--- a/第七週(10-22)/第七週_第3節_簡報.pptx
+++ b/第七週(10-22)/第七週_第3節_簡報.pptx
@@ -446,6 +446,39 @@
               </a:spcAft>
             </a:pPr>
             <a:r>
+              <a:rPr sz="1200" b="1" lang="zh-TW" dirty="0">
+                <a:solidFill>
+                  <a:srgbClr val="000000"/>
+                </a:solidFill>
+                <a:latin typeface="Arial Unicode MS"/>
+                <a:ea typeface="Arial Unicode MS"/>
+                <a:cs typeface="Arial Unicode MS"/>
+              </a:rPr>
+              <a:t>這一節的目的：</a:t>
+            </a:r>
+            <a:r>
+              <a:rPr sz="1200" lang="zh-TW" dirty="0">
+                <a:solidFill>
+                  <a:srgbClr val="000000"/>
+                </a:solidFill>
+                <a:latin typeface="Arial Unicode MS"/>
+                <a:ea typeface="Arial Unicode MS"/>
+                <a:cs typeface="Arial Unicode MS"/>
+              </a:rPr>
+              <a:t>讓大家自己動手，打開真的自駕車資料，親眼看相機、光達、雷達各看到什麼。
+</a:t>
+            </a:r>
+          </a:p>
+          <a:p>
+            <a:pPr algn="l">
+              <a:spcBef>
+                <a:spcPts val="0"/>
+              </a:spcBef>
+              <a:spcAft>
+                <a:spcPts val="200"/>
+              </a:spcAft>
+            </a:pPr>
+            <a:r>
               <a:rPr sz="1200" lang="zh-TW" dirty="0">
                 <a:solidFill>
                   <a:srgbClr val="000000"/>
@@ -655,6 +688,39 @@
               </a:spcAft>
             </a:pPr>
             <a:r>
+              <a:rPr sz="1200" b="1" lang="zh-TW" dirty="0">
+                <a:solidFill>
+                  <a:srgbClr val="000000"/>
+                </a:solidFill>
+                <a:latin typeface="Arial Unicode MS"/>
+                <a:ea typeface="Arial Unicode MS"/>
+                <a:cs typeface="Arial Unicode MS"/>
+              </a:rPr>
+              <a:t>這一張的目的：</a:t>
+            </a:r>
+            <a:r>
+              <a:rPr sz="1200" lang="zh-TW" dirty="0">
+                <a:solidFill>
+                  <a:srgbClr val="000000"/>
+                </a:solidFill>
+                <a:latin typeface="Arial Unicode MS"/>
+                <a:ea typeface="Arial Unicode MS"/>
+                <a:cs typeface="Arial Unicode MS"/>
+              </a:rPr>
+              <a:t>讓大家自己發現，雷達抓得到汽車，抓不太到機車。
+</a:t>
+            </a:r>
+          </a:p>
+          <a:p>
+            <a:pPr algn="l">
+              <a:spcBef>
+                <a:spcPts val="0"/>
+              </a:spcBef>
+              <a:spcAft>
+                <a:spcPts val="200"/>
+              </a:spcAft>
+            </a:pPr>
+            <a:r>
               <a:rPr sz="1200" lang="zh-TW" dirty="0">
                 <a:solidFill>
                   <a:srgbClr val="000000"/>
@@ -1036,41 +1102,30 @@
                 <a:spcPts val="0"/>
               </a:spcBef>
               <a:spcAft>
-                <a:spcPts val="192"/>
+                <a:spcPts val="183"/>
               </a:spcAft>
             </a:pPr>
             <a:r>
-              <a:rPr sz="1150" lang="zh-TW" dirty="0">
-                <a:solidFill>
-                  <a:srgbClr val="000000"/>
-                </a:solidFill>
-                <a:latin typeface="Arial Unicode MS"/>
-                <a:ea typeface="Arial Unicode MS"/>
-                <a:cs typeface="Arial Unicode MS"/>
-              </a:rPr>
-              <a:t>任務三，</a:t>
-            </a:r>
-            <a:r>
-              <a:rPr sz="1150" b="1" lang="zh-TW" dirty="0">
-                <a:solidFill>
-                  <a:srgbClr val="000000"/>
-                </a:solidFill>
-                <a:latin typeface="Arial Unicode MS"/>
-                <a:ea typeface="Arial Unicode MS"/>
-                <a:cs typeface="Arial Unicode MS"/>
-              </a:rPr>
-              <a:t>新加坡，晚上的一個路口</a:t>
-            </a:r>
-            <a:r>
-              <a:rPr sz="1150" lang="zh-TW" dirty="0">
-                <a:solidFill>
-                  <a:srgbClr val="000000"/>
-                </a:solidFill>
-                <a:latin typeface="Arial Unicode MS"/>
-                <a:ea typeface="Arial Unicode MS"/>
-                <a:cs typeface="Arial Unicode MS"/>
-              </a:rPr>
-              <a:t>。場景鈕按「夜間」。
+              <a:rPr sz="1100" b="1" lang="zh-TW" dirty="0">
+                <a:solidFill>
+                  <a:srgbClr val="000000"/>
+                </a:solidFill>
+                <a:latin typeface="Arial Unicode MS"/>
+                <a:ea typeface="Arial Unicode MS"/>
+                <a:cs typeface="Arial Unicode MS"/>
+              </a:rPr>
+              <a:t>這一張的目的：</a:t>
+            </a:r>
+            <a:r>
+              <a:rPr sz="1100" lang="zh-TW" dirty="0">
+                <a:solidFill>
+                  <a:srgbClr val="000000"/>
+                </a:solidFill>
+                <a:latin typeface="Arial Unicode MS"/>
+                <a:ea typeface="Arial Unicode MS"/>
+                <a:cs typeface="Arial Unicode MS"/>
+              </a:rPr>
+              <a:t>讓大家自己發現，天黑對相機有影響，對光達、雷達沒有。
 </a:t>
             </a:r>
           </a:p>
@@ -1080,63 +1135,41 @@
                 <a:spcPts val="0"/>
               </a:spcBef>
               <a:spcAft>
-                <a:spcPts val="192"/>
+                <a:spcPts val="183"/>
               </a:spcAft>
             </a:pPr>
             <a:r>
-              <a:rPr sz="1150" lang="zh-TW" dirty="0">
-                <a:solidFill>
-                  <a:srgbClr val="000000"/>
-                </a:solidFill>
-                <a:latin typeface="Arial Unicode MS"/>
-                <a:ea typeface="Arial Unicode MS"/>
-                <a:cs typeface="Arial Unicode MS"/>
-              </a:rPr>
-              <a:t>先把所有開關</a:t>
-            </a:r>
-            <a:r>
-              <a:rPr sz="1150" b="1" lang="zh-TW" dirty="0">
-                <a:solidFill>
-                  <a:srgbClr val="000000"/>
-                </a:solidFill>
-                <a:latin typeface="Arial Unicode MS"/>
-                <a:ea typeface="Arial Unicode MS"/>
-                <a:cs typeface="Arial Unicode MS"/>
-              </a:rPr>
-              <a:t>全部關掉</a:t>
-            </a:r>
-            <a:r>
-              <a:rPr sz="1150" lang="zh-TW" dirty="0">
-                <a:solidFill>
-                  <a:srgbClr val="000000"/>
-                </a:solidFill>
-                <a:latin typeface="Arial Unicode MS"/>
-                <a:ea typeface="Arial Unicode MS"/>
-                <a:cs typeface="Arial Unicode MS"/>
-              </a:rPr>
-              <a:t>，只看照片。路燈很亮，地上很暗，右邊有一台黑色的車正開過路口，車身很暗。</a:t>
-            </a:r>
-            <a:r>
-              <a:rPr sz="1150" b="1" lang="zh-TW" dirty="0">
-                <a:solidFill>
-                  <a:srgbClr val="000000"/>
-                </a:solidFill>
-                <a:latin typeface="Arial Unicode MS"/>
-                <a:ea typeface="Arial Unicode MS"/>
-                <a:cs typeface="Arial Unicode MS"/>
-              </a:rPr>
-              <a:t>相機在晚上，就是這個樣子。</a:t>
-            </a:r>
-            <a:r>
-              <a:rPr sz="1150" lang="zh-TW" dirty="0">
-                <a:solidFill>
-                  <a:srgbClr val="000000"/>
-                </a:solidFill>
-                <a:latin typeface="Arial Unicode MS"/>
-                <a:ea typeface="Arial Unicode MS"/>
-                <a:cs typeface="Arial Unicode MS"/>
-              </a:rPr>
-              <a:t>
+              <a:rPr sz="1100" lang="zh-TW" dirty="0">
+                <a:solidFill>
+                  <a:srgbClr val="000000"/>
+                </a:solidFill>
+                <a:latin typeface="Arial Unicode MS"/>
+                <a:ea typeface="Arial Unicode MS"/>
+                <a:cs typeface="Arial Unicode MS"/>
+              </a:rPr>
+              <a:t>任務三，</a:t>
+            </a:r>
+            <a:r>
+              <a:rPr sz="1100" b="1" lang="zh-TW" dirty="0">
+                <a:solidFill>
+                  <a:srgbClr val="000000"/>
+                </a:solidFill>
+                <a:latin typeface="Arial Unicode MS"/>
+                <a:ea typeface="Arial Unicode MS"/>
+                <a:cs typeface="Arial Unicode MS"/>
+              </a:rPr>
+              <a:t>新加坡，晚上的一個路口</a:t>
+            </a:r>
+            <a:r>
+              <a:rPr sz="1100" lang="zh-TW" dirty="0">
+                <a:solidFill>
+                  <a:srgbClr val="000000"/>
+                </a:solidFill>
+                <a:latin typeface="Arial Unicode MS"/>
+                <a:ea typeface="Arial Unicode MS"/>
+                <a:cs typeface="Arial Unicode MS"/>
+              </a:rPr>
+              <a:t>。場景鈕按「夜間」。
 </a:t>
             </a:r>
           </a:p>
@@ -1146,19 +1179,63 @@
                 <a:spcPts val="0"/>
               </a:spcBef>
               <a:spcAft>
-                <a:spcPts val="192"/>
+                <a:spcPts val="183"/>
               </a:spcAft>
             </a:pPr>
             <a:r>
-              <a:rPr sz="1150" lang="zh-TW" dirty="0">
-                <a:solidFill>
-                  <a:srgbClr val="000000"/>
-                </a:solidFill>
-                <a:latin typeface="Arial Unicode MS"/>
-                <a:ea typeface="Arial Unicode MS"/>
-                <a:cs typeface="Arial Unicode MS"/>
-              </a:rPr>
-              <a:t>現在打開光達點。
+              <a:rPr sz="1100" lang="zh-TW" dirty="0">
+                <a:solidFill>
+                  <a:srgbClr val="000000"/>
+                </a:solidFill>
+                <a:latin typeface="Arial Unicode MS"/>
+                <a:ea typeface="Arial Unicode MS"/>
+                <a:cs typeface="Arial Unicode MS"/>
+              </a:rPr>
+              <a:t>先把所有開關</a:t>
+            </a:r>
+            <a:r>
+              <a:rPr sz="1100" b="1" lang="zh-TW" dirty="0">
+                <a:solidFill>
+                  <a:srgbClr val="000000"/>
+                </a:solidFill>
+                <a:latin typeface="Arial Unicode MS"/>
+                <a:ea typeface="Arial Unicode MS"/>
+                <a:cs typeface="Arial Unicode MS"/>
+              </a:rPr>
+              <a:t>全部關掉</a:t>
+            </a:r>
+            <a:r>
+              <a:rPr sz="1100" lang="zh-TW" dirty="0">
+                <a:solidFill>
+                  <a:srgbClr val="000000"/>
+                </a:solidFill>
+                <a:latin typeface="Arial Unicode MS"/>
+                <a:ea typeface="Arial Unicode MS"/>
+                <a:cs typeface="Arial Unicode MS"/>
+              </a:rPr>
+              <a:t>，只看照片。路燈很亮，地上很暗，右邊有一台黑色的車正開過路口，車身很暗。</a:t>
+            </a:r>
+            <a:r>
+              <a:rPr sz="1100" b="1" lang="zh-TW" dirty="0">
+                <a:solidFill>
+                  <a:srgbClr val="000000"/>
+                </a:solidFill>
+                <a:latin typeface="Arial Unicode MS"/>
+                <a:ea typeface="Arial Unicode MS"/>
+                <a:cs typeface="Arial Unicode MS"/>
+              </a:rPr>
+              <a:t>相機在晚上，就是這個樣子。</a:t>
+            </a:r>
+            <a:r>
+              <a:rPr sz="1100" lang="zh-TW" dirty="0">
+                <a:solidFill>
+                  <a:srgbClr val="000000"/>
+                </a:solidFill>
+                <a:latin typeface="Arial Unicode MS"/>
+                <a:ea typeface="Arial Unicode MS"/>
+                <a:cs typeface="Arial Unicode MS"/>
+              </a:rPr>
+              <a:t>
 </a:t>
             </a:r>
           </a:p>
@@ -1168,19 +1245,19 @@
                 <a:spcPts val="0"/>
               </a:spcBef>
               <a:spcAft>
-                <a:spcPts val="192"/>
+                <a:spcPts val="183"/>
               </a:spcAft>
             </a:pPr>
             <a:r>
-              <a:rPr sz="1150" lang="zh-TW" dirty="0">
-                <a:solidFill>
-                  <a:srgbClr val="000000"/>
-                </a:solidFill>
-                <a:latin typeface="Arial Unicode MS"/>
-                <a:ea typeface="Arial Unicode MS"/>
-                <a:cs typeface="Arial Unicode MS"/>
-              </a:rPr>
-              <a:t>（等大家選完再講答案。）
+              <a:rPr sz="1100" lang="zh-TW" dirty="0">
+                <a:solidFill>
+                  <a:srgbClr val="000000"/>
+                </a:solidFill>
+                <a:latin typeface="Arial Unicode MS"/>
+                <a:ea typeface="Arial Unicode MS"/>
+                <a:cs typeface="Arial Unicode MS"/>
+              </a:rPr>
+              <a:t>現在打開光達點。
 </a:t>
             </a:r>
           </a:p>
@@ -1190,74 +1267,19 @@
                 <a:spcPts val="0"/>
               </a:spcBef>
               <a:spcAft>
-                <a:spcPts val="192"/>
+                <a:spcPts val="183"/>
               </a:spcAft>
             </a:pPr>
             <a:r>
-              <a:rPr sz="1150" b="1" lang="zh-TW" dirty="0">
-                <a:solidFill>
-                  <a:srgbClr val="000000"/>
-                </a:solidFill>
-                <a:latin typeface="Arial Unicode MS"/>
-                <a:ea typeface="Arial Unicode MS"/>
-                <a:cs typeface="Arial Unicode MS"/>
-              </a:rPr>
-              <a:t>第 6 題。</a:t>
-            </a:r>
-            <a:r>
-              <a:rPr sz="1150" lang="zh-TW" dirty="0">
-                <a:solidFill>
-                  <a:srgbClr val="000000"/>
-                </a:solidFill>
-                <a:latin typeface="Arial Unicode MS"/>
-                <a:ea typeface="Arial Unicode MS"/>
-                <a:cs typeface="Arial Unicode MS"/>
-              </a:rPr>
-              <a:t>看「數一數」第一格：三千三百二十五個。白天是三千零一十三個。答案是</a:t>
-            </a:r>
-            <a:r>
-              <a:rPr sz="1150" b="1" lang="zh-TW" dirty="0">
-                <a:solidFill>
-                  <a:srgbClr val="000000"/>
-                </a:solidFill>
-                <a:latin typeface="Arial Unicode MS"/>
-                <a:ea typeface="Arial Unicode MS"/>
-                <a:cs typeface="Arial Unicode MS"/>
-              </a:rPr>
-              <a:t>差不多</a:t>
-            </a:r>
-            <a:r>
-              <a:rPr sz="1150" lang="zh-TW" dirty="0">
-                <a:solidFill>
-                  <a:srgbClr val="000000"/>
-                </a:solidFill>
-                <a:latin typeface="Arial Unicode MS"/>
-                <a:ea typeface="Arial Unicode MS"/>
-                <a:cs typeface="Arial Unicode MS"/>
-              </a:rPr>
-              <a:t>。為什麼？光達自己打雷射出去，</a:t>
-            </a:r>
-            <a:r>
-              <a:rPr sz="1150" b="1" lang="zh-TW" dirty="0">
-                <a:solidFill>
-                  <a:srgbClr val="000000"/>
-                </a:solidFill>
-                <a:latin typeface="Arial Unicode MS"/>
-                <a:ea typeface="Arial Unicode MS"/>
-                <a:cs typeface="Arial Unicode MS"/>
-              </a:rPr>
-              <a:t>不需要外面的光</a:t>
-            </a:r>
-            <a:r>
-              <a:rPr sz="1150" lang="zh-TW" dirty="0">
-                <a:solidFill>
-                  <a:srgbClr val="000000"/>
-                </a:solidFill>
-                <a:latin typeface="Arial Unicode MS"/>
-                <a:ea typeface="Arial Unicode MS"/>
-                <a:cs typeface="Arial Unicode MS"/>
-              </a:rPr>
-              <a:t>。天黑了，相機看不清楚，光達的點一個都沒少。
+              <a:rPr sz="1100" lang="zh-TW" dirty="0">
+                <a:solidFill>
+                  <a:srgbClr val="000000"/>
+                </a:solidFill>
+                <a:latin typeface="Arial Unicode MS"/>
+                <a:ea typeface="Arial Unicode MS"/>
+                <a:cs typeface="Arial Unicode MS"/>
+              </a:rPr>
+              <a:t>（等大家選完再講答案。）
 </a:t>
             </a:r>
           </a:p>
@@ -1267,52 +1289,74 @@
                 <a:spcPts val="0"/>
               </a:spcBef>
               <a:spcAft>
-                <a:spcPts val="192"/>
+                <a:spcPts val="183"/>
               </a:spcAft>
             </a:pPr>
             <a:r>
-              <a:rPr sz="1150" b="1" lang="zh-TW" dirty="0">
-                <a:solidFill>
-                  <a:srgbClr val="000000"/>
-                </a:solidFill>
-                <a:latin typeface="Arial Unicode MS"/>
-                <a:ea typeface="Arial Unicode MS"/>
-                <a:cs typeface="Arial Unicode MS"/>
-              </a:rPr>
-              <a:t>第 7 題。</a:t>
-            </a:r>
-            <a:r>
-              <a:rPr sz="1150" lang="zh-TW" dirty="0">
-                <a:solidFill>
-                  <a:srgbClr val="000000"/>
-                </a:solidFill>
-                <a:latin typeface="Arial Unicode MS"/>
-                <a:ea typeface="Arial Unicode MS"/>
-                <a:cs typeface="Arial Unicode MS"/>
-              </a:rPr>
-              <a:t>看表格十五點六公尺那一台車，有黑點的那一列：</a:t>
-            </a:r>
-            <a:r>
-              <a:rPr sz="1150" b="1" lang="zh-TW" dirty="0">
-                <a:solidFill>
-                  <a:srgbClr val="000000"/>
-                </a:solidFill>
-                <a:latin typeface="Arial Unicode MS"/>
-                <a:ea typeface="Arial Unicode MS"/>
-                <a:cs typeface="Arial Unicode MS"/>
-              </a:rPr>
-              <a:t>光達七十三個點、雷達七個點。</a:t>
-            </a:r>
-            <a:r>
-              <a:rPr sz="1150" lang="zh-TW" dirty="0">
-                <a:solidFill>
-                  <a:srgbClr val="000000"/>
-                </a:solidFill>
-                <a:latin typeface="Arial Unicode MS"/>
-                <a:ea typeface="Arial Unicode MS"/>
-                <a:cs typeface="Arial Unicode MS"/>
-              </a:rPr>
-              <a:t>答案是「光達 73、雷達 7」。
+              <a:rPr sz="1100" b="1" lang="zh-TW" dirty="0">
+                <a:solidFill>
+                  <a:srgbClr val="000000"/>
+                </a:solidFill>
+                <a:latin typeface="Arial Unicode MS"/>
+                <a:ea typeface="Arial Unicode MS"/>
+                <a:cs typeface="Arial Unicode MS"/>
+              </a:rPr>
+              <a:t>第 6 題。</a:t>
+            </a:r>
+            <a:r>
+              <a:rPr sz="1100" lang="zh-TW" dirty="0">
+                <a:solidFill>
+                  <a:srgbClr val="000000"/>
+                </a:solidFill>
+                <a:latin typeface="Arial Unicode MS"/>
+                <a:ea typeface="Arial Unicode MS"/>
+                <a:cs typeface="Arial Unicode MS"/>
+              </a:rPr>
+              <a:t>看「數一數」第一格：三千三百二十五個。白天是三千零一十三個。答案是</a:t>
+            </a:r>
+            <a:r>
+              <a:rPr sz="1100" b="1" lang="zh-TW" dirty="0">
+                <a:solidFill>
+                  <a:srgbClr val="000000"/>
+                </a:solidFill>
+                <a:latin typeface="Arial Unicode MS"/>
+                <a:ea typeface="Arial Unicode MS"/>
+                <a:cs typeface="Arial Unicode MS"/>
+              </a:rPr>
+              <a:t>差不多</a:t>
+            </a:r>
+            <a:r>
+              <a:rPr sz="1100" lang="zh-TW" dirty="0">
+                <a:solidFill>
+                  <a:srgbClr val="000000"/>
+                </a:solidFill>
+                <a:latin typeface="Arial Unicode MS"/>
+                <a:ea typeface="Arial Unicode MS"/>
+                <a:cs typeface="Arial Unicode MS"/>
+              </a:rPr>
+              <a:t>。為什麼？光達自己打雷射出去，</a:t>
+            </a:r>
+            <a:r>
+              <a:rPr sz="1100" b="1" lang="zh-TW" dirty="0">
+                <a:solidFill>
+                  <a:srgbClr val="000000"/>
+                </a:solidFill>
+                <a:latin typeface="Arial Unicode MS"/>
+                <a:ea typeface="Arial Unicode MS"/>
+                <a:cs typeface="Arial Unicode MS"/>
+              </a:rPr>
+              <a:t>不需要外面的光</a:t>
+            </a:r>
+            <a:r>
+              <a:rPr sz="1100" lang="zh-TW" dirty="0">
+                <a:solidFill>
+                  <a:srgbClr val="000000"/>
+                </a:solidFill>
+                <a:latin typeface="Arial Unicode MS"/>
+                <a:ea typeface="Arial Unicode MS"/>
+                <a:cs typeface="Arial Unicode MS"/>
+              </a:rPr>
+              <a:t>。天黑了，相機看不清楚，光達的點一個都沒少。
 </a:t>
             </a:r>
           </a:p>
@@ -1322,19 +1366,52 @@
                 <a:spcPts val="0"/>
               </a:spcBef>
               <a:spcAft>
-                <a:spcPts val="192"/>
+                <a:spcPts val="183"/>
               </a:spcAft>
             </a:pPr>
             <a:r>
-              <a:rPr sz="1150" lang="zh-TW" dirty="0">
-                <a:solidFill>
-                  <a:srgbClr val="000000"/>
-                </a:solidFill>
-                <a:latin typeface="Arial Unicode MS"/>
-                <a:ea typeface="Arial Unicode MS"/>
-                <a:cs typeface="Arial Unicode MS"/>
-              </a:rPr>
-              <a:t>打開雷達點和物體框看看：那台黑色轎車的框是綠的，身上有一串紅圈，有幾個是實心的，表示它在動。相機圖下面那行說明，括號裡寫的是 8／59：五十九個雷達點，八個在動。
+              <a:rPr sz="1100" b="1" lang="zh-TW" dirty="0">
+                <a:solidFill>
+                  <a:srgbClr val="000000"/>
+                </a:solidFill>
+                <a:latin typeface="Arial Unicode MS"/>
+                <a:ea typeface="Arial Unicode MS"/>
+                <a:cs typeface="Arial Unicode MS"/>
+              </a:rPr>
+              <a:t>第 7 題。</a:t>
+            </a:r>
+            <a:r>
+              <a:rPr sz="1100" lang="zh-TW" dirty="0">
+                <a:solidFill>
+                  <a:srgbClr val="000000"/>
+                </a:solidFill>
+                <a:latin typeface="Arial Unicode MS"/>
+                <a:ea typeface="Arial Unicode MS"/>
+                <a:cs typeface="Arial Unicode MS"/>
+              </a:rPr>
+              <a:t>看表格十五點六公尺那一台車，有黑點的那一列：</a:t>
+            </a:r>
+            <a:r>
+              <a:rPr sz="1100" b="1" lang="zh-TW" dirty="0">
+                <a:solidFill>
+                  <a:srgbClr val="000000"/>
+                </a:solidFill>
+                <a:latin typeface="Arial Unicode MS"/>
+                <a:ea typeface="Arial Unicode MS"/>
+                <a:cs typeface="Arial Unicode MS"/>
+              </a:rPr>
+              <a:t>光達七十三個點、雷達七個點。</a:t>
+            </a:r>
+            <a:r>
+              <a:rPr sz="1100" lang="zh-TW" dirty="0">
+                <a:solidFill>
+                  <a:srgbClr val="000000"/>
+                </a:solidFill>
+                <a:latin typeface="Arial Unicode MS"/>
+                <a:ea typeface="Arial Unicode MS"/>
+                <a:cs typeface="Arial Unicode MS"/>
+              </a:rPr>
+              <a:t>答案是「光達 73、雷達 7」。
 </a:t>
             </a:r>
           </a:p>
@@ -1344,41 +1421,19 @@
                 <a:spcPts val="0"/>
               </a:spcBef>
               <a:spcAft>
-                <a:spcPts val="192"/>
+                <a:spcPts val="183"/>
               </a:spcAft>
             </a:pPr>
             <a:r>
-              <a:rPr sz="1150" lang="zh-TW" dirty="0">
-                <a:solidFill>
-                  <a:srgbClr val="000000"/>
-                </a:solidFill>
-                <a:latin typeface="Arial Unicode MS"/>
-                <a:ea typeface="Arial Unicode MS"/>
-                <a:cs typeface="Arial Unicode MS"/>
-              </a:rPr>
-              <a:t>所以晚上的時候，</a:t>
-            </a:r>
-            <a:r>
-              <a:rPr sz="1150" b="1" lang="zh-TW" dirty="0">
-                <a:solidFill>
-                  <a:srgbClr val="000000"/>
-                </a:solidFill>
-                <a:latin typeface="Arial Unicode MS"/>
-                <a:ea typeface="Arial Unicode MS"/>
-                <a:cs typeface="Arial Unicode MS"/>
-              </a:rPr>
-              <a:t>相機看不清楚，光達和雷達照樣量得到</a:t>
-            </a:r>
-            <a:r>
-              <a:rPr sz="1150" lang="zh-TW" dirty="0">
-                <a:solidFill>
-                  <a:srgbClr val="000000"/>
-                </a:solidFill>
-                <a:latin typeface="Arial Unicode MS"/>
-                <a:ea typeface="Arial Unicode MS"/>
-                <a:cs typeface="Arial Unicode MS"/>
-              </a:rPr>
-              <a:t>。這就是第三週那張表第五列：「天黑，相機看不清楚」，由光達或雷達來補。
+              <a:rPr sz="1100" lang="zh-TW" dirty="0">
+                <a:solidFill>
+                  <a:srgbClr val="000000"/>
+                </a:solidFill>
+                <a:latin typeface="Arial Unicode MS"/>
+                <a:ea typeface="Arial Unicode MS"/>
+                <a:cs typeface="Arial Unicode MS"/>
+              </a:rPr>
+              <a:t>打開雷達點和物體框看看：那台黑色轎車的框是綠的，身上有一串紅圈，有幾個是實心的，表示它在動。相機圖下面那行說明，括號裡寫的是 8／59：五十九個雷達點，八個在動。
 </a:t>
             </a:r>
           </a:p>
@@ -1388,11 +1443,55 @@
                 <a:spcPts val="0"/>
               </a:spcBef>
               <a:spcAft>
-                <a:spcPts val="192"/>
+                <a:spcPts val="183"/>
               </a:spcAft>
             </a:pPr>
             <a:r>
-              <a:rPr sz="1150" lang="zh-TW" dirty="0">
+              <a:rPr sz="1100" lang="zh-TW" dirty="0">
+                <a:solidFill>
+                  <a:srgbClr val="000000"/>
+                </a:solidFill>
+                <a:latin typeface="Arial Unicode MS"/>
+                <a:ea typeface="Arial Unicode MS"/>
+                <a:cs typeface="Arial Unicode MS"/>
+              </a:rPr>
+              <a:t>所以晚上的時候，</a:t>
+            </a:r>
+            <a:r>
+              <a:rPr sz="1100" b="1" lang="zh-TW" dirty="0">
+                <a:solidFill>
+                  <a:srgbClr val="000000"/>
+                </a:solidFill>
+                <a:latin typeface="Arial Unicode MS"/>
+                <a:ea typeface="Arial Unicode MS"/>
+                <a:cs typeface="Arial Unicode MS"/>
+              </a:rPr>
+              <a:t>相機看不清楚，光達和雷達照樣量得到</a:t>
+            </a:r>
+            <a:r>
+              <a:rPr sz="1100" lang="zh-TW" dirty="0">
+                <a:solidFill>
+                  <a:srgbClr val="000000"/>
+                </a:solidFill>
+                <a:latin typeface="Arial Unicode MS"/>
+                <a:ea typeface="Arial Unicode MS"/>
+                <a:cs typeface="Arial Unicode MS"/>
+              </a:rPr>
+              <a:t>。這就是第三週那張表第五列：「天黑，相機看不清楚」，由光達或雷達來補。
+</a:t>
+            </a:r>
+          </a:p>
+          <a:p>
+            <a:pPr algn="l">
+              <a:spcBef>
+                <a:spcPts val="0"/>
+              </a:spcBef>
+              <a:spcAft>
+                <a:spcPts val="183"/>
+              </a:spcAft>
+            </a:pPr>
+            <a:r>
+              <a:rPr sz="1100" lang="zh-TW" dirty="0">
                 <a:solidFill>
                   <a:srgbClr val="000000"/>
                 </a:solidFill>
@@ -1509,41 +1608,30 @@
                 <a:spcPts val="0"/>
               </a:spcBef>
               <a:spcAft>
-                <a:spcPts val="200"/>
+                <a:spcPts val="192"/>
               </a:spcAft>
             </a:pPr>
             <a:r>
-              <a:rPr sz="1200" lang="zh-TW" dirty="0">
-                <a:solidFill>
-                  <a:srgbClr val="000000"/>
-                </a:solidFill>
-                <a:latin typeface="Arial Unicode MS"/>
-                <a:ea typeface="Arial Unicode MS"/>
-                <a:cs typeface="Arial Unicode MS"/>
-              </a:rPr>
-              <a:t>任務四，</a:t>
-            </a:r>
-            <a:r>
-              <a:rPr sz="1200" b="1" lang="zh-TW" dirty="0">
-                <a:solidFill>
-                  <a:srgbClr val="000000"/>
-                </a:solidFill>
-                <a:latin typeface="Arial Unicode MS"/>
-                <a:ea typeface="Arial Unicode MS"/>
-                <a:cs typeface="Arial Unicode MS"/>
-              </a:rPr>
-              <a:t>新加坡，晚上，剛下過雨</a:t>
-            </a:r>
-            <a:r>
-              <a:rPr sz="1200" lang="zh-TW" dirty="0">
-                <a:solidFill>
-                  <a:srgbClr val="000000"/>
-                </a:solidFill>
-                <a:latin typeface="Arial Unicode MS"/>
-                <a:ea typeface="Arial Unicode MS"/>
-                <a:cs typeface="Arial Unicode MS"/>
-              </a:rPr>
-              <a:t>。場景鈕按「夜間雨後」，打開物體框。
+              <a:rPr sz="1150" b="1" lang="zh-TW" dirty="0">
+                <a:solidFill>
+                  <a:srgbClr val="000000"/>
+                </a:solidFill>
+                <a:latin typeface="Arial Unicode MS"/>
+                <a:ea typeface="Arial Unicode MS"/>
+                <a:cs typeface="Arial Unicode MS"/>
+              </a:rPr>
+              <a:t>這一張的目的：</a:t>
+            </a:r>
+            <a:r>
+              <a:rPr sz="1150" lang="zh-TW" dirty="0">
+                <a:solidFill>
+                  <a:srgbClr val="000000"/>
+                </a:solidFill>
+                <a:latin typeface="Arial Unicode MS"/>
+                <a:ea typeface="Arial Unicode MS"/>
+                <a:cs typeface="Arial Unicode MS"/>
+              </a:rPr>
+              <a:t>讓大家自己發現，很近的行人，雷達可能一個點都沒有，要靠光達和相機補。
 </a:t>
             </a:r>
           </a:p>
@@ -1553,41 +1641,41 @@
                 <a:spcPts val="0"/>
               </a:spcBef>
               <a:spcAft>
-                <a:spcPts val="200"/>
+                <a:spcPts val="192"/>
               </a:spcAft>
             </a:pPr>
             <a:r>
-              <a:rPr sz="1200" lang="zh-TW" dirty="0">
-                <a:solidFill>
-                  <a:srgbClr val="000000"/>
-                </a:solidFill>
-                <a:latin typeface="Arial Unicode MS"/>
-                <a:ea typeface="Arial Unicode MS"/>
-                <a:cs typeface="Arial Unicode MS"/>
-              </a:rPr>
-              <a:t>畫面右邊，有一個人正走在斑馬線上，離車子大約十公尺。他的框是一個很大的</a:t>
-            </a:r>
-            <a:r>
-              <a:rPr sz="1200" b="1" lang="zh-TW" dirty="0">
-                <a:solidFill>
-                  <a:srgbClr val="000000"/>
-                </a:solidFill>
-                <a:latin typeface="Arial Unicode MS"/>
-                <a:ea typeface="Arial Unicode MS"/>
-                <a:cs typeface="Arial Unicode MS"/>
-              </a:rPr>
-              <a:t>橘色</a:t>
-            </a:r>
-            <a:r>
-              <a:rPr sz="1200" lang="zh-TW" dirty="0">
-                <a:solidFill>
-                  <a:srgbClr val="000000"/>
-                </a:solidFill>
-                <a:latin typeface="Arial Unicode MS"/>
-                <a:ea typeface="Arial Unicode MS"/>
-                <a:cs typeface="Arial Unicode MS"/>
-              </a:rPr>
-              <a:t>框。找不到的話，點表格十點二公尺那一列，兩張圖會用黃色把他標出來。
+              <a:rPr sz="1150" lang="zh-TW" dirty="0">
+                <a:solidFill>
+                  <a:srgbClr val="000000"/>
+                </a:solidFill>
+                <a:latin typeface="Arial Unicode MS"/>
+                <a:ea typeface="Arial Unicode MS"/>
+                <a:cs typeface="Arial Unicode MS"/>
+              </a:rPr>
+              <a:t>任務四，</a:t>
+            </a:r>
+            <a:r>
+              <a:rPr sz="1150" b="1" lang="zh-TW" dirty="0">
+                <a:solidFill>
+                  <a:srgbClr val="000000"/>
+                </a:solidFill>
+                <a:latin typeface="Arial Unicode MS"/>
+                <a:ea typeface="Arial Unicode MS"/>
+                <a:cs typeface="Arial Unicode MS"/>
+              </a:rPr>
+              <a:t>新加坡，晚上，剛下過雨</a:t>
+            </a:r>
+            <a:r>
+              <a:rPr sz="1150" lang="zh-TW" dirty="0">
+                <a:solidFill>
+                  <a:srgbClr val="000000"/>
+                </a:solidFill>
+                <a:latin typeface="Arial Unicode MS"/>
+                <a:ea typeface="Arial Unicode MS"/>
+                <a:cs typeface="Arial Unicode MS"/>
+              </a:rPr>
+              <a:t>。場景鈕按「夜間雨後」，打開物體框。
 </a:t>
             </a:r>
           </a:p>
@@ -1597,19 +1685,41 @@
                 <a:spcPts val="0"/>
               </a:spcBef>
               <a:spcAft>
-                <a:spcPts val="200"/>
+                <a:spcPts val="192"/>
               </a:spcAft>
             </a:pPr>
             <a:r>
-              <a:rPr sz="1200" lang="zh-TW" dirty="0">
-                <a:solidFill>
-                  <a:srgbClr val="000000"/>
-                </a:solidFill>
-                <a:latin typeface="Arial Unicode MS"/>
-                <a:ea typeface="Arial Unicode MS"/>
-                <a:cs typeface="Arial Unicode MS"/>
-              </a:rPr>
-              <a:t>（等大家選完再講答案。）
+              <a:rPr sz="1150" lang="zh-TW" dirty="0">
+                <a:solidFill>
+                  <a:srgbClr val="000000"/>
+                </a:solidFill>
+                <a:latin typeface="Arial Unicode MS"/>
+                <a:ea typeface="Arial Unicode MS"/>
+                <a:cs typeface="Arial Unicode MS"/>
+              </a:rPr>
+              <a:t>畫面右邊，有一個人正走在斑馬線上，離車子大約十公尺。他的框是一個很大的</a:t>
+            </a:r>
+            <a:r>
+              <a:rPr sz="1150" b="1" lang="zh-TW" dirty="0">
+                <a:solidFill>
+                  <a:srgbClr val="000000"/>
+                </a:solidFill>
+                <a:latin typeface="Arial Unicode MS"/>
+                <a:ea typeface="Arial Unicode MS"/>
+                <a:cs typeface="Arial Unicode MS"/>
+              </a:rPr>
+              <a:t>橘色</a:t>
+            </a:r>
+            <a:r>
+              <a:rPr sz="1150" lang="zh-TW" dirty="0">
+                <a:solidFill>
+                  <a:srgbClr val="000000"/>
+                </a:solidFill>
+                <a:latin typeface="Arial Unicode MS"/>
+                <a:ea typeface="Arial Unicode MS"/>
+                <a:cs typeface="Arial Unicode MS"/>
+              </a:rPr>
+              <a:t>框。找不到的話，點表格十點二公尺那一列，兩張圖會用黃色把他標出來。
 </a:t>
             </a:r>
           </a:p>
@@ -1619,52 +1729,19 @@
                 <a:spcPts val="0"/>
               </a:spcBef>
               <a:spcAft>
-                <a:spcPts val="200"/>
+                <a:spcPts val="192"/>
               </a:spcAft>
             </a:pPr>
             <a:r>
-              <a:rPr sz="1200" b="1" lang="zh-TW" dirty="0">
-                <a:solidFill>
-                  <a:srgbClr val="000000"/>
-                </a:solidFill>
-                <a:latin typeface="Arial Unicode MS"/>
-                <a:ea typeface="Arial Unicode MS"/>
-                <a:cs typeface="Arial Unicode MS"/>
-              </a:rPr>
-              <a:t>第 8 題。</a:t>
-            </a:r>
-            <a:r>
-              <a:rPr sz="1200" lang="zh-TW" dirty="0">
-                <a:solidFill>
-                  <a:srgbClr val="000000"/>
-                </a:solidFill>
-                <a:latin typeface="Arial Unicode MS"/>
-                <a:ea typeface="Arial Unicode MS"/>
-                <a:cs typeface="Arial Unicode MS"/>
-              </a:rPr>
-              <a:t>表格十點二公尺那一列：</a:t>
-            </a:r>
-            <a:r>
-              <a:rPr sz="1200" b="1" lang="zh-TW" dirty="0">
-                <a:solidFill>
-                  <a:srgbClr val="000000"/>
-                </a:solidFill>
-                <a:latin typeface="Arial Unicode MS"/>
-                <a:ea typeface="Arial Unicode MS"/>
-                <a:cs typeface="Arial Unicode MS"/>
-              </a:rPr>
-              <a:t>光達四十九個點，雷達零個。</a:t>
-            </a:r>
-            <a:r>
-              <a:rPr sz="1200" lang="zh-TW" dirty="0">
-                <a:solidFill>
-                  <a:srgbClr val="000000"/>
-                </a:solidFill>
-                <a:latin typeface="Arial Unicode MS"/>
-                <a:ea typeface="Arial Unicode MS"/>
-                <a:cs typeface="Arial Unicode MS"/>
-              </a:rPr>
-              <a:t>答案是「光達 49、雷達 0」。
+              <a:rPr sz="1150" lang="zh-TW" dirty="0">
+                <a:solidFill>
+                  <a:srgbClr val="000000"/>
+                </a:solidFill>
+                <a:latin typeface="Arial Unicode MS"/>
+                <a:ea typeface="Arial Unicode MS"/>
+                <a:cs typeface="Arial Unicode MS"/>
+              </a:rPr>
+              <a:t>（等大家選完再講答案。）
 </a:t>
             </a:r>
           </a:p>
@@ -1674,19 +1751,52 @@
                 <a:spcPts val="0"/>
               </a:spcBef>
               <a:spcAft>
-                <a:spcPts val="200"/>
+                <a:spcPts val="192"/>
               </a:spcAft>
             </a:pPr>
             <a:r>
-              <a:rPr sz="1200" lang="zh-TW" dirty="0">
-                <a:solidFill>
-                  <a:srgbClr val="000000"/>
-                </a:solidFill>
-                <a:latin typeface="Arial Unicode MS"/>
-                <a:ea typeface="Arial Unicode MS"/>
-                <a:cs typeface="Arial Unicode MS"/>
-              </a:rPr>
-              <a:t>十公尺，很近了，雷達一個點都沒有。第一節那張統計表說，行人在十公尺內也只有兩成多抓得到；這個人就是另外那將近八成。
+              <a:rPr sz="1150" b="1" lang="zh-TW" dirty="0">
+                <a:solidFill>
+                  <a:srgbClr val="000000"/>
+                </a:solidFill>
+                <a:latin typeface="Arial Unicode MS"/>
+                <a:ea typeface="Arial Unicode MS"/>
+                <a:cs typeface="Arial Unicode MS"/>
+              </a:rPr>
+              <a:t>第 8 題。</a:t>
+            </a:r>
+            <a:r>
+              <a:rPr sz="1150" lang="zh-TW" dirty="0">
+                <a:solidFill>
+                  <a:srgbClr val="000000"/>
+                </a:solidFill>
+                <a:latin typeface="Arial Unicode MS"/>
+                <a:ea typeface="Arial Unicode MS"/>
+                <a:cs typeface="Arial Unicode MS"/>
+              </a:rPr>
+              <a:t>表格十點二公尺那一列：</a:t>
+            </a:r>
+            <a:r>
+              <a:rPr sz="1150" b="1" lang="zh-TW" dirty="0">
+                <a:solidFill>
+                  <a:srgbClr val="000000"/>
+                </a:solidFill>
+                <a:latin typeface="Arial Unicode MS"/>
+                <a:ea typeface="Arial Unicode MS"/>
+                <a:cs typeface="Arial Unicode MS"/>
+              </a:rPr>
+              <a:t>光達四十九個點，雷達零個。</a:t>
+            </a:r>
+            <a:r>
+              <a:rPr sz="1150" lang="zh-TW" dirty="0">
+                <a:solidFill>
+                  <a:srgbClr val="000000"/>
+                </a:solidFill>
+                <a:latin typeface="Arial Unicode MS"/>
+                <a:ea typeface="Arial Unicode MS"/>
+                <a:cs typeface="Arial Unicode MS"/>
+              </a:rPr>
+              <a:t>答案是「光達 49、雷達 0」。
 </a:t>
             </a:r>
           </a:p>
@@ -1696,96 +1806,19 @@
                 <a:spcPts val="0"/>
               </a:spcBef>
               <a:spcAft>
-                <a:spcPts val="200"/>
+                <a:spcPts val="192"/>
               </a:spcAft>
             </a:pPr>
             <a:r>
-              <a:rPr sz="1200" b="1" lang="zh-TW" dirty="0">
-                <a:solidFill>
-                  <a:srgbClr val="000000"/>
-                </a:solidFill>
-                <a:latin typeface="Arial Unicode MS"/>
-                <a:ea typeface="Arial Unicode MS"/>
-                <a:cs typeface="Arial Unicode MS"/>
-              </a:rPr>
-              <a:t>第 9 題。</a:t>
-            </a:r>
-            <a:r>
-              <a:rPr sz="1200" lang="zh-TW" dirty="0">
-                <a:solidFill>
-                  <a:srgbClr val="000000"/>
-                </a:solidFill>
-                <a:latin typeface="Arial Unicode MS"/>
-                <a:ea typeface="Arial Unicode MS"/>
-                <a:cs typeface="Arial Unicode MS"/>
-              </a:rPr>
-              <a:t>要靠誰來補？想兩件事：</a:t>
-            </a:r>
-            <a:r>
-              <a:rPr sz="1200" b="1" lang="zh-TW" dirty="0">
-                <a:solidFill>
-                  <a:srgbClr val="000000"/>
-                </a:solidFill>
-                <a:latin typeface="Arial Unicode MS"/>
-                <a:ea typeface="Arial Unicode MS"/>
-                <a:cs typeface="Arial Unicode MS"/>
-              </a:rPr>
-              <a:t>誰在他身上有點？</a:t>
-            </a:r>
-            <a:r>
-              <a:rPr sz="1200" lang="zh-TW" dirty="0">
-                <a:solidFill>
-                  <a:srgbClr val="000000"/>
-                </a:solidFill>
-                <a:latin typeface="Arial Unicode MS"/>
-                <a:ea typeface="Arial Unicode MS"/>
-                <a:cs typeface="Arial Unicode MS"/>
-              </a:rPr>
-              <a:t>光達有四十九個點，知道他在哪裡、多遠。</a:t>
-            </a:r>
-            <a:r>
-              <a:rPr sz="1200" b="1" lang="zh-TW" dirty="0">
-                <a:solidFill>
-                  <a:srgbClr val="000000"/>
-                </a:solidFill>
-                <a:latin typeface="Arial Unicode MS"/>
-                <a:ea typeface="Arial Unicode MS"/>
-                <a:cs typeface="Arial Unicode MS"/>
-              </a:rPr>
-              <a:t>誰認得出他是一個人？</a:t>
-            </a:r>
-            <a:r>
-              <a:rPr sz="1200" lang="zh-TW" dirty="0">
-                <a:solidFill>
-                  <a:srgbClr val="000000"/>
-                </a:solidFill>
-                <a:latin typeface="Arial Unicode MS"/>
-                <a:ea typeface="Arial Unicode MS"/>
-                <a:cs typeface="Arial Unicode MS"/>
-              </a:rPr>
-              <a:t>光達的四十九個點，只是一小團；要知道那是人、不是一根柱子，要靠相機。答案是</a:t>
-            </a:r>
-            <a:r>
-              <a:rPr sz="1200" b="1" lang="zh-TW" dirty="0">
-                <a:solidFill>
-                  <a:srgbClr val="000000"/>
-                </a:solidFill>
-                <a:latin typeface="Arial Unicode MS"/>
-                <a:ea typeface="Arial Unicode MS"/>
-                <a:cs typeface="Arial Unicode MS"/>
-              </a:rPr>
-              <a:t>光達和相機</a:t>
-            </a:r>
-            <a:r>
-              <a:rPr sz="1200" lang="zh-TW" dirty="0">
-                <a:solidFill>
-                  <a:srgbClr val="000000"/>
-                </a:solidFill>
-                <a:latin typeface="Arial Unicode MS"/>
-                <a:ea typeface="Arial Unicode MS"/>
-                <a:cs typeface="Arial Unicode MS"/>
-              </a:rPr>
-              <a:t>。
+              <a:rPr sz="1150" lang="zh-TW" dirty="0">
+                <a:solidFill>
+                  <a:srgbClr val="000000"/>
+                </a:solidFill>
+                <a:latin typeface="Arial Unicode MS"/>
+                <a:ea typeface="Arial Unicode MS"/>
+                <a:cs typeface="Arial Unicode MS"/>
+              </a:rPr>
+              <a:t>十公尺，很近了，雷達一個點都沒有。第一節那張統計表說，行人在十公尺內也只有兩成多抓得到；這個人就是另外那將近八成。
 </a:t>
             </a:r>
           </a:p>
@@ -1795,19 +1828,96 @@
                 <a:spcPts val="0"/>
               </a:spcBef>
               <a:spcAft>
-                <a:spcPts val="200"/>
+                <a:spcPts val="192"/>
               </a:spcAft>
             </a:pPr>
             <a:r>
-              <a:rPr sz="1200" lang="zh-TW" dirty="0">
-                <a:solidFill>
-                  <a:srgbClr val="000000"/>
-                </a:solidFill>
-                <a:latin typeface="Arial Unicode MS"/>
-                <a:ea typeface="Arial Unicode MS"/>
-                <a:cs typeface="Arial Unicode MS"/>
-              </a:rPr>
-              <a:t>其他三個選項：超音波只看得到幾公尺，十公尺太遠了；衛星定位是知道自己在哪，跟看到別人沒有關係；再多裝一顆雷達，問題不在少一顆，是雷達本來就不擅長抓行人。
+              <a:rPr sz="1150" b="1" lang="zh-TW" dirty="0">
+                <a:solidFill>
+                  <a:srgbClr val="000000"/>
+                </a:solidFill>
+                <a:latin typeface="Arial Unicode MS"/>
+                <a:ea typeface="Arial Unicode MS"/>
+                <a:cs typeface="Arial Unicode MS"/>
+              </a:rPr>
+              <a:t>第 9 題。</a:t>
+            </a:r>
+            <a:r>
+              <a:rPr sz="1150" lang="zh-TW" dirty="0">
+                <a:solidFill>
+                  <a:srgbClr val="000000"/>
+                </a:solidFill>
+                <a:latin typeface="Arial Unicode MS"/>
+                <a:ea typeface="Arial Unicode MS"/>
+                <a:cs typeface="Arial Unicode MS"/>
+              </a:rPr>
+              <a:t>要靠誰來補？想兩件事：</a:t>
+            </a:r>
+            <a:r>
+              <a:rPr sz="1150" b="1" lang="zh-TW" dirty="0">
+                <a:solidFill>
+                  <a:srgbClr val="000000"/>
+                </a:solidFill>
+                <a:latin typeface="Arial Unicode MS"/>
+                <a:ea typeface="Arial Unicode MS"/>
+                <a:cs typeface="Arial Unicode MS"/>
+              </a:rPr>
+              <a:t>誰在他身上有點？</a:t>
+            </a:r>
+            <a:r>
+              <a:rPr sz="1150" lang="zh-TW" dirty="0">
+                <a:solidFill>
+                  <a:srgbClr val="000000"/>
+                </a:solidFill>
+                <a:latin typeface="Arial Unicode MS"/>
+                <a:ea typeface="Arial Unicode MS"/>
+                <a:cs typeface="Arial Unicode MS"/>
+              </a:rPr>
+              <a:t>光達有四十九個點，知道他在哪裡、多遠。</a:t>
+            </a:r>
+            <a:r>
+              <a:rPr sz="1150" b="1" lang="zh-TW" dirty="0">
+                <a:solidFill>
+                  <a:srgbClr val="000000"/>
+                </a:solidFill>
+                <a:latin typeface="Arial Unicode MS"/>
+                <a:ea typeface="Arial Unicode MS"/>
+                <a:cs typeface="Arial Unicode MS"/>
+              </a:rPr>
+              <a:t>誰認得出他是一個人？</a:t>
+            </a:r>
+            <a:r>
+              <a:rPr sz="1150" lang="zh-TW" dirty="0">
+                <a:solidFill>
+                  <a:srgbClr val="000000"/>
+                </a:solidFill>
+                <a:latin typeface="Arial Unicode MS"/>
+                <a:ea typeface="Arial Unicode MS"/>
+                <a:cs typeface="Arial Unicode MS"/>
+              </a:rPr>
+              <a:t>光達的四十九個點，只是一小團；要知道那是人、不是一根柱子，要靠相機。答案是</a:t>
+            </a:r>
+            <a:r>
+              <a:rPr sz="1150" b="1" lang="zh-TW" dirty="0">
+                <a:solidFill>
+                  <a:srgbClr val="000000"/>
+                </a:solidFill>
+                <a:latin typeface="Arial Unicode MS"/>
+                <a:ea typeface="Arial Unicode MS"/>
+                <a:cs typeface="Arial Unicode MS"/>
+              </a:rPr>
+              <a:t>光達和相機</a:t>
+            </a:r>
+            <a:r>
+              <a:rPr sz="1150" lang="zh-TW" dirty="0">
+                <a:solidFill>
+                  <a:srgbClr val="000000"/>
+                </a:solidFill>
+                <a:latin typeface="Arial Unicode MS"/>
+                <a:ea typeface="Arial Unicode MS"/>
+                <a:cs typeface="Arial Unicode MS"/>
+              </a:rPr>
+              <a:t>。
 </a:t>
             </a:r>
           </a:p>
@@ -1817,11 +1927,33 @@
                 <a:spcPts val="0"/>
               </a:spcBef>
               <a:spcAft>
-                <a:spcPts val="200"/>
+                <a:spcPts val="192"/>
               </a:spcAft>
             </a:pPr>
             <a:r>
-              <a:rPr sz="1200" lang="zh-TW" dirty="0">
+              <a:rPr sz="1150" lang="zh-TW" dirty="0">
+                <a:solidFill>
+                  <a:srgbClr val="000000"/>
+                </a:solidFill>
+                <a:latin typeface="Arial Unicode MS"/>
+                <a:ea typeface="Arial Unicode MS"/>
+                <a:cs typeface="Arial Unicode MS"/>
+              </a:rPr>
+              <a:t>其他三個選項：超音波只看得到幾公尺，十公尺太遠了；衛星定位是知道自己在哪，跟看到別人沒有關係；再多裝一顆雷達，問題不在少一顆，是雷達本來就不擅長抓行人。
+</a:t>
+            </a:r>
+          </a:p>
+          <a:p>
+            <a:pPr algn="l">
+              <a:spcBef>
+                <a:spcPts val="0"/>
+              </a:spcBef>
+              <a:spcAft>
+                <a:spcPts val="192"/>
+              </a:spcAft>
+            </a:pPr>
+            <a:r>
+              <a:rPr sz="1150" lang="zh-TW" dirty="0">
                 <a:solidFill>
                   <a:srgbClr val="000000"/>
                 </a:solidFill>
@@ -1942,6 +2074,39 @@
               </a:spcAft>
             </a:pPr>
             <a:r>
+              <a:rPr sz="950" b="1" lang="zh-TW" dirty="0">
+                <a:solidFill>
+                  <a:srgbClr val="000000"/>
+                </a:solidFill>
+                <a:latin typeface="Arial Unicode MS"/>
+                <a:ea typeface="Arial Unicode MS"/>
+                <a:cs typeface="Arial Unicode MS"/>
+              </a:rPr>
+              <a:t>這一張的目的：</a:t>
+            </a:r>
+            <a:r>
+              <a:rPr sz="950" lang="zh-TW" dirty="0">
+                <a:solidFill>
+                  <a:srgbClr val="000000"/>
+                </a:solidFill>
+                <a:latin typeface="Arial Unicode MS"/>
+                <a:ea typeface="Arial Unicode MS"/>
+                <a:cs typeface="Arial Unicode MS"/>
+              </a:rPr>
+              <a:t>讓大家親手做一次融合，把三種感測器說的拼成一句話，也看到雷達量速度的盲點。
+</a:t>
+            </a:r>
+          </a:p>
+          <a:p>
+            <a:pPr algn="l">
+              <a:spcBef>
+                <a:spcPts val="0"/>
+              </a:spcBef>
+              <a:spcAft>
+                <a:spcPts val="158"/>
+              </a:spcAft>
+            </a:pPr>
+            <a:r>
               <a:rPr sz="950" lang="zh-TW" dirty="0">
                 <a:solidFill>
                   <a:srgbClr val="000000"/>
@@ -2547,6 +2712,39 @@
               </a:spcAft>
             </a:pPr>
             <a:r>
+              <a:rPr sz="950" b="1" lang="zh-TW" dirty="0">
+                <a:solidFill>
+                  <a:srgbClr val="000000"/>
+                </a:solidFill>
+                <a:latin typeface="Arial Unicode MS"/>
+                <a:ea typeface="Arial Unicode MS"/>
+                <a:cs typeface="Arial Unicode MS"/>
+              </a:rPr>
+              <a:t>這一張的目的：</a:t>
+            </a:r>
+            <a:r>
+              <a:rPr sz="950" lang="zh-TW" dirty="0">
+                <a:solidFill>
+                  <a:srgbClr val="000000"/>
+                </a:solidFill>
+                <a:latin typeface="Arial Unicode MS"/>
+                <a:ea typeface="Arial Unicode MS"/>
+                <a:cs typeface="Arial Unicode MS"/>
+              </a:rPr>
+              <a:t>讓大家把今天看到的整理成一張表：每一種弱點由誰來補。
+</a:t>
+            </a:r>
+          </a:p>
+          <a:p>
+            <a:pPr algn="l">
+              <a:spcBef>
+                <a:spcPts val="0"/>
+              </a:spcBef>
+              <a:spcAft>
+                <a:spcPts val="158"/>
+              </a:spcAft>
+            </a:pPr>
+            <a:r>
               <a:rPr sz="950" lang="zh-TW" dirty="0">
                 <a:solidFill>
                   <a:srgbClr val="000000"/>
@@ -3130,6 +3328,39 @@
               </a:spcAft>
             </a:pPr>
             <a:r>
+              <a:rPr sz="1200" b="1" lang="zh-TW" dirty="0">
+                <a:solidFill>
+                  <a:srgbClr val="000000"/>
+                </a:solidFill>
+                <a:latin typeface="Arial Unicode MS"/>
+                <a:ea typeface="Arial Unicode MS"/>
+                <a:cs typeface="Arial Unicode MS"/>
+              </a:rPr>
+              <a:t>這一張的目的：</a:t>
+            </a:r>
+            <a:r>
+              <a:rPr sz="1200" lang="zh-TW" dirty="0">
+                <a:solidFill>
+                  <a:srgbClr val="000000"/>
+                </a:solidFill>
+                <a:latin typeface="Arial Unicode MS"/>
+                <a:ea typeface="Arial Unicode MS"/>
+                <a:cs typeface="Arial Unicode MS"/>
+              </a:rPr>
+              <a:t>讓大家知道，雷達量不出高度這件事，新一代雷達已經在改善，但還是取代不了相機。
+</a:t>
+            </a:r>
+          </a:p>
+          <a:p>
+            <a:pPr algn="l">
+              <a:spcBef>
+                <a:spcPts val="0"/>
+              </a:spcBef>
+              <a:spcAft>
+                <a:spcPts val="200"/>
+              </a:spcAft>
+            </a:pPr>
+            <a:r>
               <a:rPr sz="1200" lang="zh-TW" dirty="0">
                 <a:solidFill>
                   <a:srgbClr val="000000"/>
@@ -3493,6 +3724,39 @@
               </a:spcAft>
             </a:pPr>
             <a:r>
+              <a:rPr sz="1200" b="1" lang="zh-TW" dirty="0">
+                <a:solidFill>
+                  <a:srgbClr val="000000"/>
+                </a:solidFill>
+                <a:latin typeface="Arial Unicode MS"/>
+                <a:ea typeface="Arial Unicode MS"/>
+                <a:cs typeface="Arial Unicode MS"/>
+              </a:rPr>
+              <a:t>這一張的目的：</a:t>
+            </a:r>
+            <a:r>
+              <a:rPr sz="1200" lang="zh-TW" dirty="0">
+                <a:solidFill>
+                  <a:srgbClr val="000000"/>
+                </a:solidFill>
+                <a:latin typeface="Arial Unicode MS"/>
+                <a:ea typeface="Arial Unicode MS"/>
+                <a:cs typeface="Arial Unicode MS"/>
+              </a:rPr>
+              <a:t>把今天親眼看到的三件事收起來，提醒交作業和下週的內容。
+</a:t>
+            </a:r>
+          </a:p>
+          <a:p>
+            <a:pPr algn="l">
+              <a:spcBef>
+                <a:spcPts val="0"/>
+              </a:spcBef>
+              <a:spcAft>
+                <a:spcPts val="200"/>
+              </a:spcAft>
+            </a:pPr>
+            <a:r>
               <a:rPr sz="1200" lang="zh-TW" dirty="0">
                 <a:solidFill>
                   <a:srgbClr val="000000"/>
@@ -3841,19 +4105,30 @@
                 <a:spcPts val="0"/>
               </a:spcBef>
               <a:spcAft>
-                <a:spcPts val="175"/>
+                <a:spcPts val="167"/>
               </a:spcAft>
             </a:pPr>
             <a:r>
-              <a:rPr sz="1050" lang="zh-TW" dirty="0">
-                <a:solidFill>
-                  <a:srgbClr val="000000"/>
-                </a:solidFill>
-                <a:latin typeface="Arial Unicode MS"/>
-                <a:ea typeface="Arial Unicode MS"/>
-                <a:cs typeface="Arial Unicode MS"/>
-              </a:rPr>
-              <a:t>開始做作業之前，先看一支影片，把第二節講的融合再複習一次。
+              <a:rPr sz="1000" b="1" lang="zh-TW" dirty="0">
+                <a:solidFill>
+                  <a:srgbClr val="000000"/>
+                </a:solidFill>
+                <a:latin typeface="Arial Unicode MS"/>
+                <a:ea typeface="Arial Unicode MS"/>
+                <a:cs typeface="Arial Unicode MS"/>
+              </a:rPr>
+              <a:t>這一張的目的：</a:t>
+            </a:r>
+            <a:r>
+              <a:rPr sz="1000" lang="zh-TW" dirty="0">
+                <a:solidFill>
+                  <a:srgbClr val="000000"/>
+                </a:solidFill>
+                <a:latin typeface="Arial Unicode MS"/>
+                <a:ea typeface="Arial Unicode MS"/>
+                <a:cs typeface="Arial Unicode MS"/>
+              </a:rPr>
+              <a:t>動手之前，用一支影片把融合的四個好處再複習一次。
 </a:t>
             </a:r>
           </a:p>
@@ -3863,19 +4138,19 @@
                 <a:spcPts val="0"/>
               </a:spcBef>
               <a:spcAft>
-                <a:spcPts val="175"/>
+                <a:spcPts val="167"/>
               </a:spcAft>
             </a:pPr>
             <a:r>
-              <a:rPr sz="1050" lang="zh-TW" dirty="0">
-                <a:solidFill>
-                  <a:srgbClr val="000000"/>
-                </a:solidFill>
-                <a:latin typeface="Arial Unicode MS"/>
-                <a:ea typeface="Arial Unicode MS"/>
-                <a:cs typeface="Arial Unicode MS"/>
-              </a:rPr>
-              <a:t>這支是 MATLAB 的 Tech Talk，主講人叫 Brian，用手繪白板講，速度不快。英文旁白，請各位開字幕：右下角齒輪，字幕，選「自動翻譯」，再選中文（繁體）或越南文。自動翻譯偶爾會翻怪，看圖就懂。
+              <a:rPr sz="1000" lang="zh-TW" dirty="0">
+                <a:solidFill>
+                  <a:srgbClr val="000000"/>
+                </a:solidFill>
+                <a:latin typeface="Arial Unicode MS"/>
+                <a:ea typeface="Arial Unicode MS"/>
+                <a:cs typeface="Arial Unicode MS"/>
+              </a:rPr>
+              <a:t>開始做作業之前，先看一支影片，把第二節講的融合再複習一次。
 </a:t>
             </a:r>
           </a:p>
@@ -3885,30 +4160,19 @@
                 <a:spcPts val="0"/>
               </a:spcBef>
               <a:spcAft>
-                <a:spcPts val="175"/>
+                <a:spcPts val="167"/>
               </a:spcAft>
             </a:pPr>
             <a:r>
-              <a:rPr sz="1050" b="1" lang="zh-TW" dirty="0">
-                <a:solidFill>
-                  <a:srgbClr val="000000"/>
-                </a:solidFill>
-                <a:latin typeface="Arial Unicode MS"/>
-                <a:ea typeface="Arial Unicode MS"/>
-                <a:cs typeface="Arial Unicode MS"/>
-              </a:rPr>
-              <a:t>從 3:45 播到 11:35</a:t>
-            </a:r>
-            <a:r>
-              <a:rPr sz="1050" lang="zh-TW" dirty="0">
-                <a:solidFill>
-                  <a:srgbClr val="000000"/>
-                </a:solidFill>
-                <a:latin typeface="Arial Unicode MS"/>
-                <a:ea typeface="Arial Unicode MS"/>
-                <a:cs typeface="Arial Unicode MS"/>
-              </a:rPr>
-              <a:t>，大約八分鐘。前面三分多鐘是在講自駕系統分成「感測、理解、規劃、行動」四步，融合橫跨前兩步，就是左邊這張截圖，我們已經講過，可以跳過。
+              <a:rPr sz="1000" lang="zh-TW" dirty="0">
+                <a:solidFill>
+                  <a:srgbClr val="000000"/>
+                </a:solidFill>
+                <a:latin typeface="Arial Unicode MS"/>
+                <a:ea typeface="Arial Unicode MS"/>
+                <a:cs typeface="Arial Unicode MS"/>
+              </a:rPr>
+              <a:t>這支是 MATLAB 的 Tech Talk，主講人叫 Brian，用手繪白板講，速度不快。英文旁白，請各位開字幕：右下角齒輪，字幕，選「自動翻譯」，再選中文（繁體）或越南文。自動翻譯偶爾會翻怪，看圖就懂。
 </a:t>
             </a:r>
           </a:p>
@@ -3918,41 +4182,30 @@
                 <a:spcPts val="0"/>
               </a:spcBef>
               <a:spcAft>
-                <a:spcPts val="175"/>
+                <a:spcPts val="167"/>
               </a:spcAft>
             </a:pPr>
             <a:r>
-              <a:rPr sz="1050" lang="zh-TW" dirty="0">
-                <a:solidFill>
-                  <a:srgbClr val="000000"/>
-                </a:solidFill>
-                <a:latin typeface="Arial Unicode MS"/>
-                <a:ea typeface="Arial Unicode MS"/>
-                <a:cs typeface="Arial Unicode MS"/>
-              </a:rPr>
-              <a:t>它講融合有</a:t>
-            </a:r>
-            <a:r>
-              <a:rPr sz="1050" b="1" lang="zh-TW" dirty="0">
-                <a:solidFill>
-                  <a:srgbClr val="000000"/>
-                </a:solidFill>
-                <a:latin typeface="Arial Unicode MS"/>
-                <a:ea typeface="Arial Unicode MS"/>
-                <a:cs typeface="Arial Unicode MS"/>
-              </a:rPr>
-              <a:t>四個好處</a:t>
-            </a:r>
-            <a:r>
-              <a:rPr sz="1050" lang="zh-TW" dirty="0">
-                <a:solidFill>
-                  <a:srgbClr val="000000"/>
-                </a:solidFill>
-                <a:latin typeface="Arial Unicode MS"/>
-                <a:ea typeface="Arial Unicode MS"/>
-                <a:cs typeface="Arial Unicode MS"/>
-              </a:rPr>
-              <a:t>，邊看邊對回我們上過的：
+              <a:rPr sz="1000" b="1" lang="zh-TW" dirty="0">
+                <a:solidFill>
+                  <a:srgbClr val="000000"/>
+                </a:solidFill>
+                <a:latin typeface="Arial Unicode MS"/>
+                <a:ea typeface="Arial Unicode MS"/>
+                <a:cs typeface="Arial Unicode MS"/>
+              </a:rPr>
+              <a:t>從 3:45 播到 11:35</a:t>
+            </a:r>
+            <a:r>
+              <a:rPr sz="1000" lang="zh-TW" dirty="0">
+                <a:solidFill>
+                  <a:srgbClr val="000000"/>
+                </a:solidFill>
+                <a:latin typeface="Arial Unicode MS"/>
+                <a:ea typeface="Arial Unicode MS"/>
+                <a:cs typeface="Arial Unicode MS"/>
+              </a:rPr>
+              <a:t>，大約八分鐘。前面三分多鐘是在講自駕系統分成「感測、理解、規劃、行動」四步，融合橫跨前兩步，就是左邊這張截圖，我們已經講過，可以跳過。
 </a:t>
             </a:r>
           </a:p>
@@ -3962,30 +4215,41 @@
                 <a:spcPts val="0"/>
               </a:spcBef>
               <a:spcAft>
-                <a:spcPts val="175"/>
+                <a:spcPts val="167"/>
               </a:spcAft>
             </a:pPr>
             <a:r>
-              <a:rPr sz="1050" b="1" lang="zh-TW" dirty="0">
-                <a:solidFill>
-                  <a:srgbClr val="000000"/>
-                </a:solidFill>
-                <a:latin typeface="Arial Unicode MS"/>
-                <a:ea typeface="Arial Unicode MS"/>
-                <a:cs typeface="Arial Unicode MS"/>
-              </a:rPr>
-              <a:t>3:58 第一，資料品質更好。</a:t>
-            </a:r>
-            <a:r>
-              <a:rPr sz="1050" lang="zh-TW" dirty="0">
-                <a:solidFill>
-                  <a:srgbClr val="000000"/>
-                </a:solidFill>
-                <a:latin typeface="Arial Unicode MS"/>
-                <a:ea typeface="Arial Unicode MS"/>
-                <a:cs typeface="Arial Unicode MS"/>
-              </a:rPr>
-              <a:t>一顆加速度計放在桌上，讀數一直跳；兩顆取平均，雜訊就小一點，四顆疊起來，雜訊剩一半。他還提到一種很常見的做法叫卡爾曼濾波，就是第二節第九張「比較準的多相信一點」。
+              <a:rPr sz="1000" lang="zh-TW" dirty="0">
+                <a:solidFill>
+                  <a:srgbClr val="000000"/>
+                </a:solidFill>
+                <a:latin typeface="Arial Unicode MS"/>
+                <a:ea typeface="Arial Unicode MS"/>
+                <a:cs typeface="Arial Unicode MS"/>
+              </a:rPr>
+              <a:t>它講融合有</a:t>
+            </a:r>
+            <a:r>
+              <a:rPr sz="1000" b="1" lang="zh-TW" dirty="0">
+                <a:solidFill>
+                  <a:srgbClr val="000000"/>
+                </a:solidFill>
+                <a:latin typeface="Arial Unicode MS"/>
+                <a:ea typeface="Arial Unicode MS"/>
+                <a:cs typeface="Arial Unicode MS"/>
+              </a:rPr>
+              <a:t>四個好處</a:t>
+            </a:r>
+            <a:r>
+              <a:rPr sz="1000" lang="zh-TW" dirty="0">
+                <a:solidFill>
+                  <a:srgbClr val="000000"/>
+                </a:solidFill>
+                <a:latin typeface="Arial Unicode MS"/>
+                <a:ea typeface="Arial Unicode MS"/>
+                <a:cs typeface="Arial Unicode MS"/>
+              </a:rPr>
+              <a:t>，邊看邊對回我們上過的：
 </a:t>
             </a:r>
           </a:p>
@@ -3995,74 +4259,30 @@
                 <a:spcPts val="0"/>
               </a:spcBef>
               <a:spcAft>
-                <a:spcPts val="175"/>
+                <a:spcPts val="167"/>
               </a:spcAft>
             </a:pPr>
             <a:r>
-              <a:rPr sz="1050" b="1" lang="zh-TW" dirty="0">
-                <a:solidFill>
-                  <a:srgbClr val="000000"/>
-                </a:solidFill>
-                <a:latin typeface="Arial Unicode MS"/>
-                <a:ea typeface="Arial Unicode MS"/>
-                <a:cs typeface="Arial Unicode MS"/>
-              </a:rPr>
-              <a:t>6:59 第二，更可靠。</a:t>
-            </a:r>
-            <a:r>
-              <a:rPr sz="1050" lang="zh-TW" dirty="0">
-                <a:solidFill>
-                  <a:srgbClr val="000000"/>
-                </a:solidFill>
-                <a:latin typeface="Arial Unicode MS"/>
-                <a:ea typeface="Arial Unicode MS"/>
-                <a:cs typeface="Arial Unicode MS"/>
-              </a:rPr>
-              <a:t>飛機上裝三根空速管，一根壞了，另外兩根投票，這就是第二節的「多數決」。可是飛進凍雨，三根一起結冰，投票也救不了；所以要換</a:t>
-            </a:r>
-            <a:r>
-              <a:rPr sz="1050" b="1" lang="zh-TW" dirty="0">
-                <a:solidFill>
-                  <a:srgbClr val="000000"/>
-                </a:solidFill>
-                <a:latin typeface="Arial Unicode MS"/>
-                <a:ea typeface="Arial Unicode MS"/>
-                <a:cs typeface="Arial Unicode MS"/>
-              </a:rPr>
-              <a:t>不同種類</a:t>
-            </a:r>
-            <a:r>
-              <a:rPr sz="1050" lang="zh-TW" dirty="0">
-                <a:solidFill>
-                  <a:srgbClr val="000000"/>
-                </a:solidFill>
-                <a:latin typeface="Arial Unicode MS"/>
-                <a:ea typeface="Arial Unicode MS"/>
-                <a:cs typeface="Arial Unicode MS"/>
-              </a:rPr>
-              <a:t>的感測器來補，例如用 GPS 加風速模型估空速。這就是第二節講的：兩顆被同一個原因騙，多數決就會跟著錯。</a:t>
-            </a:r>
-            <a:r>
-              <a:rPr sz="1050" b="1" lang="zh-TW" dirty="0">
-                <a:solidFill>
-                  <a:srgbClr val="000000"/>
-                </a:solidFill>
-                <a:latin typeface="Arial Unicode MS"/>
-                <a:ea typeface="Arial Unicode MS"/>
-                <a:cs typeface="Arial Unicode MS"/>
-              </a:rPr>
-              <a:t>8:30</a:t>
-            </a:r>
-            <a:r>
-              <a:rPr sz="1050" lang="zh-TW" dirty="0">
-                <a:solidFill>
-                  <a:srgbClr val="000000"/>
-                </a:solidFill>
-                <a:latin typeface="Arial Unicode MS"/>
-                <a:ea typeface="Arial Unicode MS"/>
-                <a:cs typeface="Arial Unicode MS"/>
-              </a:rPr>
-              <a:t> 還有一個例子：雷達追蹤的小船被大船擋住，就先用模型預測它往哪裡走，跟第二節「隧道裡只剩預測」是同一件事。
+              <a:rPr sz="1000" b="1" lang="zh-TW" dirty="0">
+                <a:solidFill>
+                  <a:srgbClr val="000000"/>
+                </a:solidFill>
+                <a:latin typeface="Arial Unicode MS"/>
+                <a:ea typeface="Arial Unicode MS"/>
+                <a:cs typeface="Arial Unicode MS"/>
+              </a:rPr>
+              <a:t>3:58 第一，資料品質更好。</a:t>
+            </a:r>
+            <a:r>
+              <a:rPr sz="1000" lang="zh-TW" dirty="0">
+                <a:solidFill>
+                  <a:srgbClr val="000000"/>
+                </a:solidFill>
+                <a:latin typeface="Arial Unicode MS"/>
+                <a:ea typeface="Arial Unicode MS"/>
+                <a:cs typeface="Arial Unicode MS"/>
+              </a:rPr>
+              <a:t>一顆加速度計放在桌上，讀數一直跳；兩顆取平均，雜訊就小一點，四顆疊起來，雜訊剩一半。他還提到一種很常見的做法叫卡爾曼濾波，就是第二節第九張「比較準的多相信一點」。
 </a:t>
             </a:r>
           </a:p>
@@ -4072,30 +4292,74 @@
                 <a:spcPts val="0"/>
               </a:spcBef>
               <a:spcAft>
-                <a:spcPts val="175"/>
+                <a:spcPts val="167"/>
               </a:spcAft>
             </a:pPr>
             <a:r>
-              <a:rPr sz="1050" b="1" lang="zh-TW" dirty="0">
-                <a:solidFill>
-                  <a:srgbClr val="000000"/>
-                </a:solidFill>
-                <a:latin typeface="Arial Unicode MS"/>
-                <a:ea typeface="Arial Unicode MS"/>
-                <a:cs typeface="Arial Unicode MS"/>
-              </a:rPr>
-              <a:t>9:39 第三，量到原本量不到的東西。</a:t>
-            </a:r>
-            <a:r>
-              <a:rPr sz="1050" lang="zh-TW" dirty="0">
-                <a:solidFill>
-                  <a:srgbClr val="000000"/>
-                </a:solidFill>
-                <a:latin typeface="Arial Unicode MS"/>
-                <a:ea typeface="Arial Unicode MS"/>
-                <a:cs typeface="Arial Unicode MS"/>
-              </a:rPr>
-              <a:t>一台相機量不出距離，遠處的大東西和近處的小東西，在照片上可能一樣大；兩台相機從不同角度看，合起來就量得出距離。
+              <a:rPr sz="1000" b="1" lang="zh-TW" dirty="0">
+                <a:solidFill>
+                  <a:srgbClr val="000000"/>
+                </a:solidFill>
+                <a:latin typeface="Arial Unicode MS"/>
+                <a:ea typeface="Arial Unicode MS"/>
+                <a:cs typeface="Arial Unicode MS"/>
+              </a:rPr>
+              <a:t>6:59 第二，更可靠。</a:t>
+            </a:r>
+            <a:r>
+              <a:rPr sz="1000" lang="zh-TW" dirty="0">
+                <a:solidFill>
+                  <a:srgbClr val="000000"/>
+                </a:solidFill>
+                <a:latin typeface="Arial Unicode MS"/>
+                <a:ea typeface="Arial Unicode MS"/>
+                <a:cs typeface="Arial Unicode MS"/>
+              </a:rPr>
+              <a:t>飛機上裝三根空速管，一根壞了，另外兩根投票，這就是第二節的「多數決」。可是飛進凍雨，三根一起結冰，投票也救不了；所以要換</a:t>
+            </a:r>
+            <a:r>
+              <a:rPr sz="1000" b="1" lang="zh-TW" dirty="0">
+                <a:solidFill>
+                  <a:srgbClr val="000000"/>
+                </a:solidFill>
+                <a:latin typeface="Arial Unicode MS"/>
+                <a:ea typeface="Arial Unicode MS"/>
+                <a:cs typeface="Arial Unicode MS"/>
+              </a:rPr>
+              <a:t>不同種類</a:t>
+            </a:r>
+            <a:r>
+              <a:rPr sz="1000" lang="zh-TW" dirty="0">
+                <a:solidFill>
+                  <a:srgbClr val="000000"/>
+                </a:solidFill>
+                <a:latin typeface="Arial Unicode MS"/>
+                <a:ea typeface="Arial Unicode MS"/>
+                <a:cs typeface="Arial Unicode MS"/>
+              </a:rPr>
+              <a:t>的感測器來補，例如用 GPS 加風速模型估空速。這就是第二節講的：兩顆被同一個原因騙，多數決就會跟著錯。</a:t>
+            </a:r>
+            <a:r>
+              <a:rPr sz="1000" b="1" lang="zh-TW" dirty="0">
+                <a:solidFill>
+                  <a:srgbClr val="000000"/>
+                </a:solidFill>
+                <a:latin typeface="Arial Unicode MS"/>
+                <a:ea typeface="Arial Unicode MS"/>
+                <a:cs typeface="Arial Unicode MS"/>
+              </a:rPr>
+              <a:t>8:30</a:t>
+            </a:r>
+            <a:r>
+              <a:rPr sz="1000" lang="zh-TW" dirty="0">
+                <a:solidFill>
+                  <a:srgbClr val="000000"/>
+                </a:solidFill>
+                <a:latin typeface="Arial Unicode MS"/>
+                <a:ea typeface="Arial Unicode MS"/>
+                <a:cs typeface="Arial Unicode MS"/>
+              </a:rPr>
+              <a:t> 還有一個例子：雷達追蹤的小船被大船擋住，就先用模型預測它往哪裡走，跟第二節「隧道裡只剩預測」是同一件事。
 </a:t>
             </a:r>
           </a:p>
@@ -4105,30 +4369,30 @@
                 <a:spcPts val="0"/>
               </a:spcBef>
               <a:spcAft>
-                <a:spcPts val="175"/>
+                <a:spcPts val="167"/>
               </a:spcAft>
             </a:pPr>
             <a:r>
-              <a:rPr sz="1050" b="1" lang="zh-TW" dirty="0">
-                <a:solidFill>
-                  <a:srgbClr val="000000"/>
-                </a:solidFill>
-                <a:latin typeface="Arial Unicode MS"/>
-                <a:ea typeface="Arial Unicode MS"/>
-                <a:cs typeface="Arial Unicode MS"/>
-              </a:rPr>
-              <a:t>10:40 第四，看得更廣。</a:t>
-            </a:r>
-            <a:r>
-              <a:rPr sz="1050" lang="zh-TW" dirty="0">
-                <a:solidFill>
-                  <a:srgbClr val="000000"/>
-                </a:solidFill>
-                <a:latin typeface="Arial Unicode MS"/>
-                <a:ea typeface="Arial Unicode MS"/>
-                <a:cs typeface="Arial Unicode MS"/>
-              </a:rPr>
-              <a:t>停車用的超音波，一顆只看得到前面一小塊，車子四周裝一圈，合起來才看得到整圈。就是第二節搭檔表的第五組。
+              <a:rPr sz="1000" b="1" lang="zh-TW" dirty="0">
+                <a:solidFill>
+                  <a:srgbClr val="000000"/>
+                </a:solidFill>
+                <a:latin typeface="Arial Unicode MS"/>
+                <a:ea typeface="Arial Unicode MS"/>
+                <a:cs typeface="Arial Unicode MS"/>
+              </a:rPr>
+              <a:t>9:39 第三，量到原本量不到的東西。</a:t>
+            </a:r>
+            <a:r>
+              <a:rPr sz="1000" lang="zh-TW" dirty="0">
+                <a:solidFill>
+                  <a:srgbClr val="000000"/>
+                </a:solidFill>
+                <a:latin typeface="Arial Unicode MS"/>
+                <a:ea typeface="Arial Unicode MS"/>
+                <a:cs typeface="Arial Unicode MS"/>
+              </a:rPr>
+              <a:t>一台相機量不出距離，遠處的大東西和近處的小東西，在照片上可能一樣大；兩台相機從不同角度看，合起來就量得出距離。
 </a:t>
             </a:r>
           </a:p>
@@ -4138,11 +4402,44 @@
                 <a:spcPts val="0"/>
               </a:spcBef>
               <a:spcAft>
-                <a:spcPts val="175"/>
+                <a:spcPts val="167"/>
               </a:spcAft>
             </a:pPr>
             <a:r>
-              <a:rPr sz="1050" lang="zh-TW" dirty="0">
+              <a:rPr sz="1000" b="1" lang="zh-TW" dirty="0">
+                <a:solidFill>
+                  <a:srgbClr val="000000"/>
+                </a:solidFill>
+                <a:latin typeface="Arial Unicode MS"/>
+                <a:ea typeface="Arial Unicode MS"/>
+                <a:cs typeface="Arial Unicode MS"/>
+              </a:rPr>
+              <a:t>10:40 第四，看得更廣。</a:t>
+            </a:r>
+            <a:r>
+              <a:rPr sz="1000" lang="zh-TW" dirty="0">
+                <a:solidFill>
+                  <a:srgbClr val="000000"/>
+                </a:solidFill>
+                <a:latin typeface="Arial Unicode MS"/>
+                <a:ea typeface="Arial Unicode MS"/>
+                <a:cs typeface="Arial Unicode MS"/>
+              </a:rPr>
+              <a:t>停車用的超音波，一顆只看得到前面一小塊，車子四周裝一圈，合起來才看得到整圈。就是第二節搭檔表的第五組。
+</a:t>
+            </a:r>
+          </a:p>
+          <a:p>
+            <a:pPr algn="l">
+              <a:spcBef>
+                <a:spcPts val="0"/>
+              </a:spcBef>
+              <a:spcAft>
+                <a:spcPts val="167"/>
+              </a:spcAft>
+            </a:pPr>
+            <a:r>
+              <a:rPr sz="1000" lang="zh-TW" dirty="0">
                 <a:solidFill>
                   <a:srgbClr val="000000"/>
                 </a:solidFill>
@@ -4153,7 +4450,7 @@
               <a:t>播完問大家一題：</a:t>
             </a:r>
             <a:r>
-              <a:rPr sz="1050" b="1" lang="zh-TW" dirty="0">
+              <a:rPr sz="1000" b="1" lang="zh-TW" dirty="0">
                 <a:solidFill>
                   <a:srgbClr val="000000"/>
                 </a:solidFill>
@@ -4164,7 +4461,7 @@
               <a:t>這四個好處，各在第一、二節的哪裡出現過？</a:t>
             </a:r>
             <a:r>
-              <a:rPr sz="1050" lang="zh-TW" dirty="0">
+              <a:rPr sz="1000" lang="zh-TW" dirty="0">
                 <a:solidFill>
                   <a:srgbClr val="000000"/>
                 </a:solidFill>
@@ -4285,6 +4582,39 @@
               </a:spcAft>
             </a:pPr>
             <a:r>
+              <a:rPr sz="1200" b="1" lang="zh-TW" dirty="0">
+                <a:solidFill>
+                  <a:srgbClr val="000000"/>
+                </a:solidFill>
+                <a:latin typeface="Arial Unicode MS"/>
+                <a:ea typeface="Arial Unicode MS"/>
+                <a:cs typeface="Arial Unicode MS"/>
+              </a:rPr>
+              <a:t>這一張的目的：</a:t>
+            </a:r>
+            <a:r>
+              <a:rPr sz="1200" lang="zh-TW" dirty="0">
+                <a:solidFill>
+                  <a:srgbClr val="000000"/>
+                </a:solidFill>
+                <a:latin typeface="Arial Unicode MS"/>
+                <a:ea typeface="Arial Unicode MS"/>
+                <a:cs typeface="Arial Unicode MS"/>
+              </a:rPr>
+              <a:t>讓每個人都打開兩個網頁、填好姓名學號，準備開始。
+</a:t>
+            </a:r>
+          </a:p>
+          <a:p>
+            <a:pPr algn="l">
+              <a:spcBef>
+                <a:spcPts val="0"/>
+              </a:spcBef>
+              <a:spcAft>
+                <a:spcPts val="200"/>
+              </a:spcAft>
+            </a:pPr>
+            <a:r>
               <a:rPr sz="1200" lang="zh-TW" dirty="0">
                 <a:solidFill>
                   <a:srgbClr val="000000"/>
@@ -4560,6 +4890,39 @@
               </a:spcAft>
             </a:pPr>
             <a:r>
+              <a:rPr sz="1200" b="1" lang="zh-TW" dirty="0">
+                <a:solidFill>
+                  <a:srgbClr val="000000"/>
+                </a:solidFill>
+                <a:latin typeface="Arial Unicode MS"/>
+                <a:ea typeface="Arial Unicode MS"/>
+                <a:cs typeface="Arial Unicode MS"/>
+              </a:rPr>
+              <a:t>這一張的目的：</a:t>
+            </a:r>
+            <a:r>
+              <a:rPr sz="1200" lang="zh-TW" dirty="0">
+                <a:solidFill>
+                  <a:srgbClr val="000000"/>
+                </a:solidFill>
+                <a:latin typeface="Arial Unicode MS"/>
+                <a:ea typeface="Arial Unicode MS"/>
+                <a:cs typeface="Arial Unicode MS"/>
+              </a:rPr>
+              <a:t>讓大家知道今天用的 nuScenes 是什麼樣的資料。
+</a:t>
+            </a:r>
+          </a:p>
+          <a:p>
+            <a:pPr algn="l">
+              <a:spcBef>
+                <a:spcPts val="0"/>
+              </a:spcBef>
+              <a:spcAft>
+                <a:spcPts val="200"/>
+              </a:spcAft>
+            </a:pPr>
+            <a:r>
               <a:rPr sz="1200" lang="zh-TW" dirty="0">
                 <a:solidFill>
                   <a:srgbClr val="000000"/>
@@ -4945,6 +5308,39 @@
               </a:spcAft>
             </a:pPr>
             <a:r>
+              <a:rPr sz="1200" b="1" lang="zh-TW" dirty="0">
+                <a:solidFill>
+                  <a:srgbClr val="000000"/>
+                </a:solidFill>
+                <a:latin typeface="Arial Unicode MS"/>
+                <a:ea typeface="Arial Unicode MS"/>
+                <a:cs typeface="Arial Unicode MS"/>
+              </a:rPr>
+              <a:t>這一張的目的：</a:t>
+            </a:r>
+            <a:r>
+              <a:rPr sz="1200" lang="zh-TW" dirty="0">
+                <a:solidFill>
+                  <a:srgbClr val="000000"/>
+                </a:solidFill>
+                <a:latin typeface="Arial Unicode MS"/>
+                <a:ea typeface="Arial Unicode MS"/>
+                <a:cs typeface="Arial Unicode MS"/>
+              </a:rPr>
+              <a:t>讓大家看到，一台資料車上，十二顆感測器裝在哪、朝哪看；也呼應第二節的外參。
+</a:t>
+            </a:r>
+          </a:p>
+          <a:p>
+            <a:pPr algn="l">
+              <a:spcBef>
+                <a:spcPts val="0"/>
+              </a:spcBef>
+              <a:spcAft>
+                <a:spcPts val="200"/>
+              </a:spcAft>
+            </a:pPr>
+            <a:r>
               <a:rPr sz="1200" lang="zh-TW" dirty="0">
                 <a:solidFill>
                   <a:srgbClr val="000000"/>
@@ -5253,6 +5649,39 @@
               </a:spcAft>
             </a:pPr>
             <a:r>
+              <a:rPr sz="1200" b="1" lang="zh-TW" dirty="0">
+                <a:solidFill>
+                  <a:srgbClr val="000000"/>
+                </a:solidFill>
+                <a:latin typeface="Arial Unicode MS"/>
+                <a:ea typeface="Arial Unicode MS"/>
+                <a:cs typeface="Arial Unicode MS"/>
+              </a:rPr>
+              <a:t>這一張的目的：</a:t>
+            </a:r>
+            <a:r>
+              <a:rPr sz="1200" lang="zh-TW" dirty="0">
+                <a:solidFill>
+                  <a:srgbClr val="000000"/>
+                </a:solidFill>
+                <a:latin typeface="Arial Unicode MS"/>
+                <a:ea typeface="Arial Unicode MS"/>
+                <a:cs typeface="Arial Unicode MS"/>
+              </a:rPr>
+              <a:t>讓大家知道，資料集裡的框是人一格一格標出來的；下週輪到大家自己標。
+</a:t>
+            </a:r>
+          </a:p>
+          <a:p>
+            <a:pPr algn="l">
+              <a:spcBef>
+                <a:spcPts val="0"/>
+              </a:spcBef>
+              <a:spcAft>
+                <a:spcPts val="200"/>
+              </a:spcAft>
+            </a:pPr>
+            <a:r>
               <a:rPr sz="1200" lang="zh-TW" dirty="0">
                 <a:solidFill>
                   <a:srgbClr val="000000"/>
@@ -5605,6 +6034,39 @@
               </a:spcAft>
             </a:pPr>
             <a:r>
+              <a:rPr sz="1200" b="1" lang="zh-TW" dirty="0">
+                <a:solidFill>
+                  <a:srgbClr val="000000"/>
+                </a:solidFill>
+                <a:latin typeface="Arial Unicode MS"/>
+                <a:ea typeface="Arial Unicode MS"/>
+                <a:cs typeface="Arial Unicode MS"/>
+              </a:rPr>
+              <a:t>這一張的目的：</a:t>
+            </a:r>
+            <a:r>
+              <a:rPr sz="1200" lang="zh-TW" dirty="0">
+                <a:solidFill>
+                  <a:srgbClr val="000000"/>
+                </a:solidFill>
+                <a:latin typeface="Arial Unicode MS"/>
+                <a:ea typeface="Arial Unicode MS"/>
+                <a:cs typeface="Arial Unicode MS"/>
+              </a:rPr>
+              <a:t>讓大家想一想，別人的資料能不能直接用在我們的路上？答案是要有自己的資料。
+</a:t>
+            </a:r>
+          </a:p>
+          <a:p>
+            <a:pPr algn="l">
+              <a:spcBef>
+                <a:spcPts val="0"/>
+              </a:spcBef>
+              <a:spcAft>
+                <a:spcPts val="200"/>
+              </a:spcAft>
+            </a:pPr>
+            <a:r>
               <a:rPr sz="1200" lang="zh-TW" dirty="0">
                 <a:solidFill>
                   <a:srgbClr val="000000"/>
@@ -5942,19 +6404,30 @@
                 <a:spcPts val="0"/>
               </a:spcBef>
               <a:spcAft>
-                <a:spcPts val="167"/>
+                <a:spcPts val="158"/>
               </a:spcAft>
             </a:pPr>
             <a:r>
-              <a:rPr sz="1000" lang="zh-TW" dirty="0">
-                <a:solidFill>
-                  <a:srgbClr val="000000"/>
-                </a:solidFill>
-                <a:latin typeface="Arial Unicode MS"/>
-                <a:ea typeface="Arial Unicode MS"/>
-                <a:cs typeface="Arial Unicode MS"/>
-              </a:rPr>
-              <a:t>觀察台怎麼用，看這張截圖，由上往下。
+              <a:rPr sz="950" b="1" lang="zh-TW" dirty="0">
+                <a:solidFill>
+                  <a:srgbClr val="000000"/>
+                </a:solidFill>
+                <a:latin typeface="Arial Unicode MS"/>
+                <a:ea typeface="Arial Unicode MS"/>
+                <a:cs typeface="Arial Unicode MS"/>
+              </a:rPr>
+              <a:t>這一張的目的：</a:t>
+            </a:r>
+            <a:r>
+              <a:rPr sz="950" lang="zh-TW" dirty="0">
+                <a:solidFill>
+                  <a:srgbClr val="000000"/>
+                </a:solidFill>
+                <a:latin typeface="Arial Unicode MS"/>
+                <a:ea typeface="Arial Unicode MS"/>
+                <a:cs typeface="Arial Unicode MS"/>
+              </a:rPr>
+              <a:t>教大家怎麼用觀察台，尤其是表格只數有黑點的那幾列。
 </a:t>
             </a:r>
           </a:p>
@@ -5964,30 +6437,19 @@
                 <a:spcPts val="0"/>
               </a:spcBef>
               <a:spcAft>
-                <a:spcPts val="167"/>
+                <a:spcPts val="158"/>
               </a:spcAft>
             </a:pPr>
             <a:r>
-              <a:rPr sz="1000" b="1" lang="zh-TW" dirty="0">
-                <a:solidFill>
-                  <a:srgbClr val="000000"/>
-                </a:solidFill>
-                <a:latin typeface="Arial Unicode MS"/>
-                <a:ea typeface="Arial Unicode MS"/>
-                <a:cs typeface="Arial Unicode MS"/>
-              </a:rPr>
-              <a:t>最上面，四個場景鈕</a:t>
-            </a:r>
-            <a:r>
-              <a:rPr sz="1000" lang="zh-TW" dirty="0">
-                <a:solidFill>
-                  <a:srgbClr val="000000"/>
-                </a:solidFill>
-                <a:latin typeface="Arial Unicode MS"/>
-                <a:ea typeface="Arial Unicode MS"/>
-                <a:cs typeface="Arial Unicode MS"/>
-              </a:rPr>
-              <a:t>：白天、停車場、夜間、夜間雨後。按哪一個，整頁就換成那一個瞬間。
+              <a:rPr sz="950" lang="zh-TW" dirty="0">
+                <a:solidFill>
+                  <a:srgbClr val="000000"/>
+                </a:solidFill>
+                <a:latin typeface="Arial Unicode MS"/>
+                <a:ea typeface="Arial Unicode MS"/>
+                <a:cs typeface="Arial Unicode MS"/>
+              </a:rPr>
+              <a:t>觀察台怎麼用，看這張截圖，由上往下。
 </a:t>
             </a:r>
           </a:p>
@@ -5997,30 +6459,30 @@
                 <a:spcPts val="0"/>
               </a:spcBef>
               <a:spcAft>
-                <a:spcPts val="167"/>
+                <a:spcPts val="158"/>
               </a:spcAft>
             </a:pPr>
             <a:r>
-              <a:rPr sz="1000" b="1" lang="zh-TW" dirty="0">
-                <a:solidFill>
-                  <a:srgbClr val="000000"/>
-                </a:solidFill>
-                <a:latin typeface="Arial Unicode MS"/>
-                <a:ea typeface="Arial Unicode MS"/>
-                <a:cs typeface="Arial Unicode MS"/>
-              </a:rPr>
-              <a:t>左上，四個開關</a:t>
-            </a:r>
-            <a:r>
-              <a:rPr sz="1000" lang="zh-TW" dirty="0">
-                <a:solidFill>
-                  <a:srgbClr val="000000"/>
-                </a:solidFill>
-                <a:latin typeface="Arial Unicode MS"/>
-                <a:ea typeface="Arial Unicode MS"/>
-                <a:cs typeface="Arial Unicode MS"/>
-              </a:rPr>
-              <a:t>：光達點、雷達點、物體框、合起來。按一下開，再按一下關。截圖裡開的是雷達點、物體框和合起來。
+              <a:rPr sz="950" b="1" lang="zh-TW" dirty="0">
+                <a:solidFill>
+                  <a:srgbClr val="000000"/>
+                </a:solidFill>
+                <a:latin typeface="Arial Unicode MS"/>
+                <a:ea typeface="Arial Unicode MS"/>
+                <a:cs typeface="Arial Unicode MS"/>
+              </a:rPr>
+              <a:t>最上面，四個場景鈕</a:t>
+            </a:r>
+            <a:r>
+              <a:rPr sz="950" lang="zh-TW" dirty="0">
+                <a:solidFill>
+                  <a:srgbClr val="000000"/>
+                </a:solidFill>
+                <a:latin typeface="Arial Unicode MS"/>
+                <a:ea typeface="Arial Unicode MS"/>
+                <a:cs typeface="Arial Unicode MS"/>
+              </a:rPr>
+              <a:t>：白天、停車場、夜間、夜間雨後。按哪一個，整頁就換成那一個瞬間。
 </a:t>
             </a:r>
           </a:p>
@@ -6030,107 +6492,30 @@
                 <a:spcPts val="0"/>
               </a:spcBef>
               <a:spcAft>
-                <a:spcPts val="167"/>
+                <a:spcPts val="158"/>
               </a:spcAft>
             </a:pPr>
             <a:r>
-              <a:rPr sz="1000" lang="zh-TW" dirty="0">
-                <a:solidFill>
-                  <a:srgbClr val="000000"/>
-                </a:solidFill>
-                <a:latin typeface="Arial Unicode MS"/>
-                <a:ea typeface="Arial Unicode MS"/>
-                <a:cs typeface="Arial Unicode MS"/>
-              </a:rPr>
-              <a:t>先講顏色。</a:t>
-            </a:r>
-            <a:r>
-              <a:rPr sz="1000" b="1" lang="zh-TW" dirty="0">
-                <a:solidFill>
-                  <a:srgbClr val="000000"/>
-                </a:solidFill>
-                <a:latin typeface="Arial Unicode MS"/>
-                <a:ea typeface="Arial Unicode MS"/>
-                <a:cs typeface="Arial Unicode MS"/>
-              </a:rPr>
-              <a:t>光達點</a:t>
-            </a:r>
-            <a:r>
-              <a:rPr sz="1000" lang="zh-TW" dirty="0">
-                <a:solidFill>
-                  <a:srgbClr val="000000"/>
-                </a:solidFill>
-                <a:latin typeface="Arial Unicode MS"/>
-                <a:ea typeface="Arial Unicode MS"/>
-                <a:cs typeface="Arial Unicode MS"/>
-              </a:rPr>
-              <a:t>是小方點，顏色代表距離，紅色近、藍色遠，跟第一節的圖一樣。</a:t>
-            </a:r>
-            <a:r>
-              <a:rPr sz="1000" b="1" lang="zh-TW" dirty="0">
-                <a:solidFill>
-                  <a:srgbClr val="000000"/>
-                </a:solidFill>
-                <a:latin typeface="Arial Unicode MS"/>
-                <a:ea typeface="Arial Unicode MS"/>
-                <a:cs typeface="Arial Unicode MS"/>
-              </a:rPr>
-              <a:t>雷達點</a:t>
-            </a:r>
-            <a:r>
-              <a:rPr sz="1000" lang="zh-TW" dirty="0">
-                <a:solidFill>
-                  <a:srgbClr val="000000"/>
-                </a:solidFill>
-                <a:latin typeface="Arial Unicode MS"/>
-                <a:ea typeface="Arial Unicode MS"/>
-                <a:cs typeface="Arial Unicode MS"/>
-              </a:rPr>
-              <a:t>是紅色的圈，實心的表示那個東西在動，空心的表示靜止。</a:t>
-            </a:r>
-            <a:r>
-              <a:rPr sz="1000" b="1" lang="zh-TW" dirty="0">
-                <a:solidFill>
-                  <a:srgbClr val="000000"/>
-                </a:solidFill>
-                <a:latin typeface="Arial Unicode MS"/>
-                <a:ea typeface="Arial Unicode MS"/>
-                <a:cs typeface="Arial Unicode MS"/>
-              </a:rPr>
-              <a:t>物體框</a:t>
-            </a:r>
-            <a:r>
-              <a:rPr sz="1000" lang="zh-TW" dirty="0">
-                <a:solidFill>
-                  <a:srgbClr val="000000"/>
-                </a:solidFill>
-                <a:latin typeface="Arial Unicode MS"/>
-                <a:ea typeface="Arial Unicode MS"/>
-                <a:cs typeface="Arial Unicode MS"/>
-              </a:rPr>
-              <a:t>有兩種顏色：</a:t>
-            </a:r>
-            <a:r>
-              <a:rPr sz="1000" b="1" lang="zh-TW" dirty="0">
-                <a:solidFill>
-                  <a:srgbClr val="000000"/>
-                </a:solidFill>
-                <a:latin typeface="Arial Unicode MS"/>
-                <a:ea typeface="Arial Unicode MS"/>
-                <a:cs typeface="Arial Unicode MS"/>
-              </a:rPr>
-              <a:t>綠框表示框裡至少有一個雷達點，橘框表示一個都沒有。</a:t>
-            </a:r>
-            <a:r>
-              <a:rPr sz="1000" lang="zh-TW" dirty="0">
-                <a:solidFill>
-                  <a:srgbClr val="000000"/>
-                </a:solidFill>
-                <a:latin typeface="Arial Unicode MS"/>
-                <a:ea typeface="Arial Unicode MS"/>
-                <a:cs typeface="Arial Unicode MS"/>
-              </a:rPr>
-              <a:t>
+              <a:rPr sz="950" b="1" lang="zh-TW" dirty="0">
+                <a:solidFill>
+                  <a:srgbClr val="000000"/>
+                </a:solidFill>
+                <a:latin typeface="Arial Unicode MS"/>
+                <a:ea typeface="Arial Unicode MS"/>
+                <a:cs typeface="Arial Unicode MS"/>
+              </a:rPr>
+              <a:t>左上，四個開關</a:t>
+            </a:r>
+            <a:r>
+              <a:rPr sz="950" lang="zh-TW" dirty="0">
+                <a:solidFill>
+                  <a:srgbClr val="000000"/>
+                </a:solidFill>
+                <a:latin typeface="Arial Unicode MS"/>
+                <a:ea typeface="Arial Unicode MS"/>
+                <a:cs typeface="Arial Unicode MS"/>
+              </a:rPr>
+              <a:t>：光達點、雷達點、物體框、合起來。按一下開，再按一下關。截圖裡開的是雷達點、物體框和合起來。
 </a:t>
             </a:r>
           </a:p>
@@ -6140,19 +6525,107 @@
                 <a:spcPts val="0"/>
               </a:spcBef>
               <a:spcAft>
-                <a:spcPts val="167"/>
+                <a:spcPts val="158"/>
               </a:spcAft>
             </a:pPr>
             <a:r>
-              <a:rPr sz="1000" lang="zh-TW" dirty="0">
-                <a:solidFill>
-                  <a:srgbClr val="000000"/>
-                </a:solidFill>
-                <a:latin typeface="Arial Unicode MS"/>
-                <a:ea typeface="Arial Unicode MS"/>
-                <a:cs typeface="Arial Unicode MS"/>
-              </a:rPr>
-              <a:t>左下還有一張從上往下看的鳥瞰圖，自己的車在正中間、車頭朝上，前後左右各四十公尺。
+              <a:rPr sz="950" lang="zh-TW" dirty="0">
+                <a:solidFill>
+                  <a:srgbClr val="000000"/>
+                </a:solidFill>
+                <a:latin typeface="Arial Unicode MS"/>
+                <a:ea typeface="Arial Unicode MS"/>
+                <a:cs typeface="Arial Unicode MS"/>
+              </a:rPr>
+              <a:t>先講顏色。</a:t>
+            </a:r>
+            <a:r>
+              <a:rPr sz="950" b="1" lang="zh-TW" dirty="0">
+                <a:solidFill>
+                  <a:srgbClr val="000000"/>
+                </a:solidFill>
+                <a:latin typeface="Arial Unicode MS"/>
+                <a:ea typeface="Arial Unicode MS"/>
+                <a:cs typeface="Arial Unicode MS"/>
+              </a:rPr>
+              <a:t>光達點</a:t>
+            </a:r>
+            <a:r>
+              <a:rPr sz="950" lang="zh-TW" dirty="0">
+                <a:solidFill>
+                  <a:srgbClr val="000000"/>
+                </a:solidFill>
+                <a:latin typeface="Arial Unicode MS"/>
+                <a:ea typeface="Arial Unicode MS"/>
+                <a:cs typeface="Arial Unicode MS"/>
+              </a:rPr>
+              <a:t>是小方點，顏色代表距離，紅色近、藍色遠，跟第一節的圖一樣。</a:t>
+            </a:r>
+            <a:r>
+              <a:rPr sz="950" b="1" lang="zh-TW" dirty="0">
+                <a:solidFill>
+                  <a:srgbClr val="000000"/>
+                </a:solidFill>
+                <a:latin typeface="Arial Unicode MS"/>
+                <a:ea typeface="Arial Unicode MS"/>
+                <a:cs typeface="Arial Unicode MS"/>
+              </a:rPr>
+              <a:t>雷達點</a:t>
+            </a:r>
+            <a:r>
+              <a:rPr sz="950" lang="zh-TW" dirty="0">
+                <a:solidFill>
+                  <a:srgbClr val="000000"/>
+                </a:solidFill>
+                <a:latin typeface="Arial Unicode MS"/>
+                <a:ea typeface="Arial Unicode MS"/>
+                <a:cs typeface="Arial Unicode MS"/>
+              </a:rPr>
+              <a:t>是紅色的圈，實心的表示那個東西在動，空心的表示靜止。</a:t>
+            </a:r>
+            <a:r>
+              <a:rPr sz="950" b="1" lang="zh-TW" dirty="0">
+                <a:solidFill>
+                  <a:srgbClr val="000000"/>
+                </a:solidFill>
+                <a:latin typeface="Arial Unicode MS"/>
+                <a:ea typeface="Arial Unicode MS"/>
+                <a:cs typeface="Arial Unicode MS"/>
+              </a:rPr>
+              <a:t>物體框</a:t>
+            </a:r>
+            <a:r>
+              <a:rPr sz="950" lang="zh-TW" dirty="0">
+                <a:solidFill>
+                  <a:srgbClr val="000000"/>
+                </a:solidFill>
+                <a:latin typeface="Arial Unicode MS"/>
+                <a:ea typeface="Arial Unicode MS"/>
+                <a:cs typeface="Arial Unicode MS"/>
+              </a:rPr>
+              <a:t>有兩種顏色：</a:t>
+            </a:r>
+            <a:r>
+              <a:rPr sz="950" b="1" lang="zh-TW" dirty="0">
+                <a:solidFill>
+                  <a:srgbClr val="000000"/>
+                </a:solidFill>
+                <a:latin typeface="Arial Unicode MS"/>
+                <a:ea typeface="Arial Unicode MS"/>
+                <a:cs typeface="Arial Unicode MS"/>
+              </a:rPr>
+              <a:t>綠框表示框裡至少有一個雷達點，橘框表示一個都沒有。</a:t>
+            </a:r>
+            <a:r>
+              <a:rPr sz="950" lang="zh-TW" dirty="0">
+                <a:solidFill>
+                  <a:srgbClr val="000000"/>
+                </a:solidFill>
+                <a:latin typeface="Arial Unicode MS"/>
+                <a:ea typeface="Arial Unicode MS"/>
+                <a:cs typeface="Arial Unicode MS"/>
+              </a:rPr>
+              <a:t>
 </a:t>
             </a:r>
           </a:p>
@@ -6162,52 +6635,19 @@
                 <a:spcPts val="0"/>
               </a:spcBef>
               <a:spcAft>
-                <a:spcPts val="167"/>
+                <a:spcPts val="158"/>
               </a:spcAft>
             </a:pPr>
             <a:r>
-              <a:rPr sz="1000" b="1" lang="zh-TW" dirty="0">
-                <a:solidFill>
-                  <a:srgbClr val="000000"/>
-                </a:solidFill>
-                <a:latin typeface="Arial Unicode MS"/>
-                <a:ea typeface="Arial Unicode MS"/>
-                <a:cs typeface="Arial Unicode MS"/>
-              </a:rPr>
-              <a:t>右邊，數一數。</a:t>
-            </a:r>
-            <a:r>
-              <a:rPr sz="1000" lang="zh-TW" dirty="0">
-                <a:solidFill>
-                  <a:srgbClr val="000000"/>
-                </a:solidFill>
-                <a:latin typeface="Arial Unicode MS"/>
-                <a:ea typeface="Arial Unicode MS"/>
-                <a:cs typeface="Arial Unicode MS"/>
-              </a:rPr>
-              <a:t>上面三格數字：畫面裡有幾個光達點、幾個雷達點、幾個物體有被雷達抓到。下面的表格，每一列是一個物體，寫它離車子多遠、身上有幾個光達點、幾個雷達點，還有一欄「</a:t>
-            </a:r>
-            <a:r>
-              <a:rPr sz="1000" b="1" lang="zh-TW" dirty="0">
-                <a:solidFill>
-                  <a:srgbClr val="000000"/>
-                </a:solidFill>
-                <a:latin typeface="Arial Unicode MS"/>
-                <a:ea typeface="Arial Unicode MS"/>
-                <a:cs typeface="Arial Unicode MS"/>
-              </a:rPr>
-              <a:t>雷達：多快</a:t>
-            </a:r>
-            <a:r>
-              <a:rPr sz="1000" lang="zh-TW" dirty="0">
-                <a:solidFill>
-                  <a:srgbClr val="000000"/>
-                </a:solidFill>
-                <a:latin typeface="Arial Unicode MS"/>
-                <a:ea typeface="Arial Unicode MS"/>
-                <a:cs typeface="Arial Unicode MS"/>
-              </a:rPr>
-              <a:t>」：雷達量到這個東西正在靠近還是遠離、時速多少。沒有雷達點的，這一欄就是一條線。
+              <a:rPr sz="950" lang="zh-TW" dirty="0">
+                <a:solidFill>
+                  <a:srgbClr val="000000"/>
+                </a:solidFill>
+                <a:latin typeface="Arial Unicode MS"/>
+                <a:ea typeface="Arial Unicode MS"/>
+                <a:cs typeface="Arial Unicode MS"/>
+              </a:rPr>
+              <a:t>左下還有一張從上往下看的鳥瞰圖，自己的車在正中間、車頭朝上，前後左右各四十公尺。
 </a:t>
             </a:r>
           </a:p>
@@ -6217,30 +6657,52 @@
                 <a:spcPts val="0"/>
               </a:spcBef>
               <a:spcAft>
-                <a:spcPts val="167"/>
+                <a:spcPts val="158"/>
               </a:spcAft>
             </a:pPr>
             <a:r>
-              <a:rPr sz="1000" b="1" lang="zh-TW" dirty="0">
-                <a:solidFill>
-                  <a:srgbClr val="000000"/>
-                </a:solidFill>
-                <a:latin typeface="Arial Unicode MS"/>
-                <a:ea typeface="Arial Unicode MS"/>
-                <a:cs typeface="Arial Unicode MS"/>
-              </a:rPr>
-              <a:t>第四個開關「合起來」</a:t>
-            </a:r>
-            <a:r>
-              <a:rPr sz="1000" lang="zh-TW" dirty="0">
-                <a:solidFill>
-                  <a:srgbClr val="000000"/>
-                </a:solidFill>
-                <a:latin typeface="Arial Unicode MS"/>
-                <a:ea typeface="Arial Unicode MS"/>
-                <a:cs typeface="Arial Unicode MS"/>
-              </a:rPr>
-              <a:t>，會在每個框上寫一行字，例如「車・14 m・≈0」：「車」是相機認出來的，「14 m」是光達量的，「≈0」是雷達量的速度。三種感測器各給一塊，拼成一句話。任務五會用到。
+              <a:rPr sz="950" b="1" lang="zh-TW" dirty="0">
+                <a:solidFill>
+                  <a:srgbClr val="000000"/>
+                </a:solidFill>
+                <a:latin typeface="Arial Unicode MS"/>
+                <a:ea typeface="Arial Unicode MS"/>
+                <a:cs typeface="Arial Unicode MS"/>
+              </a:rPr>
+              <a:t>右邊，數一數。</a:t>
+            </a:r>
+            <a:r>
+              <a:rPr sz="950" lang="zh-TW" dirty="0">
+                <a:solidFill>
+                  <a:srgbClr val="000000"/>
+                </a:solidFill>
+                <a:latin typeface="Arial Unicode MS"/>
+                <a:ea typeface="Arial Unicode MS"/>
+                <a:cs typeface="Arial Unicode MS"/>
+              </a:rPr>
+              <a:t>上面三格數字：畫面裡有幾個光達點、幾個雷達點、幾個物體有被雷達抓到。下面的表格，每一列是一個物體，寫它離車子多遠、身上有幾個光達點、幾個雷達點，還有一欄「</a:t>
+            </a:r>
+            <a:r>
+              <a:rPr sz="950" b="1" lang="zh-TW" dirty="0">
+                <a:solidFill>
+                  <a:srgbClr val="000000"/>
+                </a:solidFill>
+                <a:latin typeface="Arial Unicode MS"/>
+                <a:ea typeface="Arial Unicode MS"/>
+                <a:cs typeface="Arial Unicode MS"/>
+              </a:rPr>
+              <a:t>雷達：多快</a:t>
+            </a:r>
+            <a:r>
+              <a:rPr sz="950" lang="zh-TW" dirty="0">
+                <a:solidFill>
+                  <a:srgbClr val="000000"/>
+                </a:solidFill>
+                <a:latin typeface="Arial Unicode MS"/>
+                <a:ea typeface="Arial Unicode MS"/>
+                <a:cs typeface="Arial Unicode MS"/>
+              </a:rPr>
+              <a:t>」：雷達量到這個東西正在靠近還是遠離、時速多少。沒有雷達點的，這一欄就是一條線。
 </a:t>
             </a:r>
           </a:p>
@@ -6250,74 +6712,30 @@
                 <a:spcPts val="0"/>
               </a:spcBef>
               <a:spcAft>
-                <a:spcPts val="167"/>
+                <a:spcPts val="158"/>
               </a:spcAft>
             </a:pPr>
             <a:r>
-              <a:rPr sz="1000" b="1" lang="zh-TW" dirty="0">
-                <a:solidFill>
-                  <a:srgbClr val="000000"/>
-                </a:solidFill>
-                <a:latin typeface="Arial Unicode MS"/>
-                <a:ea typeface="Arial Unicode MS"/>
-                <a:cs typeface="Arial Unicode MS"/>
-              </a:rPr>
-              <a:t>這裡最容易搞錯，請看結論條。</a:t>
-            </a:r>
-            <a:r>
-              <a:rPr sz="1000" lang="zh-TW" dirty="0">
-                <a:solidFill>
-                  <a:srgbClr val="000000"/>
-                </a:solidFill>
-                <a:latin typeface="Arial Unicode MS"/>
-                <a:ea typeface="Arial Unicode MS"/>
-                <a:cs typeface="Arial Unicode MS"/>
-              </a:rPr>
-              <a:t>表格列的是車子周圍五十公尺內</a:t>
-            </a:r>
-            <a:r>
-              <a:rPr sz="1000" b="1" lang="zh-TW" dirty="0">
-                <a:solidFill>
-                  <a:srgbClr val="000000"/>
-                </a:solidFill>
-                <a:latin typeface="Arial Unicode MS"/>
-                <a:ea typeface="Arial Unicode MS"/>
-                <a:cs typeface="Arial Unicode MS"/>
-              </a:rPr>
-              <a:t>全部</a:t>
-            </a:r>
-            <a:r>
-              <a:rPr sz="1000" lang="zh-TW" dirty="0">
-                <a:solidFill>
-                  <a:srgbClr val="000000"/>
-                </a:solidFill>
-                <a:latin typeface="Arial Unicode MS"/>
-                <a:ea typeface="Arial Unicode MS"/>
-                <a:cs typeface="Arial Unicode MS"/>
-              </a:rPr>
-              <a:t>的物體，連車子後面的也列進來。所以題目問「前方相機畫面裡」的時候，</a:t>
-            </a:r>
-            <a:r>
-              <a:rPr sz="1000" b="1" lang="zh-TW" dirty="0">
-                <a:solidFill>
-                  <a:srgbClr val="000000"/>
-                </a:solidFill>
-                <a:latin typeface="Arial Unicode MS"/>
-                <a:ea typeface="Arial Unicode MS"/>
-                <a:cs typeface="Arial Unicode MS"/>
-              </a:rPr>
-              <a:t>只數最右邊那一欄有黑點的</a:t>
-            </a:r>
-            <a:r>
-              <a:rPr sz="1000" lang="zh-TW" dirty="0">
-                <a:solidFill>
-                  <a:srgbClr val="000000"/>
-                </a:solidFill>
-                <a:latin typeface="Arial Unicode MS"/>
-                <a:ea typeface="Arial Unicode MS"/>
-                <a:cs typeface="Arial Unicode MS"/>
-              </a:rPr>
-              <a:t>；沒有黑點的，那一欄會寫它在車子的左側、右側還是後方。nuScenes 的車一圈有六台相機，觀察台只放正前方那一台。停車場那個場景，表格裡的車有三十幾台，畫面裡只有四台。
+              <a:rPr sz="950" b="1" lang="zh-TW" dirty="0">
+                <a:solidFill>
+                  <a:srgbClr val="000000"/>
+                </a:solidFill>
+                <a:latin typeface="Arial Unicode MS"/>
+                <a:ea typeface="Arial Unicode MS"/>
+                <a:cs typeface="Arial Unicode MS"/>
+              </a:rPr>
+              <a:t>第四個開關「合起來」</a:t>
+            </a:r>
+            <a:r>
+              <a:rPr sz="950" lang="zh-TW" dirty="0">
+                <a:solidFill>
+                  <a:srgbClr val="000000"/>
+                </a:solidFill>
+                <a:latin typeface="Arial Unicode MS"/>
+                <a:ea typeface="Arial Unicode MS"/>
+                <a:cs typeface="Arial Unicode MS"/>
+              </a:rPr>
+              <a:t>，會在每個框上寫一行字，例如「車・14 m・≈0」：「車」是相機認出來的，「14 m」是光達量的，「≈0」是雷達量的速度。三種感測器各給一塊，拼成一句話。任務五會用到。
 </a:t>
             </a:r>
           </a:p>
@@ -6327,41 +6745,74 @@
                 <a:spcPts val="0"/>
               </a:spcBef>
               <a:spcAft>
-                <a:spcPts val="167"/>
+                <a:spcPts val="158"/>
               </a:spcAft>
             </a:pPr>
             <a:r>
-              <a:rPr sz="1000" lang="zh-TW" dirty="0">
-                <a:solidFill>
-                  <a:srgbClr val="000000"/>
-                </a:solidFill>
-                <a:latin typeface="Arial Unicode MS"/>
-                <a:ea typeface="Arial Unicode MS"/>
-                <a:cs typeface="Arial Unicode MS"/>
-              </a:rPr>
-              <a:t>也提醒一句：這一欄</a:t>
-            </a:r>
-            <a:r>
-              <a:rPr sz="1000" b="1" lang="zh-TW" dirty="0">
-                <a:solidFill>
-                  <a:srgbClr val="000000"/>
-                </a:solidFill>
-                <a:latin typeface="Arial Unicode MS"/>
-                <a:ea typeface="Arial Unicode MS"/>
-                <a:cs typeface="Arial Unicode MS"/>
-              </a:rPr>
-              <a:t>不是「相機有沒有認出來」</a:t>
-            </a:r>
-            <a:r>
-              <a:rPr sz="1000" lang="zh-TW" dirty="0">
-                <a:solidFill>
-                  <a:srgbClr val="000000"/>
-                </a:solidFill>
-                <a:latin typeface="Arial Unicode MS"/>
-                <a:ea typeface="Arial Unicode MS"/>
-                <a:cs typeface="Arial Unicode MS"/>
-              </a:rPr>
-              <a:t>。框是人工畫的標註，黑點只表示那個東西在前方相機拍得到的範圍裡。
+              <a:rPr sz="950" b="1" lang="zh-TW" dirty="0">
+                <a:solidFill>
+                  <a:srgbClr val="000000"/>
+                </a:solidFill>
+                <a:latin typeface="Arial Unicode MS"/>
+                <a:ea typeface="Arial Unicode MS"/>
+                <a:cs typeface="Arial Unicode MS"/>
+              </a:rPr>
+              <a:t>這裡最容易搞錯，請看結論條。</a:t>
+            </a:r>
+            <a:r>
+              <a:rPr sz="950" lang="zh-TW" dirty="0">
+                <a:solidFill>
+                  <a:srgbClr val="000000"/>
+                </a:solidFill>
+                <a:latin typeface="Arial Unicode MS"/>
+                <a:ea typeface="Arial Unicode MS"/>
+                <a:cs typeface="Arial Unicode MS"/>
+              </a:rPr>
+              <a:t>表格列的是車子周圍五十公尺內</a:t>
+            </a:r>
+            <a:r>
+              <a:rPr sz="950" b="1" lang="zh-TW" dirty="0">
+                <a:solidFill>
+                  <a:srgbClr val="000000"/>
+                </a:solidFill>
+                <a:latin typeface="Arial Unicode MS"/>
+                <a:ea typeface="Arial Unicode MS"/>
+                <a:cs typeface="Arial Unicode MS"/>
+              </a:rPr>
+              <a:t>全部</a:t>
+            </a:r>
+            <a:r>
+              <a:rPr sz="950" lang="zh-TW" dirty="0">
+                <a:solidFill>
+                  <a:srgbClr val="000000"/>
+                </a:solidFill>
+                <a:latin typeface="Arial Unicode MS"/>
+                <a:ea typeface="Arial Unicode MS"/>
+                <a:cs typeface="Arial Unicode MS"/>
+              </a:rPr>
+              <a:t>的物體，連車子後面的也列進來。所以題目問「前方相機畫面裡」的時候，</a:t>
+            </a:r>
+            <a:r>
+              <a:rPr sz="950" b="1" lang="zh-TW" dirty="0">
+                <a:solidFill>
+                  <a:srgbClr val="000000"/>
+                </a:solidFill>
+                <a:latin typeface="Arial Unicode MS"/>
+                <a:ea typeface="Arial Unicode MS"/>
+                <a:cs typeface="Arial Unicode MS"/>
+              </a:rPr>
+              <a:t>只數最右邊那一欄有黑點的</a:t>
+            </a:r>
+            <a:r>
+              <a:rPr sz="950" lang="zh-TW" dirty="0">
+                <a:solidFill>
+                  <a:srgbClr val="000000"/>
+                </a:solidFill>
+                <a:latin typeface="Arial Unicode MS"/>
+                <a:ea typeface="Arial Unicode MS"/>
+                <a:cs typeface="Arial Unicode MS"/>
+              </a:rPr>
+              <a:t>；沒有黑點的，那一欄會寫它在車子的左側、右側還是後方。nuScenes 的車一圈有六台相機，觀察台只放正前方那一台。停車場那個場景，表格裡的車有三十幾台，畫面裡只有四台。
 </a:t>
             </a:r>
           </a:p>
@@ -6371,11 +6822,55 @@
                 <a:spcPts val="0"/>
               </a:spcBef>
               <a:spcAft>
-                <a:spcPts val="167"/>
+                <a:spcPts val="158"/>
               </a:spcAft>
             </a:pPr>
             <a:r>
-              <a:rPr sz="1000" lang="zh-TW" dirty="0">
+              <a:rPr sz="950" lang="zh-TW" dirty="0">
+                <a:solidFill>
+                  <a:srgbClr val="000000"/>
+                </a:solidFill>
+                <a:latin typeface="Arial Unicode MS"/>
+                <a:ea typeface="Arial Unicode MS"/>
+                <a:cs typeface="Arial Unicode MS"/>
+              </a:rPr>
+              <a:t>也提醒一句：這一欄</a:t>
+            </a:r>
+            <a:r>
+              <a:rPr sz="950" b="1" lang="zh-TW" dirty="0">
+                <a:solidFill>
+                  <a:srgbClr val="000000"/>
+                </a:solidFill>
+                <a:latin typeface="Arial Unicode MS"/>
+                <a:ea typeface="Arial Unicode MS"/>
+                <a:cs typeface="Arial Unicode MS"/>
+              </a:rPr>
+              <a:t>不是「相機有沒有認出來」</a:t>
+            </a:r>
+            <a:r>
+              <a:rPr sz="950" lang="zh-TW" dirty="0">
+                <a:solidFill>
+                  <a:srgbClr val="000000"/>
+                </a:solidFill>
+                <a:latin typeface="Arial Unicode MS"/>
+                <a:ea typeface="Arial Unicode MS"/>
+                <a:cs typeface="Arial Unicode MS"/>
+              </a:rPr>
+              <a:t>。框是人工畫的標註，黑點只表示那個東西在前方相機拍得到的範圍裡。
+</a:t>
+            </a:r>
+          </a:p>
+          <a:p>
+            <a:pPr algn="l">
+              <a:spcBef>
+                <a:spcPts val="0"/>
+              </a:spcBef>
+              <a:spcAft>
+                <a:spcPts val="158"/>
+              </a:spcAft>
+            </a:pPr>
+            <a:r>
+              <a:rPr sz="950" lang="zh-TW" dirty="0">
                 <a:solidFill>
                   <a:srgbClr val="000000"/>
                 </a:solidFill>
@@ -6492,41 +6987,30 @@
                 <a:spcPts val="0"/>
               </a:spcBef>
               <a:spcAft>
-                <a:spcPts val="192"/>
+                <a:spcPts val="183"/>
               </a:spcAft>
             </a:pPr>
             <a:r>
-              <a:rPr sz="1150" lang="zh-TW" dirty="0">
-                <a:solidFill>
-                  <a:srgbClr val="000000"/>
-                </a:solidFill>
-                <a:latin typeface="Arial Unicode MS"/>
-                <a:ea typeface="Arial Unicode MS"/>
-                <a:cs typeface="Arial Unicode MS"/>
-              </a:rPr>
-              <a:t>任務一，</a:t>
-            </a:r>
-            <a:r>
-              <a:rPr sz="1150" b="1" lang="zh-TW" dirty="0">
-                <a:solidFill>
-                  <a:srgbClr val="000000"/>
-                </a:solidFill>
-                <a:latin typeface="Arial Unicode MS"/>
-                <a:ea typeface="Arial Unicode MS"/>
-                <a:cs typeface="Arial Unicode MS"/>
-              </a:rPr>
-              <a:t>白天，美國波士頓</a:t>
-            </a:r>
-            <a:r>
-              <a:rPr sz="1150" lang="zh-TW" dirty="0">
-                <a:solidFill>
-                  <a:srgbClr val="000000"/>
-                </a:solidFill>
-                <a:latin typeface="Arial Unicode MS"/>
-                <a:ea typeface="Arial Unicode MS"/>
-                <a:cs typeface="Arial Unicode MS"/>
-              </a:rPr>
-              <a:t>的一條街，兩邊停滿了車。場景鈕按「白天」。
+              <a:rPr sz="1100" b="1" lang="zh-TW" dirty="0">
+                <a:solidFill>
+                  <a:srgbClr val="000000"/>
+                </a:solidFill>
+                <a:latin typeface="Arial Unicode MS"/>
+                <a:ea typeface="Arial Unicode MS"/>
+                <a:cs typeface="Arial Unicode MS"/>
+              </a:rPr>
+              <a:t>這一張的目的：</a:t>
+            </a:r>
+            <a:r>
+              <a:rPr sz="1100" lang="zh-TW" dirty="0">
+                <a:solidFill>
+                  <a:srgbClr val="000000"/>
+                </a:solidFill>
+                <a:latin typeface="Arial Unicode MS"/>
+                <a:ea typeface="Arial Unicode MS"/>
+                <a:cs typeface="Arial Unicode MS"/>
+              </a:rPr>
+              <a:t>讓大家自己發現，光達點遠比雷達多，雷達抓不到這幾個行人，也量不出高度。
 </a:t>
             </a:r>
           </a:p>
@@ -6536,41 +7020,41 @@
                 <a:spcPts val="0"/>
               </a:spcBef>
               <a:spcAft>
-                <a:spcPts val="192"/>
+                <a:spcPts val="183"/>
               </a:spcAft>
             </a:pPr>
             <a:r>
-              <a:rPr sz="1150" lang="zh-TW" dirty="0">
-                <a:solidFill>
-                  <a:srgbClr val="000000"/>
-                </a:solidFill>
-                <a:latin typeface="Arial Unicode MS"/>
-                <a:ea typeface="Arial Unicode MS"/>
-                <a:cs typeface="Arial Unicode MS"/>
-              </a:rPr>
-              <a:t>先只開</a:t>
-            </a:r>
-            <a:r>
-              <a:rPr sz="1150" b="1" lang="zh-TW" dirty="0">
-                <a:solidFill>
-                  <a:srgbClr val="000000"/>
-                </a:solidFill>
-                <a:latin typeface="Arial Unicode MS"/>
-                <a:ea typeface="Arial Unicode MS"/>
-                <a:cs typeface="Arial Unicode MS"/>
-              </a:rPr>
-              <a:t>光達點和雷達點</a:t>
-            </a:r>
-            <a:r>
-              <a:rPr sz="1150" lang="zh-TW" dirty="0">
-                <a:solidFill>
-                  <a:srgbClr val="000000"/>
-                </a:solidFill>
-                <a:latin typeface="Arial Unicode MS"/>
-                <a:ea typeface="Arial Unicode MS"/>
-                <a:cs typeface="Arial Unicode MS"/>
-              </a:rPr>
-              <a:t>。給大家兩分鐘，看右邊「數一數」的前兩格。
+              <a:rPr sz="1100" lang="zh-TW" dirty="0">
+                <a:solidFill>
+                  <a:srgbClr val="000000"/>
+                </a:solidFill>
+                <a:latin typeface="Arial Unicode MS"/>
+                <a:ea typeface="Arial Unicode MS"/>
+                <a:cs typeface="Arial Unicode MS"/>
+              </a:rPr>
+              <a:t>任務一，</a:t>
+            </a:r>
+            <a:r>
+              <a:rPr sz="1100" b="1" lang="zh-TW" dirty="0">
+                <a:solidFill>
+                  <a:srgbClr val="000000"/>
+                </a:solidFill>
+                <a:latin typeface="Arial Unicode MS"/>
+                <a:ea typeface="Arial Unicode MS"/>
+                <a:cs typeface="Arial Unicode MS"/>
+              </a:rPr>
+              <a:t>白天，美國波士頓</a:t>
+            </a:r>
+            <a:r>
+              <a:rPr sz="1100" lang="zh-TW" dirty="0">
+                <a:solidFill>
+                  <a:srgbClr val="000000"/>
+                </a:solidFill>
+                <a:latin typeface="Arial Unicode MS"/>
+                <a:ea typeface="Arial Unicode MS"/>
+                <a:cs typeface="Arial Unicode MS"/>
+              </a:rPr>
+              <a:t>的一條街，兩邊停滿了車。場景鈕按「白天」。
 </a:t>
             </a:r>
           </a:p>
@@ -6580,19 +7064,41 @@
                 <a:spcPts val="0"/>
               </a:spcBef>
               <a:spcAft>
-                <a:spcPts val="192"/>
+                <a:spcPts val="183"/>
               </a:spcAft>
             </a:pPr>
             <a:r>
-              <a:rPr sz="1150" lang="zh-TW" dirty="0">
-                <a:solidFill>
-                  <a:srgbClr val="000000"/>
-                </a:solidFill>
-                <a:latin typeface="Arial Unicode MS"/>
-                <a:ea typeface="Arial Unicode MS"/>
-                <a:cs typeface="Arial Unicode MS"/>
-              </a:rPr>
-              <a:t>（等大家選完再講答案。）
+              <a:rPr sz="1100" lang="zh-TW" dirty="0">
+                <a:solidFill>
+                  <a:srgbClr val="000000"/>
+                </a:solidFill>
+                <a:latin typeface="Arial Unicode MS"/>
+                <a:ea typeface="Arial Unicode MS"/>
+                <a:cs typeface="Arial Unicode MS"/>
+              </a:rPr>
+              <a:t>先只開</a:t>
+            </a:r>
+            <a:r>
+              <a:rPr sz="1100" b="1" lang="zh-TW" dirty="0">
+                <a:solidFill>
+                  <a:srgbClr val="000000"/>
+                </a:solidFill>
+                <a:latin typeface="Arial Unicode MS"/>
+                <a:ea typeface="Arial Unicode MS"/>
+                <a:cs typeface="Arial Unicode MS"/>
+              </a:rPr>
+              <a:t>光達點和雷達點</a:t>
+            </a:r>
+            <a:r>
+              <a:rPr sz="1100" lang="zh-TW" dirty="0">
+                <a:solidFill>
+                  <a:srgbClr val="000000"/>
+                </a:solidFill>
+                <a:latin typeface="Arial Unicode MS"/>
+                <a:ea typeface="Arial Unicode MS"/>
+                <a:cs typeface="Arial Unicode MS"/>
+              </a:rPr>
+              <a:t>。給大家兩分鐘，看右邊「數一數」的前兩格。
 </a:t>
             </a:r>
           </a:p>
@@ -6602,52 +7108,19 @@
                 <a:spcPts val="0"/>
               </a:spcBef>
               <a:spcAft>
-                <a:spcPts val="192"/>
+                <a:spcPts val="183"/>
               </a:spcAft>
             </a:pPr>
             <a:r>
-              <a:rPr sz="1150" b="1" lang="zh-TW" dirty="0">
-                <a:solidFill>
-                  <a:srgbClr val="000000"/>
-                </a:solidFill>
-                <a:latin typeface="Arial Unicode MS"/>
-                <a:ea typeface="Arial Unicode MS"/>
-                <a:cs typeface="Arial Unicode MS"/>
-              </a:rPr>
-              <a:t>第 1 題。</a:t>
-            </a:r>
-            <a:r>
-              <a:rPr sz="1150" lang="zh-TW" dirty="0">
-                <a:solidFill>
-                  <a:srgbClr val="000000"/>
-                </a:solidFill>
-                <a:latin typeface="Arial Unicode MS"/>
-                <a:ea typeface="Arial Unicode MS"/>
-                <a:cs typeface="Arial Unicode MS"/>
-              </a:rPr>
-              <a:t>光達點三千零一十三個，雷達點四十八個。三千除以四十八，大約六十。答案是</a:t>
-            </a:r>
-            <a:r>
-              <a:rPr sz="1150" b="1" lang="zh-TW" dirty="0">
-                <a:solidFill>
-                  <a:srgbClr val="000000"/>
-                </a:solidFill>
-                <a:latin typeface="Arial Unicode MS"/>
-                <a:ea typeface="Arial Unicode MS"/>
-                <a:cs typeface="Arial Unicode MS"/>
-              </a:rPr>
-              <a:t>約 60 倍</a:t>
-            </a:r>
-            <a:r>
-              <a:rPr sz="1150" lang="zh-TW" dirty="0">
-                <a:solidFill>
-                  <a:srgbClr val="000000"/>
-                </a:solidFill>
-                <a:latin typeface="Arial Unicode MS"/>
-                <a:ea typeface="Arial Unicode MS"/>
-                <a:cs typeface="Arial Unicode MS"/>
-              </a:rPr>
-              <a:t>。同一個瞬間、同一個畫面，光達給的點，是雷達的六十倍。這就是光達「有形狀」的原因。
+              <a:rPr sz="1100" lang="zh-TW" dirty="0">
+                <a:solidFill>
+                  <a:srgbClr val="000000"/>
+                </a:solidFill>
+                <a:latin typeface="Arial Unicode MS"/>
+                <a:ea typeface="Arial Unicode MS"/>
+                <a:cs typeface="Arial Unicode MS"/>
+              </a:rPr>
+              <a:t>（等大家選完再講答案。）
 </a:t>
             </a:r>
           </a:p>
@@ -6657,74 +7130,52 @@
                 <a:spcPts val="0"/>
               </a:spcBef>
               <a:spcAft>
-                <a:spcPts val="192"/>
+                <a:spcPts val="183"/>
               </a:spcAft>
             </a:pPr>
             <a:r>
-              <a:rPr sz="1150" b="1" lang="zh-TW" dirty="0">
-                <a:solidFill>
-                  <a:srgbClr val="000000"/>
-                </a:solidFill>
-                <a:latin typeface="Arial Unicode MS"/>
-                <a:ea typeface="Arial Unicode MS"/>
-                <a:cs typeface="Arial Unicode MS"/>
-              </a:rPr>
-              <a:t>第 2 題。</a:t>
-            </a:r>
-            <a:r>
-              <a:rPr sz="1150" lang="zh-TW" dirty="0">
-                <a:solidFill>
-                  <a:srgbClr val="000000"/>
-                </a:solidFill>
-                <a:latin typeface="Arial Unicode MS"/>
-                <a:ea typeface="Arial Unicode MS"/>
-                <a:cs typeface="Arial Unicode MS"/>
-              </a:rPr>
-              <a:t>打開物體框。畫面裡的行人，框都是</a:t>
-            </a:r>
-            <a:r>
-              <a:rPr sz="1150" b="1" lang="zh-TW" dirty="0">
-                <a:solidFill>
-                  <a:srgbClr val="000000"/>
-                </a:solidFill>
-                <a:latin typeface="Arial Unicode MS"/>
-                <a:ea typeface="Arial Unicode MS"/>
-                <a:cs typeface="Arial Unicode MS"/>
-              </a:rPr>
-              <a:t>橘色</a:t>
-            </a:r>
-            <a:r>
-              <a:rPr sz="1150" lang="zh-TW" dirty="0">
-                <a:solidFill>
-                  <a:srgbClr val="000000"/>
-                </a:solidFill>
-                <a:latin typeface="Arial Unicode MS"/>
-                <a:ea typeface="Arial Unicode MS"/>
-                <a:cs typeface="Arial Unicode MS"/>
-              </a:rPr>
-              <a:t>的，一個雷達點都沒有。看表格，「前方相機畫面」那欄有黑點的行人有四個，十九點六、二十五點三、二十五點三、三十一點六公尺，雷達點全部是零。答案是 </a:t>
-            </a:r>
-            <a:r>
-              <a:rPr sz="1150" b="1" lang="zh-TW" dirty="0">
-                <a:solidFill>
-                  <a:srgbClr val="000000"/>
-                </a:solidFill>
-                <a:latin typeface="Arial Unicode MS"/>
-                <a:ea typeface="Arial Unicode MS"/>
-                <a:cs typeface="Arial Unicode MS"/>
-              </a:rPr>
-              <a:t>0 個</a:t>
-            </a:r>
-            <a:r>
-              <a:rPr sz="1150" lang="zh-TW" dirty="0">
-                <a:solidFill>
-                  <a:srgbClr val="000000"/>
-                </a:solidFill>
-                <a:latin typeface="Arial Unicode MS"/>
-                <a:ea typeface="Arial Unicode MS"/>
-                <a:cs typeface="Arial Unicode MS"/>
-              </a:rPr>
-              <a:t>。第一節那張統計表說，行人在二十到三十公尺，只有一成多抓得到；今天在一個瞬間裡親眼看到。
+              <a:rPr sz="1100" b="1" lang="zh-TW" dirty="0">
+                <a:solidFill>
+                  <a:srgbClr val="000000"/>
+                </a:solidFill>
+                <a:latin typeface="Arial Unicode MS"/>
+                <a:ea typeface="Arial Unicode MS"/>
+                <a:cs typeface="Arial Unicode MS"/>
+              </a:rPr>
+              <a:t>第 1 題。</a:t>
+            </a:r>
+            <a:r>
+              <a:rPr sz="1100" lang="zh-TW" dirty="0">
+                <a:solidFill>
+                  <a:srgbClr val="000000"/>
+                </a:solidFill>
+                <a:latin typeface="Arial Unicode MS"/>
+                <a:ea typeface="Arial Unicode MS"/>
+                <a:cs typeface="Arial Unicode MS"/>
+              </a:rPr>
+              <a:t>光達點三千零一十三個，雷達點四十八個。三千除以四十八，大約六十。答案是</a:t>
+            </a:r>
+            <a:r>
+              <a:rPr sz="1100" b="1" lang="zh-TW" dirty="0">
+                <a:solidFill>
+                  <a:srgbClr val="000000"/>
+                </a:solidFill>
+                <a:latin typeface="Arial Unicode MS"/>
+                <a:ea typeface="Arial Unicode MS"/>
+                <a:cs typeface="Arial Unicode MS"/>
+              </a:rPr>
+              <a:t>約 60 倍</a:t>
+            </a:r>
+            <a:r>
+              <a:rPr sz="1100" lang="zh-TW" dirty="0">
+                <a:solidFill>
+                  <a:srgbClr val="000000"/>
+                </a:solidFill>
+                <a:latin typeface="Arial Unicode MS"/>
+                <a:ea typeface="Arial Unicode MS"/>
+                <a:cs typeface="Arial Unicode MS"/>
+              </a:rPr>
+              <a:t>。同一個瞬間、同一個畫面，光達給的點，是雷達的六十倍。這就是光達「有形狀」的原因。
 </a:t>
             </a:r>
           </a:p>
@@ -6734,52 +7185,74 @@
                 <a:spcPts val="0"/>
               </a:spcBef>
               <a:spcAft>
-                <a:spcPts val="192"/>
+                <a:spcPts val="183"/>
               </a:spcAft>
             </a:pPr>
             <a:r>
-              <a:rPr sz="1150" b="1" lang="zh-TW" dirty="0">
-                <a:solidFill>
-                  <a:srgbClr val="000000"/>
-                </a:solidFill>
-                <a:latin typeface="Arial Unicode MS"/>
-                <a:ea typeface="Arial Unicode MS"/>
-                <a:cs typeface="Arial Unicode MS"/>
-              </a:rPr>
-              <a:t>第 3 題。</a:t>
-            </a:r>
-            <a:r>
-              <a:rPr sz="1150" lang="zh-TW" dirty="0">
-                <a:solidFill>
-                  <a:srgbClr val="000000"/>
-                </a:solidFill>
-                <a:latin typeface="Arial Unicode MS"/>
-                <a:ea typeface="Arial Unicode MS"/>
-                <a:cs typeface="Arial Unicode MS"/>
-              </a:rPr>
-              <a:t>紅圈全部在很低的地方：遠的貼著地平線，近的車子身上稍微低一點，樓上、樹上、招牌上一個都沒有。答案是：</a:t>
-            </a:r>
-            <a:r>
-              <a:rPr sz="1150" b="1" lang="zh-TW" dirty="0">
-                <a:solidFill>
-                  <a:srgbClr val="000000"/>
-                </a:solidFill>
-                <a:latin typeface="Arial Unicode MS"/>
-                <a:ea typeface="Arial Unicode MS"/>
-                <a:cs typeface="Arial Unicode MS"/>
-              </a:rPr>
-              <a:t>ARS 408 量不出高度，所有的點都放在同一個高度。</a:t>
-            </a:r>
-            <a:r>
-              <a:rPr sz="1150" lang="zh-TW" dirty="0">
-                <a:solidFill>
-                  <a:srgbClr val="000000"/>
-                </a:solidFill>
-                <a:latin typeface="Arial Unicode MS"/>
-                <a:ea typeface="Arial Unicode MS"/>
-                <a:cs typeface="Arial Unicode MS"/>
-              </a:rPr>
-              <a:t>上週規格表上，408 少了「Accuracy elevation angle」那一行；第一節也講過，資料裡每一個雷達點的高度欄都是零。
+              <a:rPr sz="1100" b="1" lang="zh-TW" dirty="0">
+                <a:solidFill>
+                  <a:srgbClr val="000000"/>
+                </a:solidFill>
+                <a:latin typeface="Arial Unicode MS"/>
+                <a:ea typeface="Arial Unicode MS"/>
+                <a:cs typeface="Arial Unicode MS"/>
+              </a:rPr>
+              <a:t>第 2 題。</a:t>
+            </a:r>
+            <a:r>
+              <a:rPr sz="1100" lang="zh-TW" dirty="0">
+                <a:solidFill>
+                  <a:srgbClr val="000000"/>
+                </a:solidFill>
+                <a:latin typeface="Arial Unicode MS"/>
+                <a:ea typeface="Arial Unicode MS"/>
+                <a:cs typeface="Arial Unicode MS"/>
+              </a:rPr>
+              <a:t>打開物體框。畫面裡的行人，框都是</a:t>
+            </a:r>
+            <a:r>
+              <a:rPr sz="1100" b="1" lang="zh-TW" dirty="0">
+                <a:solidFill>
+                  <a:srgbClr val="000000"/>
+                </a:solidFill>
+                <a:latin typeface="Arial Unicode MS"/>
+                <a:ea typeface="Arial Unicode MS"/>
+                <a:cs typeface="Arial Unicode MS"/>
+              </a:rPr>
+              <a:t>橘色</a:t>
+            </a:r>
+            <a:r>
+              <a:rPr sz="1100" lang="zh-TW" dirty="0">
+                <a:solidFill>
+                  <a:srgbClr val="000000"/>
+                </a:solidFill>
+                <a:latin typeface="Arial Unicode MS"/>
+                <a:ea typeface="Arial Unicode MS"/>
+                <a:cs typeface="Arial Unicode MS"/>
+              </a:rPr>
+              <a:t>的，一個雷達點都沒有。看表格，「前方相機畫面」那欄有黑點的行人有四個，十九點六、二十五點三、二十五點三、三十一點六公尺，雷達點全部是零。答案是 </a:t>
+            </a:r>
+            <a:r>
+              <a:rPr sz="1100" b="1" lang="zh-TW" dirty="0">
+                <a:solidFill>
+                  <a:srgbClr val="000000"/>
+                </a:solidFill>
+                <a:latin typeface="Arial Unicode MS"/>
+                <a:ea typeface="Arial Unicode MS"/>
+                <a:cs typeface="Arial Unicode MS"/>
+              </a:rPr>
+              <a:t>0 個</a:t>
+            </a:r>
+            <a:r>
+              <a:rPr sz="1100" lang="zh-TW" dirty="0">
+                <a:solidFill>
+                  <a:srgbClr val="000000"/>
+                </a:solidFill>
+                <a:latin typeface="Arial Unicode MS"/>
+                <a:ea typeface="Arial Unicode MS"/>
+                <a:cs typeface="Arial Unicode MS"/>
+              </a:rPr>
+              <a:t>。第一節那張統計表說，行人在二十到三十公尺，只有一成多抓得到；今天在一個瞬間裡親眼看到。
 </a:t>
             </a:r>
           </a:p>
@@ -6789,19 +7262,52 @@
                 <a:spcPts val="0"/>
               </a:spcBef>
               <a:spcAft>
-                <a:spcPts val="192"/>
+                <a:spcPts val="183"/>
               </a:spcAft>
             </a:pPr>
             <a:r>
-              <a:rPr sz="1150" lang="zh-TW" dirty="0">
-                <a:solidFill>
-                  <a:srgbClr val="000000"/>
-                </a:solidFill>
-                <a:latin typeface="Arial Unicode MS"/>
-                <a:ea typeface="Arial Unicode MS"/>
-                <a:cs typeface="Arial Unicode MS"/>
-              </a:rPr>
-              <a:t>其他三個選項為什麼不對？「只看得到地面」不對，雷達點落在車身上；「只看得到車」也不對，路邊靜止的東西也有點；「照片拍歪」也不對，光達點就有高有低，打得到樓上。
+              <a:rPr sz="1100" b="1" lang="zh-TW" dirty="0">
+                <a:solidFill>
+                  <a:srgbClr val="000000"/>
+                </a:solidFill>
+                <a:latin typeface="Arial Unicode MS"/>
+                <a:ea typeface="Arial Unicode MS"/>
+                <a:cs typeface="Arial Unicode MS"/>
+              </a:rPr>
+              <a:t>第 3 題。</a:t>
+            </a:r>
+            <a:r>
+              <a:rPr sz="1100" lang="zh-TW" dirty="0">
+                <a:solidFill>
+                  <a:srgbClr val="000000"/>
+                </a:solidFill>
+                <a:latin typeface="Arial Unicode MS"/>
+                <a:ea typeface="Arial Unicode MS"/>
+                <a:cs typeface="Arial Unicode MS"/>
+              </a:rPr>
+              <a:t>紅圈全部在很低的地方：遠的貼著地平線，近的車子身上稍微低一點，樓上、樹上、招牌上一個都沒有。答案是：</a:t>
+            </a:r>
+            <a:r>
+              <a:rPr sz="1100" b="1" lang="zh-TW" dirty="0">
+                <a:solidFill>
+                  <a:srgbClr val="000000"/>
+                </a:solidFill>
+                <a:latin typeface="Arial Unicode MS"/>
+                <a:ea typeface="Arial Unicode MS"/>
+                <a:cs typeface="Arial Unicode MS"/>
+              </a:rPr>
+              <a:t>ARS 408 量不出高度，所有的點都放在同一個高度。</a:t>
+            </a:r>
+            <a:r>
+              <a:rPr sz="1100" lang="zh-TW" dirty="0">
+                <a:solidFill>
+                  <a:srgbClr val="000000"/>
+                </a:solidFill>
+                <a:latin typeface="Arial Unicode MS"/>
+                <a:ea typeface="Arial Unicode MS"/>
+                <a:cs typeface="Arial Unicode MS"/>
+              </a:rPr>
+              <a:t>上週規格表上，408 少了「Accuracy elevation angle」那一行；第一節也講過，資料裡每一個雷達點的高度欄都是零。
 </a:t>
             </a:r>
           </a:p>
@@ -6811,11 +7317,33 @@
                 <a:spcPts val="0"/>
               </a:spcBef>
               <a:spcAft>
-                <a:spcPts val="192"/>
+                <a:spcPts val="183"/>
               </a:spcAft>
             </a:pPr>
             <a:r>
-              <a:rPr sz="1150" lang="zh-TW" dirty="0">
+              <a:rPr sz="1100" lang="zh-TW" dirty="0">
+                <a:solidFill>
+                  <a:srgbClr val="000000"/>
+                </a:solidFill>
+                <a:latin typeface="Arial Unicode MS"/>
+                <a:ea typeface="Arial Unicode MS"/>
+                <a:cs typeface="Arial Unicode MS"/>
+              </a:rPr>
+              <a:t>其他三個選項為什麼不對？「只看得到地面」不對，雷達點落在車身上；「只看得到車」也不對，路邊靜止的東西也有點；「照片拍歪」也不對，光達點就有高有低，打得到樓上。
+</a:t>
+            </a:r>
+          </a:p>
+          <a:p>
+            <a:pPr algn="l">
+              <a:spcBef>
+                <a:spcPts val="0"/>
+              </a:spcBef>
+              <a:spcAft>
+                <a:spcPts val="183"/>
+              </a:spcAft>
+            </a:pPr>
+            <a:r>
+              <a:rPr sz="1100" lang="zh-TW" dirty="0">
                 <a:solidFill>
                   <a:srgbClr val="000000"/>
                 </a:solidFill>
@@ -6826,7 +7354,7 @@
               <a:t>順便講清楚：紅圈不是排成一條直直的線，近的比較低、遠的貼著地平線，這是透視，就像地上的斑馬線，近的在腳下、遠的在地平線。它們真正的共同點是：</a:t>
             </a:r>
             <a:r>
-              <a:rPr sz="1150" b="1" lang="zh-TW" dirty="0">
+              <a:rPr sz="1100" b="1" lang="zh-TW" dirty="0">
                 <a:solidFill>
                   <a:srgbClr val="000000"/>
                 </a:solidFill>

--- a/第七週(10-22)/第七週_第3節_簡報.pptx
+++ b/第七週(10-22)/第七週_第3節_簡報.pptx
@@ -6373,11 +6373,11 @@
                 <a:spcPts val="0"/>
               </a:spcBef>
               <a:spcAft>
-                <a:spcPts val="192"/>
+                <a:spcPts val="150"/>
               </a:spcAft>
             </a:pPr>
             <a:r>
-              <a:rPr sz="1150" b="1" lang="zh-TW" dirty="0">
+              <a:rPr sz="900" b="1" lang="zh-TW" dirty="0">
                 <a:solidFill>
                   <a:srgbClr val="000000"/>
                 </a:solidFill>
@@ -6388,7 +6388,7 @@
               <a:t>這一張的目的：</a:t>
             </a:r>
             <a:r>
-              <a:rPr sz="1150" lang="zh-TW" dirty="0">
+              <a:rPr sz="900" lang="zh-TW" dirty="0">
                 <a:solidFill>
                   <a:srgbClr val="000000"/>
                 </a:solidFill>
@@ -6406,11 +6406,11 @@
                 <a:spcPts val="0"/>
               </a:spcBef>
               <a:spcAft>
-                <a:spcPts val="192"/>
+                <a:spcPts val="150"/>
               </a:spcAft>
             </a:pPr>
             <a:r>
-              <a:rPr sz="1150" lang="zh-TW" dirty="0">
+              <a:rPr sz="900" lang="zh-TW" dirty="0">
                 <a:solidFill>
                   <a:srgbClr val="000000"/>
                 </a:solidFill>
@@ -6421,7 +6421,7 @@
               <a:t>做自駕車，寫程式只是一半；另一半是</a:t>
             </a:r>
             <a:r>
-              <a:rPr sz="1150" b="1" lang="zh-TW" dirty="0">
+              <a:rPr sz="900" b="1" lang="zh-TW" dirty="0">
                 <a:solidFill>
                   <a:srgbClr val="000000"/>
                 </a:solidFill>
@@ -6432,7 +6432,7 @@
               <a:t>資料</a:t>
             </a:r>
             <a:r>
-              <a:rPr sz="1150" lang="zh-TW" dirty="0">
+              <a:rPr sz="900" lang="zh-TW" dirty="0">
                 <a:solidFill>
                   <a:srgbClr val="000000"/>
                 </a:solidFill>
@@ -6450,11 +6450,11 @@
                 <a:spcPts val="0"/>
               </a:spcBef>
               <a:spcAft>
-                <a:spcPts val="192"/>
+                <a:spcPts val="150"/>
               </a:spcAft>
             </a:pPr>
             <a:r>
-              <a:rPr sz="1150" b="1" lang="zh-TW" dirty="0">
+              <a:rPr sz="900" b="1" lang="zh-TW" dirty="0">
                 <a:solidFill>
                   <a:srgbClr val="000000"/>
                 </a:solidFill>
@@ -6465,7 +6465,7 @@
               <a:t>第一，訓練。</a:t>
             </a:r>
             <a:r>
-              <a:rPr sz="1150" lang="zh-TW" dirty="0">
+              <a:rPr sz="900" lang="zh-TW" dirty="0">
                 <a:solidFill>
                   <a:srgbClr val="000000"/>
                 </a:solidFill>
@@ -6476,7 +6476,7 @@
               <a:t>電腦要認得出那是一台車、一個人，就得先看過很多「答案」：這裡有一台車，框在這裡。上一張說，整份資料有一百四十萬個這樣的框。拿來訓練的模型，會做三件事：</a:t>
             </a:r>
             <a:r>
-              <a:rPr sz="1150" b="1" lang="zh-TW" dirty="0">
+              <a:rPr sz="900" b="1" lang="zh-TW" dirty="0">
                 <a:solidFill>
                   <a:srgbClr val="000000"/>
                 </a:solidFill>
@@ -6487,7 +6487,7 @@
               <a:t>偵測</a:t>
             </a:r>
             <a:r>
-              <a:rPr sz="1150" lang="zh-TW" dirty="0">
+              <a:rPr sz="900" lang="zh-TW" dirty="0">
                 <a:solidFill>
                   <a:srgbClr val="000000"/>
                 </a:solidFill>
@@ -6498,7 +6498,7 @@
               <a:t>，找出車和人在哪裡；</a:t>
             </a:r>
             <a:r>
-              <a:rPr sz="1150" b="1" lang="zh-TW" dirty="0">
+              <a:rPr sz="900" b="1" lang="zh-TW" dirty="0">
                 <a:solidFill>
                   <a:srgbClr val="000000"/>
                 </a:solidFill>
@@ -6509,7 +6509,7 @@
               <a:t>追蹤</a:t>
             </a:r>
             <a:r>
-              <a:rPr sz="1150" lang="zh-TW" dirty="0">
+              <a:rPr sz="900" lang="zh-TW" dirty="0">
                 <a:solidFill>
                   <a:srgbClr val="000000"/>
                 </a:solidFill>
@@ -6520,7 +6520,7 @@
               <a:t>，跟著同一台車一秒一秒走；</a:t>
             </a:r>
             <a:r>
-              <a:rPr sz="1150" b="1" lang="zh-TW" dirty="0">
+              <a:rPr sz="900" b="1" lang="zh-TW" dirty="0">
                 <a:solidFill>
                   <a:srgbClr val="000000"/>
                 </a:solidFill>
@@ -6531,7 +6531,7 @@
               <a:t>預測</a:t>
             </a:r>
             <a:r>
-              <a:rPr sz="1150" lang="zh-TW" dirty="0">
+              <a:rPr sz="900" lang="zh-TW" dirty="0">
                 <a:solidFill>
                   <a:srgbClr val="000000"/>
                 </a:solidFill>
@@ -6549,11 +6549,11 @@
                 <a:spcPts val="0"/>
               </a:spcBef>
               <a:spcAft>
-                <a:spcPts val="192"/>
+                <a:spcPts val="150"/>
               </a:spcAft>
             </a:pPr>
             <a:r>
-              <a:rPr sz="1150" b="1" lang="zh-TW" dirty="0">
+              <a:rPr sz="900" b="1" lang="zh-TW" dirty="0">
                 <a:solidFill>
                   <a:srgbClr val="000000"/>
                 </a:solidFill>
@@ -6564,7 +6564,7 @@
               <a:t>第二，考試。</a:t>
             </a:r>
             <a:r>
-              <a:rPr sz="1150" lang="zh-TW" dirty="0">
+              <a:rPr sz="900" lang="zh-TW" dirty="0">
                 <a:solidFill>
                   <a:srgbClr val="000000"/>
                 </a:solidFill>
@@ -6575,7 +6575,7 @@
               <a:t>就像全年級考同一份考卷。每個研究團隊的方法，都拿同一份測試資料、用同一個分數比，nuScenes 自己定了一個分數，叫 </a:t>
             </a:r>
             <a:r>
-              <a:rPr sz="1150" b="1" lang="zh-TW" dirty="0">
+              <a:rPr sz="900" b="1" lang="zh-TW" dirty="0">
                 <a:solidFill>
                   <a:srgbClr val="000000"/>
                 </a:solidFill>
@@ -6586,7 +6586,7 @@
               <a:t>NDS</a:t>
             </a:r>
             <a:r>
-              <a:rPr sz="1150" lang="zh-TW" dirty="0">
+              <a:rPr sz="900" lang="zh-TW" dirty="0">
                 <a:solidFill>
                   <a:srgbClr val="000000"/>
                 </a:solidFill>
@@ -6597,7 +6597,7 @@
               <a:t>。大家把結果上傳，排行榜上誰比較好一目了然。論文還說，同樣的方法放到 nuScenes 上，分數比在更早的 KITTI 資料集上低很多：</a:t>
             </a:r>
             <a:r>
-              <a:rPr sz="1150" b="1" lang="zh-TW" dirty="0">
+              <a:rPr sz="900" b="1" lang="zh-TW" dirty="0">
                 <a:solidFill>
                   <a:srgbClr val="000000"/>
                 </a:solidFill>
@@ -6608,7 +6608,7 @@
               <a:t>它比較難</a:t>
             </a:r>
             <a:r>
-              <a:rPr sz="1150" lang="zh-TW" dirty="0">
+              <a:rPr sz="900" lang="zh-TW" dirty="0">
                 <a:solidFill>
                   <a:srgbClr val="000000"/>
                 </a:solidFill>
@@ -6626,11 +6626,11 @@
                 <a:spcPts val="0"/>
               </a:spcBef>
               <a:spcAft>
-                <a:spcPts val="192"/>
+                <a:spcPts val="150"/>
               </a:spcAft>
             </a:pPr>
             <a:r>
-              <a:rPr sz="1150" b="1" lang="zh-TW" dirty="0">
+              <a:rPr sz="900" b="1" lang="zh-TW" dirty="0">
                 <a:solidFill>
                   <a:srgbClr val="000000"/>
                 </a:solidFill>
@@ -6641,7 +6641,7 @@
               <a:t>第三，研究融合。</a:t>
             </a:r>
             <a:r>
-              <a:rPr sz="1150" lang="zh-TW" dirty="0">
+              <a:rPr sz="900" lang="zh-TW" dirty="0">
                 <a:solidFill>
                   <a:srgbClr val="000000"/>
                 </a:solidFill>
@@ -6652,7 +6652,7 @@
               <a:t>這是它最特別的地方：相機、光達、</a:t>
             </a:r>
             <a:r>
-              <a:rPr sz="1150" b="1" lang="zh-TW" dirty="0">
+              <a:rPr sz="900" b="1" lang="zh-TW" dirty="0">
                 <a:solidFill>
                   <a:srgbClr val="000000"/>
                 </a:solidFill>
@@ -6663,37 +6663,81 @@
               <a:t>雷達</a:t>
             </a:r>
             <a:r>
-              <a:rPr sz="1150" lang="zh-TW" dirty="0">
-                <a:solidFill>
-                  <a:srgbClr val="000000"/>
-                </a:solidFill>
-                <a:latin typeface="Arial Unicode MS"/>
-                <a:ea typeface="Arial Unicode MS"/>
-                <a:cs typeface="Arial Unicode MS"/>
-              </a:rPr>
-              <a:t>全部都有，而且已經</a:t>
-            </a:r>
-            <a:r>
-              <a:rPr sz="1150" b="1" lang="zh-TW" dirty="0">
-                <a:solidFill>
-                  <a:srgbClr val="000000"/>
-                </a:solidFill>
-                <a:latin typeface="Arial Unicode MS"/>
-                <a:ea typeface="Arial Unicode MS"/>
-                <a:cs typeface="Arial Unicode MS"/>
-              </a:rPr>
-              <a:t>同步、標定好了</a:t>
-            </a:r>
-            <a:r>
-              <a:rPr sz="1150" lang="zh-TW" dirty="0">
-                <a:solidFill>
-                  <a:srgbClr val="000000"/>
-                </a:solidFill>
-                <a:latin typeface="Arial Unicode MS"/>
-                <a:ea typeface="Arial Unicode MS"/>
-                <a:cs typeface="Arial Unicode MS"/>
-              </a:rPr>
-              <a:t>，第二節講的兩個前提，它都幫你做好了。論文特別說，它是第一個有雷達的大型資料集，鼓勵大家研究雷達和融合。
+              <a:rPr sz="900" lang="zh-TW" dirty="0">
+                <a:solidFill>
+                  <a:srgbClr val="000000"/>
+                </a:solidFill>
+                <a:latin typeface="Arial Unicode MS"/>
+                <a:ea typeface="Arial Unicode MS"/>
+                <a:cs typeface="Arial Unicode MS"/>
+              </a:rPr>
+              <a:t>全部都有，而且第二節講的兩個前提，</a:t>
+            </a:r>
+            <a:r>
+              <a:rPr sz="900" b="1" lang="zh-TW" dirty="0">
+                <a:solidFill>
+                  <a:srgbClr val="000000"/>
+                </a:solidFill>
+                <a:latin typeface="Arial Unicode MS"/>
+                <a:ea typeface="Arial Unicode MS"/>
+                <a:cs typeface="Arial Unicode MS"/>
+              </a:rPr>
+              <a:t>標定</a:t>
+            </a:r>
+            <a:r>
+              <a:rPr sz="900" lang="zh-TW" dirty="0">
+                <a:solidFill>
+                  <a:srgbClr val="000000"/>
+                </a:solidFill>
+                <a:latin typeface="Arial Unicode MS"/>
+                <a:ea typeface="Arial Unicode MS"/>
+                <a:cs typeface="Arial Unicode MS"/>
+              </a:rPr>
+              <a:t>和</a:t>
+            </a:r>
+            <a:r>
+              <a:rPr sz="900" b="1" lang="zh-TW" dirty="0">
+                <a:solidFill>
+                  <a:srgbClr val="000000"/>
+                </a:solidFill>
+                <a:latin typeface="Arial Unicode MS"/>
+                <a:ea typeface="Arial Unicode MS"/>
+                <a:cs typeface="Arial Unicode MS"/>
+              </a:rPr>
+              <a:t>同步</a:t>
+            </a:r>
+            <a:r>
+              <a:rPr sz="900" lang="zh-TW" dirty="0">
+                <a:solidFill>
+                  <a:srgbClr val="000000"/>
+                </a:solidFill>
+                <a:latin typeface="Arial Unicode MS"/>
+                <a:ea typeface="Arial Unicode MS"/>
+                <a:cs typeface="Arial Unicode MS"/>
+              </a:rPr>
+              <a:t>需要的東西，它在錄的時候就準備好了。一份資料集怎麼做得到？其實是在</a:t>
+            </a:r>
+            <a:r>
+              <a:rPr sz="900" b="1" lang="zh-TW" dirty="0">
+                <a:solidFill>
+                  <a:srgbClr val="000000"/>
+                </a:solidFill>
+                <a:latin typeface="Arial Unicode MS"/>
+                <a:ea typeface="Arial Unicode MS"/>
+                <a:cs typeface="Arial Unicode MS"/>
+              </a:rPr>
+              <a:t>錄的時候</a:t>
+            </a:r>
+            <a:r>
+              <a:rPr sz="900" lang="zh-TW" dirty="0">
+                <a:solidFill>
+                  <a:srgbClr val="000000"/>
+                </a:solidFill>
+                <a:latin typeface="Arial Unicode MS"/>
+                <a:ea typeface="Arial Unicode MS"/>
+                <a:cs typeface="Arial Unicode MS"/>
+              </a:rPr>
+              <a:t>做的，然後把結果一起存下來：
 </a:t>
             </a:r>
           </a:p>
@@ -6703,30 +6747,30 @@
                 <a:spcPts val="0"/>
               </a:spcBef>
               <a:spcAft>
-                <a:spcPts val="192"/>
+                <a:spcPts val="150"/>
               </a:spcAft>
             </a:pPr>
             <a:r>
-              <a:rPr sz="1150" b="1" lang="zh-TW" dirty="0">
-                <a:solidFill>
-                  <a:srgbClr val="000000"/>
-                </a:solidFill>
-                <a:latin typeface="Arial Unicode MS"/>
-                <a:ea typeface="Arial Unicode MS"/>
-                <a:cs typeface="Arial Unicode MS"/>
-              </a:rPr>
-              <a:t>第四，開發新方法時，先拿真實資料試。</a:t>
-            </a:r>
-            <a:r>
-              <a:rPr sz="1150" lang="zh-TW" dirty="0">
-                <a:solidFill>
-                  <a:srgbClr val="000000"/>
-                </a:solidFill>
-                <a:latin typeface="Arial Unicode MS"/>
-                <a:ea typeface="Arial Unicode MS"/>
-                <a:cs typeface="Arial Unicode MS"/>
-              </a:rPr>
-              <a:t>在真的上路之前，先看新的程式在幾千個真實瞬間裡會不會出錯。
+              <a:rPr sz="900" b="1" lang="zh-TW" dirty="0">
+                <a:solidFill>
+                  <a:srgbClr val="000000"/>
+                </a:solidFill>
+                <a:latin typeface="Arial Unicode MS"/>
+                <a:ea typeface="Arial Unicode MS"/>
+                <a:cs typeface="Arial Unicode MS"/>
+              </a:rPr>
+              <a:t>標定</a:t>
+            </a:r>
+            <a:r>
+              <a:rPr sz="900" lang="zh-TW" dirty="0">
+                <a:solidFill>
+                  <a:srgbClr val="000000"/>
+                </a:solidFill>
+                <a:latin typeface="Arial Unicode MS"/>
+                <a:ea typeface="Arial Unicode MS"/>
+                <a:cs typeface="Arial Unicode MS"/>
+              </a:rPr>
+              <a:t>：開車出去錄之前，先在車庫裡量好每一顆的外參，光達用雷射水平儀、相機用立方體校正靶、雷達開上路反推，收資料的半年裡大約每星期重量兩次。量好的六個數字，跟著每一筆資料一起存。
 </a:t>
             </a:r>
           </a:p>
@@ -6736,11 +6780,143 @@
                 <a:spcPts val="0"/>
               </a:spcBef>
               <a:spcAft>
-                <a:spcPts val="192"/>
+                <a:spcPts val="150"/>
               </a:spcAft>
             </a:pPr>
             <a:r>
-              <a:rPr sz="1150" lang="zh-TW" dirty="0">
+              <a:rPr sz="900" b="1" lang="zh-TW" dirty="0">
+                <a:solidFill>
+                  <a:srgbClr val="000000"/>
+                </a:solidFill>
+                <a:latin typeface="Arial Unicode MS"/>
+                <a:ea typeface="Arial Unicode MS"/>
+                <a:cs typeface="Arial Unicode MS"/>
+              </a:rPr>
+              <a:t>同步</a:t>
+            </a:r>
+            <a:r>
+              <a:rPr sz="900" lang="zh-TW" dirty="0">
+                <a:solidFill>
+                  <a:srgbClr val="000000"/>
+                </a:solidFill>
+                <a:latin typeface="Arial Unicode MS"/>
+                <a:ea typeface="Arial Unicode MS"/>
+                <a:cs typeface="Arial Unicode MS"/>
+              </a:rPr>
+              <a:t>：車上有一個共同的時鐘，每一張照片、每一圈光達、每一輪雷達，都蓋上</a:t>
+            </a:r>
+            <a:r>
+              <a:rPr sz="900" b="1" lang="zh-TW" dirty="0">
+                <a:solidFill>
+                  <a:srgbClr val="000000"/>
+                </a:solidFill>
+                <a:latin typeface="Arial Unicode MS"/>
+                <a:ea typeface="Arial Unicode MS"/>
+                <a:cs typeface="Arial Unicode MS"/>
+              </a:rPr>
+              <a:t>拍下那一刻的時間</a:t>
+            </a:r>
+            <a:r>
+              <a:rPr sz="900" lang="zh-TW" dirty="0">
+                <a:solidFill>
+                  <a:srgbClr val="000000"/>
+                </a:solidFill>
+                <a:latin typeface="Arial Unicode MS"/>
+                <a:ea typeface="Arial Unicode MS"/>
+                <a:cs typeface="Arial Unicode MS"/>
+              </a:rPr>
+              <a:t>，精確到百萬分之一秒。相機和光達還多做一件事：光達轉到相機正中間的那一刻，才讓相機拍照，所以這兩個本來就對得很準。雷達沒有這樣觸發，它只有時間戳記。另外，每一個時間點，車子自己在哪裡、朝哪個方向，也都記下來了。
+</a:t>
+            </a:r>
+          </a:p>
+          <a:p>
+            <a:pPr algn="l">
+              <a:spcBef>
+                <a:spcPts val="0"/>
+              </a:spcBef>
+              <a:spcAft>
+                <a:spcPts val="150"/>
+              </a:spcAft>
+            </a:pPr>
+            <a:r>
+              <a:rPr sz="900" lang="zh-TW" dirty="0">
+                <a:solidFill>
+                  <a:srgbClr val="000000"/>
+                </a:solidFill>
+                <a:latin typeface="Arial Unicode MS"/>
+                <a:ea typeface="Arial Unicode MS"/>
+                <a:cs typeface="Arial Unicode MS"/>
+              </a:rPr>
+              <a:t>所以「幫你做好」的意思是：</a:t>
+            </a:r>
+            <a:r>
+              <a:rPr sz="900" b="1" lang="zh-TW" dirty="0">
+                <a:solidFill>
+                  <a:srgbClr val="000000"/>
+                </a:solidFill>
+                <a:latin typeface="Arial Unicode MS"/>
+                <a:ea typeface="Arial Unicode MS"/>
+                <a:cs typeface="Arial Unicode MS"/>
+              </a:rPr>
+              <a:t>數字都給你了，但要用的人自己把它們套進去算。</a:t>
+            </a:r>
+            <a:r>
+              <a:rPr sz="900" lang="zh-TW" dirty="0">
+                <a:solidFill>
+                  <a:srgbClr val="000000"/>
+                </a:solidFill>
+                <a:latin typeface="Arial Unicode MS"/>
+                <a:ea typeface="Arial Unicode MS"/>
+                <a:cs typeface="Arial Unicode MS"/>
+              </a:rPr>
+              <a:t>我們做觀察台的時候就是這樣：照片、光達、雷達各拍的時間不一樣，程式先用各自那一刻車子的位置和外參，換到同一個座標，再投到照片上。論文特別說，它是第一個有雷達的大型資料集，鼓勵大家研究雷達和融合。
+</a:t>
+            </a:r>
+          </a:p>
+          <a:p>
+            <a:pPr algn="l">
+              <a:spcBef>
+                <a:spcPts val="0"/>
+              </a:spcBef>
+              <a:spcAft>
+                <a:spcPts val="150"/>
+              </a:spcAft>
+            </a:pPr>
+            <a:r>
+              <a:rPr sz="900" b="1" lang="zh-TW" dirty="0">
+                <a:solidFill>
+                  <a:srgbClr val="000000"/>
+                </a:solidFill>
+                <a:latin typeface="Arial Unicode MS"/>
+                <a:ea typeface="Arial Unicode MS"/>
+                <a:cs typeface="Arial Unicode MS"/>
+              </a:rPr>
+              <a:t>第四，開發新方法時，先拿真實資料試。</a:t>
+            </a:r>
+            <a:r>
+              <a:rPr sz="900" lang="zh-TW" dirty="0">
+                <a:solidFill>
+                  <a:srgbClr val="000000"/>
+                </a:solidFill>
+                <a:latin typeface="Arial Unicode MS"/>
+                <a:ea typeface="Arial Unicode MS"/>
+                <a:cs typeface="Arial Unicode MS"/>
+              </a:rPr>
+              <a:t>在真的上路之前，先看新的程式在幾千個真實瞬間裡會不會出錯。
+</a:t>
+            </a:r>
+          </a:p>
+          <a:p>
+            <a:pPr algn="l">
+              <a:spcBef>
+                <a:spcPts val="0"/>
+              </a:spcBef>
+              <a:spcAft>
+                <a:spcPts val="150"/>
+              </a:spcAft>
+            </a:pPr>
+            <a:r>
+              <a:rPr sz="900" lang="zh-TW" dirty="0">
                 <a:solidFill>
                   <a:srgbClr val="000000"/>
                 </a:solidFill>
@@ -6751,7 +6927,7 @@
               <a:t>右邊這四格，就是我們這門課用 nuScenes 做過的四件事：第二節的</a:t>
             </a:r>
             <a:r>
-              <a:rPr sz="1150" b="1" lang="zh-TW" dirty="0">
+              <a:rPr sz="900" b="1" lang="zh-TW" dirty="0">
                 <a:solidFill>
                   <a:srgbClr val="000000"/>
                 </a:solidFill>
@@ -6762,7 +6938,7 @@
               <a:t>標定</a:t>
             </a:r>
             <a:r>
-              <a:rPr sz="1150" lang="zh-TW" dirty="0">
+              <a:rPr sz="900" lang="zh-TW" dirty="0">
                 <a:solidFill>
                   <a:srgbClr val="000000"/>
                 </a:solidFill>
@@ -6773,7 +6949,7 @@
               <a:t>和</a:t>
             </a:r>
             <a:r>
-              <a:rPr sz="1150" b="1" lang="zh-TW" dirty="0">
+              <a:rPr sz="900" b="1" lang="zh-TW" dirty="0">
                 <a:solidFill>
                   <a:srgbClr val="000000"/>
                 </a:solidFill>
@@ -6784,7 +6960,7 @@
               <a:t>同步</a:t>
             </a:r>
             <a:r>
-              <a:rPr sz="1150" lang="zh-TW" dirty="0">
+              <a:rPr sz="900" lang="zh-TW" dirty="0">
                 <a:solidFill>
                   <a:srgbClr val="000000"/>
                 </a:solidFill>
@@ -6795,7 +6971,7 @@
               <a:t>、</a:t>
             </a:r>
             <a:r>
-              <a:rPr sz="1150" b="1" lang="zh-TW" dirty="0">
+              <a:rPr sz="900" b="1" lang="zh-TW" dirty="0">
                 <a:solidFill>
                   <a:srgbClr val="000000"/>
                 </a:solidFill>
@@ -6806,7 +6982,7 @@
               <a:t>對應</a:t>
             </a:r>
             <a:r>
-              <a:rPr sz="1150" lang="zh-TW" dirty="0">
+              <a:rPr sz="900" lang="zh-TW" dirty="0">
                 <a:solidFill>
                   <a:srgbClr val="000000"/>
                 </a:solidFill>
@@ -6817,7 +6993,7 @@
               <a:t>，還有第一節那張</a:t>
             </a:r>
             <a:r>
-              <a:rPr sz="1150" b="1" lang="zh-TW" dirty="0">
+              <a:rPr sz="900" b="1" lang="zh-TW" dirty="0">
                 <a:solidFill>
                   <a:srgbClr val="000000"/>
                 </a:solidFill>
@@ -6828,7 +7004,7 @@
               <a:t>同一個人前後十五秒</a:t>
             </a:r>
             <a:r>
-              <a:rPr sz="1150" lang="zh-TW" dirty="0">
+              <a:rPr sz="900" lang="zh-TW" dirty="0">
                 <a:solidFill>
                   <a:srgbClr val="000000"/>
                 </a:solidFill>
@@ -18938,7 +19114,7 @@
                 <a:ea typeface="Arial" pitchFamily="34" charset="-122"/>
                 <a:cs typeface="Arial" pitchFamily="34" charset="-120"/>
               </a:rPr>
-              <a:t>① Dạy máy nhận ra xe, người. ② Cùng một đề, cùng một điểm (NDS). ③ Ba cảm biến đã đồng bộ, hiệu chuẩn sẵn. ④ Thử phương pháp mới.</a:t>
+              <a:t>① Dạy máy nhận ra xe, người. ② Cùng một đề, cùng một điểm (NDS). ③ Mỗi dữ liệu kèm sẵn hiệu chuẩn và thời gian. ④ Thử phương pháp mới.</a:t>
             </a:r>
             <a:endParaRPr lang="en-US" sz="2300" dirty="0"/>
           </a:p>
@@ -18958,7 +19134,7 @@
                 <a:ea typeface="微軟正黑體" pitchFamily="34" charset="-122"/>
                 <a:cs typeface="微軟正黑體" pitchFamily="34" charset="-120"/>
               </a:rPr>
-              <a:t>① 教電腦認出車和人。② 同一份考卷、同一個分數（NDS）。③ 三種感測器已同步、標定好。④ 新方法先拿真實資料試。</a:t>
+              <a:t>① 教電腦認出車和人。② 同一份考卷、同一個分數（NDS）。③ 每一筆都附好標定和時間。④ 新方法先拿真實資料試。</a:t>
             </a:r>
             <a:endParaRPr lang="en-US" sz="2300" dirty="0"/>
           </a:p>

--- a/第七週(10-22)/第七週_第3節_簡報.pptx
+++ b/第七週(10-22)/第七週_第3節_簡報.pptx
@@ -7902,11 +7902,11 @@
                 <a:spcPts val="0"/>
               </a:spcBef>
               <a:spcAft>
-                <a:spcPts val="200"/>
+                <a:spcPts val="183"/>
               </a:spcAft>
             </a:pPr>
             <a:r>
-              <a:rPr sz="1200" b="1" lang="zh-TW" dirty="0">
+              <a:rPr sz="1100" b="1" lang="zh-TW" dirty="0">
                 <a:solidFill>
                   <a:srgbClr val="000000"/>
                 </a:solidFill>
@@ -7917,7 +7917,7 @@
               <a:t>這一張的目的：</a:t>
             </a:r>
             <a:r>
-              <a:rPr sz="1200" lang="zh-TW" dirty="0">
+              <a:rPr sz="1100" lang="zh-TW" dirty="0">
                 <a:solidFill>
                   <a:srgbClr val="000000"/>
                 </a:solidFill>
@@ -7935,11 +7935,11 @@
                 <a:spcPts val="0"/>
               </a:spcBef>
               <a:spcAft>
-                <a:spcPts val="200"/>
+                <a:spcPts val="183"/>
               </a:spcAft>
             </a:pPr>
             <a:r>
-              <a:rPr sz="1200" lang="zh-TW" dirty="0">
+              <a:rPr sz="1100" lang="zh-TW" dirty="0">
                 <a:solidFill>
                   <a:srgbClr val="000000"/>
                 </a:solidFill>
@@ -7950,7 +7950,7 @@
               <a:t>觀察台上那些框，是從哪裡來的？</a:t>
             </a:r>
             <a:r>
-              <a:rPr sz="1200" b="1" lang="zh-TW" dirty="0">
+              <a:rPr sz="1100" b="1" lang="zh-TW" dirty="0">
                 <a:solidFill>
                   <a:srgbClr val="000000"/>
                 </a:solidFill>
@@ -7961,7 +7961,7 @@
               <a:t>人畫的。</a:t>
             </a:r>
             <a:r>
-              <a:rPr sz="1200" lang="zh-TW" dirty="0">
+              <a:rPr sz="1100" lang="zh-TW" dirty="0">
                 <a:solidFill>
                   <a:srgbClr val="000000"/>
                 </a:solidFill>
@@ -7979,11 +7979,11 @@
                 <a:spcPts val="0"/>
               </a:spcBef>
               <a:spcAft>
-                <a:spcPts val="200"/>
+                <a:spcPts val="183"/>
               </a:spcAft>
             </a:pPr>
             <a:r>
-              <a:rPr sz="1200" lang="zh-TW" dirty="0">
+              <a:rPr sz="1100" lang="zh-TW" dirty="0">
                 <a:solidFill>
                   <a:srgbClr val="000000"/>
                 </a:solidFill>
@@ -7994,7 +7994,7 @@
               <a:t>nuScenes 每零點五秒挑一格，就是我們說的關鍵畫面，然後請人把畫面裡的每一台車、每一個人、每一個三角錐，都畫成一個</a:t>
             </a:r>
             <a:r>
-              <a:rPr sz="1200" b="1" lang="zh-TW" dirty="0">
+              <a:rPr sz="1100" b="1" lang="zh-TW" dirty="0">
                 <a:solidFill>
                   <a:srgbClr val="000000"/>
                 </a:solidFill>
@@ -8005,7 +8005,7 @@
               <a:t>立體框</a:t>
             </a:r>
             <a:r>
-              <a:rPr sz="1200" lang="zh-TW" dirty="0">
+              <a:rPr sz="1100" lang="zh-TW" dirty="0">
                 <a:solidFill>
                   <a:srgbClr val="000000"/>
                 </a:solidFill>
@@ -8023,63 +8023,63 @@
                 <a:spcPts val="0"/>
               </a:spcBef>
               <a:spcAft>
-                <a:spcPts val="200"/>
+                <a:spcPts val="183"/>
               </a:spcAft>
             </a:pPr>
             <a:r>
-              <a:rPr sz="1200" lang="zh-TW" dirty="0">
-                <a:solidFill>
-                  <a:srgbClr val="000000"/>
-                </a:solidFill>
-                <a:latin typeface="Arial Unicode MS"/>
-                <a:ea typeface="Arial Unicode MS"/>
-                <a:cs typeface="Arial Unicode MS"/>
-              </a:rPr>
-              <a:t>一個框要記七個數字：位置三個，x、y、z；大小三個，寬、長、高；再一個轉角，就是它的車頭朝哪。另外還要標</a:t>
-            </a:r>
-            <a:r>
-              <a:rPr sz="1200" b="1" lang="zh-TW" dirty="0">
-                <a:solidFill>
-                  <a:srgbClr val="000000"/>
-                </a:solidFill>
-                <a:latin typeface="Arial Unicode MS"/>
-                <a:ea typeface="Arial Unicode MS"/>
-                <a:cs typeface="Arial Unicode MS"/>
-              </a:rPr>
-              <a:t>屬性</a:t>
-            </a:r>
-            <a:r>
-              <a:rPr sz="1200" lang="zh-TW" dirty="0">
-                <a:solidFill>
-                  <a:srgbClr val="000000"/>
-                </a:solidFill>
-                <a:latin typeface="Arial Unicode MS"/>
-                <a:ea typeface="Arial Unicode MS"/>
-                <a:cs typeface="Arial Unicode MS"/>
-              </a:rPr>
-              <a:t>：這個人在走還是站著？這台車在開還是停著？整份資料一共二十三類，從汽車、行人，到嬰兒車、輪椅、警察都有。規則是：</a:t>
-            </a:r>
-            <a:r>
-              <a:rPr sz="1200" b="1" lang="zh-TW" dirty="0">
-                <a:solidFill>
-                  <a:srgbClr val="000000"/>
-                </a:solidFill>
-                <a:latin typeface="Arial Unicode MS"/>
-                <a:ea typeface="Arial Unicode MS"/>
-                <a:cs typeface="Arial Unicode MS"/>
-              </a:rPr>
-              <a:t>只要有一個光達點或雷達點打到它，就要標</a:t>
-            </a:r>
-            <a:r>
-              <a:rPr sz="1200" lang="zh-TW" dirty="0">
-                <a:solidFill>
-                  <a:srgbClr val="000000"/>
-                </a:solidFill>
-                <a:latin typeface="Arial Unicode MS"/>
-                <a:ea typeface="Arial Unicode MS"/>
-                <a:cs typeface="Arial Unicode MS"/>
-              </a:rPr>
-              <a:t>。
+              <a:rPr sz="1100" lang="zh-TW" dirty="0">
+                <a:solidFill>
+                  <a:srgbClr val="000000"/>
+                </a:solidFill>
+                <a:latin typeface="Arial Unicode MS"/>
+                <a:ea typeface="Arial Unicode MS"/>
+                <a:cs typeface="Arial Unicode MS"/>
+              </a:rPr>
+              <a:t>一個框要記七個數字：位置三個，x、y、z；大小三個，寬、長、高；最後一個是</a:t>
+            </a:r>
+            <a:r>
+              <a:rPr sz="1100" b="1" lang="zh-TW" dirty="0">
+                <a:solidFill>
+                  <a:srgbClr val="000000"/>
+                </a:solidFill>
+                <a:latin typeface="Arial Unicode MS"/>
+                <a:ea typeface="Arial Unicode MS"/>
+                <a:cs typeface="Arial Unicode MS"/>
+              </a:rPr>
+              <a:t>車頭朝向</a:t>
+            </a:r>
+            <a:r>
+              <a:rPr sz="1100" lang="zh-TW" dirty="0">
+                <a:solidFill>
+                  <a:srgbClr val="000000"/>
+                </a:solidFill>
+                <a:latin typeface="Arial Unicode MS"/>
+                <a:ea typeface="Arial Unicode MS"/>
+                <a:cs typeface="Arial Unicode MS"/>
+              </a:rPr>
+              <a:t>，從上往下看，這個框轉了幾度，英文叫 yaw，中文叫偏航角或航向角。就像指南針：同樣停在路邊的兩台車，一台順著路停，車頭朝北；一台斜斜地停進停車格，車頭朝東北，位置、大小都一樣，只差這一個角度。這個角度是對</a:t>
+            </a:r>
+            <a:r>
+              <a:rPr sz="1100" b="1" lang="zh-TW" dirty="0">
+                <a:solidFill>
+                  <a:srgbClr val="000000"/>
+                </a:solidFill>
+                <a:latin typeface="Arial Unicode MS"/>
+                <a:ea typeface="Arial Unicode MS"/>
+                <a:cs typeface="Arial Unicode MS"/>
+              </a:rPr>
+              <a:t>地圖</a:t>
+            </a:r>
+            <a:r>
+              <a:rPr sz="1100" lang="zh-TW" dirty="0">
+                <a:solidFill>
+                  <a:srgbClr val="000000"/>
+                </a:solidFill>
+                <a:latin typeface="Arial Unicode MS"/>
+                <a:ea typeface="Arial Unicode MS"/>
+                <a:cs typeface="Arial Unicode MS"/>
+              </a:rPr>
+              <a:t>量的，不是對自己的車。
 </a:t>
             </a:r>
           </a:p>
@@ -8089,41 +8089,63 @@
                 <a:spcPts val="0"/>
               </a:spcBef>
               <a:spcAft>
-                <a:spcPts val="200"/>
+                <a:spcPts val="183"/>
               </a:spcAft>
             </a:pPr>
             <a:r>
-              <a:rPr sz="1200" lang="zh-TW" dirty="0">
-                <a:solidFill>
-                  <a:srgbClr val="000000"/>
-                </a:solidFill>
-                <a:latin typeface="Arial Unicode MS"/>
-                <a:ea typeface="Arial Unicode MS"/>
-                <a:cs typeface="Arial Unicode MS"/>
-              </a:rPr>
-              <a:t>量有多大？完整版有四萬個關鍵畫面、</a:t>
-            </a:r>
-            <a:r>
-              <a:rPr sz="1200" b="1" lang="zh-TW" dirty="0">
-                <a:solidFill>
-                  <a:srgbClr val="000000"/>
-                </a:solidFill>
-                <a:latin typeface="Arial Unicode MS"/>
-                <a:ea typeface="Arial Unicode MS"/>
-                <a:cs typeface="Arial Unicode MS"/>
-              </a:rPr>
-              <a:t>一百四十萬個框</a:t>
-            </a:r>
-            <a:r>
-              <a:rPr sz="1200" lang="zh-TW" dirty="0">
-                <a:solidFill>
-                  <a:srgbClr val="000000"/>
-                </a:solidFill>
-                <a:latin typeface="Arial Unicode MS"/>
-                <a:ea typeface="Arial Unicode MS"/>
-                <a:cs typeface="Arial Unicode MS"/>
-              </a:rPr>
-              <a:t>。論文寫，是請專業的標註員標的，而且經過好幾輪檢查。
+              <a:rPr sz="1100" lang="zh-TW" dirty="0">
+                <a:solidFill>
+                  <a:srgbClr val="000000"/>
+                </a:solidFill>
+                <a:latin typeface="Arial Unicode MS"/>
+                <a:ea typeface="Arial Unicode MS"/>
+                <a:cs typeface="Arial Unicode MS"/>
+              </a:rPr>
+              <a:t>為什麼只有一個角度？第二節講外參時，方向有三個數字：左右轉、上下仰、有沒有歪。可是路上的車和人幾乎都是平平地站在地面上，不會仰頭、不會側翻，所以標註只記左右轉的那一個就夠了。另外還要標</a:t>
+            </a:r>
+            <a:r>
+              <a:rPr sz="1100" b="1" lang="zh-TW" dirty="0">
+                <a:solidFill>
+                  <a:srgbClr val="000000"/>
+                </a:solidFill>
+                <a:latin typeface="Arial Unicode MS"/>
+                <a:ea typeface="Arial Unicode MS"/>
+                <a:cs typeface="Arial Unicode MS"/>
+              </a:rPr>
+              <a:t>屬性</a:t>
+            </a:r>
+            <a:r>
+              <a:rPr sz="1100" lang="zh-TW" dirty="0">
+                <a:solidFill>
+                  <a:srgbClr val="000000"/>
+                </a:solidFill>
+                <a:latin typeface="Arial Unicode MS"/>
+                <a:ea typeface="Arial Unicode MS"/>
+                <a:cs typeface="Arial Unicode MS"/>
+              </a:rPr>
+              <a:t>：這個人在走還是站著？這台車在開還是停著？整份資料一共二十三類，從汽車、行人，到嬰兒車、輪椅、警察都有。規則是：</a:t>
+            </a:r>
+            <a:r>
+              <a:rPr sz="1100" b="1" lang="zh-TW" dirty="0">
+                <a:solidFill>
+                  <a:srgbClr val="000000"/>
+                </a:solidFill>
+                <a:latin typeface="Arial Unicode MS"/>
+                <a:ea typeface="Arial Unicode MS"/>
+                <a:cs typeface="Arial Unicode MS"/>
+              </a:rPr>
+              <a:t>只要有一個光達點或雷達點打到它，就要標</a:t>
+            </a:r>
+            <a:r>
+              <a:rPr sz="1100" lang="zh-TW" dirty="0">
+                <a:solidFill>
+                  <a:srgbClr val="000000"/>
+                </a:solidFill>
+                <a:latin typeface="Arial Unicode MS"/>
+                <a:ea typeface="Arial Unicode MS"/>
+                <a:cs typeface="Arial Unicode MS"/>
+              </a:rPr>
+              <a:t>。
 </a:t>
             </a:r>
           </a:p>
@@ -8133,19 +8155,41 @@
                 <a:spcPts val="0"/>
               </a:spcBef>
               <a:spcAft>
-                <a:spcPts val="200"/>
+                <a:spcPts val="183"/>
               </a:spcAft>
             </a:pPr>
             <a:r>
-              <a:rPr sz="1200" lang="zh-TW" dirty="0">
-                <a:solidFill>
-                  <a:srgbClr val="000000"/>
-                </a:solidFill>
-                <a:latin typeface="Arial Unicode MS"/>
-                <a:ea typeface="Arial Unicode MS"/>
-                <a:cs typeface="Arial Unicode MS"/>
-              </a:rPr>
-              <a:t>還有一件事：照片裡路人的臉和車牌，都被模糊掉了。一百四十萬張照片，人工一張一張塗不完，所以他們是先用程式自動找出臉和車牌，再模糊。
+              <a:rPr sz="1100" lang="zh-TW" dirty="0">
+                <a:solidFill>
+                  <a:srgbClr val="000000"/>
+                </a:solidFill>
+                <a:latin typeface="Arial Unicode MS"/>
+                <a:ea typeface="Arial Unicode MS"/>
+                <a:cs typeface="Arial Unicode MS"/>
+              </a:rPr>
+              <a:t>量有多大？完整版有四萬個關鍵畫面、</a:t>
+            </a:r>
+            <a:r>
+              <a:rPr sz="1100" b="1" lang="zh-TW" dirty="0">
+                <a:solidFill>
+                  <a:srgbClr val="000000"/>
+                </a:solidFill>
+                <a:latin typeface="Arial Unicode MS"/>
+                <a:ea typeface="Arial Unicode MS"/>
+                <a:cs typeface="Arial Unicode MS"/>
+              </a:rPr>
+              <a:t>一百四十萬個框</a:t>
+            </a:r>
+            <a:r>
+              <a:rPr sz="1100" lang="zh-TW" dirty="0">
+                <a:solidFill>
+                  <a:srgbClr val="000000"/>
+                </a:solidFill>
+                <a:latin typeface="Arial Unicode MS"/>
+                <a:ea typeface="Arial Unicode MS"/>
+                <a:cs typeface="Arial Unicode MS"/>
+              </a:rPr>
+              <a:t>。論文寫，是請專業的標註員標的，而且經過好幾輪檢查。
 </a:t>
             </a:r>
           </a:p>
@@ -8155,11 +8199,33 @@
                 <a:spcPts val="0"/>
               </a:spcBef>
               <a:spcAft>
-                <a:spcPts val="200"/>
+                <a:spcPts val="183"/>
               </a:spcAft>
             </a:pPr>
             <a:r>
-              <a:rPr sz="1200" b="1" lang="zh-TW" dirty="0">
+              <a:rPr sz="1100" lang="zh-TW" dirty="0">
+                <a:solidFill>
+                  <a:srgbClr val="000000"/>
+                </a:solidFill>
+                <a:latin typeface="Arial Unicode MS"/>
+                <a:ea typeface="Arial Unicode MS"/>
+                <a:cs typeface="Arial Unicode MS"/>
+              </a:rPr>
+              <a:t>還有一件事：照片裡路人的臉和車牌，都被模糊掉了。一百四十萬張照片，人工一張一張塗不完，所以他們是先用程式自動找出臉和車牌，再模糊。
+</a:t>
+            </a:r>
+          </a:p>
+          <a:p>
+            <a:pPr algn="l">
+              <a:spcBef>
+                <a:spcPts val="0"/>
+              </a:spcBef>
+              <a:spcAft>
+                <a:spcPts val="183"/>
+              </a:spcAft>
+            </a:pPr>
+            <a:r>
+              <a:rPr sz="1100" b="1" lang="zh-TW" dirty="0">
                 <a:solidFill>
                   <a:srgbClr val="000000"/>
                 </a:solidFill>
@@ -8170,7 +8236,7 @@
               <a:t>下週上機，換各位自己標。</a:t>
             </a:r>
             <a:r>
-              <a:rPr sz="1200" lang="zh-TW" dirty="0">
+              <a:rPr sz="1100" lang="zh-TW" dirty="0">
                 <a:solidFill>
                   <a:srgbClr val="000000"/>
                 </a:solidFill>
@@ -21373,7 +21439,7 @@
                 <a:ea typeface="Arial" pitchFamily="34" charset="-122"/>
                 <a:cs typeface="Arial" pitchFamily="34" charset="-120"/>
               </a:rPr>
-              <a:t>Mỗi hộp 7 số (vị trí, kích thước, góc) + thuộc tính (đang đi, đứng yên…). 23 loại; cả bộ 40 nghìn khung, 1,4 triệu hộp.</a:t>
+              <a:t>Mỗi hộp 7 số (vị trí, kích thước, hướng đầu xe) + thuộc tính (đang đi, đứng yên…). 23 loại; cả bộ 40 nghìn khung, 1,4 triệu hộp.</a:t>
             </a:r>
             <a:endParaRPr lang="en-US" sz="2300" dirty="0"/>
           </a:p>
@@ -21393,7 +21459,7 @@
                 <a:ea typeface="微軟正黑體" pitchFamily="34" charset="-122"/>
                 <a:cs typeface="微軟正黑體" pitchFamily="34" charset="-120"/>
               </a:rPr>
-              <a:t>每個框 7 個數字（位置、大小、轉角）＋屬性（在走、停著…）。23 類；整份 4 萬格、140 萬個框。</a:t>
+              <a:t>每個框 7 個數字（位置、大小、車頭朝向）＋屬性（在走、停著…）。23 類；整份 4 萬格、140 萬個框。</a:t>
             </a:r>
             <a:endParaRPr lang="en-US" sz="2300" dirty="0"/>
           </a:p>

--- a/第七週(10-22)/第七週_第3節_簡報.pptx
+++ b/第七週(10-22)/第七週_第3節_簡報.pptx
@@ -709,7 +709,7 @@
                 <a:ea typeface="Arial Unicode MS"/>
                 <a:cs typeface="Arial Unicode MS"/>
               </a:rPr>
-              <a:t>教大家怎麼用觀察台，尤其是表格只數有黑點的那幾列。
+              <a:t>教大家怎麼用觀察台，尤其是表格最右邊「前方相機畫面」那一欄：只數有 ● 的那幾列。
 </a:t>
             </a:r>
           </a:p>
@@ -1083,7 +1083,7 @@
                 <a:ea typeface="Arial Unicode MS"/>
                 <a:cs typeface="Arial Unicode MS"/>
               </a:rPr>
-              <a:t>只數最右邊那一欄有黑點的</a:t>
+              <a:t>只數表格最右邊「前方相機畫面」那一欄，有一個黑色圓點 ● 的那幾列</a:t>
             </a:r>
             <a:r>
               <a:rPr sz="950" lang="zh-TW" dirty="0">
@@ -1094,7 +1094,7 @@
                 <a:ea typeface="Arial Unicode MS"/>
                 <a:cs typeface="Arial Unicode MS"/>
               </a:rPr>
-              <a:t>；沒有黑點的，那一欄會寫它在車子的左側、右側還是後方。nuScenes 的車一圈有六台相機，觀察台只放正前方那一台。停車場那個場景，表格裡的車有三十幾台，畫面裡只有四台。
+              <a:t>；沒有 ● 的，那一欄會寫它在車子的左側、右側還是後方。nuScenes 的車一圈有六台相機，觀察台只放正前方那一台。停車場那個場景，表格裡的車有三十幾台，畫面裡只有四台。
 </a:t>
             </a:r>
           </a:p>
@@ -1138,7 +1138,7 @@
                 <a:ea typeface="Arial Unicode MS"/>
                 <a:cs typeface="Arial Unicode MS"/>
               </a:rPr>
-              <a:t>。框是人工畫的標註，黑點只表示那個東西在前方相機拍得到的範圍裡。
+              <a:t>。框是人工畫的標註，那個 ● 只表示那個東西在前方相機拍得到的範圍裡。
 </a:t>
             </a:r>
           </a:p>
@@ -1512,7 +1512,7 @@
                 <a:ea typeface="Arial Unicode MS"/>
                 <a:cs typeface="Arial Unicode MS"/>
               </a:rPr>
-              <a:t>的，一個雷達點都沒有。看表格，「前方相機畫面」那欄有黑點的行人有四個，十九點六、二十五點三、二十五點三、三十一點六公尺，雷達點全部是零。答案是 </a:t>
+              <a:t>的，一個雷達點都沒有。看表格，「前方相機畫面」那欄有 ● 的行人有四個，十九點六、二十五點三、二十五點三、三十一點六公尺，雷達點全部是零。答案是 </a:t>
             </a:r>
             <a:r>
               <a:rPr sz="1100" b="1" lang="zh-TW" dirty="0">
@@ -1853,7 +1853,7 @@
                 <a:ea typeface="Arial Unicode MS"/>
                 <a:cs typeface="Arial Unicode MS"/>
               </a:rPr>
-              <a:t>只數最右邊有黑點的。</a:t>
+              <a:t>只數表格最右邊「前方相機畫面」那一欄有 ● 的那幾列。</a:t>
             </a:r>
             <a:r>
               <a:rPr sz="1200" lang="zh-TW" dirty="0">
@@ -2458,7 +2458,7 @@
                 <a:ea typeface="Arial Unicode MS"/>
                 <a:cs typeface="Arial Unicode MS"/>
               </a:rPr>
-              <a:t>看表格十五點六公尺那一台車，有黑點的那一列：</a:t>
+              <a:t>看表格十五點六公尺那一台車，「前方相機畫面」有 ● 的那一列：</a:t>
             </a:r>
             <a:r>
               <a:rPr sz="1100" b="1" lang="zh-TW" dirty="0">
@@ -2568,7 +2568,7 @@
                 <a:ea typeface="Arial Unicode MS"/>
                 <a:cs typeface="Arial Unicode MS"/>
               </a:rPr>
-              <a:t>順便一提，表格裡十公尺左右還有好幾個行人，可是右邊沒有黑點，他們在車子旁邊或後面的人行道上，不在前方相機的畫面裡。</a:t>
+              <a:t>順便一提，表格裡十公尺左右還有好幾個行人，可是「前方相機畫面」那一欄沒有 ●，寫的是側面或後方，他們在車子旁邊或後面的人行道上，不在前方相機的畫面裡。</a:t>
             </a:r>
           </a:p>
         </p:txBody>

--- a/第七週(10-22)/第七週_第3節_簡報.pptx
+++ b/第七週(10-22)/第七週_第3節_簡報.pptx
@@ -158,8 +158,8 @@
         </p:nvSpPr>
         <p:spPr>
           <a:xfrm>
-            <a:off x="540000" y="540000"/>
-            <a:ext cx="6480000" cy="3645000"/>
+            <a:off x="1620000" y="380000"/>
+            <a:ext cx="4320000" cy="2430000"/>
           </a:xfrm>
           <a:prstGeom prst="rect">
             <a:avLst/>
@@ -209,8 +209,8 @@
         </p:nvSpPr>
         <p:spPr>
           <a:xfrm>
-            <a:off x="540000" y="4440000"/>
-            <a:ext cx="6480000" cy="5500000"/>
+            <a:off x="540000" y="2990000"/>
+            <a:ext cx="6480000" cy="7060000"/>
           </a:xfrm>
           <a:prstGeom prst="rect">
             <a:avLst/>
@@ -414,8 +414,8 @@
         </p:nvSpPr>
         <p:spPr>
           <a:xfrm>
-            <a:off x="540000" y="540000"/>
-            <a:ext cx="6480000" cy="3645000"/>
+            <a:off x="1620000" y="380000"/>
+            <a:ext cx="4320000" cy="2430000"/>
           </a:xfrm>
         </p:spPr>
       </p:sp>
@@ -431,8 +431,8 @@
         </p:nvSpPr>
         <p:spPr>
           <a:xfrm>
-            <a:off x="540000" y="4440000"/>
-            <a:ext cx="6480000" cy="5500000"/>
+            <a:off x="540000" y="2990000"/>
+            <a:ext cx="6480000" cy="7060000"/>
           </a:xfrm>
         </p:spPr>
         <p:txBody>
@@ -444,11 +444,11 @@
                 <a:spcPts val="0"/>
               </a:spcBef>
               <a:spcAft>
-                <a:spcPts val="200"/>
+                <a:spcPts val="267"/>
               </a:spcAft>
             </a:pPr>
             <a:r>
-              <a:rPr sz="1200" b="1" lang="zh-TW" dirty="0">
+              <a:rPr sz="1600" b="1" lang="zh-TW" dirty="0">
                 <a:solidFill>
                   <a:srgbClr val="000000"/>
                 </a:solidFill>
@@ -459,7 +459,7 @@
               <a:t>這一節的目的：</a:t>
             </a:r>
             <a:r>
-              <a:rPr sz="1200" lang="zh-TW" dirty="0">
+              <a:rPr sz="1600" lang="zh-TW" dirty="0">
                 <a:solidFill>
                   <a:srgbClr val="000000"/>
                 </a:solidFill>
@@ -477,11 +477,11 @@
                 <a:spcPts val="0"/>
               </a:spcBef>
               <a:spcAft>
-                <a:spcPts val="200"/>
+                <a:spcPts val="267"/>
               </a:spcAft>
             </a:pPr>
             <a:r>
-              <a:rPr sz="1200" lang="zh-TW" dirty="0">
+              <a:rPr sz="1600" lang="zh-TW" dirty="0">
                 <a:solidFill>
                   <a:srgbClr val="000000"/>
                 </a:solidFill>
@@ -499,11 +499,11 @@
                 <a:spcPts val="0"/>
               </a:spcBef>
               <a:spcAft>
-                <a:spcPts val="200"/>
+                <a:spcPts val="267"/>
               </a:spcAft>
             </a:pPr>
             <a:r>
-              <a:rPr sz="1200" lang="zh-TW" dirty="0">
+              <a:rPr sz="1600" lang="zh-TW" dirty="0">
                 <a:solidFill>
                   <a:srgbClr val="000000"/>
                 </a:solidFill>
@@ -514,7 +514,7 @@
               <a:t>前兩節的圖，都是我從資料裡挑出來、畫好給各位看的。這一節換各位自己動手：打開一個網頁，裡面是 nuScenes 的四個真實場景，</a:t>
             </a:r>
             <a:r>
-              <a:rPr sz="1200" b="1" lang="zh-TW" dirty="0">
+              <a:rPr sz="1600" b="1" lang="zh-TW" dirty="0">
                 <a:solidFill>
                   <a:srgbClr val="000000"/>
                 </a:solidFill>
@@ -525,7 +525,7 @@
               <a:t>同一個瞬間，相機、光達、雷達各看到什麼</a:t>
             </a:r>
             <a:r>
-              <a:rPr sz="1200" lang="zh-TW" dirty="0">
+              <a:rPr sz="1600" lang="zh-TW" dirty="0">
                 <a:solidFill>
                   <a:srgbClr val="000000"/>
                 </a:solidFill>
@@ -543,11 +543,11 @@
                 <a:spcPts val="0"/>
               </a:spcBef>
               <a:spcAft>
-                <a:spcPts val="200"/>
+                <a:spcPts val="267"/>
               </a:spcAft>
             </a:pPr>
             <a:r>
-              <a:rPr sz="1200" lang="zh-TW" dirty="0">
+              <a:rPr sz="1600" lang="zh-TW" dirty="0">
                 <a:solidFill>
                   <a:srgbClr val="000000"/>
                 </a:solidFill>
@@ -558,7 +558,7 @@
               <a:t>四個場景：白天、停車場、夜間、夜間雨後。前四個任務，一個場景一個。任務五是</a:t>
             </a:r>
             <a:r>
-              <a:rPr sz="1200" b="1" lang="zh-TW" dirty="0">
+              <a:rPr sz="1600" b="1" lang="zh-TW" dirty="0">
                 <a:solidFill>
                   <a:srgbClr val="000000"/>
                 </a:solidFill>
@@ -569,7 +569,7 @@
               <a:t>搭檔卡</a:t>
             </a:r>
             <a:r>
-              <a:rPr sz="1200" lang="zh-TW" dirty="0">
+              <a:rPr sz="1600" lang="zh-TW" dirty="0">
                 <a:solidFill>
                   <a:srgbClr val="000000"/>
                 </a:solidFill>
@@ -656,8 +656,8 @@
         </p:nvSpPr>
         <p:spPr>
           <a:xfrm>
-            <a:off x="540000" y="540000"/>
-            <a:ext cx="6480000" cy="3645000"/>
+            <a:off x="1620000" y="380000"/>
+            <a:ext cx="4320000" cy="2430000"/>
           </a:xfrm>
         </p:spPr>
       </p:sp>
@@ -673,8 +673,8 @@
         </p:nvSpPr>
         <p:spPr>
           <a:xfrm>
-            <a:off x="540000" y="4440000"/>
-            <a:ext cx="6480000" cy="5500000"/>
+            <a:off x="540000" y="2990000"/>
+            <a:ext cx="6480000" cy="7060000"/>
           </a:xfrm>
         </p:spPr>
         <p:txBody>
@@ -686,11 +686,11 @@
                 <a:spcPts val="0"/>
               </a:spcBef>
               <a:spcAft>
-                <a:spcPts val="158"/>
+                <a:spcPts val="183"/>
               </a:spcAft>
             </a:pPr>
             <a:r>
-              <a:rPr sz="950" b="1" lang="zh-TW" dirty="0">
+              <a:rPr sz="1100" b="1" lang="zh-TW" dirty="0">
                 <a:solidFill>
                   <a:srgbClr val="000000"/>
                 </a:solidFill>
@@ -701,7 +701,7 @@
               <a:t>這一張的目的：</a:t>
             </a:r>
             <a:r>
-              <a:rPr sz="950" lang="zh-TW" dirty="0">
+              <a:rPr sz="1100" lang="zh-TW" dirty="0">
                 <a:solidFill>
                   <a:srgbClr val="000000"/>
                 </a:solidFill>
@@ -719,11 +719,11 @@
                 <a:spcPts val="0"/>
               </a:spcBef>
               <a:spcAft>
-                <a:spcPts val="158"/>
+                <a:spcPts val="183"/>
               </a:spcAft>
             </a:pPr>
             <a:r>
-              <a:rPr sz="950" lang="zh-TW" dirty="0">
+              <a:rPr sz="1100" lang="zh-TW" dirty="0">
                 <a:solidFill>
                   <a:srgbClr val="000000"/>
                 </a:solidFill>
@@ -741,11 +741,11 @@
                 <a:spcPts val="0"/>
               </a:spcBef>
               <a:spcAft>
-                <a:spcPts val="158"/>
+                <a:spcPts val="183"/>
               </a:spcAft>
             </a:pPr>
             <a:r>
-              <a:rPr sz="950" b="1" lang="zh-TW" dirty="0">
+              <a:rPr sz="1100" b="1" lang="zh-TW" dirty="0">
                 <a:solidFill>
                   <a:srgbClr val="000000"/>
                 </a:solidFill>
@@ -756,7 +756,7 @@
               <a:t>最上面，四個場景鈕</a:t>
             </a:r>
             <a:r>
-              <a:rPr sz="950" lang="zh-TW" dirty="0">
+              <a:rPr sz="1100" lang="zh-TW" dirty="0">
                 <a:solidFill>
                   <a:srgbClr val="000000"/>
                 </a:solidFill>
@@ -774,11 +774,11 @@
                 <a:spcPts val="0"/>
               </a:spcBef>
               <a:spcAft>
-                <a:spcPts val="158"/>
+                <a:spcPts val="183"/>
               </a:spcAft>
             </a:pPr>
             <a:r>
-              <a:rPr sz="950" b="1" lang="zh-TW" dirty="0">
+              <a:rPr sz="1100" b="1" lang="zh-TW" dirty="0">
                 <a:solidFill>
                   <a:srgbClr val="000000"/>
                 </a:solidFill>
@@ -789,7 +789,7 @@
               <a:t>左上，四個開關</a:t>
             </a:r>
             <a:r>
-              <a:rPr sz="950" lang="zh-TW" dirty="0">
+              <a:rPr sz="1100" lang="zh-TW" dirty="0">
                 <a:solidFill>
                   <a:srgbClr val="000000"/>
                 </a:solidFill>
@@ -807,11 +807,11 @@
                 <a:spcPts val="0"/>
               </a:spcBef>
               <a:spcAft>
-                <a:spcPts val="158"/>
+                <a:spcPts val="183"/>
               </a:spcAft>
             </a:pPr>
             <a:r>
-              <a:rPr sz="950" lang="zh-TW" dirty="0">
+              <a:rPr sz="1100" lang="zh-TW" dirty="0">
                 <a:solidFill>
                   <a:srgbClr val="000000"/>
                 </a:solidFill>
@@ -822,7 +822,7 @@
               <a:t>先講顏色。</a:t>
             </a:r>
             <a:r>
-              <a:rPr sz="950" b="1" lang="zh-TW" dirty="0">
+              <a:rPr sz="1100" b="1" lang="zh-TW" dirty="0">
                 <a:solidFill>
                   <a:srgbClr val="000000"/>
                 </a:solidFill>
@@ -833,7 +833,7 @@
               <a:t>光達點</a:t>
             </a:r>
             <a:r>
-              <a:rPr sz="950" lang="zh-TW" dirty="0">
+              <a:rPr sz="1100" lang="zh-TW" dirty="0">
                 <a:solidFill>
                   <a:srgbClr val="000000"/>
                 </a:solidFill>
@@ -844,7 +844,7 @@
               <a:t>是小方點，顏色代表距離，紅色近、藍色遠，跟第一節的圖一樣。</a:t>
             </a:r>
             <a:r>
-              <a:rPr sz="950" b="1" lang="zh-TW" dirty="0">
+              <a:rPr sz="1100" b="1" lang="zh-TW" dirty="0">
                 <a:solidFill>
                   <a:srgbClr val="000000"/>
                 </a:solidFill>
@@ -855,7 +855,7 @@
               <a:t>雷達點</a:t>
             </a:r>
             <a:r>
-              <a:rPr sz="950" lang="zh-TW" dirty="0">
+              <a:rPr sz="1100" lang="zh-TW" dirty="0">
                 <a:solidFill>
                   <a:srgbClr val="000000"/>
                 </a:solidFill>
@@ -866,7 +866,7 @@
               <a:t>是紅色的圈，實心的表示那個東西在動，空心的表示靜止。</a:t>
             </a:r>
             <a:r>
-              <a:rPr sz="950" b="1" lang="zh-TW" dirty="0">
+              <a:rPr sz="1100" b="1" lang="zh-TW" dirty="0">
                 <a:solidFill>
                   <a:srgbClr val="000000"/>
                 </a:solidFill>
@@ -877,7 +877,7 @@
               <a:t>物體框</a:t>
             </a:r>
             <a:r>
-              <a:rPr sz="950" lang="zh-TW" dirty="0">
+              <a:rPr sz="1100" lang="zh-TW" dirty="0">
                 <a:solidFill>
                   <a:srgbClr val="000000"/>
                 </a:solidFill>
@@ -888,7 +888,7 @@
               <a:t>有兩種顏色：</a:t>
             </a:r>
             <a:r>
-              <a:rPr sz="950" b="1" lang="zh-TW" dirty="0">
+              <a:rPr sz="1100" b="1" lang="zh-TW" dirty="0">
                 <a:solidFill>
                   <a:srgbClr val="000000"/>
                 </a:solidFill>
@@ -899,7 +899,7 @@
               <a:t>綠框表示框裡至少有一個雷達點，橘框表示一個都沒有。</a:t>
             </a:r>
             <a:r>
-              <a:rPr sz="950" lang="zh-TW" dirty="0">
+              <a:rPr sz="1100" lang="zh-TW" dirty="0">
                 <a:solidFill>
                   <a:srgbClr val="000000"/>
                 </a:solidFill>
@@ -917,11 +917,11 @@
                 <a:spcPts val="0"/>
               </a:spcBef>
               <a:spcAft>
-                <a:spcPts val="158"/>
+                <a:spcPts val="183"/>
               </a:spcAft>
             </a:pPr>
             <a:r>
-              <a:rPr sz="950" lang="zh-TW" dirty="0">
+              <a:rPr sz="1100" lang="zh-TW" dirty="0">
                 <a:solidFill>
                   <a:srgbClr val="000000"/>
                 </a:solidFill>
@@ -939,11 +939,11 @@
                 <a:spcPts val="0"/>
               </a:spcBef>
               <a:spcAft>
-                <a:spcPts val="158"/>
+                <a:spcPts val="183"/>
               </a:spcAft>
             </a:pPr>
             <a:r>
-              <a:rPr sz="950" b="1" lang="zh-TW" dirty="0">
+              <a:rPr sz="1100" b="1" lang="zh-TW" dirty="0">
                 <a:solidFill>
                   <a:srgbClr val="000000"/>
                 </a:solidFill>
@@ -954,7 +954,7 @@
               <a:t>右邊，數一數。</a:t>
             </a:r>
             <a:r>
-              <a:rPr sz="950" lang="zh-TW" dirty="0">
+              <a:rPr sz="1100" lang="zh-TW" dirty="0">
                 <a:solidFill>
                   <a:srgbClr val="000000"/>
                 </a:solidFill>
@@ -965,7 +965,7 @@
               <a:t>上面三格數字：畫面裡有幾個光達點、幾個雷達點、幾個物體有被雷達抓到。下面的表格，每一列是一個物體，寫它離車子多遠、身上有幾個光達點、幾個雷達點，還有一欄「</a:t>
             </a:r>
             <a:r>
-              <a:rPr sz="950" b="1" lang="zh-TW" dirty="0">
+              <a:rPr sz="1100" b="1" lang="zh-TW" dirty="0">
                 <a:solidFill>
                   <a:srgbClr val="000000"/>
                 </a:solidFill>
@@ -976,7 +976,7 @@
               <a:t>雷達：多快</a:t>
             </a:r>
             <a:r>
-              <a:rPr sz="950" lang="zh-TW" dirty="0">
+              <a:rPr sz="1100" lang="zh-TW" dirty="0">
                 <a:solidFill>
                   <a:srgbClr val="000000"/>
                 </a:solidFill>
@@ -994,11 +994,11 @@
                 <a:spcPts val="0"/>
               </a:spcBef>
               <a:spcAft>
-                <a:spcPts val="158"/>
+                <a:spcPts val="183"/>
               </a:spcAft>
             </a:pPr>
             <a:r>
-              <a:rPr sz="950" b="1" lang="zh-TW" dirty="0">
+              <a:rPr sz="1100" b="1" lang="zh-TW" dirty="0">
                 <a:solidFill>
                   <a:srgbClr val="000000"/>
                 </a:solidFill>
@@ -1009,7 +1009,7 @@
               <a:t>第四個開關「合起來」</a:t>
             </a:r>
             <a:r>
-              <a:rPr sz="950" lang="zh-TW" dirty="0">
+              <a:rPr sz="1100" lang="zh-TW" dirty="0">
                 <a:solidFill>
                   <a:srgbClr val="000000"/>
                 </a:solidFill>
@@ -1027,11 +1027,11 @@
                 <a:spcPts val="0"/>
               </a:spcBef>
               <a:spcAft>
-                <a:spcPts val="158"/>
+                <a:spcPts val="183"/>
               </a:spcAft>
             </a:pPr>
             <a:r>
-              <a:rPr sz="950" b="1" lang="zh-TW" dirty="0">
+              <a:rPr sz="1100" b="1" lang="zh-TW" dirty="0">
                 <a:solidFill>
                   <a:srgbClr val="000000"/>
                 </a:solidFill>
@@ -1042,7 +1042,7 @@
               <a:t>這裡最容易搞錯，請看結論條。</a:t>
             </a:r>
             <a:r>
-              <a:rPr sz="950" lang="zh-TW" dirty="0">
+              <a:rPr sz="1100" lang="zh-TW" dirty="0">
                 <a:solidFill>
                   <a:srgbClr val="000000"/>
                 </a:solidFill>
@@ -1053,7 +1053,7 @@
               <a:t>表格列的是車子周圍五十公尺內</a:t>
             </a:r>
             <a:r>
-              <a:rPr sz="950" b="1" lang="zh-TW" dirty="0">
+              <a:rPr sz="1100" b="1" lang="zh-TW" dirty="0">
                 <a:solidFill>
                   <a:srgbClr val="000000"/>
                 </a:solidFill>
@@ -1064,7 +1064,7 @@
               <a:t>全部</a:t>
             </a:r>
             <a:r>
-              <a:rPr sz="950" lang="zh-TW" dirty="0">
+              <a:rPr sz="1100" lang="zh-TW" dirty="0">
                 <a:solidFill>
                   <a:srgbClr val="000000"/>
                 </a:solidFill>
@@ -1075,7 +1075,7 @@
               <a:t>的物體，連車子後面的也列進來。所以題目問「前方相機畫面裡」的時候，</a:t>
             </a:r>
             <a:r>
-              <a:rPr sz="950" b="1" lang="zh-TW" dirty="0">
+              <a:rPr sz="1100" b="1" lang="zh-TW" dirty="0">
                 <a:solidFill>
                   <a:srgbClr val="000000"/>
                 </a:solidFill>
@@ -1086,7 +1086,7 @@
               <a:t>只數表格最右邊「前方相機畫面」那一欄，有一個黑色圓點 ● 的那幾列</a:t>
             </a:r>
             <a:r>
-              <a:rPr sz="950" lang="zh-TW" dirty="0">
+              <a:rPr sz="1100" lang="zh-TW" dirty="0">
                 <a:solidFill>
                   <a:srgbClr val="000000"/>
                 </a:solidFill>
@@ -1104,11 +1104,11 @@
                 <a:spcPts val="0"/>
               </a:spcBef>
               <a:spcAft>
-                <a:spcPts val="158"/>
+                <a:spcPts val="183"/>
               </a:spcAft>
             </a:pPr>
             <a:r>
-              <a:rPr sz="950" lang="zh-TW" dirty="0">
+              <a:rPr sz="1100" lang="zh-TW" dirty="0">
                 <a:solidFill>
                   <a:srgbClr val="000000"/>
                 </a:solidFill>
@@ -1119,7 +1119,7 @@
               <a:t>也提醒一句：這一欄</a:t>
             </a:r>
             <a:r>
-              <a:rPr sz="950" b="1" lang="zh-TW" dirty="0">
+              <a:rPr sz="1100" b="1" lang="zh-TW" dirty="0">
                 <a:solidFill>
                   <a:srgbClr val="000000"/>
                 </a:solidFill>
@@ -1130,7 +1130,7 @@
               <a:t>不是「相機有沒有認出來」</a:t>
             </a:r>
             <a:r>
-              <a:rPr sz="950" lang="zh-TW" dirty="0">
+              <a:rPr sz="1100" lang="zh-TW" dirty="0">
                 <a:solidFill>
                   <a:srgbClr val="000000"/>
                 </a:solidFill>
@@ -1148,11 +1148,11 @@
                 <a:spcPts val="0"/>
               </a:spcBef>
               <a:spcAft>
-                <a:spcPts val="158"/>
+                <a:spcPts val="183"/>
               </a:spcAft>
             </a:pPr>
             <a:r>
-              <a:rPr sz="950" lang="zh-TW" dirty="0">
+              <a:rPr sz="1100" lang="zh-TW" dirty="0">
                 <a:solidFill>
                   <a:srgbClr val="000000"/>
                 </a:solidFill>
@@ -1239,8 +1239,8 @@
         </p:nvSpPr>
         <p:spPr>
           <a:xfrm>
-            <a:off x="540000" y="540000"/>
-            <a:ext cx="6480000" cy="3645000"/>
+            <a:off x="1620000" y="380000"/>
+            <a:ext cx="4320000" cy="2430000"/>
           </a:xfrm>
         </p:spPr>
       </p:sp>
@@ -1256,8 +1256,8 @@
         </p:nvSpPr>
         <p:spPr>
           <a:xfrm>
-            <a:off x="540000" y="4440000"/>
-            <a:ext cx="6480000" cy="5500000"/>
+            <a:off x="540000" y="2990000"/>
+            <a:ext cx="6480000" cy="7060000"/>
           </a:xfrm>
         </p:spPr>
         <p:txBody>
@@ -1269,11 +1269,11 @@
                 <a:spcPts val="0"/>
               </a:spcBef>
               <a:spcAft>
-                <a:spcPts val="183"/>
+                <a:spcPts val="208"/>
               </a:spcAft>
             </a:pPr>
             <a:r>
-              <a:rPr sz="1100" b="1" lang="zh-TW" dirty="0">
+              <a:rPr sz="1250" b="1" lang="zh-TW" dirty="0">
                 <a:solidFill>
                   <a:srgbClr val="000000"/>
                 </a:solidFill>
@@ -1284,7 +1284,7 @@
               <a:t>這一張的目的：</a:t>
             </a:r>
             <a:r>
-              <a:rPr sz="1100" lang="zh-TW" dirty="0">
+              <a:rPr sz="1250" lang="zh-TW" dirty="0">
                 <a:solidFill>
                   <a:srgbClr val="000000"/>
                 </a:solidFill>
@@ -1302,11 +1302,11 @@
                 <a:spcPts val="0"/>
               </a:spcBef>
               <a:spcAft>
-                <a:spcPts val="183"/>
+                <a:spcPts val="208"/>
               </a:spcAft>
             </a:pPr>
             <a:r>
-              <a:rPr sz="1100" lang="zh-TW" dirty="0">
+              <a:rPr sz="1250" lang="zh-TW" dirty="0">
                 <a:solidFill>
                   <a:srgbClr val="000000"/>
                 </a:solidFill>
@@ -1317,7 +1317,7 @@
               <a:t>任務一，</a:t>
             </a:r>
             <a:r>
-              <a:rPr sz="1100" b="1" lang="zh-TW" dirty="0">
+              <a:rPr sz="1250" b="1" lang="zh-TW" dirty="0">
                 <a:solidFill>
                   <a:srgbClr val="000000"/>
                 </a:solidFill>
@@ -1328,7 +1328,7 @@
               <a:t>白天，美國波士頓</a:t>
             </a:r>
             <a:r>
-              <a:rPr sz="1100" lang="zh-TW" dirty="0">
+              <a:rPr sz="1250" lang="zh-TW" dirty="0">
                 <a:solidFill>
                   <a:srgbClr val="000000"/>
                 </a:solidFill>
@@ -1346,11 +1346,11 @@
                 <a:spcPts val="0"/>
               </a:spcBef>
               <a:spcAft>
-                <a:spcPts val="183"/>
+                <a:spcPts val="208"/>
               </a:spcAft>
             </a:pPr>
             <a:r>
-              <a:rPr sz="1100" lang="zh-TW" dirty="0">
+              <a:rPr sz="1250" lang="zh-TW" dirty="0">
                 <a:solidFill>
                   <a:srgbClr val="000000"/>
                 </a:solidFill>
@@ -1361,7 +1361,7 @@
               <a:t>先只開</a:t>
             </a:r>
             <a:r>
-              <a:rPr sz="1100" b="1" lang="zh-TW" dirty="0">
+              <a:rPr sz="1250" b="1" lang="zh-TW" dirty="0">
                 <a:solidFill>
                   <a:srgbClr val="000000"/>
                 </a:solidFill>
@@ -1372,7 +1372,7 @@
               <a:t>光達點和雷達點</a:t>
             </a:r>
             <a:r>
-              <a:rPr sz="1100" lang="zh-TW" dirty="0">
+              <a:rPr sz="1250" lang="zh-TW" dirty="0">
                 <a:solidFill>
                   <a:srgbClr val="000000"/>
                 </a:solidFill>
@@ -1390,11 +1390,11 @@
                 <a:spcPts val="0"/>
               </a:spcBef>
               <a:spcAft>
-                <a:spcPts val="183"/>
+                <a:spcPts val="208"/>
               </a:spcAft>
             </a:pPr>
             <a:r>
-              <a:rPr sz="1100" lang="zh-TW" dirty="0">
+              <a:rPr sz="1250" lang="zh-TW" dirty="0">
                 <a:solidFill>
                   <a:srgbClr val="000000"/>
                 </a:solidFill>
@@ -1412,11 +1412,11 @@
                 <a:spcPts val="0"/>
               </a:spcBef>
               <a:spcAft>
-                <a:spcPts val="183"/>
+                <a:spcPts val="208"/>
               </a:spcAft>
             </a:pPr>
             <a:r>
-              <a:rPr sz="1100" b="1" lang="zh-TW" dirty="0">
+              <a:rPr sz="1250" b="1" lang="zh-TW" dirty="0">
                 <a:solidFill>
                   <a:srgbClr val="000000"/>
                 </a:solidFill>
@@ -1427,7 +1427,7 @@
               <a:t>第 1 題。</a:t>
             </a:r>
             <a:r>
-              <a:rPr sz="1100" lang="zh-TW" dirty="0">
+              <a:rPr sz="1250" lang="zh-TW" dirty="0">
                 <a:solidFill>
                   <a:srgbClr val="000000"/>
                 </a:solidFill>
@@ -1438,7 +1438,7 @@
               <a:t>光達點三千零一十三個，雷達點四十八個。三千除以四十八，大約六十。答案是</a:t>
             </a:r>
             <a:r>
-              <a:rPr sz="1100" b="1" lang="zh-TW" dirty="0">
+              <a:rPr sz="1250" b="1" lang="zh-TW" dirty="0">
                 <a:solidFill>
                   <a:srgbClr val="000000"/>
                 </a:solidFill>
@@ -1449,7 +1449,7 @@
               <a:t>約 60 倍</a:t>
             </a:r>
             <a:r>
-              <a:rPr sz="1100" lang="zh-TW" dirty="0">
+              <a:rPr sz="1250" lang="zh-TW" dirty="0">
                 <a:solidFill>
                   <a:srgbClr val="000000"/>
                 </a:solidFill>
@@ -1467,11 +1467,11 @@
                 <a:spcPts val="0"/>
               </a:spcBef>
               <a:spcAft>
-                <a:spcPts val="183"/>
+                <a:spcPts val="208"/>
               </a:spcAft>
             </a:pPr>
             <a:r>
-              <a:rPr sz="1100" b="1" lang="zh-TW" dirty="0">
+              <a:rPr sz="1250" b="1" lang="zh-TW" dirty="0">
                 <a:solidFill>
                   <a:srgbClr val="000000"/>
                 </a:solidFill>
@@ -1482,7 +1482,7 @@
               <a:t>第 2 題。</a:t>
             </a:r>
             <a:r>
-              <a:rPr sz="1100" lang="zh-TW" dirty="0">
+              <a:rPr sz="1250" lang="zh-TW" dirty="0">
                 <a:solidFill>
                   <a:srgbClr val="000000"/>
                 </a:solidFill>
@@ -1493,7 +1493,7 @@
               <a:t>打開物體框。畫面裡的行人，框都是</a:t>
             </a:r>
             <a:r>
-              <a:rPr sz="1100" b="1" lang="zh-TW" dirty="0">
+              <a:rPr sz="1250" b="1" lang="zh-TW" dirty="0">
                 <a:solidFill>
                   <a:srgbClr val="000000"/>
                 </a:solidFill>
@@ -1504,7 +1504,7 @@
               <a:t>橘色</a:t>
             </a:r>
             <a:r>
-              <a:rPr sz="1100" lang="zh-TW" dirty="0">
+              <a:rPr sz="1250" lang="zh-TW" dirty="0">
                 <a:solidFill>
                   <a:srgbClr val="000000"/>
                 </a:solidFill>
@@ -1515,7 +1515,7 @@
               <a:t>的，一個雷達點都沒有。看表格，「前方相機畫面」那欄有 ● 的行人有四個，十九點六、二十五點三、二十五點三、三十一點六公尺，雷達點全部是零。答案是 </a:t>
             </a:r>
             <a:r>
-              <a:rPr sz="1100" b="1" lang="zh-TW" dirty="0">
+              <a:rPr sz="1250" b="1" lang="zh-TW" dirty="0">
                 <a:solidFill>
                   <a:srgbClr val="000000"/>
                 </a:solidFill>
@@ -1526,7 +1526,7 @@
               <a:t>0 個</a:t>
             </a:r>
             <a:r>
-              <a:rPr sz="1100" lang="zh-TW" dirty="0">
+              <a:rPr sz="1250" lang="zh-TW" dirty="0">
                 <a:solidFill>
                   <a:srgbClr val="000000"/>
                 </a:solidFill>
@@ -1544,11 +1544,11 @@
                 <a:spcPts val="0"/>
               </a:spcBef>
               <a:spcAft>
-                <a:spcPts val="183"/>
+                <a:spcPts val="208"/>
               </a:spcAft>
             </a:pPr>
             <a:r>
-              <a:rPr sz="1100" b="1" lang="zh-TW" dirty="0">
+              <a:rPr sz="1250" b="1" lang="zh-TW" dirty="0">
                 <a:solidFill>
                   <a:srgbClr val="000000"/>
                 </a:solidFill>
@@ -1559,7 +1559,7 @@
               <a:t>第 3 題。</a:t>
             </a:r>
             <a:r>
-              <a:rPr sz="1100" lang="zh-TW" dirty="0">
+              <a:rPr sz="1250" lang="zh-TW" dirty="0">
                 <a:solidFill>
                   <a:srgbClr val="000000"/>
                 </a:solidFill>
@@ -1570,7 +1570,7 @@
               <a:t>紅圈全部在很低的地方：遠的貼著地平線，近的車子身上稍微低一點，樓上、樹上、招牌上一個都沒有。答案是：</a:t>
             </a:r>
             <a:r>
-              <a:rPr sz="1100" b="1" lang="zh-TW" dirty="0">
+              <a:rPr sz="1250" b="1" lang="zh-TW" dirty="0">
                 <a:solidFill>
                   <a:srgbClr val="000000"/>
                 </a:solidFill>
@@ -1581,7 +1581,7 @@
               <a:t>ARS 408 量不出高度，所有的點都放在同一個高度。</a:t>
             </a:r>
             <a:r>
-              <a:rPr sz="1100" lang="zh-TW" dirty="0">
+              <a:rPr sz="1250" lang="zh-TW" dirty="0">
                 <a:solidFill>
                   <a:srgbClr val="000000"/>
                 </a:solidFill>
@@ -1599,11 +1599,11 @@
                 <a:spcPts val="0"/>
               </a:spcBef>
               <a:spcAft>
-                <a:spcPts val="183"/>
+                <a:spcPts val="208"/>
               </a:spcAft>
             </a:pPr>
             <a:r>
-              <a:rPr sz="1100" lang="zh-TW" dirty="0">
+              <a:rPr sz="1250" lang="zh-TW" dirty="0">
                 <a:solidFill>
                   <a:srgbClr val="000000"/>
                 </a:solidFill>
@@ -1621,11 +1621,11 @@
                 <a:spcPts val="0"/>
               </a:spcBef>
               <a:spcAft>
-                <a:spcPts val="183"/>
+                <a:spcPts val="208"/>
               </a:spcAft>
             </a:pPr>
             <a:r>
-              <a:rPr sz="1100" lang="zh-TW" dirty="0">
+              <a:rPr sz="1250" lang="zh-TW" dirty="0">
                 <a:solidFill>
                   <a:srgbClr val="000000"/>
                 </a:solidFill>
@@ -1636,7 +1636,7 @@
               <a:t>順便講清楚：紅圈不是排成一條直直的線，近的比較低、遠的貼著地平線，這是透視，就像地上的斑馬線，近的在腳下、遠的在地平線。它們真正的共同點是：</a:t>
             </a:r>
             <a:r>
-              <a:rPr sz="1100" b="1" lang="zh-TW" dirty="0">
+              <a:rPr sz="1250" b="1" lang="zh-TW" dirty="0">
                 <a:solidFill>
                   <a:srgbClr val="000000"/>
                 </a:solidFill>
@@ -1723,8 +1723,8 @@
         </p:nvSpPr>
         <p:spPr>
           <a:xfrm>
-            <a:off x="540000" y="540000"/>
-            <a:ext cx="6480000" cy="3645000"/>
+            <a:off x="1620000" y="380000"/>
+            <a:ext cx="4320000" cy="2430000"/>
           </a:xfrm>
         </p:spPr>
       </p:sp>
@@ -1740,8 +1740,8 @@
         </p:nvSpPr>
         <p:spPr>
           <a:xfrm>
-            <a:off x="540000" y="4440000"/>
-            <a:ext cx="6480000" cy="5500000"/>
+            <a:off x="540000" y="2990000"/>
+            <a:ext cx="6480000" cy="7060000"/>
           </a:xfrm>
         </p:spPr>
         <p:txBody>
@@ -1753,11 +1753,11 @@
                 <a:spcPts val="0"/>
               </a:spcBef>
               <a:spcAft>
-                <a:spcPts val="200"/>
+                <a:spcPts val="250"/>
               </a:spcAft>
             </a:pPr>
             <a:r>
-              <a:rPr sz="1200" b="1" lang="zh-TW" dirty="0">
+              <a:rPr sz="1500" b="1" lang="zh-TW" dirty="0">
                 <a:solidFill>
                   <a:srgbClr val="000000"/>
                 </a:solidFill>
@@ -1768,7 +1768,7 @@
               <a:t>這一張的目的：</a:t>
             </a:r>
             <a:r>
-              <a:rPr sz="1200" lang="zh-TW" dirty="0">
+              <a:rPr sz="1500" lang="zh-TW" dirty="0">
                 <a:solidFill>
                   <a:srgbClr val="000000"/>
                 </a:solidFill>
@@ -1786,11 +1786,11 @@
                 <a:spcPts val="0"/>
               </a:spcBef>
               <a:spcAft>
-                <a:spcPts val="200"/>
+                <a:spcPts val="250"/>
               </a:spcAft>
             </a:pPr>
             <a:r>
-              <a:rPr sz="1200" lang="zh-TW" dirty="0">
+              <a:rPr sz="1500" lang="zh-TW" dirty="0">
                 <a:solidFill>
                   <a:srgbClr val="000000"/>
                 </a:solidFill>
@@ -1801,7 +1801,7 @@
               <a:t>任務二，</a:t>
             </a:r>
             <a:r>
-              <a:rPr sz="1200" b="1" lang="zh-TW" dirty="0">
+              <a:rPr sz="1500" b="1" lang="zh-TW" dirty="0">
                 <a:solidFill>
                   <a:srgbClr val="000000"/>
                 </a:solidFill>
@@ -1812,7 +1812,7 @@
               <a:t>新加坡的一個停車場</a:t>
             </a:r>
             <a:r>
-              <a:rPr sz="1200" lang="zh-TW" dirty="0">
+              <a:rPr sz="1500" lang="zh-TW" dirty="0">
                 <a:solidFill>
                   <a:srgbClr val="000000"/>
                 </a:solidFill>
@@ -1830,11 +1830,11 @@
                 <a:spcPts val="0"/>
               </a:spcBef>
               <a:spcAft>
-                <a:spcPts val="200"/>
+                <a:spcPts val="250"/>
               </a:spcAft>
             </a:pPr>
             <a:r>
-              <a:rPr sz="1200" lang="zh-TW" dirty="0">
+              <a:rPr sz="1500" lang="zh-TW" dirty="0">
                 <a:solidFill>
                   <a:srgbClr val="000000"/>
                 </a:solidFill>
@@ -1845,7 +1845,7 @@
               <a:t>先提醒一次：這個場景表格很長，因為停車場裡到處都是車，三十幾台，大部分在車子旁邊和後面。</a:t>
             </a:r>
             <a:r>
-              <a:rPr sz="1200" b="1" lang="zh-TW" dirty="0">
+              <a:rPr sz="1500" b="1" lang="zh-TW" dirty="0">
                 <a:solidFill>
                   <a:srgbClr val="000000"/>
                 </a:solidFill>
@@ -1856,7 +1856,7 @@
               <a:t>只數表格最右邊「前方相機畫面」那一欄有 ● 的那幾列。</a:t>
             </a:r>
             <a:r>
-              <a:rPr sz="1200" lang="zh-TW" dirty="0">
+              <a:rPr sz="1500" lang="zh-TW" dirty="0">
                 <a:solidFill>
                   <a:srgbClr val="000000"/>
                 </a:solidFill>
@@ -1874,11 +1874,11 @@
                 <a:spcPts val="0"/>
               </a:spcBef>
               <a:spcAft>
-                <a:spcPts val="200"/>
+                <a:spcPts val="250"/>
               </a:spcAft>
             </a:pPr>
             <a:r>
-              <a:rPr sz="1200" lang="zh-TW" dirty="0">
+              <a:rPr sz="1500" lang="zh-TW" dirty="0">
                 <a:solidFill>
                   <a:srgbClr val="000000"/>
                 </a:solidFill>
@@ -1896,11 +1896,11 @@
                 <a:spcPts val="0"/>
               </a:spcBef>
               <a:spcAft>
-                <a:spcPts val="200"/>
+                <a:spcPts val="250"/>
               </a:spcAft>
             </a:pPr>
             <a:r>
-              <a:rPr sz="1200" b="1" lang="zh-TW" dirty="0">
+              <a:rPr sz="1500" b="1" lang="zh-TW" dirty="0">
                 <a:solidFill>
                   <a:srgbClr val="000000"/>
                 </a:solidFill>
@@ -1911,7 +1911,7 @@
               <a:t>第 4 題。</a:t>
             </a:r>
             <a:r>
-              <a:rPr sz="1200" lang="zh-TW" dirty="0">
+              <a:rPr sz="1500" lang="zh-TW" dirty="0">
                 <a:solidFill>
                   <a:srgbClr val="000000"/>
                 </a:solidFill>
@@ -1922,7 +1922,7 @@
               <a:t>畫面裡八台機車，框大多是橘色。看表格，機車那幾列，雷達點不是零的只有兩台：十六點八公尺那台兩個點，二十一點八公尺有一台一個點。答案是 </a:t>
             </a:r>
             <a:r>
-              <a:rPr sz="1200" b="1" lang="zh-TW" dirty="0">
+              <a:rPr sz="1500" b="1" lang="zh-TW" dirty="0">
                 <a:solidFill>
                   <a:srgbClr val="000000"/>
                 </a:solidFill>
@@ -1933,7 +1933,7 @@
               <a:t>2 台</a:t>
             </a:r>
             <a:r>
-              <a:rPr sz="1200" lang="zh-TW" dirty="0">
+              <a:rPr sz="1500" lang="zh-TW" dirty="0">
                 <a:solidFill>
                   <a:srgbClr val="000000"/>
                 </a:solidFill>
@@ -1951,11 +1951,11 @@
                 <a:spcPts val="0"/>
               </a:spcBef>
               <a:spcAft>
-                <a:spcPts val="200"/>
+                <a:spcPts val="250"/>
               </a:spcAft>
             </a:pPr>
             <a:r>
-              <a:rPr sz="1200" b="1" lang="zh-TW" dirty="0">
+              <a:rPr sz="1500" b="1" lang="zh-TW" dirty="0">
                 <a:solidFill>
                   <a:srgbClr val="000000"/>
                 </a:solidFill>
@@ -1966,7 +1966,7 @@
               <a:t>第 5 題。</a:t>
             </a:r>
             <a:r>
-              <a:rPr sz="1200" lang="zh-TW" dirty="0">
+              <a:rPr sz="1500" lang="zh-TW" dirty="0">
                 <a:solidFill>
                   <a:srgbClr val="000000"/>
                 </a:solidFill>
@@ -1977,7 +1977,7 @@
               <a:t>右邊那幾台汽車，二十七到二十九公尺，四台框都是綠色，每台兩到三個雷達點，只有一台是一個點。答案是 </a:t>
             </a:r>
             <a:r>
-              <a:rPr sz="1200" b="1" lang="zh-TW" dirty="0">
+              <a:rPr sz="1500" b="1" lang="zh-TW" dirty="0">
                 <a:solidFill>
                   <a:srgbClr val="000000"/>
                 </a:solidFill>
@@ -1988,7 +1988,7 @@
               <a:t>4 台</a:t>
             </a:r>
             <a:r>
-              <a:rPr sz="1200" lang="zh-TW" dirty="0">
+              <a:rPr sz="1500" lang="zh-TW" dirty="0">
                 <a:solidFill>
                   <a:srgbClr val="000000"/>
                 </a:solidFill>
@@ -2006,11 +2006,11 @@
                 <a:spcPts val="0"/>
               </a:spcBef>
               <a:spcAft>
-                <a:spcPts val="200"/>
+                <a:spcPts val="250"/>
               </a:spcAft>
             </a:pPr>
             <a:r>
-              <a:rPr sz="1200" lang="zh-TW" dirty="0">
+              <a:rPr sz="1500" lang="zh-TW" dirty="0">
                 <a:solidFill>
                   <a:srgbClr val="000000"/>
                 </a:solidFill>
@@ -2021,7 +2021,7 @@
               <a:t>兩題放在一起看：</a:t>
             </a:r>
             <a:r>
-              <a:rPr sz="1200" b="1" lang="zh-TW" dirty="0">
+              <a:rPr sz="1500" b="1" lang="zh-TW" dirty="0">
                 <a:solidFill>
                   <a:srgbClr val="000000"/>
                 </a:solidFill>
@@ -2032,7 +2032,7 @@
               <a:t>機車比汽車近，雷達反而抓不太到。</a:t>
             </a:r>
             <a:r>
-              <a:rPr sz="1200" lang="zh-TW" dirty="0">
+              <a:rPr sz="1500" lang="zh-TW" dirty="0">
                 <a:solidFill>
                   <a:srgbClr val="000000"/>
                 </a:solidFill>
@@ -2050,11 +2050,11 @@
                 <a:spcPts val="0"/>
               </a:spcBef>
               <a:spcAft>
-                <a:spcPts val="200"/>
+                <a:spcPts val="250"/>
               </a:spcAft>
             </a:pPr>
             <a:r>
-              <a:rPr sz="1200" lang="zh-TW" dirty="0">
+              <a:rPr sz="1500" lang="zh-TW" dirty="0">
                 <a:solidFill>
                   <a:srgbClr val="000000"/>
                 </a:solidFill>
@@ -2141,8 +2141,8 @@
         </p:nvSpPr>
         <p:spPr>
           <a:xfrm>
-            <a:off x="540000" y="540000"/>
-            <a:ext cx="6480000" cy="3645000"/>
+            <a:off x="1620000" y="380000"/>
+            <a:ext cx="4320000" cy="2430000"/>
           </a:xfrm>
         </p:spPr>
       </p:sp>
@@ -2158,8 +2158,8 @@
         </p:nvSpPr>
         <p:spPr>
           <a:xfrm>
-            <a:off x="540000" y="4440000"/>
-            <a:ext cx="6480000" cy="5500000"/>
+            <a:off x="540000" y="2990000"/>
+            <a:ext cx="6480000" cy="7060000"/>
           </a:xfrm>
         </p:spPr>
         <p:txBody>
@@ -2171,11 +2171,11 @@
                 <a:spcPts val="0"/>
               </a:spcBef>
               <a:spcAft>
-                <a:spcPts val="183"/>
+                <a:spcPts val="217"/>
               </a:spcAft>
             </a:pPr>
             <a:r>
-              <a:rPr sz="1100" b="1" lang="zh-TW" dirty="0">
+              <a:rPr sz="1300" b="1" lang="zh-TW" dirty="0">
                 <a:solidFill>
                   <a:srgbClr val="000000"/>
                 </a:solidFill>
@@ -2186,7 +2186,7 @@
               <a:t>這一張的目的：</a:t>
             </a:r>
             <a:r>
-              <a:rPr sz="1100" lang="zh-TW" dirty="0">
+              <a:rPr sz="1300" lang="zh-TW" dirty="0">
                 <a:solidFill>
                   <a:srgbClr val="000000"/>
                 </a:solidFill>
@@ -2204,11 +2204,11 @@
                 <a:spcPts val="0"/>
               </a:spcBef>
               <a:spcAft>
-                <a:spcPts val="183"/>
+                <a:spcPts val="217"/>
               </a:spcAft>
             </a:pPr>
             <a:r>
-              <a:rPr sz="1100" lang="zh-TW" dirty="0">
+              <a:rPr sz="1300" lang="zh-TW" dirty="0">
                 <a:solidFill>
                   <a:srgbClr val="000000"/>
                 </a:solidFill>
@@ -2219,7 +2219,7 @@
               <a:t>任務三，</a:t>
             </a:r>
             <a:r>
-              <a:rPr sz="1100" b="1" lang="zh-TW" dirty="0">
+              <a:rPr sz="1300" b="1" lang="zh-TW" dirty="0">
                 <a:solidFill>
                   <a:srgbClr val="000000"/>
                 </a:solidFill>
@@ -2230,7 +2230,7 @@
               <a:t>新加坡，晚上的一個路口</a:t>
             </a:r>
             <a:r>
-              <a:rPr sz="1100" lang="zh-TW" dirty="0">
+              <a:rPr sz="1300" lang="zh-TW" dirty="0">
                 <a:solidFill>
                   <a:srgbClr val="000000"/>
                 </a:solidFill>
@@ -2248,11 +2248,11 @@
                 <a:spcPts val="0"/>
               </a:spcBef>
               <a:spcAft>
-                <a:spcPts val="183"/>
+                <a:spcPts val="217"/>
               </a:spcAft>
             </a:pPr>
             <a:r>
-              <a:rPr sz="1100" lang="zh-TW" dirty="0">
+              <a:rPr sz="1300" lang="zh-TW" dirty="0">
                 <a:solidFill>
                   <a:srgbClr val="000000"/>
                 </a:solidFill>
@@ -2263,7 +2263,7 @@
               <a:t>先把所有開關</a:t>
             </a:r>
             <a:r>
-              <a:rPr sz="1100" b="1" lang="zh-TW" dirty="0">
+              <a:rPr sz="1300" b="1" lang="zh-TW" dirty="0">
                 <a:solidFill>
                   <a:srgbClr val="000000"/>
                 </a:solidFill>
@@ -2274,7 +2274,7 @@
               <a:t>全部關掉</a:t>
             </a:r>
             <a:r>
-              <a:rPr sz="1100" lang="zh-TW" dirty="0">
+              <a:rPr sz="1300" lang="zh-TW" dirty="0">
                 <a:solidFill>
                   <a:srgbClr val="000000"/>
                 </a:solidFill>
@@ -2285,7 +2285,7 @@
               <a:t>，只看照片。路燈很亮，地上很暗，右邊有一台黑色的車正開過路口，車身很暗。</a:t>
             </a:r>
             <a:r>
-              <a:rPr sz="1100" b="1" lang="zh-TW" dirty="0">
+              <a:rPr sz="1300" b="1" lang="zh-TW" dirty="0">
                 <a:solidFill>
                   <a:srgbClr val="000000"/>
                 </a:solidFill>
@@ -2296,7 +2296,7 @@
               <a:t>相機在晚上，就是這個樣子。</a:t>
             </a:r>
             <a:r>
-              <a:rPr sz="1100" lang="zh-TW" dirty="0">
+              <a:rPr sz="1300" lang="zh-TW" dirty="0">
                 <a:solidFill>
                   <a:srgbClr val="000000"/>
                 </a:solidFill>
@@ -2314,11 +2314,11 @@
                 <a:spcPts val="0"/>
               </a:spcBef>
               <a:spcAft>
-                <a:spcPts val="183"/>
+                <a:spcPts val="217"/>
               </a:spcAft>
             </a:pPr>
             <a:r>
-              <a:rPr sz="1100" lang="zh-TW" dirty="0">
+              <a:rPr sz="1300" lang="zh-TW" dirty="0">
                 <a:solidFill>
                   <a:srgbClr val="000000"/>
                 </a:solidFill>
@@ -2336,11 +2336,11 @@
                 <a:spcPts val="0"/>
               </a:spcBef>
               <a:spcAft>
-                <a:spcPts val="183"/>
+                <a:spcPts val="217"/>
               </a:spcAft>
             </a:pPr>
             <a:r>
-              <a:rPr sz="1100" lang="zh-TW" dirty="0">
+              <a:rPr sz="1300" lang="zh-TW" dirty="0">
                 <a:solidFill>
                   <a:srgbClr val="000000"/>
                 </a:solidFill>
@@ -2358,11 +2358,11 @@
                 <a:spcPts val="0"/>
               </a:spcBef>
               <a:spcAft>
-                <a:spcPts val="183"/>
+                <a:spcPts val="217"/>
               </a:spcAft>
             </a:pPr>
             <a:r>
-              <a:rPr sz="1100" b="1" lang="zh-TW" dirty="0">
+              <a:rPr sz="1300" b="1" lang="zh-TW" dirty="0">
                 <a:solidFill>
                   <a:srgbClr val="000000"/>
                 </a:solidFill>
@@ -2373,7 +2373,7 @@
               <a:t>第 6 題。</a:t>
             </a:r>
             <a:r>
-              <a:rPr sz="1100" lang="zh-TW" dirty="0">
+              <a:rPr sz="1300" lang="zh-TW" dirty="0">
                 <a:solidFill>
                   <a:srgbClr val="000000"/>
                 </a:solidFill>
@@ -2384,7 +2384,7 @@
               <a:t>看「數一數」第一格：三千三百二十五個。白天是三千零一十三個。答案是</a:t>
             </a:r>
             <a:r>
-              <a:rPr sz="1100" b="1" lang="zh-TW" dirty="0">
+              <a:rPr sz="1300" b="1" lang="zh-TW" dirty="0">
                 <a:solidFill>
                   <a:srgbClr val="000000"/>
                 </a:solidFill>
@@ -2395,7 +2395,7 @@
               <a:t>差不多</a:t>
             </a:r>
             <a:r>
-              <a:rPr sz="1100" lang="zh-TW" dirty="0">
+              <a:rPr sz="1300" lang="zh-TW" dirty="0">
                 <a:solidFill>
                   <a:srgbClr val="000000"/>
                 </a:solidFill>
@@ -2406,7 +2406,7 @@
               <a:t>。為什麼？光達自己打雷射出去，</a:t>
             </a:r>
             <a:r>
-              <a:rPr sz="1100" b="1" lang="zh-TW" dirty="0">
+              <a:rPr sz="1300" b="1" lang="zh-TW" dirty="0">
                 <a:solidFill>
                   <a:srgbClr val="000000"/>
                 </a:solidFill>
@@ -2417,7 +2417,7 @@
               <a:t>不需要外面的光</a:t>
             </a:r>
             <a:r>
-              <a:rPr sz="1100" lang="zh-TW" dirty="0">
+              <a:rPr sz="1300" lang="zh-TW" dirty="0">
                 <a:solidFill>
                   <a:srgbClr val="000000"/>
                 </a:solidFill>
@@ -2435,11 +2435,11 @@
                 <a:spcPts val="0"/>
               </a:spcBef>
               <a:spcAft>
-                <a:spcPts val="183"/>
+                <a:spcPts val="217"/>
               </a:spcAft>
             </a:pPr>
             <a:r>
-              <a:rPr sz="1100" b="1" lang="zh-TW" dirty="0">
+              <a:rPr sz="1300" b="1" lang="zh-TW" dirty="0">
                 <a:solidFill>
                   <a:srgbClr val="000000"/>
                 </a:solidFill>
@@ -2450,7 +2450,7 @@
               <a:t>第 7 題。</a:t>
             </a:r>
             <a:r>
-              <a:rPr sz="1100" lang="zh-TW" dirty="0">
+              <a:rPr sz="1300" lang="zh-TW" dirty="0">
                 <a:solidFill>
                   <a:srgbClr val="000000"/>
                 </a:solidFill>
@@ -2461,7 +2461,7 @@
               <a:t>看表格十五點六公尺那一台車，「前方相機畫面」有 ● 的那一列：</a:t>
             </a:r>
             <a:r>
-              <a:rPr sz="1100" b="1" lang="zh-TW" dirty="0">
+              <a:rPr sz="1300" b="1" lang="zh-TW" dirty="0">
                 <a:solidFill>
                   <a:srgbClr val="000000"/>
                 </a:solidFill>
@@ -2472,7 +2472,7 @@
               <a:t>光達七十三個點、雷達七個點。</a:t>
             </a:r>
             <a:r>
-              <a:rPr sz="1100" lang="zh-TW" dirty="0">
+              <a:rPr sz="1300" lang="zh-TW" dirty="0">
                 <a:solidFill>
                   <a:srgbClr val="000000"/>
                 </a:solidFill>
@@ -2490,11 +2490,11 @@
                 <a:spcPts val="0"/>
               </a:spcBef>
               <a:spcAft>
-                <a:spcPts val="183"/>
+                <a:spcPts val="217"/>
               </a:spcAft>
             </a:pPr>
             <a:r>
-              <a:rPr sz="1100" lang="zh-TW" dirty="0">
+              <a:rPr sz="1300" lang="zh-TW" dirty="0">
                 <a:solidFill>
                   <a:srgbClr val="000000"/>
                 </a:solidFill>
@@ -2512,11 +2512,11 @@
                 <a:spcPts val="0"/>
               </a:spcBef>
               <a:spcAft>
-                <a:spcPts val="183"/>
+                <a:spcPts val="217"/>
               </a:spcAft>
             </a:pPr>
             <a:r>
-              <a:rPr sz="1100" lang="zh-TW" dirty="0">
+              <a:rPr sz="1300" lang="zh-TW" dirty="0">
                 <a:solidFill>
                   <a:srgbClr val="000000"/>
                 </a:solidFill>
@@ -2527,7 +2527,7 @@
               <a:t>所以晚上的時候，</a:t>
             </a:r>
             <a:r>
-              <a:rPr sz="1100" b="1" lang="zh-TW" dirty="0">
+              <a:rPr sz="1300" b="1" lang="zh-TW" dirty="0">
                 <a:solidFill>
                   <a:srgbClr val="000000"/>
                 </a:solidFill>
@@ -2538,7 +2538,7 @@
               <a:t>相機看不清楚，光達和雷達照樣量得到</a:t>
             </a:r>
             <a:r>
-              <a:rPr sz="1100" lang="zh-TW" dirty="0">
+              <a:rPr sz="1300" lang="zh-TW" dirty="0">
                 <a:solidFill>
                   <a:srgbClr val="000000"/>
                 </a:solidFill>
@@ -2556,11 +2556,11 @@
                 <a:spcPts val="0"/>
               </a:spcBef>
               <a:spcAft>
-                <a:spcPts val="183"/>
+                <a:spcPts val="217"/>
               </a:spcAft>
             </a:pPr>
             <a:r>
-              <a:rPr sz="1100" lang="zh-TW" dirty="0">
+              <a:rPr sz="1300" lang="zh-TW" dirty="0">
                 <a:solidFill>
                   <a:srgbClr val="000000"/>
                 </a:solidFill>
@@ -2647,8 +2647,8 @@
         </p:nvSpPr>
         <p:spPr>
           <a:xfrm>
-            <a:off x="540000" y="540000"/>
-            <a:ext cx="6480000" cy="3645000"/>
+            <a:off x="1620000" y="380000"/>
+            <a:ext cx="4320000" cy="2430000"/>
           </a:xfrm>
         </p:spPr>
       </p:sp>
@@ -2664,8 +2664,8 @@
         </p:nvSpPr>
         <p:spPr>
           <a:xfrm>
-            <a:off x="540000" y="4440000"/>
-            <a:ext cx="6480000" cy="5500000"/>
+            <a:off x="540000" y="2990000"/>
+            <a:ext cx="6480000" cy="7060000"/>
           </a:xfrm>
         </p:spPr>
         <p:txBody>
@@ -2677,11 +2677,11 @@
                 <a:spcPts val="0"/>
               </a:spcBef>
               <a:spcAft>
-                <a:spcPts val="192"/>
+                <a:spcPts val="233"/>
               </a:spcAft>
             </a:pPr>
             <a:r>
-              <a:rPr sz="1150" b="1" lang="zh-TW" dirty="0">
+              <a:rPr sz="1400" b="1" lang="zh-TW" dirty="0">
                 <a:solidFill>
                   <a:srgbClr val="000000"/>
                 </a:solidFill>
@@ -2692,7 +2692,7 @@
               <a:t>這一張的目的：</a:t>
             </a:r>
             <a:r>
-              <a:rPr sz="1150" lang="zh-TW" dirty="0">
+              <a:rPr sz="1400" lang="zh-TW" dirty="0">
                 <a:solidFill>
                   <a:srgbClr val="000000"/>
                 </a:solidFill>
@@ -2710,11 +2710,11 @@
                 <a:spcPts val="0"/>
               </a:spcBef>
               <a:spcAft>
-                <a:spcPts val="192"/>
+                <a:spcPts val="233"/>
               </a:spcAft>
             </a:pPr>
             <a:r>
-              <a:rPr sz="1150" lang="zh-TW" dirty="0">
+              <a:rPr sz="1400" lang="zh-TW" dirty="0">
                 <a:solidFill>
                   <a:srgbClr val="000000"/>
                 </a:solidFill>
@@ -2725,7 +2725,7 @@
               <a:t>任務四，</a:t>
             </a:r>
             <a:r>
-              <a:rPr sz="1150" b="1" lang="zh-TW" dirty="0">
+              <a:rPr sz="1400" b="1" lang="zh-TW" dirty="0">
                 <a:solidFill>
                   <a:srgbClr val="000000"/>
                 </a:solidFill>
@@ -2736,7 +2736,7 @@
               <a:t>新加坡，晚上，剛下過雨</a:t>
             </a:r>
             <a:r>
-              <a:rPr sz="1150" lang="zh-TW" dirty="0">
+              <a:rPr sz="1400" lang="zh-TW" dirty="0">
                 <a:solidFill>
                   <a:srgbClr val="000000"/>
                 </a:solidFill>
@@ -2754,11 +2754,11 @@
                 <a:spcPts val="0"/>
               </a:spcBef>
               <a:spcAft>
-                <a:spcPts val="192"/>
+                <a:spcPts val="233"/>
               </a:spcAft>
             </a:pPr>
             <a:r>
-              <a:rPr sz="1150" lang="zh-TW" dirty="0">
+              <a:rPr sz="1400" lang="zh-TW" dirty="0">
                 <a:solidFill>
                   <a:srgbClr val="000000"/>
                 </a:solidFill>
@@ -2769,7 +2769,7 @@
               <a:t>畫面右邊，有一個人正走在斑馬線上，離車子大約十公尺。他的框是一個很大的</a:t>
             </a:r>
             <a:r>
-              <a:rPr sz="1150" b="1" lang="zh-TW" dirty="0">
+              <a:rPr sz="1400" b="1" lang="zh-TW" dirty="0">
                 <a:solidFill>
                   <a:srgbClr val="000000"/>
                 </a:solidFill>
@@ -2780,7 +2780,7 @@
               <a:t>橘色</a:t>
             </a:r>
             <a:r>
-              <a:rPr sz="1150" lang="zh-TW" dirty="0">
+              <a:rPr sz="1400" lang="zh-TW" dirty="0">
                 <a:solidFill>
                   <a:srgbClr val="000000"/>
                 </a:solidFill>
@@ -2798,11 +2798,11 @@
                 <a:spcPts val="0"/>
               </a:spcBef>
               <a:spcAft>
-                <a:spcPts val="192"/>
+                <a:spcPts val="233"/>
               </a:spcAft>
             </a:pPr>
             <a:r>
-              <a:rPr sz="1150" lang="zh-TW" dirty="0">
+              <a:rPr sz="1400" lang="zh-TW" dirty="0">
                 <a:solidFill>
                   <a:srgbClr val="000000"/>
                 </a:solidFill>
@@ -2820,11 +2820,11 @@
                 <a:spcPts val="0"/>
               </a:spcBef>
               <a:spcAft>
-                <a:spcPts val="192"/>
+                <a:spcPts val="233"/>
               </a:spcAft>
             </a:pPr>
             <a:r>
-              <a:rPr sz="1150" b="1" lang="zh-TW" dirty="0">
+              <a:rPr sz="1400" b="1" lang="zh-TW" dirty="0">
                 <a:solidFill>
                   <a:srgbClr val="000000"/>
                 </a:solidFill>
@@ -2835,7 +2835,7 @@
               <a:t>第 8 題。</a:t>
             </a:r>
             <a:r>
-              <a:rPr sz="1150" lang="zh-TW" dirty="0">
+              <a:rPr sz="1400" lang="zh-TW" dirty="0">
                 <a:solidFill>
                   <a:srgbClr val="000000"/>
                 </a:solidFill>
@@ -2846,7 +2846,7 @@
               <a:t>表格十點二公尺那一列：</a:t>
             </a:r>
             <a:r>
-              <a:rPr sz="1150" b="1" lang="zh-TW" dirty="0">
+              <a:rPr sz="1400" b="1" lang="zh-TW" dirty="0">
                 <a:solidFill>
                   <a:srgbClr val="000000"/>
                 </a:solidFill>
@@ -2857,7 +2857,7 @@
               <a:t>光達四十九個點，雷達零個。</a:t>
             </a:r>
             <a:r>
-              <a:rPr sz="1150" lang="zh-TW" dirty="0">
+              <a:rPr sz="1400" lang="zh-TW" dirty="0">
                 <a:solidFill>
                   <a:srgbClr val="000000"/>
                 </a:solidFill>
@@ -2875,11 +2875,11 @@
                 <a:spcPts val="0"/>
               </a:spcBef>
               <a:spcAft>
-                <a:spcPts val="192"/>
+                <a:spcPts val="233"/>
               </a:spcAft>
             </a:pPr>
             <a:r>
-              <a:rPr sz="1150" lang="zh-TW" dirty="0">
+              <a:rPr sz="1400" lang="zh-TW" dirty="0">
                 <a:solidFill>
                   <a:srgbClr val="000000"/>
                 </a:solidFill>
@@ -2897,11 +2897,11 @@
                 <a:spcPts val="0"/>
               </a:spcBef>
               <a:spcAft>
-                <a:spcPts val="192"/>
+                <a:spcPts val="233"/>
               </a:spcAft>
             </a:pPr>
             <a:r>
-              <a:rPr sz="1150" b="1" lang="zh-TW" dirty="0">
+              <a:rPr sz="1400" b="1" lang="zh-TW" dirty="0">
                 <a:solidFill>
                   <a:srgbClr val="000000"/>
                 </a:solidFill>
@@ -2912,7 +2912,7 @@
               <a:t>第 9 題。</a:t>
             </a:r>
             <a:r>
-              <a:rPr sz="1150" lang="zh-TW" dirty="0">
+              <a:rPr sz="1400" lang="zh-TW" dirty="0">
                 <a:solidFill>
                   <a:srgbClr val="000000"/>
                 </a:solidFill>
@@ -2923,7 +2923,7 @@
               <a:t>要靠誰來補？想兩件事：</a:t>
             </a:r>
             <a:r>
-              <a:rPr sz="1150" b="1" lang="zh-TW" dirty="0">
+              <a:rPr sz="1400" b="1" lang="zh-TW" dirty="0">
                 <a:solidFill>
                   <a:srgbClr val="000000"/>
                 </a:solidFill>
@@ -2934,7 +2934,7 @@
               <a:t>誰在他身上有點？</a:t>
             </a:r>
             <a:r>
-              <a:rPr sz="1150" lang="zh-TW" dirty="0">
+              <a:rPr sz="1400" lang="zh-TW" dirty="0">
                 <a:solidFill>
                   <a:srgbClr val="000000"/>
                 </a:solidFill>
@@ -2945,7 +2945,7 @@
               <a:t>光達有四十九個點，知道他在哪裡、多遠。</a:t>
             </a:r>
             <a:r>
-              <a:rPr sz="1150" b="1" lang="zh-TW" dirty="0">
+              <a:rPr sz="1400" b="1" lang="zh-TW" dirty="0">
                 <a:solidFill>
                   <a:srgbClr val="000000"/>
                 </a:solidFill>
@@ -2956,7 +2956,7 @@
               <a:t>誰認得出他是一個人？</a:t>
             </a:r>
             <a:r>
-              <a:rPr sz="1150" lang="zh-TW" dirty="0">
+              <a:rPr sz="1400" lang="zh-TW" dirty="0">
                 <a:solidFill>
                   <a:srgbClr val="000000"/>
                 </a:solidFill>
@@ -2967,7 +2967,7 @@
               <a:t>光達的四十九個點，只是一小團；要知道那是人、不是一根柱子，要靠相機。答案是</a:t>
             </a:r>
             <a:r>
-              <a:rPr sz="1150" b="1" lang="zh-TW" dirty="0">
+              <a:rPr sz="1400" b="1" lang="zh-TW" dirty="0">
                 <a:solidFill>
                   <a:srgbClr val="000000"/>
                 </a:solidFill>
@@ -2978,7 +2978,7 @@
               <a:t>光達和相機</a:t>
             </a:r>
             <a:r>
-              <a:rPr sz="1150" lang="zh-TW" dirty="0">
+              <a:rPr sz="1400" lang="zh-TW" dirty="0">
                 <a:solidFill>
                   <a:srgbClr val="000000"/>
                 </a:solidFill>
@@ -2996,11 +2996,11 @@
                 <a:spcPts val="0"/>
               </a:spcBef>
               <a:spcAft>
-                <a:spcPts val="192"/>
+                <a:spcPts val="233"/>
               </a:spcAft>
             </a:pPr>
             <a:r>
-              <a:rPr sz="1150" lang="zh-TW" dirty="0">
+              <a:rPr sz="1400" lang="zh-TW" dirty="0">
                 <a:solidFill>
                   <a:srgbClr val="000000"/>
                 </a:solidFill>
@@ -3018,11 +3018,11 @@
                 <a:spcPts val="0"/>
               </a:spcBef>
               <a:spcAft>
-                <a:spcPts val="192"/>
+                <a:spcPts val="233"/>
               </a:spcAft>
             </a:pPr>
             <a:r>
-              <a:rPr sz="1150" lang="zh-TW" dirty="0">
+              <a:rPr sz="1400" lang="zh-TW" dirty="0">
                 <a:solidFill>
                   <a:srgbClr val="000000"/>
                 </a:solidFill>
@@ -3109,8 +3109,8 @@
         </p:nvSpPr>
         <p:spPr>
           <a:xfrm>
-            <a:off x="540000" y="540000"/>
-            <a:ext cx="6480000" cy="3645000"/>
+            <a:off x="1620000" y="380000"/>
+            <a:ext cx="4320000" cy="2430000"/>
           </a:xfrm>
         </p:spPr>
       </p:sp>
@@ -3126,8 +3126,8 @@
         </p:nvSpPr>
         <p:spPr>
           <a:xfrm>
-            <a:off x="540000" y="4440000"/>
-            <a:ext cx="6480000" cy="5500000"/>
+            <a:off x="540000" y="2990000"/>
+            <a:ext cx="6480000" cy="7060000"/>
           </a:xfrm>
         </p:spPr>
         <p:txBody>
@@ -3139,11 +3139,11 @@
                 <a:spcPts val="0"/>
               </a:spcBef>
               <a:spcAft>
-                <a:spcPts val="158"/>
+                <a:spcPts val="183"/>
               </a:spcAft>
             </a:pPr>
             <a:r>
-              <a:rPr sz="950" b="1" lang="zh-TW" dirty="0">
+              <a:rPr sz="1100" b="1" lang="zh-TW" dirty="0">
                 <a:solidFill>
                   <a:srgbClr val="000000"/>
                 </a:solidFill>
@@ -3154,7 +3154,7 @@
               <a:t>這一張的目的：</a:t>
             </a:r>
             <a:r>
-              <a:rPr sz="950" lang="zh-TW" dirty="0">
+              <a:rPr sz="1100" lang="zh-TW" dirty="0">
                 <a:solidFill>
                   <a:srgbClr val="000000"/>
                 </a:solidFill>
@@ -3172,11 +3172,11 @@
                 <a:spcPts val="0"/>
               </a:spcBef>
               <a:spcAft>
-                <a:spcPts val="158"/>
+                <a:spcPts val="183"/>
               </a:spcAft>
             </a:pPr>
             <a:r>
-              <a:rPr sz="950" lang="zh-TW" dirty="0">
+              <a:rPr sz="1100" lang="zh-TW" dirty="0">
                 <a:solidFill>
                   <a:srgbClr val="000000"/>
                 </a:solidFill>
@@ -3187,7 +3187,7 @@
               <a:t>任務五，</a:t>
             </a:r>
             <a:r>
-              <a:rPr sz="950" b="1" lang="zh-TW" dirty="0">
+              <a:rPr sz="1100" b="1" lang="zh-TW" dirty="0">
                 <a:solidFill>
                   <a:srgbClr val="000000"/>
                 </a:solidFill>
@@ -3198,7 +3198,7 @@
               <a:t>搭檔卡</a:t>
             </a:r>
             <a:r>
-              <a:rPr sz="950" lang="zh-TW" dirty="0">
+              <a:rPr sz="1100" lang="zh-TW" dirty="0">
                 <a:solidFill>
                   <a:srgbClr val="000000"/>
                 </a:solidFill>
@@ -3216,11 +3216,11 @@
                 <a:spcPts val="0"/>
               </a:spcBef>
               <a:spcAft>
-                <a:spcPts val="158"/>
+                <a:spcPts val="183"/>
               </a:spcAft>
             </a:pPr>
             <a:r>
-              <a:rPr sz="950" lang="zh-TW" dirty="0">
+              <a:rPr sz="1100" lang="zh-TW" dirty="0">
                 <a:solidFill>
                   <a:srgbClr val="000000"/>
                 </a:solidFill>
@@ -3231,7 +3231,7 @@
               <a:t>先示範一下。場景按「夜間雨後」，打開相機畫面上方那排最右邊、新的開關「</a:t>
             </a:r>
             <a:r>
-              <a:rPr sz="950" b="1" lang="zh-TW" dirty="0">
+              <a:rPr sz="1100" b="1" lang="zh-TW" dirty="0">
                 <a:solidFill>
                   <a:srgbClr val="000000"/>
                 </a:solidFill>
@@ -3242,7 +3242,7 @@
               <a:t>合起來</a:t>
             </a:r>
             <a:r>
-              <a:rPr sz="950" lang="zh-TW" dirty="0">
+              <a:rPr sz="1100" lang="zh-TW" dirty="0">
                 <a:solidFill>
                   <a:srgbClr val="000000"/>
                 </a:solidFill>
@@ -3260,11 +3260,11 @@
                 <a:spcPts val="0"/>
               </a:spcBef>
               <a:spcAft>
-                <a:spcPts val="158"/>
+                <a:spcPts val="183"/>
               </a:spcAft>
             </a:pPr>
             <a:r>
-              <a:rPr sz="950" lang="zh-TW" dirty="0">
+              <a:rPr sz="1100" lang="zh-TW" dirty="0">
                 <a:solidFill>
                   <a:srgbClr val="000000"/>
                 </a:solidFill>
@@ -3282,11 +3282,11 @@
                 <a:spcPts val="0"/>
               </a:spcBef>
               <a:spcAft>
-                <a:spcPts val="158"/>
+                <a:spcPts val="183"/>
               </a:spcAft>
             </a:pPr>
             <a:r>
-              <a:rPr sz="950" b="1" lang="zh-TW" dirty="0">
+              <a:rPr sz="1100" b="1" lang="zh-TW" dirty="0">
                 <a:solidFill>
                   <a:srgbClr val="000000"/>
                 </a:solidFill>
@@ -3297,7 +3297,7 @@
               <a:t>第 10 題。</a:t>
             </a:r>
             <a:r>
-              <a:rPr sz="950" lang="zh-TW" dirty="0">
+              <a:rPr sz="1100" lang="zh-TW" dirty="0">
                 <a:solidFill>
                   <a:srgbClr val="000000"/>
                 </a:solidFill>
@@ -3308,7 +3308,7 @@
               <a:t>表格 12.0 m 那台車，就是畫面最左邊、只拍到一半的那一台。「雷達：多快」寫「遠離 18」。所以答案是：</a:t>
             </a:r>
             <a:r>
-              <a:rPr sz="950" b="1" lang="zh-TW" dirty="0">
+              <a:rPr sz="1100" b="1" lang="zh-TW" dirty="0">
                 <a:solidFill>
                   <a:srgbClr val="000000"/>
                 </a:solidFill>
@@ -3319,7 +3319,7 @@
               <a:t>一台車，約 12 公尺，正以時速約 18 公里遠離。</a:t>
             </a:r>
             <a:r>
-              <a:rPr sz="950" lang="zh-TW" dirty="0">
+              <a:rPr sz="1100" lang="zh-TW" dirty="0">
                 <a:solidFill>
                   <a:srgbClr val="000000"/>
                 </a:solidFill>
@@ -3337,11 +3337,11 @@
                 <a:spcPts val="0"/>
               </a:spcBef>
               <a:spcAft>
-                <a:spcPts val="158"/>
+                <a:spcPts val="183"/>
               </a:spcAft>
             </a:pPr>
             <a:r>
-              <a:rPr sz="950" b="1" lang="zh-TW" dirty="0">
+              <a:rPr sz="1100" b="1" lang="zh-TW" dirty="0">
                 <a:solidFill>
                   <a:srgbClr val="000000"/>
                 </a:solidFill>
@@ -3352,7 +3352,7 @@
               <a:t>第 11 題。</a:t>
             </a:r>
             <a:r>
-              <a:rPr sz="950" lang="zh-TW" dirty="0">
+              <a:rPr sz="1100" lang="zh-TW" dirty="0">
                 <a:solidFill>
                   <a:srgbClr val="000000"/>
                 </a:solidFill>
@@ -3363,7 +3363,7 @@
               <a:t>「一台車」最靠</a:t>
             </a:r>
             <a:r>
-              <a:rPr sz="950" b="1" lang="zh-TW" dirty="0">
+              <a:rPr sz="1100" b="1" lang="zh-TW" dirty="0">
                 <a:solidFill>
                   <a:srgbClr val="000000"/>
                 </a:solidFill>
@@ -3374,7 +3374,7 @@
               <a:t>相機</a:t>
             </a:r>
             <a:r>
-              <a:rPr sz="950" lang="zh-TW" dirty="0">
+              <a:rPr sz="1100" lang="zh-TW" dirty="0">
                 <a:solidFill>
                   <a:srgbClr val="000000"/>
                 </a:solidFill>
@@ -3385,7 +3385,7 @@
               <a:t>，只有它認得出那是車；「12 公尺」最靠</a:t>
             </a:r>
             <a:r>
-              <a:rPr sz="950" b="1" lang="zh-TW" dirty="0">
+              <a:rPr sz="1100" b="1" lang="zh-TW" dirty="0">
                 <a:solidFill>
                   <a:srgbClr val="000000"/>
                 </a:solidFill>
@@ -3396,7 +3396,7 @@
               <a:t>光達</a:t>
             </a:r>
             <a:r>
-              <a:rPr sz="950" lang="zh-TW" dirty="0">
+              <a:rPr sz="1100" lang="zh-TW" dirty="0">
                 <a:solidFill>
                   <a:srgbClr val="000000"/>
                 </a:solidFill>
@@ -3407,7 +3407,7 @@
               <a:t>，表格的距離是用官方標註的框算的，那個框是照光達的點畫出來的；「時速 18 遠離」最靠</a:t>
             </a:r>
             <a:r>
-              <a:rPr sz="950" b="1" lang="zh-TW" dirty="0">
+              <a:rPr sz="1100" b="1" lang="zh-TW" dirty="0">
                 <a:solidFill>
                   <a:srgbClr val="000000"/>
                 </a:solidFill>
@@ -3418,7 +3418,7 @@
               <a:t>雷達</a:t>
             </a:r>
             <a:r>
-              <a:rPr sz="950" lang="zh-TW" dirty="0">
+              <a:rPr sz="1100" lang="zh-TW" dirty="0">
                 <a:solidFill>
                   <a:srgbClr val="000000"/>
                 </a:solidFill>
@@ -3429,7 +3429,7 @@
               <a:t>，它用都卜勒直接量速度。答案是「</a:t>
             </a:r>
             <a:r>
-              <a:rPr sz="950" b="1" lang="zh-TW" dirty="0">
+              <a:rPr sz="1100" b="1" lang="zh-TW" dirty="0">
                 <a:solidFill>
                   <a:srgbClr val="000000"/>
                 </a:solidFill>
@@ -3440,7 +3440,7 @@
               <a:t>相機／光達／雷達</a:t>
             </a:r>
             <a:r>
-              <a:rPr sz="950" lang="zh-TW" dirty="0">
+              <a:rPr sz="1100" lang="zh-TW" dirty="0">
                 <a:solidFill>
                   <a:srgbClr val="000000"/>
                 </a:solidFill>
@@ -3458,11 +3458,11 @@
                 <a:spcPts val="0"/>
               </a:spcBef>
               <a:spcAft>
-                <a:spcPts val="158"/>
+                <a:spcPts val="183"/>
               </a:spcAft>
             </a:pPr>
             <a:r>
-              <a:rPr sz="950" b="1" lang="zh-TW" dirty="0">
+              <a:rPr sz="1100" b="1" lang="zh-TW" dirty="0">
                 <a:solidFill>
                   <a:srgbClr val="000000"/>
                 </a:solidFill>
@@ -3473,7 +3473,7 @@
               <a:t>第 12 題。</a:t>
             </a:r>
             <a:r>
-              <a:rPr sz="950" lang="zh-TW" dirty="0">
+              <a:rPr sz="1100" lang="zh-TW" dirty="0">
                 <a:solidFill>
                   <a:srgbClr val="000000"/>
                 </a:solidFill>
@@ -3484,7 +3484,7 @@
               <a:t>這題最重要。場景換「夜間」，那台黑色轎車，任務三看過，正在開過路口。可是「雷達：多快」寫 </a:t>
             </a:r>
             <a:r>
-              <a:rPr sz="950" b="1" lang="zh-TW" dirty="0">
+              <a:rPr sz="1100" b="1" lang="zh-TW" dirty="0">
                 <a:solidFill>
                   <a:srgbClr val="000000"/>
                 </a:solidFill>
@@ -3495,7 +3495,7 @@
               <a:t>≈0</a:t>
             </a:r>
             <a:r>
-              <a:rPr sz="950" lang="zh-TW" dirty="0">
+              <a:rPr sz="1100" lang="zh-TW" dirty="0">
                 <a:solidFill>
                   <a:srgbClr val="000000"/>
                 </a:solidFill>
@@ -3506,7 +3506,7 @@
               <a:t>。雷達壞了嗎？沒有。我用官方標註算過，這台車實際上大約時速二十二，可是它是</a:t>
             </a:r>
             <a:r>
-              <a:rPr sz="950" b="1" lang="zh-TW" dirty="0">
+              <a:rPr sz="1100" b="1" lang="zh-TW" dirty="0">
                 <a:solidFill>
                   <a:srgbClr val="000000"/>
                 </a:solidFill>
@@ -3517,7 +3517,7 @@
               <a:t>橫著開</a:t>
             </a:r>
             <a:r>
-              <a:rPr sz="950" lang="zh-TW" dirty="0">
+              <a:rPr sz="1100" lang="zh-TW" dirty="0">
                 <a:solidFill>
                   <a:srgbClr val="000000"/>
                 </a:solidFill>
@@ -3528,7 +3528,7 @@
               <a:t>的，朝我們靠近的那一段速度，只有時速五左右。雷達用都卜勒量速度，只量得到「朝我來、離我去」的那一段。就像站在路邊看一台車從左邊開到右邊，它沒有變近、也沒有變遠。答案是「</a:t>
             </a:r>
             <a:r>
-              <a:rPr sz="950" b="1" lang="zh-TW" dirty="0">
+              <a:rPr sz="1100" b="1" lang="zh-TW" dirty="0">
                 <a:solidFill>
                   <a:srgbClr val="000000"/>
                 </a:solidFill>
@@ -3539,7 +3539,7 @@
               <a:t>它是橫著開，雷達只量得到朝自己靠近或遠離的那一段</a:t>
             </a:r>
             <a:r>
-              <a:rPr sz="950" lang="zh-TW" dirty="0">
+              <a:rPr sz="1100" lang="zh-TW" dirty="0">
                 <a:solidFill>
                   <a:srgbClr val="000000"/>
                 </a:solidFill>
@@ -3557,11 +3557,11 @@
                 <a:spcPts val="0"/>
               </a:spcBef>
               <a:spcAft>
-                <a:spcPts val="158"/>
+                <a:spcPts val="183"/>
               </a:spcAft>
             </a:pPr>
             <a:r>
-              <a:rPr sz="950" lang="zh-TW" dirty="0">
+              <a:rPr sz="1100" lang="zh-TW" dirty="0">
                 <a:solidFill>
                   <a:srgbClr val="000000"/>
                 </a:solidFill>
@@ -3579,11 +3579,11 @@
                 <a:spcPts val="0"/>
               </a:spcBef>
               <a:spcAft>
-                <a:spcPts val="158"/>
+                <a:spcPts val="183"/>
               </a:spcAft>
             </a:pPr>
             <a:r>
-              <a:rPr sz="950" b="1" lang="zh-TW" dirty="0">
+              <a:rPr sz="1100" b="1" lang="zh-TW" dirty="0">
                 <a:solidFill>
                   <a:srgbClr val="000000"/>
                 </a:solidFill>
@@ -3594,7 +3594,7 @@
               <a:t>第 13 題。</a:t>
             </a:r>
             <a:r>
-              <a:rPr sz="950" lang="zh-TW" dirty="0">
+              <a:rPr sz="1100" lang="zh-TW" dirty="0">
                 <a:solidFill>
                   <a:srgbClr val="000000"/>
                 </a:solidFill>
@@ -3605,7 +3605,7 @@
               <a:t>斑馬線上 10.2 m 的行人，雷達一個點都沒有，速度是「—」。這一塊要怎麼補？速度就是「位置變了多少，除以過了多久」。光達每秒轉二十圈，把它連續幾格的位置記下來，一除就知道他走多快。答案是「</a:t>
             </a:r>
             <a:r>
-              <a:rPr sz="950" b="1" lang="zh-TW" dirty="0">
+              <a:rPr sz="1100" b="1" lang="zh-TW" dirty="0">
                 <a:solidFill>
                   <a:srgbClr val="000000"/>
                 </a:solidFill>
@@ -3616,7 +3616,7 @@
               <a:t>用光達（或相機）連續幾格的位置變化，算出他走多快</a:t>
             </a:r>
             <a:r>
-              <a:rPr sz="950" lang="zh-TW" dirty="0">
+              <a:rPr sz="1100" lang="zh-TW" dirty="0">
                 <a:solidFill>
                   <a:srgbClr val="000000"/>
                 </a:solidFill>
@@ -3634,11 +3634,11 @@
                 <a:spcPts val="0"/>
               </a:spcBef>
               <a:spcAft>
-                <a:spcPts val="158"/>
+                <a:spcPts val="183"/>
               </a:spcAft>
             </a:pPr>
             <a:r>
-              <a:rPr sz="950" lang="zh-TW" dirty="0">
+              <a:rPr sz="1100" lang="zh-TW" dirty="0">
                 <a:solidFill>
                   <a:srgbClr val="000000"/>
                 </a:solidFill>
@@ -3649,7 +3649,7 @@
               <a:t>四題做完，各位會發現：三種感測器各給一塊，</a:t>
             </a:r>
             <a:r>
-              <a:rPr sz="950" b="1" lang="zh-TW" dirty="0">
+              <a:rPr sz="1100" b="1" lang="zh-TW" dirty="0">
                 <a:solidFill>
                   <a:srgbClr val="000000"/>
                 </a:solidFill>
@@ -3660,7 +3660,7 @@
               <a:t>少了哪一塊，就要找另一個來補</a:t>
             </a:r>
             <a:r>
-              <a:rPr sz="950" lang="zh-TW" dirty="0">
+              <a:rPr sz="1100" lang="zh-TW" dirty="0">
                 <a:solidFill>
                   <a:srgbClr val="000000"/>
                 </a:solidFill>
@@ -3747,8 +3747,8 @@
         </p:nvSpPr>
         <p:spPr>
           <a:xfrm>
-            <a:off x="540000" y="540000"/>
-            <a:ext cx="6480000" cy="3645000"/>
+            <a:off x="1620000" y="380000"/>
+            <a:ext cx="4320000" cy="2430000"/>
           </a:xfrm>
         </p:spPr>
       </p:sp>
@@ -3764,8 +3764,8 @@
         </p:nvSpPr>
         <p:spPr>
           <a:xfrm>
-            <a:off x="540000" y="4440000"/>
-            <a:ext cx="6480000" cy="5500000"/>
+            <a:off x="540000" y="2990000"/>
+            <a:ext cx="6480000" cy="7060000"/>
           </a:xfrm>
         </p:spPr>
         <p:txBody>
@@ -3777,11 +3777,11 @@
                 <a:spcPts val="0"/>
               </a:spcBef>
               <a:spcAft>
-                <a:spcPts val="158"/>
+                <a:spcPts val="192"/>
               </a:spcAft>
             </a:pPr>
             <a:r>
-              <a:rPr sz="950" b="1" lang="zh-TW" dirty="0">
+              <a:rPr sz="1150" b="1" lang="zh-TW" dirty="0">
                 <a:solidFill>
                   <a:srgbClr val="000000"/>
                 </a:solidFill>
@@ -3792,7 +3792,7 @@
               <a:t>這一張的目的：</a:t>
             </a:r>
             <a:r>
-              <a:rPr sz="950" lang="zh-TW" dirty="0">
+              <a:rPr sz="1150" lang="zh-TW" dirty="0">
                 <a:solidFill>
                   <a:srgbClr val="000000"/>
                 </a:solidFill>
@@ -3810,11 +3810,11 @@
                 <a:spcPts val="0"/>
               </a:spcBef>
               <a:spcAft>
-                <a:spcPts val="158"/>
+                <a:spcPts val="192"/>
               </a:spcAft>
             </a:pPr>
             <a:r>
-              <a:rPr sz="950" lang="zh-TW" dirty="0">
+              <a:rPr sz="1150" lang="zh-TW" dirty="0">
                 <a:solidFill>
                   <a:srgbClr val="000000"/>
                 </a:solidFill>
@@ -3825,7 +3825,7 @@
               <a:t>任務六。第三週第一節有一張表：</a:t>
             </a:r>
             <a:r>
-              <a:rPr sz="950" b="1" lang="zh-TW" dirty="0">
+              <a:rPr sz="1150" b="1" lang="zh-TW" dirty="0">
                 <a:solidFill>
                   <a:srgbClr val="000000"/>
                 </a:solidFill>
@@ -3836,7 +3836,7 @@
               <a:t>每一種感測器的弱點，由哪一種來補。</a:t>
             </a:r>
             <a:r>
-              <a:rPr sz="950" lang="zh-TW" dirty="0">
+              <a:rPr sz="1150" lang="zh-TW" dirty="0">
                 <a:solidFill>
                   <a:srgbClr val="000000"/>
                 </a:solidFill>
@@ -3854,11 +3854,11 @@
                 <a:spcPts val="0"/>
               </a:spcBef>
               <a:spcAft>
-                <a:spcPts val="158"/>
+                <a:spcPts val="192"/>
               </a:spcAft>
             </a:pPr>
             <a:r>
-              <a:rPr sz="950" lang="zh-TW" dirty="0">
+              <a:rPr sz="1150" lang="zh-TW" dirty="0">
                 <a:solidFill>
                   <a:srgbClr val="000000"/>
                 </a:solidFill>
@@ -3876,11 +3876,11 @@
                 <a:spcPts val="0"/>
               </a:spcBef>
               <a:spcAft>
-                <a:spcPts val="158"/>
+                <a:spcPts val="192"/>
               </a:spcAft>
             </a:pPr>
             <a:r>
-              <a:rPr sz="950" lang="zh-TW" dirty="0">
+              <a:rPr sz="1150" lang="zh-TW" dirty="0">
                 <a:solidFill>
                   <a:srgbClr val="000000"/>
                 </a:solidFill>
@@ -3898,11 +3898,11 @@
                 <a:spcPts val="0"/>
               </a:spcBef>
               <a:spcAft>
-                <a:spcPts val="158"/>
+                <a:spcPts val="192"/>
               </a:spcAft>
             </a:pPr>
             <a:r>
-              <a:rPr sz="950" b="1" lang="zh-TW" dirty="0">
+              <a:rPr sz="1150" b="1" lang="zh-TW" dirty="0">
                 <a:solidFill>
                   <a:srgbClr val="000000"/>
                 </a:solidFill>
@@ -3913,7 +3913,7 @@
               <a:t>第一列，不知道那是什麼。</a:t>
             </a:r>
             <a:r>
-              <a:rPr sz="950" lang="zh-TW" dirty="0">
+              <a:rPr sz="1150" lang="zh-TW" dirty="0">
                 <a:solidFill>
                   <a:srgbClr val="000000"/>
                 </a:solidFill>
@@ -3924,7 +3924,7 @@
               <a:t>光達、雷達只知道有一團東西，認得出是人還是垃圾桶的，是</a:t>
             </a:r>
             <a:r>
-              <a:rPr sz="950" b="1" lang="zh-TW" dirty="0">
+              <a:rPr sz="1150" b="1" lang="zh-TW" dirty="0">
                 <a:solidFill>
                   <a:srgbClr val="000000"/>
                 </a:solidFill>
@@ -3935,7 +3935,7 @@
               <a:t>相機</a:t>
             </a:r>
             <a:r>
-              <a:rPr sz="950" lang="zh-TW" dirty="0">
+              <a:rPr sz="1150" lang="zh-TW" dirty="0">
                 <a:solidFill>
                   <a:srgbClr val="000000"/>
                 </a:solidFill>
@@ -3953,11 +3953,11 @@
                 <a:spcPts val="0"/>
               </a:spcBef>
               <a:spcAft>
-                <a:spcPts val="158"/>
+                <a:spcPts val="192"/>
               </a:spcAft>
             </a:pPr>
             <a:r>
-              <a:rPr sz="950" b="1" lang="zh-TW" dirty="0">
+              <a:rPr sz="1150" b="1" lang="zh-TW" dirty="0">
                 <a:solidFill>
                   <a:srgbClr val="000000"/>
                 </a:solidFill>
@@ -3968,7 +3968,7 @@
               <a:t>第二列，讀不出紅綠燈的顏色。</a:t>
             </a:r>
             <a:r>
-              <a:rPr sz="950" lang="zh-TW" dirty="0">
+              <a:rPr sz="1150" lang="zh-TW" dirty="0">
                 <a:solidFill>
                   <a:srgbClr val="000000"/>
                 </a:solidFill>
@@ -3979,7 +3979,7 @@
               <a:t>只有</a:t>
             </a:r>
             <a:r>
-              <a:rPr sz="950" b="1" lang="zh-TW" dirty="0">
+              <a:rPr sz="1150" b="1" lang="zh-TW" dirty="0">
                 <a:solidFill>
                   <a:srgbClr val="000000"/>
                 </a:solidFill>
@@ -3990,7 +3990,7 @@
               <a:t>相機</a:t>
             </a:r>
             <a:r>
-              <a:rPr sz="950" lang="zh-TW" dirty="0">
+              <a:rPr sz="1150" lang="zh-TW" dirty="0">
                 <a:solidFill>
                   <a:srgbClr val="000000"/>
                 </a:solidFill>
@@ -4008,11 +4008,11 @@
                 <a:spcPts val="0"/>
               </a:spcBef>
               <a:spcAft>
-                <a:spcPts val="158"/>
+                <a:spcPts val="192"/>
               </a:spcAft>
             </a:pPr>
             <a:r>
-              <a:rPr sz="950" b="1" lang="zh-TW" dirty="0">
+              <a:rPr sz="1150" b="1" lang="zh-TW" dirty="0">
                 <a:solidFill>
                   <a:srgbClr val="000000"/>
                 </a:solidFill>
@@ -4023,7 +4023,7 @@
               <a:t>第三列，不知道接近得多快。</a:t>
             </a:r>
             <a:r>
-              <a:rPr sz="950" b="1" lang="zh-TW" dirty="0">
+              <a:rPr sz="1150" b="1" lang="zh-TW" dirty="0">
                 <a:solidFill>
                   <a:srgbClr val="000000"/>
                 </a:solidFill>
@@ -4034,7 +4034,7 @@
               <a:t>雷達</a:t>
             </a:r>
             <a:r>
-              <a:rPr sz="950" lang="zh-TW" dirty="0">
+              <a:rPr sz="1150" lang="zh-TW" dirty="0">
                 <a:solidFill>
                   <a:srgbClr val="000000"/>
                 </a:solidFill>
@@ -4052,11 +4052,11 @@
                 <a:spcPts val="0"/>
               </a:spcBef>
               <a:spcAft>
-                <a:spcPts val="158"/>
+                <a:spcPts val="192"/>
               </a:spcAft>
             </a:pPr>
             <a:r>
-              <a:rPr sz="950" b="1" lang="zh-TW" dirty="0">
+              <a:rPr sz="1150" b="1" lang="zh-TW" dirty="0">
                 <a:solidFill>
                   <a:srgbClr val="000000"/>
                 </a:solidFill>
@@ -4067,7 +4067,7 @@
               <a:t>第四列，保險桿前面的近距離盲區。</a:t>
             </a:r>
             <a:r>
-              <a:rPr sz="950" b="1" lang="zh-TW" dirty="0">
+              <a:rPr sz="1150" b="1" lang="zh-TW" dirty="0">
                 <a:solidFill>
                   <a:srgbClr val="000000"/>
                 </a:solidFill>
@@ -4078,7 +4078,7 @@
               <a:t>超音波</a:t>
             </a:r>
             <a:r>
-              <a:rPr sz="950" lang="zh-TW" dirty="0">
+              <a:rPr sz="1150" lang="zh-TW" dirty="0">
                 <a:solidFill>
                   <a:srgbClr val="000000"/>
                 </a:solidFill>
@@ -4096,11 +4096,11 @@
                 <a:spcPts val="0"/>
               </a:spcBef>
               <a:spcAft>
-                <a:spcPts val="158"/>
+                <a:spcPts val="192"/>
               </a:spcAft>
             </a:pPr>
             <a:r>
-              <a:rPr sz="950" b="1" lang="zh-TW" dirty="0">
+              <a:rPr sz="1150" b="1" lang="zh-TW" dirty="0">
                 <a:solidFill>
                   <a:srgbClr val="000000"/>
                 </a:solidFill>
@@ -4111,7 +4111,7 @@
               <a:t>第五列，天黑，相機看不清楚。</a:t>
             </a:r>
             <a:r>
-              <a:rPr sz="950" b="1" lang="zh-TW" dirty="0">
+              <a:rPr sz="1150" b="1" lang="zh-TW" dirty="0">
                 <a:solidFill>
                   <a:srgbClr val="000000"/>
                 </a:solidFill>
@@ -4122,7 +4122,7 @@
               <a:t>光達或雷達</a:t>
             </a:r>
             <a:r>
-              <a:rPr sz="950" lang="zh-TW" dirty="0">
+              <a:rPr sz="1150" lang="zh-TW" dirty="0">
                 <a:solidFill>
                   <a:srgbClr val="000000"/>
                 </a:solidFill>
@@ -4140,11 +4140,11 @@
                 <a:spcPts val="0"/>
               </a:spcBef>
               <a:spcAft>
-                <a:spcPts val="158"/>
+                <a:spcPts val="192"/>
               </a:spcAft>
             </a:pPr>
             <a:r>
-              <a:rPr sz="950" b="1" lang="zh-TW" dirty="0">
+              <a:rPr sz="1150" b="1" lang="zh-TW" dirty="0">
                 <a:solidFill>
                   <a:srgbClr val="000000"/>
                 </a:solidFill>
@@ -4155,7 +4155,7 @@
               <a:t>第六列，不知道自己在哪裡。</a:t>
             </a:r>
             <a:r>
-              <a:rPr sz="950" b="1" lang="zh-TW" dirty="0">
+              <a:rPr sz="1150" b="1" lang="zh-TW" dirty="0">
                 <a:solidFill>
                   <a:srgbClr val="000000"/>
                 </a:solidFill>
@@ -4166,7 +4166,7 @@
               <a:t>衛星定位加 IMU 加地圖</a:t>
             </a:r>
             <a:r>
-              <a:rPr sz="950" lang="zh-TW" dirty="0">
+              <a:rPr sz="1150" lang="zh-TW" dirty="0">
                 <a:solidFill>
                   <a:srgbClr val="000000"/>
                 </a:solidFill>
@@ -4184,11 +4184,11 @@
                 <a:spcPts val="0"/>
               </a:spcBef>
               <a:spcAft>
-                <a:spcPts val="158"/>
+                <a:spcPts val="192"/>
               </a:spcAft>
             </a:pPr>
             <a:r>
-              <a:rPr sz="950" b="1" lang="zh-TW" dirty="0">
+              <a:rPr sz="1150" b="1" lang="zh-TW" dirty="0">
                 <a:solidFill>
                   <a:srgbClr val="000000"/>
                 </a:solidFill>
@@ -4199,7 +4199,7 @@
               <a:t>第七列，今天新加的：雷達量不出高度。</a:t>
             </a:r>
             <a:r>
-              <a:rPr sz="950" b="1" lang="zh-TW" dirty="0">
+              <a:rPr sz="1150" b="1" lang="zh-TW" dirty="0">
                 <a:solidFill>
                   <a:srgbClr val="000000"/>
                 </a:solidFill>
@@ -4210,7 +4210,7 @@
               <a:t>光達</a:t>
             </a:r>
             <a:r>
-              <a:rPr sz="950" lang="zh-TW" dirty="0">
+              <a:rPr sz="1150" lang="zh-TW" dirty="0">
                 <a:solidFill>
                   <a:srgbClr val="000000"/>
                 </a:solidFill>
@@ -4228,11 +4228,11 @@
                 <a:spcPts val="0"/>
               </a:spcBef>
               <a:spcAft>
-                <a:spcPts val="158"/>
+                <a:spcPts val="192"/>
               </a:spcAft>
             </a:pPr>
             <a:r>
-              <a:rPr sz="950" b="1" lang="zh-TW" dirty="0">
+              <a:rPr sz="1150" b="1" lang="zh-TW" dirty="0">
                 <a:solidFill>
                   <a:srgbClr val="000000"/>
                 </a:solidFill>
@@ -4243,7 +4243,7 @@
               <a:t>第八列，今天新加的：雷達很少抓到行人和機車。</a:t>
             </a:r>
             <a:r>
-              <a:rPr sz="950" b="1" lang="zh-TW" dirty="0">
+              <a:rPr sz="1150" b="1" lang="zh-TW" dirty="0">
                 <a:solidFill>
                   <a:srgbClr val="000000"/>
                 </a:solidFill>
@@ -4254,7 +4254,7 @@
               <a:t>相機和光達</a:t>
             </a:r>
             <a:r>
-              <a:rPr sz="950" lang="zh-TW" dirty="0">
+              <a:rPr sz="1150" lang="zh-TW" dirty="0">
                 <a:solidFill>
                   <a:srgbClr val="000000"/>
                 </a:solidFill>
@@ -4272,11 +4272,11 @@
                 <a:spcPts val="0"/>
               </a:spcBef>
               <a:spcAft>
-                <a:spcPts val="158"/>
+                <a:spcPts val="192"/>
               </a:spcAft>
             </a:pPr>
             <a:r>
-              <a:rPr sz="950" lang="zh-TW" dirty="0">
+              <a:rPr sz="1150" lang="zh-TW" dirty="0">
                 <a:solidFill>
                   <a:srgbClr val="000000"/>
                 </a:solidFill>
@@ -4363,8 +4363,8 @@
         </p:nvSpPr>
         <p:spPr>
           <a:xfrm>
-            <a:off x="540000" y="540000"/>
-            <a:ext cx="6480000" cy="3645000"/>
+            <a:off x="1620000" y="380000"/>
+            <a:ext cx="4320000" cy="2430000"/>
           </a:xfrm>
         </p:spPr>
       </p:sp>
@@ -4380,8 +4380,8 @@
         </p:nvSpPr>
         <p:spPr>
           <a:xfrm>
-            <a:off x="540000" y="4440000"/>
-            <a:ext cx="6480000" cy="5500000"/>
+            <a:off x="540000" y="2990000"/>
+            <a:ext cx="6480000" cy="7060000"/>
           </a:xfrm>
         </p:spPr>
         <p:txBody>
@@ -4393,11 +4393,11 @@
                 <a:spcPts val="0"/>
               </a:spcBef>
               <a:spcAft>
-                <a:spcPts val="200"/>
+                <a:spcPts val="250"/>
               </a:spcAft>
             </a:pPr>
             <a:r>
-              <a:rPr sz="1200" b="1" lang="zh-TW" dirty="0">
+              <a:rPr sz="1500" b="1" lang="zh-TW" dirty="0">
                 <a:solidFill>
                   <a:srgbClr val="000000"/>
                 </a:solidFill>
@@ -4408,7 +4408,7 @@
               <a:t>這一張的目的：</a:t>
             </a:r>
             <a:r>
-              <a:rPr sz="1200" lang="zh-TW" dirty="0">
+              <a:rPr sz="1500" lang="zh-TW" dirty="0">
                 <a:solidFill>
                   <a:srgbClr val="000000"/>
                 </a:solidFill>
@@ -4426,11 +4426,11 @@
                 <a:spcPts val="0"/>
               </a:spcBef>
               <a:spcAft>
-                <a:spcPts val="200"/>
+                <a:spcPts val="250"/>
               </a:spcAft>
             </a:pPr>
             <a:r>
-              <a:rPr sz="1200" lang="zh-TW" dirty="0">
+              <a:rPr sz="1500" lang="zh-TW" dirty="0">
                 <a:solidFill>
                   <a:srgbClr val="000000"/>
                 </a:solidFill>
@@ -4448,11 +4448,11 @@
                 <a:spcPts val="0"/>
               </a:spcBef>
               <a:spcAft>
-                <a:spcPts val="200"/>
+                <a:spcPts val="250"/>
               </a:spcAft>
             </a:pPr>
             <a:r>
-              <a:rPr sz="1200" lang="zh-TW" dirty="0">
+              <a:rPr sz="1500" lang="zh-TW" dirty="0">
                 <a:solidFill>
                   <a:srgbClr val="000000"/>
                 </a:solidFill>
@@ -4463,7 +4463,7 @@
               <a:t>nuScenes 是二〇一九年公開的資料，用的雷達是 </a:t>
             </a:r>
             <a:r>
-              <a:rPr sz="1200" b="1" lang="zh-TW" dirty="0">
+              <a:rPr sz="1500" b="1" lang="zh-TW" dirty="0">
                 <a:solidFill>
                   <a:srgbClr val="000000"/>
                 </a:solidFill>
@@ -4474,7 +4474,7 @@
               <a:t>ARS 408</a:t>
             </a:r>
             <a:r>
-              <a:rPr sz="1200" lang="zh-TW" dirty="0">
+              <a:rPr sz="1500" lang="zh-TW" dirty="0">
                 <a:solidFill>
                   <a:srgbClr val="000000"/>
                 </a:solidFill>
@@ -4485,7 +4485,7 @@
               <a:t>。上週判讀台上，各位讀過同一家公司的新一代：</a:t>
             </a:r>
             <a:r>
-              <a:rPr sz="1200" b="1" lang="zh-TW" dirty="0">
+              <a:rPr sz="1500" b="1" lang="zh-TW" dirty="0">
                 <a:solidFill>
                   <a:srgbClr val="000000"/>
                 </a:solidFill>
@@ -4496,7 +4496,7 @@
               <a:t>ARS 548</a:t>
             </a:r>
             <a:r>
-              <a:rPr sz="1200" lang="zh-TW" dirty="0">
+              <a:rPr sz="1500" lang="zh-TW" dirty="0">
                 <a:solidFill>
                   <a:srgbClr val="000000"/>
                 </a:solidFill>
@@ -4514,11 +4514,11 @@
                 <a:spcPts val="0"/>
               </a:spcBef>
               <a:spcAft>
-                <a:spcPts val="200"/>
+                <a:spcPts val="250"/>
               </a:spcAft>
             </a:pPr>
             <a:r>
-              <a:rPr sz="1200" lang="zh-TW" dirty="0">
+              <a:rPr sz="1500" lang="zh-TW" dirty="0">
                 <a:solidFill>
                   <a:srgbClr val="000000"/>
                 </a:solidFill>
@@ -4529,7 +4529,7 @@
               <a:t>上週第一節講 ARS 548 的時候說過：408 每一個目標回報</a:t>
             </a:r>
             <a:r>
-              <a:rPr sz="1200" b="1" lang="zh-TW" dirty="0">
+              <a:rPr sz="1500" b="1" lang="zh-TW" dirty="0">
                 <a:solidFill>
                   <a:srgbClr val="000000"/>
                 </a:solidFill>
@@ -4540,7 +4540,7 @@
               <a:t>三個數字</a:t>
             </a:r>
             <a:r>
-              <a:rPr sz="1200" lang="zh-TW" dirty="0">
+              <a:rPr sz="1500" lang="zh-TW" dirty="0">
                 <a:solidFill>
                   <a:srgbClr val="000000"/>
                 </a:solidFill>
@@ -4551,7 +4551,7 @@
               <a:t>，距離、速度、水平角，所以今天的紅圈全部被放在同一個高度，沒有一個在高處。548 多了第四個數字，</a:t>
             </a:r>
             <a:r>
-              <a:rPr sz="1200" b="1" lang="zh-TW" dirty="0">
+              <a:rPr sz="1500" b="1" lang="zh-TW" dirty="0">
                 <a:solidFill>
                   <a:srgbClr val="000000"/>
                 </a:solidFill>
@@ -4562,7 +4562,7 @@
               <a:t>高度</a:t>
             </a:r>
             <a:r>
-              <a:rPr sz="1200" lang="zh-TW" dirty="0">
+              <a:rPr sz="1500" lang="zh-TW" dirty="0">
                 <a:solidFill>
                   <a:srgbClr val="000000"/>
                 </a:solidFill>
@@ -4580,11 +4580,11 @@
                 <a:spcPts val="0"/>
               </a:spcBef>
               <a:spcAft>
-                <a:spcPts val="200"/>
+                <a:spcPts val="250"/>
               </a:spcAft>
             </a:pPr>
             <a:r>
-              <a:rPr sz="1200" lang="zh-TW" dirty="0">
+              <a:rPr sz="1500" lang="zh-TW" dirty="0">
                 <a:solidFill>
                   <a:srgbClr val="000000"/>
                 </a:solidFill>
@@ -4602,11 +4602,11 @@
                 <a:spcPts val="0"/>
               </a:spcBef>
               <a:spcAft>
-                <a:spcPts val="200"/>
+                <a:spcPts val="250"/>
               </a:spcAft>
             </a:pPr>
             <a:r>
-              <a:rPr sz="1200" lang="zh-TW" dirty="0">
+              <a:rPr sz="1500" lang="zh-TW" dirty="0">
                 <a:solidFill>
                   <a:srgbClr val="000000"/>
                 </a:solidFill>
@@ -4617,7 +4617,7 @@
               <a:t>可是請看結論條。雷達變強了，</a:t>
             </a:r>
             <a:r>
-              <a:rPr sz="1200" b="1" lang="zh-TW" dirty="0">
+              <a:rPr sz="1500" b="1" lang="zh-TW" dirty="0">
                 <a:solidFill>
                   <a:srgbClr val="000000"/>
                 </a:solidFill>
@@ -4628,7 +4628,7 @@
               <a:t>不代表可以拿掉相機</a:t>
             </a:r>
             <a:r>
-              <a:rPr sz="1200" lang="zh-TW" dirty="0">
+              <a:rPr sz="1500" lang="zh-TW" dirty="0">
                 <a:solidFill>
                   <a:srgbClr val="000000"/>
                 </a:solidFill>
@@ -4639,7 +4639,7 @@
               <a:t>。第二列，紅綠燈的顏色；第一列，那到底是什麼，還是只有相機答得出來。至於第八列「雷達很少抓到行人和機車」，548 會不會好一點？今天的資料是 408 錄的，</a:t>
             </a:r>
             <a:r>
-              <a:rPr sz="1200" b="1" lang="zh-TW" dirty="0">
+              <a:rPr sz="1500" b="1" lang="zh-TW" dirty="0">
                 <a:solidFill>
                   <a:srgbClr val="000000"/>
                 </a:solidFill>
@@ -4650,7 +4650,7 @@
               <a:t>回答不了</a:t>
             </a:r>
             <a:r>
-              <a:rPr sz="1200" lang="zh-TW" dirty="0">
+              <a:rPr sz="1500" lang="zh-TW" dirty="0">
                 <a:solidFill>
                   <a:srgbClr val="000000"/>
                 </a:solidFill>
@@ -4668,11 +4668,11 @@
                 <a:spcPts val="0"/>
               </a:spcBef>
               <a:spcAft>
-                <a:spcPts val="200"/>
+                <a:spcPts val="250"/>
               </a:spcAft>
             </a:pPr>
             <a:r>
-              <a:rPr sz="1200" lang="zh-TW" dirty="0">
+              <a:rPr sz="1500" lang="zh-TW" dirty="0">
                 <a:solidFill>
                   <a:srgbClr val="000000"/>
                 </a:solidFill>
@@ -4759,8 +4759,8 @@
         </p:nvSpPr>
         <p:spPr>
           <a:xfrm>
-            <a:off x="540000" y="540000"/>
-            <a:ext cx="6480000" cy="3645000"/>
+            <a:off x="1620000" y="380000"/>
+            <a:ext cx="4320000" cy="2430000"/>
           </a:xfrm>
         </p:spPr>
       </p:sp>
@@ -4776,8 +4776,8 @@
         </p:nvSpPr>
         <p:spPr>
           <a:xfrm>
-            <a:off x="540000" y="4440000"/>
-            <a:ext cx="6480000" cy="5500000"/>
+            <a:off x="540000" y="2990000"/>
+            <a:ext cx="6480000" cy="7060000"/>
           </a:xfrm>
         </p:spPr>
         <p:txBody>
@@ -4789,11 +4789,11 @@
                 <a:spcPts val="0"/>
               </a:spcBef>
               <a:spcAft>
-                <a:spcPts val="200"/>
+                <a:spcPts val="250"/>
               </a:spcAft>
             </a:pPr>
             <a:r>
-              <a:rPr sz="1200" b="1" lang="zh-TW" dirty="0">
+              <a:rPr sz="1500" b="1" lang="zh-TW" dirty="0">
                 <a:solidFill>
                   <a:srgbClr val="000000"/>
                 </a:solidFill>
@@ -4804,7 +4804,7 @@
               <a:t>這一張的目的：</a:t>
             </a:r>
             <a:r>
-              <a:rPr sz="1200" lang="zh-TW" dirty="0">
+              <a:rPr sz="1500" lang="zh-TW" dirty="0">
                 <a:solidFill>
                   <a:srgbClr val="000000"/>
                 </a:solidFill>
@@ -4822,11 +4822,11 @@
                 <a:spcPts val="0"/>
               </a:spcBef>
               <a:spcAft>
-                <a:spcPts val="200"/>
+                <a:spcPts val="250"/>
               </a:spcAft>
             </a:pPr>
             <a:r>
-              <a:rPr sz="1200" lang="zh-TW" dirty="0">
+              <a:rPr sz="1500" lang="zh-TW" dirty="0">
                 <a:solidFill>
                   <a:srgbClr val="000000"/>
                 </a:solidFill>
@@ -4844,11 +4844,11 @@
                 <a:spcPts val="0"/>
               </a:spcBef>
               <a:spcAft>
-                <a:spcPts val="200"/>
+                <a:spcPts val="250"/>
               </a:spcAft>
             </a:pPr>
             <a:r>
-              <a:rPr sz="1200" b="1" lang="zh-TW" dirty="0">
+              <a:rPr sz="1500" b="1" lang="zh-TW" dirty="0">
                 <a:solidFill>
                   <a:srgbClr val="000000"/>
                 </a:solidFill>
@@ -4859,7 +4859,7 @@
               <a:t>第一，雷達。</a:t>
             </a:r>
             <a:r>
-              <a:rPr sz="1200" lang="zh-TW" dirty="0">
+              <a:rPr sz="1500" lang="zh-TW" dirty="0">
                 <a:solidFill>
                   <a:srgbClr val="000000"/>
                 </a:solidFill>
@@ -4877,11 +4877,11 @@
                 <a:spcPts val="0"/>
               </a:spcBef>
               <a:spcAft>
-                <a:spcPts val="200"/>
+                <a:spcPts val="250"/>
               </a:spcAft>
             </a:pPr>
             <a:r>
-              <a:rPr sz="1200" b="1" lang="zh-TW" dirty="0">
+              <a:rPr sz="1500" b="1" lang="zh-TW" dirty="0">
                 <a:solidFill>
                   <a:srgbClr val="000000"/>
                 </a:solidFill>
@@ -4892,7 +4892,7 @@
               <a:t>第二，光達。</a:t>
             </a:r>
             <a:r>
-              <a:rPr sz="1200" lang="zh-TW" dirty="0">
+              <a:rPr sz="1500" lang="zh-TW" dirty="0">
                 <a:solidFill>
                   <a:srgbClr val="000000"/>
                 </a:solidFill>
@@ -4910,11 +4910,11 @@
                 <a:spcPts val="0"/>
               </a:spcBef>
               <a:spcAft>
-                <a:spcPts val="200"/>
+                <a:spcPts val="250"/>
               </a:spcAft>
             </a:pPr>
             <a:r>
-              <a:rPr sz="1200" b="1" lang="zh-TW" dirty="0">
+              <a:rPr sz="1500" b="1" lang="zh-TW" dirty="0">
                 <a:solidFill>
                   <a:srgbClr val="000000"/>
                 </a:solidFill>
@@ -4925,7 +4925,7 @@
               <a:t>第三，相機。</a:t>
             </a:r>
             <a:r>
-              <a:rPr sz="1200" lang="zh-TW" dirty="0">
+              <a:rPr sz="1500" lang="zh-TW" dirty="0">
                 <a:solidFill>
                   <a:srgbClr val="000000"/>
                 </a:solidFill>
@@ -4943,11 +4943,11 @@
                 <a:spcPts val="0"/>
               </a:spcBef>
               <a:spcAft>
-                <a:spcPts val="200"/>
+                <a:spcPts val="250"/>
               </a:spcAft>
             </a:pPr>
             <a:r>
-              <a:rPr sz="1200" lang="zh-TW" dirty="0">
+              <a:rPr sz="1500" lang="zh-TW" dirty="0">
                 <a:solidFill>
                   <a:srgbClr val="000000"/>
                 </a:solidFill>
@@ -4958,7 +4958,7 @@
               <a:t>三句合起來，就是作業最後那一題的結論：</a:t>
             </a:r>
             <a:r>
-              <a:rPr sz="1200" b="1" lang="zh-TW" dirty="0">
+              <a:rPr sz="1500" b="1" lang="zh-TW" dirty="0">
                 <a:solidFill>
                   <a:srgbClr val="000000"/>
                 </a:solidFill>
@@ -4969,7 +4969,7 @@
               <a:t>同一個瞬間，三種感測器看到的不一樣，所以要合起來用。</a:t>
             </a:r>
             <a:r>
-              <a:rPr sz="1200" lang="zh-TW" dirty="0">
+              <a:rPr sz="1500" lang="zh-TW" dirty="0">
                 <a:solidFill>
                   <a:srgbClr val="000000"/>
                 </a:solidFill>
@@ -4987,11 +4987,11 @@
                 <a:spcPts val="0"/>
               </a:spcBef>
               <a:spcAft>
-                <a:spcPts val="200"/>
+                <a:spcPts val="250"/>
               </a:spcAft>
             </a:pPr>
             <a:r>
-              <a:rPr sz="1200" lang="zh-TW" dirty="0">
+              <a:rPr sz="1500" lang="zh-TW" dirty="0">
                 <a:solidFill>
                   <a:srgbClr val="000000"/>
                 </a:solidFill>
@@ -5002,7 +5002,7 @@
               <a:t>作業：做完按作業頁最下面的「</a:t>
             </a:r>
             <a:r>
-              <a:rPr sz="1200" b="1" lang="zh-TW" dirty="0">
+              <a:rPr sz="1500" b="1" lang="zh-TW" dirty="0">
                 <a:solidFill>
                   <a:srgbClr val="000000"/>
                 </a:solidFill>
@@ -5013,7 +5013,7 @@
               <a:t>產生作答單</a:t>
             </a:r>
             <a:r>
-              <a:rPr sz="1200" lang="zh-TW" dirty="0">
+              <a:rPr sz="1500" lang="zh-TW" dirty="0">
                 <a:solidFill>
                   <a:srgbClr val="000000"/>
                 </a:solidFill>
@@ -5031,11 +5031,11 @@
                 <a:spcPts val="0"/>
               </a:spcBef>
               <a:spcAft>
-                <a:spcPts val="200"/>
+                <a:spcPts val="250"/>
               </a:spcAft>
             </a:pPr>
             <a:r>
-              <a:rPr sz="1200" lang="zh-TW" dirty="0">
+              <a:rPr sz="1500" lang="zh-TW" dirty="0">
                 <a:solidFill>
                   <a:srgbClr val="000000"/>
                 </a:solidFill>
@@ -5046,7 +5046,7 @@
               <a:t>下週，第八週，十月二十九日：</a:t>
             </a:r>
             <a:r>
-              <a:rPr sz="1200" b="1" lang="zh-TW" dirty="0">
+              <a:rPr sz="1500" b="1" lang="zh-TW" dirty="0">
                 <a:solidFill>
                   <a:srgbClr val="000000"/>
                 </a:solidFill>
@@ -5057,7 +5057,7 @@
               <a:t>電腦怎麼看見車輛和行人</a:t>
             </a:r>
             <a:r>
-              <a:rPr sz="1200" lang="zh-TW" dirty="0">
+              <a:rPr sz="1500" lang="zh-TW" dirty="0">
                 <a:solidFill>
                   <a:srgbClr val="000000"/>
                 </a:solidFill>
@@ -5144,8 +5144,8 @@
         </p:nvSpPr>
         <p:spPr>
           <a:xfrm>
-            <a:off x="540000" y="540000"/>
-            <a:ext cx="6480000" cy="3645000"/>
+            <a:off x="1620000" y="380000"/>
+            <a:ext cx="4320000" cy="2430000"/>
           </a:xfrm>
         </p:spPr>
       </p:sp>
@@ -5161,8 +5161,8 @@
         </p:nvSpPr>
         <p:spPr>
           <a:xfrm>
-            <a:off x="540000" y="4440000"/>
-            <a:ext cx="6480000" cy="5500000"/>
+            <a:off x="540000" y="2990000"/>
+            <a:ext cx="6480000" cy="7060000"/>
           </a:xfrm>
         </p:spPr>
         <p:txBody>
@@ -5174,11 +5174,11 @@
                 <a:spcPts val="0"/>
               </a:spcBef>
               <a:spcAft>
-                <a:spcPts val="167"/>
+                <a:spcPts val="192"/>
               </a:spcAft>
             </a:pPr>
             <a:r>
-              <a:rPr sz="1000" b="1" lang="zh-TW" dirty="0">
+              <a:rPr sz="1150" b="1" lang="zh-TW" dirty="0">
                 <a:solidFill>
                   <a:srgbClr val="000000"/>
                 </a:solidFill>
@@ -5189,7 +5189,7 @@
               <a:t>這一張的目的：</a:t>
             </a:r>
             <a:r>
-              <a:rPr sz="1000" lang="zh-TW" dirty="0">
+              <a:rPr sz="1150" lang="zh-TW" dirty="0">
                 <a:solidFill>
                   <a:srgbClr val="000000"/>
                 </a:solidFill>
@@ -5207,11 +5207,11 @@
                 <a:spcPts val="0"/>
               </a:spcBef>
               <a:spcAft>
-                <a:spcPts val="167"/>
+                <a:spcPts val="192"/>
               </a:spcAft>
             </a:pPr>
             <a:r>
-              <a:rPr sz="1000" lang="zh-TW" dirty="0">
+              <a:rPr sz="1150" lang="zh-TW" dirty="0">
                 <a:solidFill>
                   <a:srgbClr val="000000"/>
                 </a:solidFill>
@@ -5229,11 +5229,11 @@
                 <a:spcPts val="0"/>
               </a:spcBef>
               <a:spcAft>
-                <a:spcPts val="167"/>
+                <a:spcPts val="192"/>
               </a:spcAft>
             </a:pPr>
             <a:r>
-              <a:rPr sz="1000" lang="zh-TW" dirty="0">
+              <a:rPr sz="1150" lang="zh-TW" dirty="0">
                 <a:solidFill>
                   <a:srgbClr val="000000"/>
                 </a:solidFill>
@@ -5251,11 +5251,11 @@
                 <a:spcPts val="0"/>
               </a:spcBef>
               <a:spcAft>
-                <a:spcPts val="167"/>
+                <a:spcPts val="192"/>
               </a:spcAft>
             </a:pPr>
             <a:r>
-              <a:rPr sz="1000" b="1" lang="zh-TW" dirty="0">
+              <a:rPr sz="1150" b="1" lang="zh-TW" dirty="0">
                 <a:solidFill>
                   <a:srgbClr val="000000"/>
                 </a:solidFill>
@@ -5266,7 +5266,7 @@
               <a:t>從 3:45 播到 11:35</a:t>
             </a:r>
             <a:r>
-              <a:rPr sz="1000" lang="zh-TW" dirty="0">
+              <a:rPr sz="1150" lang="zh-TW" dirty="0">
                 <a:solidFill>
                   <a:srgbClr val="000000"/>
                 </a:solidFill>
@@ -5284,11 +5284,11 @@
                 <a:spcPts val="0"/>
               </a:spcBef>
               <a:spcAft>
-                <a:spcPts val="167"/>
+                <a:spcPts val="192"/>
               </a:spcAft>
             </a:pPr>
             <a:r>
-              <a:rPr sz="1000" lang="zh-TW" dirty="0">
+              <a:rPr sz="1150" lang="zh-TW" dirty="0">
                 <a:solidFill>
                   <a:srgbClr val="000000"/>
                 </a:solidFill>
@@ -5299,7 +5299,7 @@
               <a:t>它講融合有</a:t>
             </a:r>
             <a:r>
-              <a:rPr sz="1000" b="1" lang="zh-TW" dirty="0">
+              <a:rPr sz="1150" b="1" lang="zh-TW" dirty="0">
                 <a:solidFill>
                   <a:srgbClr val="000000"/>
                 </a:solidFill>
@@ -5310,7 +5310,7 @@
               <a:t>四個好處</a:t>
             </a:r>
             <a:r>
-              <a:rPr sz="1000" lang="zh-TW" dirty="0">
+              <a:rPr sz="1150" lang="zh-TW" dirty="0">
                 <a:solidFill>
                   <a:srgbClr val="000000"/>
                 </a:solidFill>
@@ -5328,11 +5328,11 @@
                 <a:spcPts val="0"/>
               </a:spcBef>
               <a:spcAft>
-                <a:spcPts val="167"/>
+                <a:spcPts val="192"/>
               </a:spcAft>
             </a:pPr>
             <a:r>
-              <a:rPr sz="1000" b="1" lang="zh-TW" dirty="0">
+              <a:rPr sz="1150" b="1" lang="zh-TW" dirty="0">
                 <a:solidFill>
                   <a:srgbClr val="000000"/>
                 </a:solidFill>
@@ -5343,7 +5343,7 @@
               <a:t>3:58 第一，資料品質更好。</a:t>
             </a:r>
             <a:r>
-              <a:rPr sz="1000" lang="zh-TW" dirty="0">
+              <a:rPr sz="1150" lang="zh-TW" dirty="0">
                 <a:solidFill>
                   <a:srgbClr val="000000"/>
                 </a:solidFill>
@@ -5361,11 +5361,11 @@
                 <a:spcPts val="0"/>
               </a:spcBef>
               <a:spcAft>
-                <a:spcPts val="167"/>
+                <a:spcPts val="192"/>
               </a:spcAft>
             </a:pPr>
             <a:r>
-              <a:rPr sz="1000" b="1" lang="zh-TW" dirty="0">
+              <a:rPr sz="1150" b="1" lang="zh-TW" dirty="0">
                 <a:solidFill>
                   <a:srgbClr val="000000"/>
                 </a:solidFill>
@@ -5376,7 +5376,7 @@
               <a:t>6:59 第二，更可靠。</a:t>
             </a:r>
             <a:r>
-              <a:rPr sz="1000" lang="zh-TW" dirty="0">
+              <a:rPr sz="1150" lang="zh-TW" dirty="0">
                 <a:solidFill>
                   <a:srgbClr val="000000"/>
                 </a:solidFill>
@@ -5387,7 +5387,7 @@
               <a:t>飛機上裝三根空速管，一根壞了，另外兩根投票，這就是第二節的「多數決」。可是飛進凍雨，三根一起結冰，投票也救不了；所以要換</a:t>
             </a:r>
             <a:r>
-              <a:rPr sz="1000" b="1" lang="zh-TW" dirty="0">
+              <a:rPr sz="1150" b="1" lang="zh-TW" dirty="0">
                 <a:solidFill>
                   <a:srgbClr val="000000"/>
                 </a:solidFill>
@@ -5398,7 +5398,7 @@
               <a:t>不同種類</a:t>
             </a:r>
             <a:r>
-              <a:rPr sz="1000" lang="zh-TW" dirty="0">
+              <a:rPr sz="1150" lang="zh-TW" dirty="0">
                 <a:solidFill>
                   <a:srgbClr val="000000"/>
                 </a:solidFill>
@@ -5409,7 +5409,7 @@
               <a:t>的感測器來補，例如用 GPS 加風速模型估空速。這就是第二節講的：兩顆被同一個原因騙，多數決就會跟著錯。</a:t>
             </a:r>
             <a:r>
-              <a:rPr sz="1000" b="1" lang="zh-TW" dirty="0">
+              <a:rPr sz="1150" b="1" lang="zh-TW" dirty="0">
                 <a:solidFill>
                   <a:srgbClr val="000000"/>
                 </a:solidFill>
@@ -5420,7 +5420,7 @@
               <a:t>8:30</a:t>
             </a:r>
             <a:r>
-              <a:rPr sz="1000" lang="zh-TW" dirty="0">
+              <a:rPr sz="1150" lang="zh-TW" dirty="0">
                 <a:solidFill>
                   <a:srgbClr val="000000"/>
                 </a:solidFill>
@@ -5438,11 +5438,11 @@
                 <a:spcPts val="0"/>
               </a:spcBef>
               <a:spcAft>
-                <a:spcPts val="167"/>
+                <a:spcPts val="192"/>
               </a:spcAft>
             </a:pPr>
             <a:r>
-              <a:rPr sz="1000" b="1" lang="zh-TW" dirty="0">
+              <a:rPr sz="1150" b="1" lang="zh-TW" dirty="0">
                 <a:solidFill>
                   <a:srgbClr val="000000"/>
                 </a:solidFill>
@@ -5453,7 +5453,7 @@
               <a:t>9:39 第三，量到原本量不到的東西。</a:t>
             </a:r>
             <a:r>
-              <a:rPr sz="1000" lang="zh-TW" dirty="0">
+              <a:rPr sz="1150" lang="zh-TW" dirty="0">
                 <a:solidFill>
                   <a:srgbClr val="000000"/>
                 </a:solidFill>
@@ -5471,11 +5471,11 @@
                 <a:spcPts val="0"/>
               </a:spcBef>
               <a:spcAft>
-                <a:spcPts val="167"/>
+                <a:spcPts val="192"/>
               </a:spcAft>
             </a:pPr>
             <a:r>
-              <a:rPr sz="1000" b="1" lang="zh-TW" dirty="0">
+              <a:rPr sz="1150" b="1" lang="zh-TW" dirty="0">
                 <a:solidFill>
                   <a:srgbClr val="000000"/>
                 </a:solidFill>
@@ -5486,7 +5486,7 @@
               <a:t>10:40 第四，看得更廣。</a:t>
             </a:r>
             <a:r>
-              <a:rPr sz="1000" lang="zh-TW" dirty="0">
+              <a:rPr sz="1150" lang="zh-TW" dirty="0">
                 <a:solidFill>
                   <a:srgbClr val="000000"/>
                 </a:solidFill>
@@ -5504,11 +5504,11 @@
                 <a:spcPts val="0"/>
               </a:spcBef>
               <a:spcAft>
-                <a:spcPts val="167"/>
+                <a:spcPts val="192"/>
               </a:spcAft>
             </a:pPr>
             <a:r>
-              <a:rPr sz="1000" lang="zh-TW" dirty="0">
+              <a:rPr sz="1150" lang="zh-TW" dirty="0">
                 <a:solidFill>
                   <a:srgbClr val="000000"/>
                 </a:solidFill>
@@ -5519,7 +5519,7 @@
               <a:t>播完問大家一題：</a:t>
             </a:r>
             <a:r>
-              <a:rPr sz="1000" b="1" lang="zh-TW" dirty="0">
+              <a:rPr sz="1150" b="1" lang="zh-TW" dirty="0">
                 <a:solidFill>
                   <a:srgbClr val="000000"/>
                 </a:solidFill>
@@ -5530,7 +5530,7 @@
               <a:t>這四個好處，各在第一、二節的哪裡出現過？</a:t>
             </a:r>
             <a:r>
-              <a:rPr sz="1000" lang="zh-TW" dirty="0">
+              <a:rPr sz="1150" lang="zh-TW" dirty="0">
                 <a:solidFill>
                   <a:srgbClr val="000000"/>
                 </a:solidFill>
@@ -5617,8 +5617,8 @@
         </p:nvSpPr>
         <p:spPr>
           <a:xfrm>
-            <a:off x="540000" y="540000"/>
-            <a:ext cx="6480000" cy="3645000"/>
+            <a:off x="1620000" y="380000"/>
+            <a:ext cx="4320000" cy="2430000"/>
           </a:xfrm>
         </p:spPr>
       </p:sp>
@@ -5634,8 +5634,8 @@
         </p:nvSpPr>
         <p:spPr>
           <a:xfrm>
-            <a:off x="540000" y="4440000"/>
-            <a:ext cx="6480000" cy="5500000"/>
+            <a:off x="540000" y="2990000"/>
+            <a:ext cx="6480000" cy="7060000"/>
           </a:xfrm>
         </p:spPr>
         <p:txBody>
@@ -5647,11 +5647,11 @@
                 <a:spcPts val="0"/>
               </a:spcBef>
               <a:spcAft>
-                <a:spcPts val="200"/>
+                <a:spcPts val="267"/>
               </a:spcAft>
             </a:pPr>
             <a:r>
-              <a:rPr sz="1200" b="1" lang="zh-TW" dirty="0">
+              <a:rPr sz="1600" b="1" lang="zh-TW" dirty="0">
                 <a:solidFill>
                   <a:srgbClr val="000000"/>
                 </a:solidFill>
@@ -5662,7 +5662,7 @@
               <a:t>這一張的目的：</a:t>
             </a:r>
             <a:r>
-              <a:rPr sz="1200" lang="zh-TW" dirty="0">
+              <a:rPr sz="1600" lang="zh-TW" dirty="0">
                 <a:solidFill>
                   <a:srgbClr val="000000"/>
                 </a:solidFill>
@@ -5680,11 +5680,11 @@
                 <a:spcPts val="0"/>
               </a:spcBef>
               <a:spcAft>
-                <a:spcPts val="200"/>
+                <a:spcPts val="267"/>
               </a:spcAft>
             </a:pPr>
             <a:r>
-              <a:rPr sz="1200" lang="zh-TW" dirty="0">
+              <a:rPr sz="1600" lang="zh-TW" dirty="0">
                 <a:solidFill>
                   <a:srgbClr val="000000"/>
                 </a:solidFill>
@@ -5695,7 +5695,7 @@
               <a:t>兩個網頁。</a:t>
             </a:r>
             <a:r>
-              <a:rPr sz="1200" b="1" lang="zh-TW" dirty="0">
+              <a:rPr sz="1600" b="1" lang="zh-TW" dirty="0">
                 <a:solidFill>
                   <a:srgbClr val="000000"/>
                 </a:solidFill>
@@ -5706,7 +5706,7 @@
               <a:t>左邊那個 QR 是 nuScenes 觀察台</a:t>
             </a:r>
             <a:r>
-              <a:rPr sz="1200" lang="zh-TW" dirty="0">
+              <a:rPr sz="1600" lang="zh-TW" dirty="0">
                 <a:solidFill>
                   <a:srgbClr val="000000"/>
                 </a:solidFill>
@@ -5717,7 +5717,7 @@
               <a:t>，看資料用的。</a:t>
             </a:r>
             <a:r>
-              <a:rPr sz="1200" b="1" lang="zh-TW" dirty="0">
+              <a:rPr sz="1600" b="1" lang="zh-TW" dirty="0">
                 <a:solidFill>
                   <a:srgbClr val="000000"/>
                 </a:solidFill>
@@ -5728,7 +5728,7 @@
               <a:t>右邊那個是作業頁</a:t>
             </a:r>
             <a:r>
-              <a:rPr sz="1200" lang="zh-TW" dirty="0">
+              <a:rPr sz="1600" lang="zh-TW" dirty="0">
                 <a:solidFill>
                   <a:srgbClr val="000000"/>
                 </a:solidFill>
@@ -5746,11 +5746,11 @@
                 <a:spcPts val="0"/>
               </a:spcBef>
               <a:spcAft>
-                <a:spcPts val="200"/>
+                <a:spcPts val="267"/>
               </a:spcAft>
             </a:pPr>
             <a:r>
-              <a:rPr sz="1200" lang="zh-TW" dirty="0">
+              <a:rPr sz="1600" lang="zh-TW" dirty="0">
                 <a:solidFill>
                   <a:srgbClr val="000000"/>
                 </a:solidFill>
@@ -5768,11 +5768,11 @@
                 <a:spcPts val="0"/>
               </a:spcBef>
               <a:spcAft>
-                <a:spcPts val="200"/>
+                <a:spcPts val="267"/>
               </a:spcAft>
             </a:pPr>
             <a:r>
-              <a:rPr sz="1200" lang="zh-TW" dirty="0">
+              <a:rPr sz="1600" lang="zh-TW" dirty="0">
                 <a:solidFill>
                   <a:srgbClr val="000000"/>
                 </a:solidFill>
@@ -5783,7 +5783,7 @@
               <a:t>我等全班。</a:t>
             </a:r>
             <a:r>
-              <a:rPr sz="1200" b="1" lang="zh-TW" dirty="0">
+              <a:rPr sz="1600" b="1" lang="zh-TW" dirty="0">
                 <a:solidFill>
                   <a:srgbClr val="000000"/>
                 </a:solidFill>
@@ -5794,7 +5794,7 @@
               <a:t>兩個都開好了再舉手。</a:t>
             </a:r>
             <a:r>
-              <a:rPr sz="1200" lang="zh-TW" dirty="0">
+              <a:rPr sz="1600" lang="zh-TW" dirty="0">
                 <a:solidFill>
                   <a:srgbClr val="000000"/>
                 </a:solidFill>
@@ -5812,11 +5812,11 @@
                 <a:spcPts val="0"/>
               </a:spcBef>
               <a:spcAft>
-                <a:spcPts val="200"/>
+                <a:spcPts val="267"/>
               </a:spcAft>
             </a:pPr>
             <a:r>
-              <a:rPr sz="1200" lang="zh-TW" dirty="0">
+              <a:rPr sz="1600" lang="zh-TW" dirty="0">
                 <a:solidFill>
                   <a:srgbClr val="000000"/>
                 </a:solidFill>
@@ -5827,7 +5827,7 @@
               <a:t>作業頁最上面的</a:t>
             </a:r>
             <a:r>
-              <a:rPr sz="1200" b="1" lang="zh-TW" dirty="0">
+              <a:rPr sz="1600" b="1" lang="zh-TW" dirty="0">
                 <a:solidFill>
                   <a:srgbClr val="000000"/>
                 </a:solidFill>
@@ -5838,7 +5838,7 @@
               <a:t>姓名和學號現在就填</a:t>
             </a:r>
             <a:r>
-              <a:rPr sz="1200" lang="zh-TW" dirty="0">
+              <a:rPr sz="1600" lang="zh-TW" dirty="0">
                 <a:solidFill>
                   <a:srgbClr val="000000"/>
                 </a:solidFill>
@@ -5925,8 +5925,8 @@
         </p:nvSpPr>
         <p:spPr>
           <a:xfrm>
-            <a:off x="540000" y="540000"/>
-            <a:ext cx="6480000" cy="3645000"/>
+            <a:off x="1620000" y="380000"/>
+            <a:ext cx="4320000" cy="2430000"/>
           </a:xfrm>
         </p:spPr>
       </p:sp>
@@ -5942,8 +5942,8 @@
         </p:nvSpPr>
         <p:spPr>
           <a:xfrm>
-            <a:off x="540000" y="4440000"/>
-            <a:ext cx="6480000" cy="5500000"/>
+            <a:off x="540000" y="2990000"/>
+            <a:ext cx="6480000" cy="7060000"/>
           </a:xfrm>
         </p:spPr>
         <p:txBody>
@@ -5955,11 +5955,11 @@
                 <a:spcPts val="0"/>
               </a:spcBef>
               <a:spcAft>
-                <a:spcPts val="200"/>
+                <a:spcPts val="250"/>
               </a:spcAft>
             </a:pPr>
             <a:r>
-              <a:rPr sz="1200" b="1" lang="zh-TW" dirty="0">
+              <a:rPr sz="1500" b="1" lang="zh-TW" dirty="0">
                 <a:solidFill>
                   <a:srgbClr val="000000"/>
                 </a:solidFill>
@@ -5970,7 +5970,7 @@
               <a:t>這一張的目的：</a:t>
             </a:r>
             <a:r>
-              <a:rPr sz="1200" lang="zh-TW" dirty="0">
+              <a:rPr sz="1500" lang="zh-TW" dirty="0">
                 <a:solidFill>
                   <a:srgbClr val="000000"/>
                 </a:solidFill>
@@ -5988,11 +5988,11 @@
                 <a:spcPts val="0"/>
               </a:spcBef>
               <a:spcAft>
-                <a:spcPts val="200"/>
+                <a:spcPts val="250"/>
               </a:spcAft>
             </a:pPr>
             <a:r>
-              <a:rPr sz="1200" lang="zh-TW" dirty="0">
+              <a:rPr sz="1500" lang="zh-TW" dirty="0">
                 <a:solidFill>
                   <a:srgbClr val="000000"/>
                 </a:solidFill>
@@ -6003,7 +6003,7 @@
               <a:t>先認識一下今天的資料。第一節講過，nuScenes 是一家自駕公司公開的真實資料。它是</a:t>
             </a:r>
             <a:r>
-              <a:rPr sz="1200" b="1" lang="zh-TW" dirty="0">
+              <a:rPr sz="1500" b="1" lang="zh-TW" dirty="0">
                 <a:solidFill>
                   <a:srgbClr val="000000"/>
                 </a:solidFill>
@@ -6014,7 +6014,7 @@
               <a:t>一台車，身上裝了一整圈感測器</a:t>
             </a:r>
             <a:r>
-              <a:rPr sz="1200" lang="zh-TW" dirty="0">
+              <a:rPr sz="1500" lang="zh-TW" dirty="0">
                 <a:solidFill>
                   <a:srgbClr val="000000"/>
                 </a:solidFill>
@@ -6032,11 +6032,11 @@
                 <a:spcPts val="0"/>
               </a:spcBef>
               <a:spcAft>
-                <a:spcPts val="200"/>
+                <a:spcPts val="250"/>
               </a:spcAft>
             </a:pPr>
             <a:r>
-              <a:rPr sz="1200" b="1" lang="zh-TW" dirty="0">
+              <a:rPr sz="1500" b="1" lang="zh-TW" dirty="0">
                 <a:solidFill>
                   <a:srgbClr val="000000"/>
                 </a:solidFill>
@@ -6047,7 +6047,7 @@
               <a:t>第一格，六台相機</a:t>
             </a:r>
             <a:r>
-              <a:rPr sz="1200" lang="zh-TW" dirty="0">
+              <a:rPr sz="1500" lang="zh-TW" dirty="0">
                 <a:solidFill>
                   <a:srgbClr val="000000"/>
                 </a:solidFill>
@@ -6065,11 +6065,11 @@
                 <a:spcPts val="0"/>
               </a:spcBef>
               <a:spcAft>
-                <a:spcPts val="200"/>
+                <a:spcPts val="250"/>
               </a:spcAft>
             </a:pPr>
             <a:r>
-              <a:rPr sz="1200" b="1" lang="zh-TW" dirty="0">
+              <a:rPr sz="1500" b="1" lang="zh-TW" dirty="0">
                 <a:solidFill>
                   <a:srgbClr val="000000"/>
                 </a:solidFill>
@@ -6080,7 +6080,7 @@
               <a:t>第二格，一顆光達</a:t>
             </a:r>
             <a:r>
-              <a:rPr sz="1200" lang="zh-TW" dirty="0">
+              <a:rPr sz="1500" lang="zh-TW" dirty="0">
                 <a:solidFill>
                   <a:srgbClr val="000000"/>
                 </a:solidFill>
@@ -6098,11 +6098,11 @@
                 <a:spcPts val="0"/>
               </a:spcBef>
               <a:spcAft>
-                <a:spcPts val="200"/>
+                <a:spcPts val="250"/>
               </a:spcAft>
             </a:pPr>
             <a:r>
-              <a:rPr sz="1200" b="1" lang="zh-TW" dirty="0">
+              <a:rPr sz="1500" b="1" lang="zh-TW" dirty="0">
                 <a:solidFill>
                   <a:srgbClr val="000000"/>
                 </a:solidFill>
@@ -6113,7 +6113,7 @@
               <a:t>第三格，五顆雷達</a:t>
             </a:r>
             <a:r>
-              <a:rPr sz="1200" lang="zh-TW" dirty="0">
+              <a:rPr sz="1500" lang="zh-TW" dirty="0">
                 <a:solidFill>
                   <a:srgbClr val="000000"/>
                 </a:solidFill>
@@ -6124,7 +6124,7 @@
               <a:t>，前面三顆、後面兩顆。型號是 </a:t>
             </a:r>
             <a:r>
-              <a:rPr sz="1200" b="1" lang="zh-TW" dirty="0">
+              <a:rPr sz="1500" b="1" lang="zh-TW" dirty="0">
                 <a:solidFill>
                   <a:srgbClr val="000000"/>
                 </a:solidFill>
@@ -6135,7 +6135,7 @@
               <a:t>Continental ARS 408-21</a:t>
             </a:r>
             <a:r>
-              <a:rPr sz="1200" lang="zh-TW" dirty="0">
+              <a:rPr sz="1500" lang="zh-TW" dirty="0">
                 <a:solidFill>
                   <a:srgbClr val="000000"/>
                 </a:solidFill>
@@ -6153,11 +6153,11 @@
                 <a:spcPts val="0"/>
               </a:spcBef>
               <a:spcAft>
-                <a:spcPts val="200"/>
+                <a:spcPts val="250"/>
               </a:spcAft>
             </a:pPr>
             <a:r>
-              <a:rPr sz="1200" b="1" lang="zh-TW" dirty="0">
+              <a:rPr sz="1500" b="1" lang="zh-TW" dirty="0">
                 <a:solidFill>
                   <a:srgbClr val="000000"/>
                 </a:solidFill>
@@ -6168,7 +6168,7 @@
               <a:t>第四格，一千段場景</a:t>
             </a:r>
             <a:r>
-              <a:rPr sz="1200" lang="zh-TW" dirty="0">
+              <a:rPr sz="1500" lang="zh-TW" dirty="0">
                 <a:solidFill>
                   <a:srgbClr val="000000"/>
                 </a:solidFill>
@@ -6179,7 +6179,7 @@
               <a:t>，每段二十秒，在美國波士頓和新加坡錄的。新加坡是靠左行駛，跟台灣、越南相反，等一下看畫面不要嚇到。我們用的是 </a:t>
             </a:r>
             <a:r>
-              <a:rPr sz="1200" b="1" lang="zh-TW" dirty="0">
+              <a:rPr sz="1500" b="1" lang="zh-TW" dirty="0">
                 <a:solidFill>
                   <a:srgbClr val="000000"/>
                 </a:solidFill>
@@ -6190,7 +6190,7 @@
               <a:t>mini 版</a:t>
             </a:r>
             <a:r>
-              <a:rPr sz="1200" lang="zh-TW" dirty="0">
+              <a:rPr sz="1500" lang="zh-TW" dirty="0">
                 <a:solidFill>
                   <a:srgbClr val="000000"/>
                 </a:solidFill>
@@ -6208,11 +6208,11 @@
                 <a:spcPts val="0"/>
               </a:spcBef>
               <a:spcAft>
-                <a:spcPts val="200"/>
+                <a:spcPts val="250"/>
               </a:spcAft>
             </a:pPr>
             <a:r>
-              <a:rPr sz="1200" lang="zh-TW" dirty="0">
+              <a:rPr sz="1500" lang="zh-TW" dirty="0">
                 <a:solidFill>
                   <a:srgbClr val="000000"/>
                 </a:solidFill>
@@ -6223,7 +6223,7 @@
               <a:t>這裡有一個詞要講清楚：</a:t>
             </a:r>
             <a:r>
-              <a:rPr sz="1200" b="1" lang="zh-TW" dirty="0">
+              <a:rPr sz="1500" b="1" lang="zh-TW" dirty="0">
                 <a:solidFill>
                   <a:srgbClr val="000000"/>
                 </a:solidFill>
@@ -6234,7 +6234,7 @@
               <a:t>關鍵畫面</a:t>
             </a:r>
             <a:r>
-              <a:rPr sz="1200" lang="zh-TW" dirty="0">
+              <a:rPr sz="1500" lang="zh-TW" dirty="0">
                 <a:solidFill>
                   <a:srgbClr val="000000"/>
                 </a:solidFill>
@@ -6252,11 +6252,11 @@
                 <a:spcPts val="0"/>
               </a:spcBef>
               <a:spcAft>
-                <a:spcPts val="200"/>
+                <a:spcPts val="250"/>
               </a:spcAft>
             </a:pPr>
             <a:r>
-              <a:rPr sz="1200" lang="zh-TW" dirty="0">
+              <a:rPr sz="1500" lang="zh-TW" dirty="0">
                 <a:solidFill>
                   <a:srgbClr val="000000"/>
                 </a:solidFill>
@@ -6343,8 +6343,8 @@
         </p:nvSpPr>
         <p:spPr>
           <a:xfrm>
-            <a:off x="540000" y="540000"/>
-            <a:ext cx="6480000" cy="3645000"/>
+            <a:off x="1620000" y="380000"/>
+            <a:ext cx="4320000" cy="2430000"/>
           </a:xfrm>
         </p:spPr>
       </p:sp>
@@ -6360,8 +6360,8 @@
         </p:nvSpPr>
         <p:spPr>
           <a:xfrm>
-            <a:off x="540000" y="4440000"/>
-            <a:ext cx="6480000" cy="5500000"/>
+            <a:off x="540000" y="2990000"/>
+            <a:ext cx="6480000" cy="7060000"/>
           </a:xfrm>
         </p:spPr>
         <p:txBody>
@@ -6373,11 +6373,11 @@
                 <a:spcPts val="0"/>
               </a:spcBef>
               <a:spcAft>
-                <a:spcPts val="150"/>
+                <a:spcPts val="175"/>
               </a:spcAft>
             </a:pPr>
             <a:r>
-              <a:rPr sz="900" b="1" lang="zh-TW" dirty="0">
+              <a:rPr sz="1050" b="1" lang="zh-TW" dirty="0">
                 <a:solidFill>
                   <a:srgbClr val="000000"/>
                 </a:solidFill>
@@ -6388,7 +6388,7 @@
               <a:t>這一張的目的：</a:t>
             </a:r>
             <a:r>
-              <a:rPr sz="900" lang="zh-TW" dirty="0">
+              <a:rPr sz="1050" lang="zh-TW" dirty="0">
                 <a:solidFill>
                   <a:srgbClr val="000000"/>
                 </a:solidFill>
@@ -6406,11 +6406,11 @@
                 <a:spcPts val="0"/>
               </a:spcBef>
               <a:spcAft>
-                <a:spcPts val="150"/>
+                <a:spcPts val="175"/>
               </a:spcAft>
             </a:pPr>
             <a:r>
-              <a:rPr sz="900" lang="zh-TW" dirty="0">
+              <a:rPr sz="1050" lang="zh-TW" dirty="0">
                 <a:solidFill>
                   <a:srgbClr val="000000"/>
                 </a:solidFill>
@@ -6421,7 +6421,7 @@
               <a:t>做自駕車，寫程式只是一半；另一半是</a:t>
             </a:r>
             <a:r>
-              <a:rPr sz="900" b="1" lang="zh-TW" dirty="0">
+              <a:rPr sz="1050" b="1" lang="zh-TW" dirty="0">
                 <a:solidFill>
                   <a:srgbClr val="000000"/>
                 </a:solidFill>
@@ -6432,7 +6432,7 @@
               <a:t>資料</a:t>
             </a:r>
             <a:r>
-              <a:rPr sz="900" lang="zh-TW" dirty="0">
+              <a:rPr sz="1050" lang="zh-TW" dirty="0">
                 <a:solidFill>
                   <a:srgbClr val="000000"/>
                 </a:solidFill>
@@ -6450,11 +6450,11 @@
                 <a:spcPts val="0"/>
               </a:spcBef>
               <a:spcAft>
-                <a:spcPts val="150"/>
+                <a:spcPts val="175"/>
               </a:spcAft>
             </a:pPr>
             <a:r>
-              <a:rPr sz="900" b="1" lang="zh-TW" dirty="0">
+              <a:rPr sz="1050" b="1" lang="zh-TW" dirty="0">
                 <a:solidFill>
                   <a:srgbClr val="000000"/>
                 </a:solidFill>
@@ -6465,7 +6465,7 @@
               <a:t>第一，訓練。</a:t>
             </a:r>
             <a:r>
-              <a:rPr sz="900" lang="zh-TW" dirty="0">
+              <a:rPr sz="1050" lang="zh-TW" dirty="0">
                 <a:solidFill>
                   <a:srgbClr val="000000"/>
                 </a:solidFill>
@@ -6476,7 +6476,7 @@
               <a:t>電腦要認得出那是一台車、一個人，就得先看過很多「答案」：這裡有一台車，框在這裡。上一張說，整份資料有一百四十萬個這樣的框。拿來訓練的模型，會做三件事：</a:t>
             </a:r>
             <a:r>
-              <a:rPr sz="900" b="1" lang="zh-TW" dirty="0">
+              <a:rPr sz="1050" b="1" lang="zh-TW" dirty="0">
                 <a:solidFill>
                   <a:srgbClr val="000000"/>
                 </a:solidFill>
@@ -6487,7 +6487,7 @@
               <a:t>偵測</a:t>
             </a:r>
             <a:r>
-              <a:rPr sz="900" lang="zh-TW" dirty="0">
+              <a:rPr sz="1050" lang="zh-TW" dirty="0">
                 <a:solidFill>
                   <a:srgbClr val="000000"/>
                 </a:solidFill>
@@ -6498,7 +6498,7 @@
               <a:t>，找出車和人在哪裡；</a:t>
             </a:r>
             <a:r>
-              <a:rPr sz="900" b="1" lang="zh-TW" dirty="0">
+              <a:rPr sz="1050" b="1" lang="zh-TW" dirty="0">
                 <a:solidFill>
                   <a:srgbClr val="000000"/>
                 </a:solidFill>
@@ -6509,7 +6509,7 @@
               <a:t>追蹤</a:t>
             </a:r>
             <a:r>
-              <a:rPr sz="900" lang="zh-TW" dirty="0">
+              <a:rPr sz="1050" lang="zh-TW" dirty="0">
                 <a:solidFill>
                   <a:srgbClr val="000000"/>
                 </a:solidFill>
@@ -6520,7 +6520,7 @@
               <a:t>，跟著同一台車一秒一秒走；</a:t>
             </a:r>
             <a:r>
-              <a:rPr sz="900" b="1" lang="zh-TW" dirty="0">
+              <a:rPr sz="1050" b="1" lang="zh-TW" dirty="0">
                 <a:solidFill>
                   <a:srgbClr val="000000"/>
                 </a:solidFill>
@@ -6531,7 +6531,7 @@
               <a:t>預測</a:t>
             </a:r>
             <a:r>
-              <a:rPr sz="900" lang="zh-TW" dirty="0">
+              <a:rPr sz="1050" lang="zh-TW" dirty="0">
                 <a:solidFill>
                   <a:srgbClr val="000000"/>
                 </a:solidFill>
@@ -6549,11 +6549,11 @@
                 <a:spcPts val="0"/>
               </a:spcBef>
               <a:spcAft>
-                <a:spcPts val="150"/>
+                <a:spcPts val="175"/>
               </a:spcAft>
             </a:pPr>
             <a:r>
-              <a:rPr sz="900" b="1" lang="zh-TW" dirty="0">
+              <a:rPr sz="1050" b="1" lang="zh-TW" dirty="0">
                 <a:solidFill>
                   <a:srgbClr val="000000"/>
                 </a:solidFill>
@@ -6564,7 +6564,7 @@
               <a:t>第二，考試。</a:t>
             </a:r>
             <a:r>
-              <a:rPr sz="900" lang="zh-TW" dirty="0">
+              <a:rPr sz="1050" lang="zh-TW" dirty="0">
                 <a:solidFill>
                   <a:srgbClr val="000000"/>
                 </a:solidFill>
@@ -6575,7 +6575,7 @@
               <a:t>就像全年級考同一份考卷。每個研究團隊的方法，都拿同一份測試資料、用同一個分數比，nuScenes 自己定了一個分數，叫 </a:t>
             </a:r>
             <a:r>
-              <a:rPr sz="900" b="1" lang="zh-TW" dirty="0">
+              <a:rPr sz="1050" b="1" lang="zh-TW" dirty="0">
                 <a:solidFill>
                   <a:srgbClr val="000000"/>
                 </a:solidFill>
@@ -6586,7 +6586,7 @@
               <a:t>NDS</a:t>
             </a:r>
             <a:r>
-              <a:rPr sz="900" lang="zh-TW" dirty="0">
+              <a:rPr sz="1050" lang="zh-TW" dirty="0">
                 <a:solidFill>
                   <a:srgbClr val="000000"/>
                 </a:solidFill>
@@ -6597,7 +6597,7 @@
               <a:t>。大家把結果上傳，排行榜上誰比較好一目了然。論文還說，同樣的方法放到 nuScenes 上，分數比在更早的 KITTI 資料集上低很多：</a:t>
             </a:r>
             <a:r>
-              <a:rPr sz="900" b="1" lang="zh-TW" dirty="0">
+              <a:rPr sz="1050" b="1" lang="zh-TW" dirty="0">
                 <a:solidFill>
                   <a:srgbClr val="000000"/>
                 </a:solidFill>
@@ -6608,7 +6608,7 @@
               <a:t>它比較難</a:t>
             </a:r>
             <a:r>
-              <a:rPr sz="900" lang="zh-TW" dirty="0">
+              <a:rPr sz="1050" lang="zh-TW" dirty="0">
                 <a:solidFill>
                   <a:srgbClr val="000000"/>
                 </a:solidFill>
@@ -6626,11 +6626,11 @@
                 <a:spcPts val="0"/>
               </a:spcBef>
               <a:spcAft>
-                <a:spcPts val="150"/>
+                <a:spcPts val="175"/>
               </a:spcAft>
             </a:pPr>
             <a:r>
-              <a:rPr sz="900" b="1" lang="zh-TW" dirty="0">
+              <a:rPr sz="1050" b="1" lang="zh-TW" dirty="0">
                 <a:solidFill>
                   <a:srgbClr val="000000"/>
                 </a:solidFill>
@@ -6641,7 +6641,7 @@
               <a:t>第三，研究融合。</a:t>
             </a:r>
             <a:r>
-              <a:rPr sz="900" lang="zh-TW" dirty="0">
+              <a:rPr sz="1050" lang="zh-TW" dirty="0">
                 <a:solidFill>
                   <a:srgbClr val="000000"/>
                 </a:solidFill>
@@ -6652,7 +6652,7 @@
               <a:t>這是它最特別的地方：相機、光達、</a:t>
             </a:r>
             <a:r>
-              <a:rPr sz="900" b="1" lang="zh-TW" dirty="0">
+              <a:rPr sz="1050" b="1" lang="zh-TW" dirty="0">
                 <a:solidFill>
                   <a:srgbClr val="000000"/>
                 </a:solidFill>
@@ -6663,7 +6663,7 @@
               <a:t>雷達</a:t>
             </a:r>
             <a:r>
-              <a:rPr sz="900" lang="zh-TW" dirty="0">
+              <a:rPr sz="1050" lang="zh-TW" dirty="0">
                 <a:solidFill>
                   <a:srgbClr val="000000"/>
                 </a:solidFill>
@@ -6674,7 +6674,7 @@
               <a:t>全部都有，而且第二節講的兩個前提，</a:t>
             </a:r>
             <a:r>
-              <a:rPr sz="900" b="1" lang="zh-TW" dirty="0">
+              <a:rPr sz="1050" b="1" lang="zh-TW" dirty="0">
                 <a:solidFill>
                   <a:srgbClr val="000000"/>
                 </a:solidFill>
@@ -6685,7 +6685,7 @@
               <a:t>標定</a:t>
             </a:r>
             <a:r>
-              <a:rPr sz="900" lang="zh-TW" dirty="0">
+              <a:rPr sz="1050" lang="zh-TW" dirty="0">
                 <a:solidFill>
                   <a:srgbClr val="000000"/>
                 </a:solidFill>
@@ -6696,7 +6696,7 @@
               <a:t>和</a:t>
             </a:r>
             <a:r>
-              <a:rPr sz="900" b="1" lang="zh-TW" dirty="0">
+              <a:rPr sz="1050" b="1" lang="zh-TW" dirty="0">
                 <a:solidFill>
                   <a:srgbClr val="000000"/>
                 </a:solidFill>
@@ -6707,7 +6707,7 @@
               <a:t>同步</a:t>
             </a:r>
             <a:r>
-              <a:rPr sz="900" lang="zh-TW" dirty="0">
+              <a:rPr sz="1050" lang="zh-TW" dirty="0">
                 <a:solidFill>
                   <a:srgbClr val="000000"/>
                 </a:solidFill>
@@ -6718,7 +6718,7 @@
               <a:t>需要的東西，它在錄的時候就準備好了。一份資料集怎麼做得到？其實是在</a:t>
             </a:r>
             <a:r>
-              <a:rPr sz="900" b="1" lang="zh-TW" dirty="0">
+              <a:rPr sz="1050" b="1" lang="zh-TW" dirty="0">
                 <a:solidFill>
                   <a:srgbClr val="000000"/>
                 </a:solidFill>
@@ -6729,7 +6729,7 @@
               <a:t>錄的時候</a:t>
             </a:r>
             <a:r>
-              <a:rPr sz="900" lang="zh-TW" dirty="0">
+              <a:rPr sz="1050" lang="zh-TW" dirty="0">
                 <a:solidFill>
                   <a:srgbClr val="000000"/>
                 </a:solidFill>
@@ -6747,11 +6747,11 @@
                 <a:spcPts val="0"/>
               </a:spcBef>
               <a:spcAft>
-                <a:spcPts val="150"/>
+                <a:spcPts val="175"/>
               </a:spcAft>
             </a:pPr>
             <a:r>
-              <a:rPr sz="900" b="1" lang="zh-TW" dirty="0">
+              <a:rPr sz="1050" b="1" lang="zh-TW" dirty="0">
                 <a:solidFill>
                   <a:srgbClr val="000000"/>
                 </a:solidFill>
@@ -6762,7 +6762,7 @@
               <a:t>標定</a:t>
             </a:r>
             <a:r>
-              <a:rPr sz="900" lang="zh-TW" dirty="0">
+              <a:rPr sz="1050" lang="zh-TW" dirty="0">
                 <a:solidFill>
                   <a:srgbClr val="000000"/>
                 </a:solidFill>
@@ -6780,11 +6780,11 @@
                 <a:spcPts val="0"/>
               </a:spcBef>
               <a:spcAft>
-                <a:spcPts val="150"/>
+                <a:spcPts val="175"/>
               </a:spcAft>
             </a:pPr>
             <a:r>
-              <a:rPr sz="900" b="1" lang="zh-TW" dirty="0">
+              <a:rPr sz="1050" b="1" lang="zh-TW" dirty="0">
                 <a:solidFill>
                   <a:srgbClr val="000000"/>
                 </a:solidFill>
@@ -6795,7 +6795,7 @@
               <a:t>同步</a:t>
             </a:r>
             <a:r>
-              <a:rPr sz="900" lang="zh-TW" dirty="0">
+              <a:rPr sz="1050" lang="zh-TW" dirty="0">
                 <a:solidFill>
                   <a:srgbClr val="000000"/>
                 </a:solidFill>
@@ -6806,7 +6806,7 @@
               <a:t>：車上有一個共同的時鐘，每一張照片、每一圈光達、每一輪雷達，都蓋上</a:t>
             </a:r>
             <a:r>
-              <a:rPr sz="900" b="1" lang="zh-TW" dirty="0">
+              <a:rPr sz="1050" b="1" lang="zh-TW" dirty="0">
                 <a:solidFill>
                   <a:srgbClr val="000000"/>
                 </a:solidFill>
@@ -6817,7 +6817,7 @@
               <a:t>拍下那一刻的時間</a:t>
             </a:r>
             <a:r>
-              <a:rPr sz="900" lang="zh-TW" dirty="0">
+              <a:rPr sz="1050" lang="zh-TW" dirty="0">
                 <a:solidFill>
                   <a:srgbClr val="000000"/>
                 </a:solidFill>
@@ -6835,11 +6835,11 @@
                 <a:spcPts val="0"/>
               </a:spcBef>
               <a:spcAft>
-                <a:spcPts val="150"/>
+                <a:spcPts val="175"/>
               </a:spcAft>
             </a:pPr>
             <a:r>
-              <a:rPr sz="900" lang="zh-TW" dirty="0">
+              <a:rPr sz="1050" lang="zh-TW" dirty="0">
                 <a:solidFill>
                   <a:srgbClr val="000000"/>
                 </a:solidFill>
@@ -6850,7 +6850,7 @@
               <a:t>所以「幫你做好」的意思是：</a:t>
             </a:r>
             <a:r>
-              <a:rPr sz="900" b="1" lang="zh-TW" dirty="0">
+              <a:rPr sz="1050" b="1" lang="zh-TW" dirty="0">
                 <a:solidFill>
                   <a:srgbClr val="000000"/>
                 </a:solidFill>
@@ -6861,7 +6861,7 @@
               <a:t>數字都給你了，但要用的人自己把它們套進去算。</a:t>
             </a:r>
             <a:r>
-              <a:rPr sz="900" lang="zh-TW" dirty="0">
+              <a:rPr sz="1050" lang="zh-TW" dirty="0">
                 <a:solidFill>
                   <a:srgbClr val="000000"/>
                 </a:solidFill>
@@ -6879,11 +6879,11 @@
                 <a:spcPts val="0"/>
               </a:spcBef>
               <a:spcAft>
-                <a:spcPts val="150"/>
+                <a:spcPts val="175"/>
               </a:spcAft>
             </a:pPr>
             <a:r>
-              <a:rPr sz="900" b="1" lang="zh-TW" dirty="0">
+              <a:rPr sz="1050" b="1" lang="zh-TW" dirty="0">
                 <a:solidFill>
                   <a:srgbClr val="000000"/>
                 </a:solidFill>
@@ -6894,7 +6894,7 @@
               <a:t>第四，開發新方法時，先拿真實資料試。</a:t>
             </a:r>
             <a:r>
-              <a:rPr sz="900" lang="zh-TW" dirty="0">
+              <a:rPr sz="1050" lang="zh-TW" dirty="0">
                 <a:solidFill>
                   <a:srgbClr val="000000"/>
                 </a:solidFill>
@@ -6912,11 +6912,11 @@
                 <a:spcPts val="0"/>
               </a:spcBef>
               <a:spcAft>
-                <a:spcPts val="150"/>
+                <a:spcPts val="175"/>
               </a:spcAft>
             </a:pPr>
             <a:r>
-              <a:rPr sz="900" lang="zh-TW" dirty="0">
+              <a:rPr sz="1050" lang="zh-TW" dirty="0">
                 <a:solidFill>
                   <a:srgbClr val="000000"/>
                 </a:solidFill>
@@ -6927,7 +6927,7 @@
               <a:t>右邊這四格，就是我們這門課用 nuScenes 做過的四件事：第二節的</a:t>
             </a:r>
             <a:r>
-              <a:rPr sz="900" b="1" lang="zh-TW" dirty="0">
+              <a:rPr sz="1050" b="1" lang="zh-TW" dirty="0">
                 <a:solidFill>
                   <a:srgbClr val="000000"/>
                 </a:solidFill>
@@ -6938,7 +6938,7 @@
               <a:t>標定</a:t>
             </a:r>
             <a:r>
-              <a:rPr sz="900" lang="zh-TW" dirty="0">
+              <a:rPr sz="1050" lang="zh-TW" dirty="0">
                 <a:solidFill>
                   <a:srgbClr val="000000"/>
                 </a:solidFill>
@@ -6949,7 +6949,7 @@
               <a:t>和</a:t>
             </a:r>
             <a:r>
-              <a:rPr sz="900" b="1" lang="zh-TW" dirty="0">
+              <a:rPr sz="1050" b="1" lang="zh-TW" dirty="0">
                 <a:solidFill>
                   <a:srgbClr val="000000"/>
                 </a:solidFill>
@@ -6960,7 +6960,7 @@
               <a:t>同步</a:t>
             </a:r>
             <a:r>
-              <a:rPr sz="900" lang="zh-TW" dirty="0">
+              <a:rPr sz="1050" lang="zh-TW" dirty="0">
                 <a:solidFill>
                   <a:srgbClr val="000000"/>
                 </a:solidFill>
@@ -6971,7 +6971,7 @@
               <a:t>、</a:t>
             </a:r>
             <a:r>
-              <a:rPr sz="900" b="1" lang="zh-TW" dirty="0">
+              <a:rPr sz="1050" b="1" lang="zh-TW" dirty="0">
                 <a:solidFill>
                   <a:srgbClr val="000000"/>
                 </a:solidFill>
@@ -6982,7 +6982,7 @@
               <a:t>對應</a:t>
             </a:r>
             <a:r>
-              <a:rPr sz="900" lang="zh-TW" dirty="0">
+              <a:rPr sz="1050" lang="zh-TW" dirty="0">
                 <a:solidFill>
                   <a:srgbClr val="000000"/>
                 </a:solidFill>
@@ -6993,7 +6993,7 @@
               <a:t>，還有第一節那張</a:t>
             </a:r>
             <a:r>
-              <a:rPr sz="900" b="1" lang="zh-TW" dirty="0">
+              <a:rPr sz="1050" b="1" lang="zh-TW" dirty="0">
                 <a:solidFill>
                   <a:srgbClr val="000000"/>
                 </a:solidFill>
@@ -7004,7 +7004,7 @@
               <a:t>同一個人前後十五秒</a:t>
             </a:r>
             <a:r>
-              <a:rPr sz="900" lang="zh-TW" dirty="0">
+              <a:rPr sz="1050" lang="zh-TW" dirty="0">
                 <a:solidFill>
                   <a:srgbClr val="000000"/>
                 </a:solidFill>
@@ -7091,8 +7091,8 @@
         </p:nvSpPr>
         <p:spPr>
           <a:xfrm>
-            <a:off x="540000" y="540000"/>
-            <a:ext cx="6480000" cy="3645000"/>
+            <a:off x="1620000" y="380000"/>
+            <a:ext cx="4320000" cy="2430000"/>
           </a:xfrm>
         </p:spPr>
       </p:sp>
@@ -7108,8 +7108,8 @@
         </p:nvSpPr>
         <p:spPr>
           <a:xfrm>
-            <a:off x="540000" y="4440000"/>
-            <a:ext cx="6480000" cy="5500000"/>
+            <a:off x="540000" y="2990000"/>
+            <a:ext cx="6480000" cy="7060000"/>
           </a:xfrm>
         </p:spPr>
         <p:txBody>
@@ -7121,11 +7121,11 @@
                 <a:spcPts val="0"/>
               </a:spcBef>
               <a:spcAft>
-                <a:spcPts val="200"/>
+                <a:spcPts val="250"/>
               </a:spcAft>
             </a:pPr>
             <a:r>
-              <a:rPr sz="1200" b="1" lang="zh-TW" dirty="0">
+              <a:rPr sz="1500" b="1" lang="zh-TW" dirty="0">
                 <a:solidFill>
                   <a:srgbClr val="000000"/>
                 </a:solidFill>
@@ -7136,7 +7136,7 @@
               <a:t>這一張的目的：</a:t>
             </a:r>
             <a:r>
-              <a:rPr sz="1200" lang="zh-TW" dirty="0">
+              <a:rPr sz="1500" lang="zh-TW" dirty="0">
                 <a:solidFill>
                   <a:srgbClr val="000000"/>
                 </a:solidFill>
@@ -7154,11 +7154,11 @@
                 <a:spcPts val="0"/>
               </a:spcBef>
               <a:spcAft>
-                <a:spcPts val="200"/>
+                <a:spcPts val="250"/>
               </a:spcAft>
             </a:pPr>
             <a:r>
-              <a:rPr sz="1200" lang="zh-TW" dirty="0">
+              <a:rPr sz="1500" lang="zh-TW" dirty="0">
                 <a:solidFill>
                   <a:srgbClr val="000000"/>
                 </a:solidFill>
@@ -7176,11 +7176,11 @@
                 <a:spcPts val="0"/>
               </a:spcBef>
               <a:spcAft>
-                <a:spcPts val="200"/>
+                <a:spcPts val="250"/>
               </a:spcAft>
             </a:pPr>
             <a:r>
-              <a:rPr sz="1200" b="1" lang="zh-TW" dirty="0">
+              <a:rPr sz="1500" b="1" lang="zh-TW" dirty="0">
                 <a:solidFill>
                   <a:srgbClr val="000000"/>
                 </a:solidFill>
@@ -7191,7 +7191,7 @@
               <a:t>第一，註冊、下載。</a:t>
             </a:r>
             <a:r>
-              <a:rPr sz="1200" lang="zh-TW" dirty="0">
+              <a:rPr sz="1500" lang="zh-TW" dirty="0">
                 <a:solidFill>
                   <a:srgbClr val="000000"/>
                 </a:solidFill>
@@ -7202,7 +7202,7 @@
               <a:t>到 nuscenes.org 註冊帳號，同意它的授權：</a:t>
             </a:r>
             <a:r>
-              <a:rPr sz="1200" b="1" lang="zh-TW" dirty="0">
+              <a:rPr sz="1500" b="1" lang="zh-TW" dirty="0">
                 <a:solidFill>
                   <a:srgbClr val="000000"/>
                 </a:solidFill>
@@ -7213,7 +7213,7 @@
               <a:t>非商業使用</a:t>
             </a:r>
             <a:r>
-              <a:rPr sz="1200" lang="zh-TW" dirty="0">
+              <a:rPr sz="1500" lang="zh-TW" dirty="0">
                 <a:solidFill>
                   <a:srgbClr val="000000"/>
                 </a:solidFill>
@@ -7231,11 +7231,11 @@
                 <a:spcPts val="0"/>
               </a:spcBef>
               <a:spcAft>
-                <a:spcPts val="200"/>
+                <a:spcPts val="250"/>
               </a:spcAft>
             </a:pPr>
             <a:r>
-              <a:rPr sz="1200" b="1" lang="zh-TW" dirty="0">
+              <a:rPr sz="1500" b="1" lang="zh-TW" dirty="0">
                 <a:solidFill>
                   <a:srgbClr val="000000"/>
                 </a:solidFill>
@@ -7246,7 +7246,7 @@
               <a:t>第二，讀資料。</a:t>
             </a:r>
             <a:r>
-              <a:rPr sz="1200" lang="zh-TW" dirty="0">
+              <a:rPr sz="1500" lang="zh-TW" dirty="0">
                 <a:solidFill>
                   <a:srgbClr val="000000"/>
                 </a:solidFill>
@@ -7257,7 +7257,7 @@
               <a:t>官方有一套免費的工具，叫 </a:t>
             </a:r>
             <a:r>
-              <a:rPr sz="1200" b="1" lang="zh-TW" dirty="0">
+              <a:rPr sz="1500" b="1" lang="zh-TW" dirty="0">
                 <a:solidFill>
                   <a:srgbClr val="000000"/>
                 </a:solidFill>
@@ -7268,7 +7268,7 @@
               <a:t>nuscenes-devkit</a:t>
             </a:r>
             <a:r>
-              <a:rPr sz="1200" lang="zh-TW" dirty="0">
+              <a:rPr sz="1500" lang="zh-TW" dirty="0">
                 <a:solidFill>
                   <a:srgbClr val="000000"/>
                 </a:solidFill>
@@ -7286,11 +7286,11 @@
                 <a:spcPts val="0"/>
               </a:spcBef>
               <a:spcAft>
-                <a:spcPts val="200"/>
+                <a:spcPts val="250"/>
               </a:spcAft>
             </a:pPr>
             <a:r>
-              <a:rPr sz="1200" b="1" lang="zh-TW" dirty="0">
+              <a:rPr sz="1500" b="1" lang="zh-TW" dirty="0">
                 <a:solidFill>
                   <a:srgbClr val="000000"/>
                 </a:solidFill>
@@ -7301,7 +7301,7 @@
               <a:t>第三，訓練、檢查。</a:t>
             </a:r>
             <a:r>
-              <a:rPr sz="1200" lang="zh-TW" dirty="0">
+              <a:rPr sz="1500" lang="zh-TW" dirty="0">
                 <a:solidFill>
                   <a:srgbClr val="000000"/>
                 </a:solidFill>
@@ -7312,7 +7312,7 @@
               <a:t>資料分成三份，就像課本、練習題、期末考。</a:t>
             </a:r>
             <a:r>
-              <a:rPr sz="1200" b="1" lang="zh-TW" dirty="0">
+              <a:rPr sz="1500" b="1" lang="zh-TW" dirty="0">
                 <a:solidFill>
                   <a:srgbClr val="000000"/>
                 </a:solidFill>
@@ -7323,7 +7323,7 @@
               <a:t>訓練集</a:t>
             </a:r>
             <a:r>
-              <a:rPr sz="1200" lang="zh-TW" dirty="0">
+              <a:rPr sz="1500" lang="zh-TW" dirty="0">
                 <a:solidFill>
                   <a:srgbClr val="000000"/>
                 </a:solidFill>
@@ -7334,7 +7334,7 @@
               <a:t>給電腦學，</a:t>
             </a:r>
             <a:r>
-              <a:rPr sz="1200" b="1" lang="zh-TW" dirty="0">
+              <a:rPr sz="1500" b="1" lang="zh-TW" dirty="0">
                 <a:solidFill>
                   <a:srgbClr val="000000"/>
                 </a:solidFill>
@@ -7345,7 +7345,7 @@
               <a:t>驗證集</a:t>
             </a:r>
             <a:r>
-              <a:rPr sz="1200" lang="zh-TW" dirty="0">
+              <a:rPr sz="1500" lang="zh-TW" dirty="0">
                 <a:solidFill>
                   <a:srgbClr val="000000"/>
                 </a:solidFill>
@@ -7363,11 +7363,11 @@
                 <a:spcPts val="0"/>
               </a:spcBef>
               <a:spcAft>
-                <a:spcPts val="200"/>
+                <a:spcPts val="250"/>
               </a:spcAft>
             </a:pPr>
             <a:r>
-              <a:rPr sz="1200" b="1" lang="zh-TW" dirty="0">
+              <a:rPr sz="1500" b="1" lang="zh-TW" dirty="0">
                 <a:solidFill>
                   <a:srgbClr val="000000"/>
                 </a:solidFill>
@@ -7378,7 +7378,7 @@
               <a:t>第四，算分數。</a:t>
             </a:r>
             <a:r>
-              <a:rPr sz="1200" lang="zh-TW" dirty="0">
+              <a:rPr sz="1500" lang="zh-TW" dirty="0">
                 <a:solidFill>
                   <a:srgbClr val="000000"/>
                 </a:solidFill>
@@ -7389,7 +7389,7 @@
               <a:t>最後拿</a:t>
             </a:r>
             <a:r>
-              <a:rPr sz="1200" b="1" lang="zh-TW" dirty="0">
+              <a:rPr sz="1500" b="1" lang="zh-TW" dirty="0">
                 <a:solidFill>
                   <a:srgbClr val="000000"/>
                 </a:solidFill>
@@ -7400,7 +7400,7 @@
               <a:t>測試集</a:t>
             </a:r>
             <a:r>
-              <a:rPr sz="1200" lang="zh-TW" dirty="0">
+              <a:rPr sz="1500" lang="zh-TW" dirty="0">
                 <a:solidFill>
                   <a:srgbClr val="000000"/>
                 </a:solidFill>
@@ -7418,11 +7418,11 @@
                 <a:spcPts val="0"/>
               </a:spcBef>
               <a:spcAft>
-                <a:spcPts val="200"/>
+                <a:spcPts val="250"/>
               </a:spcAft>
             </a:pPr>
             <a:r>
-              <a:rPr sz="1200" lang="zh-TW" dirty="0">
+              <a:rPr sz="1500" lang="zh-TW" dirty="0">
                 <a:solidFill>
                   <a:srgbClr val="000000"/>
                 </a:solidFill>
@@ -7433,7 +7433,7 @@
               <a:t>看底註：</a:t>
             </a:r>
             <a:r>
-              <a:rPr sz="1200" b="1" lang="zh-TW" dirty="0">
+              <a:rPr sz="1500" b="1" lang="zh-TW" dirty="0">
                 <a:solidFill>
                   <a:srgbClr val="000000"/>
                 </a:solidFill>
@@ -7444,7 +7444,7 @@
               <a:t>我們這門課</a:t>
             </a:r>
             <a:r>
-              <a:rPr sz="1200" lang="zh-TW" dirty="0">
+              <a:rPr sz="1500" lang="zh-TW" dirty="0">
                 <a:solidFill>
                   <a:srgbClr val="000000"/>
                 </a:solidFill>
@@ -7531,8 +7531,8 @@
         </p:nvSpPr>
         <p:spPr>
           <a:xfrm>
-            <a:off x="540000" y="540000"/>
-            <a:ext cx="6480000" cy="3645000"/>
+            <a:off x="1620000" y="380000"/>
+            <a:ext cx="4320000" cy="2430000"/>
           </a:xfrm>
         </p:spPr>
       </p:sp>
@@ -7548,8 +7548,8 @@
         </p:nvSpPr>
         <p:spPr>
           <a:xfrm>
-            <a:off x="540000" y="4440000"/>
-            <a:ext cx="6480000" cy="5500000"/>
+            <a:off x="540000" y="2990000"/>
+            <a:ext cx="6480000" cy="7060000"/>
           </a:xfrm>
         </p:spPr>
         <p:txBody>
@@ -7561,11 +7561,11 @@
                 <a:spcPts val="0"/>
               </a:spcBef>
               <a:spcAft>
-                <a:spcPts val="200"/>
+                <a:spcPts val="267"/>
               </a:spcAft>
             </a:pPr>
             <a:r>
-              <a:rPr sz="1200" b="1" lang="zh-TW" dirty="0">
+              <a:rPr sz="1600" b="1" lang="zh-TW" dirty="0">
                 <a:solidFill>
                   <a:srgbClr val="000000"/>
                 </a:solidFill>
@@ -7576,7 +7576,7 @@
               <a:t>這一張的目的：</a:t>
             </a:r>
             <a:r>
-              <a:rPr sz="1200" lang="zh-TW" dirty="0">
+              <a:rPr sz="1600" lang="zh-TW" dirty="0">
                 <a:solidFill>
                   <a:srgbClr val="000000"/>
                 </a:solidFill>
@@ -7594,11 +7594,11 @@
                 <a:spcPts val="0"/>
               </a:spcBef>
               <a:spcAft>
-                <a:spcPts val="200"/>
+                <a:spcPts val="267"/>
               </a:spcAft>
             </a:pPr>
             <a:r>
-              <a:rPr sz="1200" lang="zh-TW" dirty="0">
+              <a:rPr sz="1600" lang="zh-TW" dirty="0">
                 <a:solidFill>
                   <a:srgbClr val="000000"/>
                 </a:solidFill>
@@ -7616,11 +7616,11 @@
                 <a:spcPts val="0"/>
               </a:spcBef>
               <a:spcAft>
-                <a:spcPts val="200"/>
+                <a:spcPts val="267"/>
               </a:spcAft>
             </a:pPr>
             <a:r>
-              <a:rPr sz="1200" b="1" lang="zh-TW" dirty="0">
+              <a:rPr sz="1600" b="1" lang="zh-TW" dirty="0">
                 <a:solidFill>
                   <a:srgbClr val="000000"/>
                 </a:solidFill>
@@ -7631,7 +7631,7 @@
               <a:t>藍色的扇形是六台相機</a:t>
             </a:r>
             <a:r>
-              <a:rPr sz="1200" lang="zh-TW" dirty="0">
+              <a:rPr sz="1600" lang="zh-TW" dirty="0">
                 <a:solidFill>
                   <a:srgbClr val="000000"/>
                 </a:solidFill>
@@ -7642,7 +7642,7 @@
               <a:t>，前、後、左前、右前、左後、右後，六個扇形拼起來剛好一整圈。後面那台的扇形特別寬，因為它用的是廣角鏡頭。</a:t>
             </a:r>
             <a:r>
-              <a:rPr sz="1200" b="1" lang="zh-TW" dirty="0">
+              <a:rPr sz="1600" b="1" lang="zh-TW" dirty="0">
                 <a:solidFill>
                   <a:srgbClr val="000000"/>
                 </a:solidFill>
@@ -7653,7 +7653,7 @@
               <a:t>黃色的圈是光達</a:t>
             </a:r>
             <a:r>
-              <a:rPr sz="1200" lang="zh-TW" dirty="0">
+              <a:rPr sz="1600" lang="zh-TW" dirty="0">
                 <a:solidFill>
                   <a:srgbClr val="000000"/>
                 </a:solidFill>
@@ -7664,7 +7664,7 @@
               <a:t>，裝在車頂中間，一直轉，一圈三百六十度。</a:t>
             </a:r>
             <a:r>
-              <a:rPr sz="1200" b="1" lang="zh-TW" dirty="0">
+              <a:rPr sz="1600" b="1" lang="zh-TW" dirty="0">
                 <a:solidFill>
                   <a:srgbClr val="000000"/>
                 </a:solidFill>
@@ -7675,7 +7675,7 @@
               <a:t>紅色的箭頭是五顆雷達</a:t>
             </a:r>
             <a:r>
-              <a:rPr sz="1200" lang="zh-TW" dirty="0">
+              <a:rPr sz="1600" lang="zh-TW" dirty="0">
                 <a:solidFill>
                   <a:srgbClr val="000000"/>
                 </a:solidFill>
@@ -7686,7 +7686,7 @@
               <a:t>：正前方一顆，前面兩個角各一顆，後面兩個角各一顆。請看前角那兩顆，箭頭是朝</a:t>
             </a:r>
             <a:r>
-              <a:rPr sz="1200" b="1" lang="zh-TW" dirty="0">
+              <a:rPr sz="1600" b="1" lang="zh-TW" dirty="0">
                 <a:solidFill>
                   <a:srgbClr val="000000"/>
                 </a:solidFill>
@@ -7697,7 +7697,7 @@
               <a:t>左右兩邊</a:t>
             </a:r>
             <a:r>
-              <a:rPr sz="1200" lang="zh-TW" dirty="0">
+              <a:rPr sz="1600" lang="zh-TW" dirty="0">
                 <a:solidFill>
                   <a:srgbClr val="000000"/>
                 </a:solidFill>
@@ -7715,11 +7715,11 @@
                 <a:spcPts val="0"/>
               </a:spcBef>
               <a:spcAft>
-                <a:spcPts val="200"/>
+                <a:spcPts val="267"/>
               </a:spcAft>
             </a:pPr>
             <a:r>
-              <a:rPr sz="1200" lang="zh-TW" dirty="0">
+              <a:rPr sz="1600" lang="zh-TW" dirty="0">
                 <a:solidFill>
                   <a:srgbClr val="000000"/>
                 </a:solidFill>
@@ -7730,7 +7730,7 @@
               <a:t>這十二顆，每一顆都有第二節講的六個數字：裝在哪、朝哪。還有時間：第二節說過，光達轉到相機正中間的那一刻，才讓相機拍照。一台資料車，最難的不是買感測器，是把它們</a:t>
             </a:r>
             <a:r>
-              <a:rPr sz="1200" b="1" lang="zh-TW" dirty="0">
+              <a:rPr sz="1600" b="1" lang="zh-TW" dirty="0">
                 <a:solidFill>
                   <a:srgbClr val="000000"/>
                 </a:solidFill>
@@ -7741,7 +7741,7 @@
               <a:t>對齊</a:t>
             </a:r>
             <a:r>
-              <a:rPr sz="1200" lang="zh-TW" dirty="0">
+              <a:rPr sz="1600" lang="zh-TW" dirty="0">
                 <a:solidFill>
                   <a:srgbClr val="000000"/>
                 </a:solidFill>
@@ -7759,11 +7759,11 @@
                 <a:spcPts val="0"/>
               </a:spcBef>
               <a:spcAft>
-                <a:spcPts val="200"/>
+                <a:spcPts val="267"/>
               </a:spcAft>
             </a:pPr>
             <a:r>
-              <a:rPr sz="1200" lang="zh-TW" dirty="0">
+              <a:rPr sz="1600" lang="zh-TW" dirty="0">
                 <a:solidFill>
                   <a:srgbClr val="000000"/>
                 </a:solidFill>
@@ -7774,7 +7774,7 @@
               <a:t>論文寫：他們在波士頓和新加坡一共開了十五個小時、兩百四十二公里，平均時速只有十六公里，因為都在市區。然後</a:t>
             </a:r>
             <a:r>
-              <a:rPr sz="1200" b="1" lang="zh-TW" dirty="0">
+              <a:rPr sz="1600" b="1" lang="zh-TW" dirty="0">
                 <a:solidFill>
                   <a:srgbClr val="000000"/>
                 </a:solidFill>
@@ -7785,7 +7785,7 @@
               <a:t>人工</a:t>
             </a:r>
             <a:r>
-              <a:rPr sz="1200" lang="zh-TW" dirty="0">
+              <a:rPr sz="1600" lang="zh-TW" dirty="0">
                 <a:solidFill>
                   <a:srgbClr val="000000"/>
                 </a:solidFill>
@@ -7872,8 +7872,8 @@
         </p:nvSpPr>
         <p:spPr>
           <a:xfrm>
-            <a:off x="540000" y="540000"/>
-            <a:ext cx="6480000" cy="3645000"/>
+            <a:off x="1620000" y="380000"/>
+            <a:ext cx="4320000" cy="2430000"/>
           </a:xfrm>
         </p:spPr>
       </p:sp>
@@ -7889,8 +7889,8 @@
         </p:nvSpPr>
         <p:spPr>
           <a:xfrm>
-            <a:off x="540000" y="4440000"/>
-            <a:ext cx="6480000" cy="5500000"/>
+            <a:off x="540000" y="2990000"/>
+            <a:ext cx="6480000" cy="7060000"/>
           </a:xfrm>
         </p:spPr>
         <p:txBody>
@@ -7902,11 +7902,11 @@
                 <a:spcPts val="0"/>
               </a:spcBef>
               <a:spcAft>
-                <a:spcPts val="183"/>
+                <a:spcPts val="217"/>
               </a:spcAft>
             </a:pPr>
             <a:r>
-              <a:rPr sz="1100" b="1" lang="zh-TW" dirty="0">
+              <a:rPr sz="1300" b="1" lang="zh-TW" dirty="0">
                 <a:solidFill>
                   <a:srgbClr val="000000"/>
                 </a:solidFill>
@@ -7917,7 +7917,7 @@
               <a:t>這一張的目的：</a:t>
             </a:r>
             <a:r>
-              <a:rPr sz="1100" lang="zh-TW" dirty="0">
+              <a:rPr sz="1300" lang="zh-TW" dirty="0">
                 <a:solidFill>
                   <a:srgbClr val="000000"/>
                 </a:solidFill>
@@ -7935,11 +7935,11 @@
                 <a:spcPts val="0"/>
               </a:spcBef>
               <a:spcAft>
-                <a:spcPts val="183"/>
+                <a:spcPts val="217"/>
               </a:spcAft>
             </a:pPr>
             <a:r>
-              <a:rPr sz="1100" lang="zh-TW" dirty="0">
+              <a:rPr sz="1300" lang="zh-TW" dirty="0">
                 <a:solidFill>
                   <a:srgbClr val="000000"/>
                 </a:solidFill>
@@ -7950,7 +7950,7 @@
               <a:t>觀察台上那些框，是從哪裡來的？</a:t>
             </a:r>
             <a:r>
-              <a:rPr sz="1100" b="1" lang="zh-TW" dirty="0">
+              <a:rPr sz="1300" b="1" lang="zh-TW" dirty="0">
                 <a:solidFill>
                   <a:srgbClr val="000000"/>
                 </a:solidFill>
@@ -7961,7 +7961,7 @@
               <a:t>人畫的。</a:t>
             </a:r>
             <a:r>
-              <a:rPr sz="1100" lang="zh-TW" dirty="0">
+              <a:rPr sz="1300" lang="zh-TW" dirty="0">
                 <a:solidFill>
                   <a:srgbClr val="000000"/>
                 </a:solidFill>
@@ -7979,11 +7979,11 @@
                 <a:spcPts val="0"/>
               </a:spcBef>
               <a:spcAft>
-                <a:spcPts val="183"/>
+                <a:spcPts val="217"/>
               </a:spcAft>
             </a:pPr>
             <a:r>
-              <a:rPr sz="1100" lang="zh-TW" dirty="0">
+              <a:rPr sz="1300" lang="zh-TW" dirty="0">
                 <a:solidFill>
                   <a:srgbClr val="000000"/>
                 </a:solidFill>
@@ -7994,7 +7994,7 @@
               <a:t>nuScenes 每零點五秒挑一格，就是我們說的關鍵畫面，然後請人把畫面裡的每一台車、每一個人、每一個三角錐，都畫成一個</a:t>
             </a:r>
             <a:r>
-              <a:rPr sz="1100" b="1" lang="zh-TW" dirty="0">
+              <a:rPr sz="1300" b="1" lang="zh-TW" dirty="0">
                 <a:solidFill>
                   <a:srgbClr val="000000"/>
                 </a:solidFill>
@@ -8005,7 +8005,7 @@
               <a:t>立體框</a:t>
             </a:r>
             <a:r>
-              <a:rPr sz="1100" lang="zh-TW" dirty="0">
+              <a:rPr sz="1300" lang="zh-TW" dirty="0">
                 <a:solidFill>
                   <a:srgbClr val="000000"/>
                 </a:solidFill>
@@ -8023,11 +8023,11 @@
                 <a:spcPts val="0"/>
               </a:spcBef>
               <a:spcAft>
-                <a:spcPts val="183"/>
+                <a:spcPts val="217"/>
               </a:spcAft>
             </a:pPr>
             <a:r>
-              <a:rPr sz="1100" lang="zh-TW" dirty="0">
+              <a:rPr sz="1300" lang="zh-TW" dirty="0">
                 <a:solidFill>
                   <a:srgbClr val="000000"/>
                 </a:solidFill>
@@ -8038,7 +8038,7 @@
               <a:t>一個框要記七個數字：位置三個，x、y、z；大小三個，寬、長、高；最後一個是</a:t>
             </a:r>
             <a:r>
-              <a:rPr sz="1100" b="1" lang="zh-TW" dirty="0">
+              <a:rPr sz="1300" b="1" lang="zh-TW" dirty="0">
                 <a:solidFill>
                   <a:srgbClr val="000000"/>
                 </a:solidFill>
@@ -8049,7 +8049,7 @@
               <a:t>車頭朝向</a:t>
             </a:r>
             <a:r>
-              <a:rPr sz="1100" lang="zh-TW" dirty="0">
+              <a:rPr sz="1300" lang="zh-TW" dirty="0">
                 <a:solidFill>
                   <a:srgbClr val="000000"/>
                 </a:solidFill>
@@ -8060,7 +8060,7 @@
               <a:t>，從上往下看，這個框轉了幾度，英文叫 yaw，中文叫偏航角或航向角。就像指南針：同樣停在路邊的兩台車，一台順著路停，車頭朝北；一台斜斜地停進停車格，車頭朝東北，位置、大小都一樣，只差這一個角度。這個角度是對</a:t>
             </a:r>
             <a:r>
-              <a:rPr sz="1100" b="1" lang="zh-TW" dirty="0">
+              <a:rPr sz="1300" b="1" lang="zh-TW" dirty="0">
                 <a:solidFill>
                   <a:srgbClr val="000000"/>
                 </a:solidFill>
@@ -8071,7 +8071,7 @@
               <a:t>地圖</a:t>
             </a:r>
             <a:r>
-              <a:rPr sz="1100" lang="zh-TW" dirty="0">
+              <a:rPr sz="1300" lang="zh-TW" dirty="0">
                 <a:solidFill>
                   <a:srgbClr val="000000"/>
                 </a:solidFill>
@@ -8089,11 +8089,11 @@
                 <a:spcPts val="0"/>
               </a:spcBef>
               <a:spcAft>
-                <a:spcPts val="183"/>
+                <a:spcPts val="217"/>
               </a:spcAft>
             </a:pPr>
             <a:r>
-              <a:rPr sz="1100" lang="zh-TW" dirty="0">
+              <a:rPr sz="1300" lang="zh-TW" dirty="0">
                 <a:solidFill>
                   <a:srgbClr val="000000"/>
                 </a:solidFill>
@@ -8104,7 +8104,7 @@
               <a:t>為什麼只有一個角度？第二節講外參時，方向有三個數字：左右轉、上下仰、有沒有歪。可是路上的車和人幾乎都是平平地站在地面上，不會仰頭、不會側翻，所以標註只記左右轉的那一個就夠了。另外還要標</a:t>
             </a:r>
             <a:r>
-              <a:rPr sz="1100" b="1" lang="zh-TW" dirty="0">
+              <a:rPr sz="1300" b="1" lang="zh-TW" dirty="0">
                 <a:solidFill>
                   <a:srgbClr val="000000"/>
                 </a:solidFill>
@@ -8115,7 +8115,7 @@
               <a:t>屬性</a:t>
             </a:r>
             <a:r>
-              <a:rPr sz="1100" lang="zh-TW" dirty="0">
+              <a:rPr sz="1300" lang="zh-TW" dirty="0">
                 <a:solidFill>
                   <a:srgbClr val="000000"/>
                 </a:solidFill>
@@ -8126,7 +8126,7 @@
               <a:t>：這個人在走還是站著？這台車在開還是停著？整份資料一共二十三類，從汽車、行人，到嬰兒車、輪椅、警察都有。規則是：</a:t>
             </a:r>
             <a:r>
-              <a:rPr sz="1100" b="1" lang="zh-TW" dirty="0">
+              <a:rPr sz="1300" b="1" lang="zh-TW" dirty="0">
                 <a:solidFill>
                   <a:srgbClr val="000000"/>
                 </a:solidFill>
@@ -8137,7 +8137,7 @@
               <a:t>只要有一個光達點或雷達點打到它，就要標</a:t>
             </a:r>
             <a:r>
-              <a:rPr sz="1100" lang="zh-TW" dirty="0">
+              <a:rPr sz="1300" lang="zh-TW" dirty="0">
                 <a:solidFill>
                   <a:srgbClr val="000000"/>
                 </a:solidFill>
@@ -8155,11 +8155,11 @@
                 <a:spcPts val="0"/>
               </a:spcBef>
               <a:spcAft>
-                <a:spcPts val="183"/>
+                <a:spcPts val="217"/>
               </a:spcAft>
             </a:pPr>
             <a:r>
-              <a:rPr sz="1100" lang="zh-TW" dirty="0">
+              <a:rPr sz="1300" lang="zh-TW" dirty="0">
                 <a:solidFill>
                   <a:srgbClr val="000000"/>
                 </a:solidFill>
@@ -8170,7 +8170,7 @@
               <a:t>量有多大？完整版有四萬個關鍵畫面、</a:t>
             </a:r>
             <a:r>
-              <a:rPr sz="1100" b="1" lang="zh-TW" dirty="0">
+              <a:rPr sz="1300" b="1" lang="zh-TW" dirty="0">
                 <a:solidFill>
                   <a:srgbClr val="000000"/>
                 </a:solidFill>
@@ -8181,7 +8181,7 @@
               <a:t>一百四十萬個框</a:t>
             </a:r>
             <a:r>
-              <a:rPr sz="1100" lang="zh-TW" dirty="0">
+              <a:rPr sz="1300" lang="zh-TW" dirty="0">
                 <a:solidFill>
                   <a:srgbClr val="000000"/>
                 </a:solidFill>
@@ -8199,11 +8199,11 @@
                 <a:spcPts val="0"/>
               </a:spcBef>
               <a:spcAft>
-                <a:spcPts val="183"/>
+                <a:spcPts val="217"/>
               </a:spcAft>
             </a:pPr>
             <a:r>
-              <a:rPr sz="1100" lang="zh-TW" dirty="0">
+              <a:rPr sz="1300" lang="zh-TW" dirty="0">
                 <a:solidFill>
                   <a:srgbClr val="000000"/>
                 </a:solidFill>
@@ -8221,11 +8221,11 @@
                 <a:spcPts val="0"/>
               </a:spcBef>
               <a:spcAft>
-                <a:spcPts val="183"/>
+                <a:spcPts val="217"/>
               </a:spcAft>
             </a:pPr>
             <a:r>
-              <a:rPr sz="1100" b="1" lang="zh-TW" dirty="0">
+              <a:rPr sz="1300" b="1" lang="zh-TW" dirty="0">
                 <a:solidFill>
                   <a:srgbClr val="000000"/>
                 </a:solidFill>
@@ -8236,7 +8236,7 @@
               <a:t>下週上機，換各位自己標。</a:t>
             </a:r>
             <a:r>
-              <a:rPr sz="1100" lang="zh-TW" dirty="0">
+              <a:rPr sz="1300" lang="zh-TW" dirty="0">
                 <a:solidFill>
                   <a:srgbClr val="000000"/>
                 </a:solidFill>
@@ -8323,8 +8323,8 @@
         </p:nvSpPr>
         <p:spPr>
           <a:xfrm>
-            <a:off x="540000" y="540000"/>
-            <a:ext cx="6480000" cy="3645000"/>
+            <a:off x="1620000" y="380000"/>
+            <a:ext cx="4320000" cy="2430000"/>
           </a:xfrm>
         </p:spPr>
       </p:sp>
@@ -8340,8 +8340,8 @@
         </p:nvSpPr>
         <p:spPr>
           <a:xfrm>
-            <a:off x="540000" y="4440000"/>
-            <a:ext cx="6480000" cy="5500000"/>
+            <a:off x="540000" y="2990000"/>
+            <a:ext cx="6480000" cy="7060000"/>
           </a:xfrm>
         </p:spPr>
         <p:txBody>
@@ -8353,11 +8353,11 @@
                 <a:spcPts val="0"/>
               </a:spcBef>
               <a:spcAft>
-                <a:spcPts val="200"/>
+                <a:spcPts val="267"/>
               </a:spcAft>
             </a:pPr>
             <a:r>
-              <a:rPr sz="1200" b="1" lang="zh-TW" dirty="0">
+              <a:rPr sz="1600" b="1" lang="zh-TW" dirty="0">
                 <a:solidFill>
                   <a:srgbClr val="000000"/>
                 </a:solidFill>
@@ -8368,7 +8368,7 @@
               <a:t>這一張的目的：</a:t>
             </a:r>
             <a:r>
-              <a:rPr sz="1200" lang="zh-TW" dirty="0">
+              <a:rPr sz="1600" lang="zh-TW" dirty="0">
                 <a:solidFill>
                   <a:srgbClr val="000000"/>
                 </a:solidFill>
@@ -8386,11 +8386,11 @@
                 <a:spcPts val="0"/>
               </a:spcBef>
               <a:spcAft>
-                <a:spcPts val="200"/>
+                <a:spcPts val="267"/>
               </a:spcAft>
             </a:pPr>
             <a:r>
-              <a:rPr sz="1200" lang="zh-TW" dirty="0">
+              <a:rPr sz="1600" lang="zh-TW" dirty="0">
                 <a:solidFill>
                   <a:srgbClr val="000000"/>
                 </a:solidFill>
@@ -8408,11 +8408,11 @@
                 <a:spcPts val="0"/>
               </a:spcBef>
               <a:spcAft>
-                <a:spcPts val="200"/>
+                <a:spcPts val="267"/>
               </a:spcAft>
             </a:pPr>
             <a:r>
-              <a:rPr sz="1200" lang="zh-TW" dirty="0">
+              <a:rPr sz="1600" lang="zh-TW" dirty="0">
                 <a:solidFill>
                   <a:srgbClr val="000000"/>
                 </a:solidFill>
@@ -8430,11 +8430,11 @@
                 <a:spcPts val="0"/>
               </a:spcBef>
               <a:spcAft>
-                <a:spcPts val="200"/>
+                <a:spcPts val="267"/>
               </a:spcAft>
             </a:pPr>
             <a:r>
-              <a:rPr sz="1200" lang="zh-TW" dirty="0">
+              <a:rPr sz="1600" lang="zh-TW" dirty="0">
                 <a:solidFill>
                   <a:srgbClr val="000000"/>
                 </a:solidFill>
@@ -8445,7 +8445,7 @@
               <a:t>可是請看右邊這張圖。這是我們用的 mini 版十段場景，每一類被標了幾個框。</a:t>
             </a:r>
             <a:r>
-              <a:rPr sz="1200" b="1" lang="zh-TW" dirty="0">
+              <a:rPr sz="1600" b="1" lang="zh-TW" dirty="0">
                 <a:solidFill>
                   <a:srgbClr val="000000"/>
                 </a:solidFill>
@@ -8456,7 +8456,7 @@
               <a:t>汽車七千六百多個，機車只有四百七十一個</a:t>
             </a:r>
             <a:r>
-              <a:rPr sz="1200" lang="zh-TW" dirty="0">
+              <a:rPr sz="1600" lang="zh-TW" dirty="0">
                 <a:solidFill>
                   <a:srgbClr val="000000"/>
                 </a:solidFill>
@@ -8474,11 +8474,11 @@
                 <a:spcPts val="0"/>
               </a:spcBef>
               <a:spcAft>
-                <a:spcPts val="200"/>
+                <a:spcPts val="267"/>
               </a:spcAft>
             </a:pPr>
             <a:r>
-              <a:rPr sz="1200" lang="zh-TW" dirty="0">
+              <a:rPr sz="1600" lang="zh-TW" dirty="0">
                 <a:solidFill>
                   <a:srgbClr val="000000"/>
                 </a:solidFill>
@@ -8489,7 +8489,7 @@
               <a:t>各位想想河內、胡志明市的街上，是這個比例嗎？一個只看過波士頓的電腦，第一次看到機車海，它會怎樣？</a:t>
             </a:r>
             <a:r>
-              <a:rPr sz="1200" b="1" lang="zh-TW" dirty="0">
+              <a:rPr sz="1600" b="1" lang="zh-TW" dirty="0">
                 <a:solidFill>
                   <a:srgbClr val="000000"/>
                 </a:solidFill>
@@ -8500,7 +8500,7 @@
               <a:t>資料在哪裡錄，模型就熟悉哪裡。</a:t>
             </a:r>
             <a:r>
-              <a:rPr sz="1200" lang="zh-TW" dirty="0">
+              <a:rPr sz="1600" lang="zh-TW" dirty="0">
                 <a:solidFill>
                   <a:srgbClr val="000000"/>
                 </a:solidFill>
@@ -8518,11 +8518,11 @@
                 <a:spcPts val="0"/>
               </a:spcBef>
               <a:spcAft>
-                <a:spcPts val="200"/>
+                <a:spcPts val="267"/>
               </a:spcAft>
             </a:pPr>
             <a:r>
-              <a:rPr sz="1200" lang="zh-TW" dirty="0">
+              <a:rPr sz="1600" lang="zh-TW" dirty="0">
                 <a:solidFill>
                   <a:srgbClr val="000000"/>
                 </a:solidFill>
@@ -8533,7 +8533,7 @@
               <a:t>最後提醒一件事：nuScenes 的授權是</a:t>
             </a:r>
             <a:r>
-              <a:rPr sz="1200" b="1" lang="zh-TW" dirty="0">
+              <a:rPr sz="1600" b="1" lang="zh-TW" dirty="0">
                 <a:solidFill>
                   <a:srgbClr val="000000"/>
                 </a:solidFill>
@@ -8544,7 +8544,7 @@
               <a:t>非商業使用</a:t>
             </a:r>
             <a:r>
-              <a:rPr sz="1200" lang="zh-TW" dirty="0">
+              <a:rPr sz="1600" lang="zh-TW" dirty="0">
                 <a:solidFill>
                   <a:srgbClr val="000000"/>
                 </a:solidFill>

--- a/第七週(10-22)/第七週_第3節_簡報.pptx
+++ b/第七週(10-22)/第七週_第3節_簡報.pptx
@@ -5351,7 +5351,7 @@
                 <a:ea typeface="Arial Unicode MS"/>
                 <a:cs typeface="Arial Unicode MS"/>
               </a:rPr>
-              <a:t>一顆加速度計放在桌上，讀數一直跳；兩顆取平均，雜訊就小一點，四顆疊起來，雜訊剩一半。他還提到一種很常見的做法叫卡爾曼濾波，就是第二節第九張「比較準的多相信一點」。
+              <a:t>一顆加速度計放在桌上，讀數一直跳；兩顆取平均，雜訊就小一點，四顆疊起來，雜訊剩一半。他還提到一種很常見的做法叫卡爾曼濾波，就是第二節第十張「比較準的多相信一點」。
 </a:t>
             </a:r>
           </a:p>

--- a/第七週(10-22)/第七週_第3節_簡報.pptx
+++ b/第七週(10-22)/第七週_第3節_簡報.pptx
@@ -1017,7 +1017,7 @@
                 <a:ea typeface="Arial Unicode MS"/>
                 <a:cs typeface="Arial Unicode MS"/>
               </a:rPr>
-              <a:t>，會在每個框上寫一行字，例如「車・14 m・≈0」：「車」是相機認出來的，「14 m」是光達量的，「≈0」是雷達量的速度。三種感測器各給一塊，拼成一句話。任務五會用到。
+              <a:t>，會在每個框上寫一行字，例如「車・12 m・遠離 18」：「車」是相機認出來的，「12 m」是光達量的，「遠離 18」是雷達量的速度。三種感測器各給一塊，拼成一句話。任務五會用到。
 </a:t>
             </a:r>
           </a:p>
@@ -1269,11 +1269,11 @@
                 <a:spcPts val="0"/>
               </a:spcBef>
               <a:spcAft>
-                <a:spcPts val="208"/>
+                <a:spcPts val="200"/>
               </a:spcAft>
             </a:pPr>
             <a:r>
-              <a:rPr sz="1250" b="1" lang="zh-TW" dirty="0">
+              <a:rPr sz="1200" b="1" lang="zh-TW" dirty="0">
                 <a:solidFill>
                   <a:srgbClr val="000000"/>
                 </a:solidFill>
@@ -1284,7 +1284,7 @@
               <a:t>這一張的目的：</a:t>
             </a:r>
             <a:r>
-              <a:rPr sz="1250" lang="zh-TW" dirty="0">
+              <a:rPr sz="1200" lang="zh-TW" dirty="0">
                 <a:solidFill>
                   <a:srgbClr val="000000"/>
                 </a:solidFill>
@@ -1302,11 +1302,11 @@
                 <a:spcPts val="0"/>
               </a:spcBef>
               <a:spcAft>
-                <a:spcPts val="208"/>
+                <a:spcPts val="200"/>
               </a:spcAft>
             </a:pPr>
             <a:r>
-              <a:rPr sz="1250" lang="zh-TW" dirty="0">
+              <a:rPr sz="1200" lang="zh-TW" dirty="0">
                 <a:solidFill>
                   <a:srgbClr val="000000"/>
                 </a:solidFill>
@@ -1317,26 +1317,26 @@
               <a:t>任務一，</a:t>
             </a:r>
             <a:r>
-              <a:rPr sz="1250" b="1" lang="zh-TW" dirty="0">
-                <a:solidFill>
-                  <a:srgbClr val="000000"/>
-                </a:solidFill>
-                <a:latin typeface="Arial Unicode MS"/>
-                <a:ea typeface="Arial Unicode MS"/>
-                <a:cs typeface="Arial Unicode MS"/>
-              </a:rPr>
-              <a:t>白天，美國波士頓</a:t>
-            </a:r>
-            <a:r>
-              <a:rPr sz="1250" lang="zh-TW" dirty="0">
-                <a:solidFill>
-                  <a:srgbClr val="000000"/>
-                </a:solidFill>
-                <a:latin typeface="Arial Unicode MS"/>
-                <a:ea typeface="Arial Unicode MS"/>
-                <a:cs typeface="Arial Unicode MS"/>
-              </a:rPr>
-              <a:t>的一條街，兩邊停滿了車。場景鈕按「白天」。
+              <a:rPr sz="1200" b="1" lang="zh-TW" dirty="0">
+                <a:solidFill>
+                  <a:srgbClr val="000000"/>
+                </a:solidFill>
+                <a:latin typeface="Arial Unicode MS"/>
+                <a:ea typeface="Arial Unicode MS"/>
+                <a:cs typeface="Arial Unicode MS"/>
+              </a:rPr>
+              <a:t>白天，美國波士頓的一個路口</a:t>
+            </a:r>
+            <a:r>
+              <a:rPr sz="1200" lang="zh-TW" dirty="0">
+                <a:solidFill>
+                  <a:srgbClr val="000000"/>
+                </a:solidFill>
+                <a:latin typeface="Arial Unicode MS"/>
+                <a:ea typeface="Arial Unicode MS"/>
+                <a:cs typeface="Arial Unicode MS"/>
+              </a:rPr>
+              <a:t>，斑馬線上有一群人正在過馬路，離車子八到十公尺。場景鈕按「白天」。這一格各位在第一節看過，今天自己數。
 </a:t>
             </a:r>
           </a:p>
@@ -1346,11 +1346,11 @@
                 <a:spcPts val="0"/>
               </a:spcBef>
               <a:spcAft>
-                <a:spcPts val="208"/>
+                <a:spcPts val="200"/>
               </a:spcAft>
             </a:pPr>
             <a:r>
-              <a:rPr sz="1250" lang="zh-TW" dirty="0">
+              <a:rPr sz="1200" lang="zh-TW" dirty="0">
                 <a:solidFill>
                   <a:srgbClr val="000000"/>
                 </a:solidFill>
@@ -1361,7 +1361,7 @@
               <a:t>先只開</a:t>
             </a:r>
             <a:r>
-              <a:rPr sz="1250" b="1" lang="zh-TW" dirty="0">
+              <a:rPr sz="1200" b="1" lang="zh-TW" dirty="0">
                 <a:solidFill>
                   <a:srgbClr val="000000"/>
                 </a:solidFill>
@@ -1372,7 +1372,7 @@
               <a:t>光達點和雷達點</a:t>
             </a:r>
             <a:r>
-              <a:rPr sz="1250" lang="zh-TW" dirty="0">
+              <a:rPr sz="1200" lang="zh-TW" dirty="0">
                 <a:solidFill>
                   <a:srgbClr val="000000"/>
                 </a:solidFill>
@@ -1390,11 +1390,11 @@
                 <a:spcPts val="0"/>
               </a:spcBef>
               <a:spcAft>
-                <a:spcPts val="208"/>
+                <a:spcPts val="200"/>
               </a:spcAft>
             </a:pPr>
             <a:r>
-              <a:rPr sz="1250" lang="zh-TW" dirty="0">
+              <a:rPr sz="1200" lang="zh-TW" dirty="0">
                 <a:solidFill>
                   <a:srgbClr val="000000"/>
                 </a:solidFill>
@@ -1412,11 +1412,11 @@
                 <a:spcPts val="0"/>
               </a:spcBef>
               <a:spcAft>
-                <a:spcPts val="208"/>
+                <a:spcPts val="200"/>
               </a:spcAft>
             </a:pPr>
             <a:r>
-              <a:rPr sz="1250" b="1" lang="zh-TW" dirty="0">
+              <a:rPr sz="1200" b="1" lang="zh-TW" dirty="0">
                 <a:solidFill>
                   <a:srgbClr val="000000"/>
                 </a:solidFill>
@@ -1427,37 +1427,37 @@
               <a:t>第 1 題。</a:t>
             </a:r>
             <a:r>
-              <a:rPr sz="1250" lang="zh-TW" dirty="0">
-                <a:solidFill>
-                  <a:srgbClr val="000000"/>
-                </a:solidFill>
-                <a:latin typeface="Arial Unicode MS"/>
-                <a:ea typeface="Arial Unicode MS"/>
-                <a:cs typeface="Arial Unicode MS"/>
-              </a:rPr>
-              <a:t>光達點三千零一十三個，雷達點四十八個。三千除以四十八，大約六十。答案是</a:t>
-            </a:r>
-            <a:r>
-              <a:rPr sz="1250" b="1" lang="zh-TW" dirty="0">
-                <a:solidFill>
-                  <a:srgbClr val="000000"/>
-                </a:solidFill>
-                <a:latin typeface="Arial Unicode MS"/>
-                <a:ea typeface="Arial Unicode MS"/>
-                <a:cs typeface="Arial Unicode MS"/>
-              </a:rPr>
-              <a:t>約 60 倍</a:t>
-            </a:r>
-            <a:r>
-              <a:rPr sz="1250" lang="zh-TW" dirty="0">
-                <a:solidFill>
-                  <a:srgbClr val="000000"/>
-                </a:solidFill>
-                <a:latin typeface="Arial Unicode MS"/>
-                <a:ea typeface="Arial Unicode MS"/>
-                <a:cs typeface="Arial Unicode MS"/>
-              </a:rPr>
-              <a:t>。同一個瞬間、同一個畫面，光達給的點，是雷達的六十倍。這就是光達「有形狀」的原因。
+              <a:rPr sz="1200" lang="zh-TW" dirty="0">
+                <a:solidFill>
+                  <a:srgbClr val="000000"/>
+                </a:solidFill>
+                <a:latin typeface="Arial Unicode MS"/>
+                <a:ea typeface="Arial Unicode MS"/>
+                <a:cs typeface="Arial Unicode MS"/>
+              </a:rPr>
+              <a:t>光達點兩千兩百九十五個，雷達點五十六個。兩千三除以五十六，大約四十。答案是</a:t>
+            </a:r>
+            <a:r>
+              <a:rPr sz="1200" b="1" lang="zh-TW" dirty="0">
+                <a:solidFill>
+                  <a:srgbClr val="000000"/>
+                </a:solidFill>
+                <a:latin typeface="Arial Unicode MS"/>
+                <a:ea typeface="Arial Unicode MS"/>
+                <a:cs typeface="Arial Unicode MS"/>
+              </a:rPr>
+              <a:t>約 40 倍</a:t>
+            </a:r>
+            <a:r>
+              <a:rPr sz="1200" lang="zh-TW" dirty="0">
+                <a:solidFill>
+                  <a:srgbClr val="000000"/>
+                </a:solidFill>
+                <a:latin typeface="Arial Unicode MS"/>
+                <a:ea typeface="Arial Unicode MS"/>
+                <a:cs typeface="Arial Unicode MS"/>
+              </a:rPr>
+              <a:t>。同一個瞬間、同一個畫面，光達給的點，是雷達的四十倍。這就是光達「有形狀」的原因。
 </a:t>
             </a:r>
           </a:p>
@@ -1467,11 +1467,11 @@
                 <a:spcPts val="0"/>
               </a:spcBef>
               <a:spcAft>
-                <a:spcPts val="208"/>
+                <a:spcPts val="200"/>
               </a:spcAft>
             </a:pPr>
             <a:r>
-              <a:rPr sz="1250" b="1" lang="zh-TW" dirty="0">
+              <a:rPr sz="1200" b="1" lang="zh-TW" dirty="0">
                 <a:solidFill>
                   <a:srgbClr val="000000"/>
                 </a:solidFill>
@@ -1482,18 +1482,18 @@
               <a:t>第 2 題。</a:t>
             </a:r>
             <a:r>
-              <a:rPr sz="1250" lang="zh-TW" dirty="0">
-                <a:solidFill>
-                  <a:srgbClr val="000000"/>
-                </a:solidFill>
-                <a:latin typeface="Arial Unicode MS"/>
-                <a:ea typeface="Arial Unicode MS"/>
-                <a:cs typeface="Arial Unicode MS"/>
-              </a:rPr>
-              <a:t>打開物體框。畫面裡的行人，框都是</a:t>
-            </a:r>
-            <a:r>
-              <a:rPr sz="1250" b="1" lang="zh-TW" dirty="0">
+              <a:rPr sz="1200" lang="zh-TW" dirty="0">
+                <a:solidFill>
+                  <a:srgbClr val="000000"/>
+                </a:solidFill>
+                <a:latin typeface="Arial Unicode MS"/>
+                <a:ea typeface="Arial Unicode MS"/>
+                <a:cs typeface="Arial Unicode MS"/>
+              </a:rPr>
+              <a:t>打開物體框。斑馬線上六個人，框都是</a:t>
+            </a:r>
+            <a:r>
+              <a:rPr sz="1200" b="1" lang="zh-TW" dirty="0">
                 <a:solidFill>
                   <a:srgbClr val="000000"/>
                 </a:solidFill>
@@ -1504,18 +1504,18 @@
               <a:t>橘色</a:t>
             </a:r>
             <a:r>
-              <a:rPr sz="1250" lang="zh-TW" dirty="0">
-                <a:solidFill>
-                  <a:srgbClr val="000000"/>
-                </a:solidFill>
-                <a:latin typeface="Arial Unicode MS"/>
-                <a:ea typeface="Arial Unicode MS"/>
-                <a:cs typeface="Arial Unicode MS"/>
-              </a:rPr>
-              <a:t>的，一個雷達點都沒有。看表格，「前方相機畫面」那欄有 ● 的行人有四個，十九點六、二十五點三、二十五點三、三十一點六公尺，雷達點全部是零。答案是 </a:t>
-            </a:r>
-            <a:r>
-              <a:rPr sz="1250" b="1" lang="zh-TW" dirty="0">
+              <a:rPr sz="1200" lang="zh-TW" dirty="0">
+                <a:solidFill>
+                  <a:srgbClr val="000000"/>
+                </a:solidFill>
+                <a:latin typeface="Arial Unicode MS"/>
+                <a:ea typeface="Arial Unicode MS"/>
+                <a:cs typeface="Arial Unicode MS"/>
+              </a:rPr>
+              <a:t>的。看表格，八到十公尺那六列，雷達點全部是零；光達點每個人都有，少的七個，多的七十一個。答案是 </a:t>
+            </a:r>
+            <a:r>
+              <a:rPr sz="1200" b="1" lang="zh-TW" dirty="0">
                 <a:solidFill>
                   <a:srgbClr val="000000"/>
                 </a:solidFill>
@@ -1526,15 +1526,15 @@
               <a:t>0 個</a:t>
             </a:r>
             <a:r>
-              <a:rPr sz="1250" lang="zh-TW" dirty="0">
-                <a:solidFill>
-                  <a:srgbClr val="000000"/>
-                </a:solidFill>
-                <a:latin typeface="Arial Unicode MS"/>
-                <a:ea typeface="Arial Unicode MS"/>
-                <a:cs typeface="Arial Unicode MS"/>
-              </a:rPr>
-              <a:t>。第一節那張統計表說，行人在二十到三十公尺，只有一成多抓得到；今天在一個瞬間裡親眼看到。
+              <a:rPr sz="1200" lang="zh-TW" dirty="0">
+                <a:solidFill>
+                  <a:srgbClr val="000000"/>
+                </a:solidFill>
+                <a:latin typeface="Arial Unicode MS"/>
+                <a:ea typeface="Arial Unicode MS"/>
+                <a:cs typeface="Arial Unicode MS"/>
+              </a:rPr>
+              <a:t>。第一節講過原因：人反射弱，橫著走又像靜止的東西。也講過，同一群人前後十五秒，其實大約三成的時候抓得到，這一格剛好全部漏掉。
 </a:t>
             </a:r>
           </a:p>
@@ -1544,11 +1544,11 @@
                 <a:spcPts val="0"/>
               </a:spcBef>
               <a:spcAft>
-                <a:spcPts val="208"/>
+                <a:spcPts val="200"/>
               </a:spcAft>
             </a:pPr>
             <a:r>
-              <a:rPr sz="1250" b="1" lang="zh-TW" dirty="0">
+              <a:rPr sz="1200" b="1" lang="zh-TW" dirty="0">
                 <a:solidFill>
                   <a:srgbClr val="000000"/>
                 </a:solidFill>
@@ -1559,18 +1559,18 @@
               <a:t>第 3 題。</a:t>
             </a:r>
             <a:r>
-              <a:rPr sz="1250" lang="zh-TW" dirty="0">
-                <a:solidFill>
-                  <a:srgbClr val="000000"/>
-                </a:solidFill>
-                <a:latin typeface="Arial Unicode MS"/>
-                <a:ea typeface="Arial Unicode MS"/>
-                <a:cs typeface="Arial Unicode MS"/>
-              </a:rPr>
-              <a:t>紅圈全部在很低的地方：遠的貼著地平線，近的車子身上稍微低一點，樓上、樹上、招牌上一個都沒有。答案是：</a:t>
-            </a:r>
-            <a:r>
-              <a:rPr sz="1250" b="1" lang="zh-TW" dirty="0">
+              <a:rPr sz="1200" lang="zh-TW" dirty="0">
+                <a:solidFill>
+                  <a:srgbClr val="000000"/>
+                </a:solidFill>
+                <a:latin typeface="Arial Unicode MS"/>
+                <a:ea typeface="Arial Unicode MS"/>
+                <a:cs typeface="Arial Unicode MS"/>
+              </a:rPr>
+              <a:t>紅圈全部在很低的地方，貼著地平線附近，樓上、樹上、招牌上一個都沒有。答案是：</a:t>
+            </a:r>
+            <a:r>
+              <a:rPr sz="1200" b="1" lang="zh-TW" dirty="0">
                 <a:solidFill>
                   <a:srgbClr val="000000"/>
                 </a:solidFill>
@@ -1581,7 +1581,7 @@
               <a:t>ARS 408 量不出高度，所有的點都放在同一個高度。</a:t>
             </a:r>
             <a:r>
-              <a:rPr sz="1250" lang="zh-TW" dirty="0">
+              <a:rPr sz="1200" lang="zh-TW" dirty="0">
                 <a:solidFill>
                   <a:srgbClr val="000000"/>
                 </a:solidFill>
@@ -1599,19 +1599,19 @@
                 <a:spcPts val="0"/>
               </a:spcBef>
               <a:spcAft>
-                <a:spcPts val="208"/>
+                <a:spcPts val="200"/>
               </a:spcAft>
             </a:pPr>
             <a:r>
-              <a:rPr sz="1250" lang="zh-TW" dirty="0">
-                <a:solidFill>
-                  <a:srgbClr val="000000"/>
-                </a:solidFill>
-                <a:latin typeface="Arial Unicode MS"/>
-                <a:ea typeface="Arial Unicode MS"/>
-                <a:cs typeface="Arial Unicode MS"/>
-              </a:rPr>
-              <a:t>其他三個選項為什麼不對？「只看得到地面」不對，雷達點落在車身上；「只看得到車」也不對，路邊靜止的東西也有點；「照片拍歪」也不對，光達點就有高有低，打得到樓上。
+              <a:rPr sz="1200" lang="zh-TW" dirty="0">
+                <a:solidFill>
+                  <a:srgbClr val="000000"/>
+                </a:solidFill>
+                <a:latin typeface="Arial Unicode MS"/>
+                <a:ea typeface="Arial Unicode MS"/>
+                <a:cs typeface="Arial Unicode MS"/>
+              </a:rPr>
+              <a:t>其他三個選項為什麼不對？「只看得到地面」不對，雷達的電波是水平往前打的，點落在遠處的車和路邊的東西上；「只看得到車」也不對，路邊靜止的東西也有點；「照片拍歪」也不對，光達點就有高有低，打得到樓上。
 </a:t>
             </a:r>
           </a:p>
@@ -1621,11 +1621,11 @@
                 <a:spcPts val="0"/>
               </a:spcBef>
               <a:spcAft>
-                <a:spcPts val="208"/>
+                <a:spcPts val="200"/>
               </a:spcAft>
             </a:pPr>
             <a:r>
-              <a:rPr sz="1250" lang="zh-TW" dirty="0">
+              <a:rPr sz="1200" lang="zh-TW" dirty="0">
                 <a:solidFill>
                   <a:srgbClr val="000000"/>
                 </a:solidFill>
@@ -1636,7 +1636,7 @@
               <a:t>順便講清楚：紅圈不是排成一條直直的線，近的比較低、遠的貼著地平線，這是透視，就像地上的斑馬線，近的在腳下、遠的在地平線。它們真正的共同點是：</a:t>
             </a:r>
             <a:r>
-              <a:rPr sz="1250" b="1" lang="zh-TW" dirty="0">
+              <a:rPr sz="1200" b="1" lang="zh-TW" dirty="0">
                 <a:solidFill>
                   <a:srgbClr val="000000"/>
                 </a:solidFill>
@@ -2171,11 +2171,11 @@
                 <a:spcPts val="0"/>
               </a:spcBef>
               <a:spcAft>
-                <a:spcPts val="217"/>
+                <a:spcPts val="208"/>
               </a:spcAft>
             </a:pPr>
             <a:r>
-              <a:rPr sz="1300" b="1" lang="zh-TW" dirty="0">
+              <a:rPr sz="1250" b="1" lang="zh-TW" dirty="0">
                 <a:solidFill>
                   <a:srgbClr val="000000"/>
                 </a:solidFill>
@@ -2186,7 +2186,7 @@
               <a:t>這一張的目的：</a:t>
             </a:r>
             <a:r>
-              <a:rPr sz="1300" lang="zh-TW" dirty="0">
+              <a:rPr sz="1250" lang="zh-TW" dirty="0">
                 <a:solidFill>
                   <a:srgbClr val="000000"/>
                 </a:solidFill>
@@ -2204,11 +2204,11 @@
                 <a:spcPts val="0"/>
               </a:spcBef>
               <a:spcAft>
-                <a:spcPts val="217"/>
+                <a:spcPts val="208"/>
               </a:spcAft>
             </a:pPr>
             <a:r>
-              <a:rPr sz="1300" lang="zh-TW" dirty="0">
+              <a:rPr sz="1250" lang="zh-TW" dirty="0">
                 <a:solidFill>
                   <a:srgbClr val="000000"/>
                 </a:solidFill>
@@ -2219,7 +2219,7 @@
               <a:t>任務三，</a:t>
             </a:r>
             <a:r>
-              <a:rPr sz="1300" b="1" lang="zh-TW" dirty="0">
+              <a:rPr sz="1250" b="1" lang="zh-TW" dirty="0">
                 <a:solidFill>
                   <a:srgbClr val="000000"/>
                 </a:solidFill>
@@ -2230,7 +2230,7 @@
               <a:t>新加坡，晚上的一個路口</a:t>
             </a:r>
             <a:r>
-              <a:rPr sz="1300" lang="zh-TW" dirty="0">
+              <a:rPr sz="1250" lang="zh-TW" dirty="0">
                 <a:solidFill>
                   <a:srgbClr val="000000"/>
                 </a:solidFill>
@@ -2248,11 +2248,11 @@
                 <a:spcPts val="0"/>
               </a:spcBef>
               <a:spcAft>
-                <a:spcPts val="217"/>
+                <a:spcPts val="208"/>
               </a:spcAft>
             </a:pPr>
             <a:r>
-              <a:rPr sz="1300" lang="zh-TW" dirty="0">
+              <a:rPr sz="1250" lang="zh-TW" dirty="0">
                 <a:solidFill>
                   <a:srgbClr val="000000"/>
                 </a:solidFill>
@@ -2263,7 +2263,7 @@
               <a:t>先把所有開關</a:t>
             </a:r>
             <a:r>
-              <a:rPr sz="1300" b="1" lang="zh-TW" dirty="0">
+              <a:rPr sz="1250" b="1" lang="zh-TW" dirty="0">
                 <a:solidFill>
                   <a:srgbClr val="000000"/>
                 </a:solidFill>
@@ -2274,7 +2274,7 @@
               <a:t>全部關掉</a:t>
             </a:r>
             <a:r>
-              <a:rPr sz="1300" lang="zh-TW" dirty="0">
+              <a:rPr sz="1250" lang="zh-TW" dirty="0">
                 <a:solidFill>
                   <a:srgbClr val="000000"/>
                 </a:solidFill>
@@ -2285,7 +2285,7 @@
               <a:t>，只看照片。路燈很亮，地上很暗，右邊有一台黑色的車正開過路口，車身很暗。</a:t>
             </a:r>
             <a:r>
-              <a:rPr sz="1300" b="1" lang="zh-TW" dirty="0">
+              <a:rPr sz="1250" b="1" lang="zh-TW" dirty="0">
                 <a:solidFill>
                   <a:srgbClr val="000000"/>
                 </a:solidFill>
@@ -2296,7 +2296,7 @@
               <a:t>相機在晚上，就是這個樣子。</a:t>
             </a:r>
             <a:r>
-              <a:rPr sz="1300" lang="zh-TW" dirty="0">
+              <a:rPr sz="1250" lang="zh-TW" dirty="0">
                 <a:solidFill>
                   <a:srgbClr val="000000"/>
                 </a:solidFill>
@@ -2314,11 +2314,11 @@
                 <a:spcPts val="0"/>
               </a:spcBef>
               <a:spcAft>
-                <a:spcPts val="217"/>
+                <a:spcPts val="208"/>
               </a:spcAft>
             </a:pPr>
             <a:r>
-              <a:rPr sz="1300" lang="zh-TW" dirty="0">
+              <a:rPr sz="1250" lang="zh-TW" dirty="0">
                 <a:solidFill>
                   <a:srgbClr val="000000"/>
                 </a:solidFill>
@@ -2336,11 +2336,11 @@
                 <a:spcPts val="0"/>
               </a:spcBef>
               <a:spcAft>
-                <a:spcPts val="217"/>
+                <a:spcPts val="208"/>
               </a:spcAft>
             </a:pPr>
             <a:r>
-              <a:rPr sz="1300" lang="zh-TW" dirty="0">
+              <a:rPr sz="1250" lang="zh-TW" dirty="0">
                 <a:solidFill>
                   <a:srgbClr val="000000"/>
                 </a:solidFill>
@@ -2358,11 +2358,11 @@
                 <a:spcPts val="0"/>
               </a:spcBef>
               <a:spcAft>
-                <a:spcPts val="217"/>
+                <a:spcPts val="208"/>
               </a:spcAft>
             </a:pPr>
             <a:r>
-              <a:rPr sz="1300" b="1" lang="zh-TW" dirty="0">
+              <a:rPr sz="1250" b="1" lang="zh-TW" dirty="0">
                 <a:solidFill>
                   <a:srgbClr val="000000"/>
                 </a:solidFill>
@@ -2373,40 +2373,40 @@
               <a:t>第 6 題。</a:t>
             </a:r>
             <a:r>
-              <a:rPr sz="1300" lang="zh-TW" dirty="0">
-                <a:solidFill>
-                  <a:srgbClr val="000000"/>
-                </a:solidFill>
-                <a:latin typeface="Arial Unicode MS"/>
-                <a:ea typeface="Arial Unicode MS"/>
-                <a:cs typeface="Arial Unicode MS"/>
-              </a:rPr>
-              <a:t>看「數一數」第一格：三千三百二十五個。白天是三千零一十三個。答案是</a:t>
-            </a:r>
-            <a:r>
-              <a:rPr sz="1300" b="1" lang="zh-TW" dirty="0">
-                <a:solidFill>
-                  <a:srgbClr val="000000"/>
-                </a:solidFill>
-                <a:latin typeface="Arial Unicode MS"/>
-                <a:ea typeface="Arial Unicode MS"/>
-                <a:cs typeface="Arial Unicode MS"/>
-              </a:rPr>
-              <a:t>差不多</a:t>
-            </a:r>
-            <a:r>
-              <a:rPr sz="1300" lang="zh-TW" dirty="0">
-                <a:solidFill>
-                  <a:srgbClr val="000000"/>
-                </a:solidFill>
-                <a:latin typeface="Arial Unicode MS"/>
-                <a:ea typeface="Arial Unicode MS"/>
-                <a:cs typeface="Arial Unicode MS"/>
-              </a:rPr>
-              <a:t>。為什麼？光達自己打雷射出去，</a:t>
-            </a:r>
-            <a:r>
-              <a:rPr sz="1300" b="1" lang="zh-TW" dirty="0">
+              <a:rPr sz="1250" lang="zh-TW" dirty="0">
+                <a:solidFill>
+                  <a:srgbClr val="000000"/>
+                </a:solidFill>
+                <a:latin typeface="Arial Unicode MS"/>
+                <a:ea typeface="Arial Unicode MS"/>
+                <a:cs typeface="Arial Unicode MS"/>
+              </a:rPr>
+              <a:t>看「數一數」第一格：三千三百二十五個。白天是兩千兩百九十五個。答案是</a:t>
+            </a:r>
+            <a:r>
+              <a:rPr sz="1250" b="1" lang="zh-TW" dirty="0">
+                <a:solidFill>
+                  <a:srgbClr val="000000"/>
+                </a:solidFill>
+                <a:latin typeface="Arial Unicode MS"/>
+                <a:ea typeface="Arial Unicode MS"/>
+                <a:cs typeface="Arial Unicode MS"/>
+              </a:rPr>
+              <a:t>沒有變少</a:t>
+            </a:r>
+            <a:r>
+              <a:rPr sz="1250" lang="zh-TW" dirty="0">
+                <a:solidFill>
+                  <a:srgbClr val="000000"/>
+                </a:solidFill>
+                <a:latin typeface="Arial Unicode MS"/>
+                <a:ea typeface="Arial Unicode MS"/>
+                <a:cs typeface="Arial Unicode MS"/>
+              </a:rPr>
+              <a:t>，晚上反而多一些：兩格拍的地方不一樣，點數本來就會差一些，重點是天黑沒有讓它變少。為什麼？光達自己打雷射出去，</a:t>
+            </a:r>
+            <a:r>
+              <a:rPr sz="1250" b="1" lang="zh-TW" dirty="0">
                 <a:solidFill>
                   <a:srgbClr val="000000"/>
                 </a:solidFill>
@@ -2417,7 +2417,7 @@
               <a:t>不需要外面的光</a:t>
             </a:r>
             <a:r>
-              <a:rPr sz="1300" lang="zh-TW" dirty="0">
+              <a:rPr sz="1250" lang="zh-TW" dirty="0">
                 <a:solidFill>
                   <a:srgbClr val="000000"/>
                 </a:solidFill>
@@ -2435,11 +2435,11 @@
                 <a:spcPts val="0"/>
               </a:spcBef>
               <a:spcAft>
-                <a:spcPts val="217"/>
+                <a:spcPts val="208"/>
               </a:spcAft>
             </a:pPr>
             <a:r>
-              <a:rPr sz="1300" b="1" lang="zh-TW" dirty="0">
+              <a:rPr sz="1250" b="1" lang="zh-TW" dirty="0">
                 <a:solidFill>
                   <a:srgbClr val="000000"/>
                 </a:solidFill>
@@ -2450,7 +2450,7 @@
               <a:t>第 7 題。</a:t>
             </a:r>
             <a:r>
-              <a:rPr sz="1300" lang="zh-TW" dirty="0">
+              <a:rPr sz="1250" lang="zh-TW" dirty="0">
                 <a:solidFill>
                   <a:srgbClr val="000000"/>
                 </a:solidFill>
@@ -2461,7 +2461,7 @@
               <a:t>看表格十五點六公尺那一台車，「前方相機畫面」有 ● 的那一列：</a:t>
             </a:r>
             <a:r>
-              <a:rPr sz="1300" b="1" lang="zh-TW" dirty="0">
+              <a:rPr sz="1250" b="1" lang="zh-TW" dirty="0">
                 <a:solidFill>
                   <a:srgbClr val="000000"/>
                 </a:solidFill>
@@ -2472,7 +2472,7 @@
               <a:t>光達七十三個點、雷達七個點。</a:t>
             </a:r>
             <a:r>
-              <a:rPr sz="1300" lang="zh-TW" dirty="0">
+              <a:rPr sz="1250" lang="zh-TW" dirty="0">
                 <a:solidFill>
                   <a:srgbClr val="000000"/>
                 </a:solidFill>
@@ -2490,11 +2490,11 @@
                 <a:spcPts val="0"/>
               </a:spcBef>
               <a:spcAft>
-                <a:spcPts val="217"/>
+                <a:spcPts val="208"/>
               </a:spcAft>
             </a:pPr>
             <a:r>
-              <a:rPr sz="1300" lang="zh-TW" dirty="0">
+              <a:rPr sz="1250" lang="zh-TW" dirty="0">
                 <a:solidFill>
                   <a:srgbClr val="000000"/>
                 </a:solidFill>
@@ -2512,11 +2512,11 @@
                 <a:spcPts val="0"/>
               </a:spcBef>
               <a:spcAft>
-                <a:spcPts val="217"/>
+                <a:spcPts val="208"/>
               </a:spcAft>
             </a:pPr>
             <a:r>
-              <a:rPr sz="1300" lang="zh-TW" dirty="0">
+              <a:rPr sz="1250" lang="zh-TW" dirty="0">
                 <a:solidFill>
                   <a:srgbClr val="000000"/>
                 </a:solidFill>
@@ -2527,7 +2527,7 @@
               <a:t>所以晚上的時候，</a:t>
             </a:r>
             <a:r>
-              <a:rPr sz="1300" b="1" lang="zh-TW" dirty="0">
+              <a:rPr sz="1250" b="1" lang="zh-TW" dirty="0">
                 <a:solidFill>
                   <a:srgbClr val="000000"/>
                 </a:solidFill>
@@ -2538,7 +2538,7 @@
               <a:t>相機看不清楚，光達和雷達照樣量得到</a:t>
             </a:r>
             <a:r>
-              <a:rPr sz="1300" lang="zh-TW" dirty="0">
+              <a:rPr sz="1250" lang="zh-TW" dirty="0">
                 <a:solidFill>
                   <a:srgbClr val="000000"/>
                 </a:solidFill>
@@ -2556,11 +2556,11 @@
                 <a:spcPts val="0"/>
               </a:spcBef>
               <a:spcAft>
-                <a:spcPts val="217"/>
+                <a:spcPts val="208"/>
               </a:spcAft>
             </a:pPr>
             <a:r>
-              <a:rPr sz="1300" lang="zh-TW" dirty="0">
+              <a:rPr sz="1250" lang="zh-TW" dirty="0">
                 <a:solidFill>
                   <a:srgbClr val="000000"/>
                 </a:solidFill>
@@ -4867,7 +4867,7 @@
                 <a:ea typeface="Arial Unicode MS"/>
                 <a:cs typeface="Arial Unicode MS"/>
               </a:rPr>
-              <a:t>量得到速度，實心的紅圈就是它量出來在動的東西；可是量不出高度，所有的點都在同一個高度；而且抓不太到人和機車，停車場八台機車只抓到兩台，白天四個行人一個都沒抓到。
+              <a:t>量得到速度，實心的紅圈就是它量出來在動的東西；可是量不出高度，所有的點都在同一個高度；而且抓不太到人和機車，停車場八台機車只抓到兩台，斑馬線上六個行人這一格一個都沒抓到。
 </a:t>
             </a:r>
           </a:p>
@@ -4900,7 +4900,7 @@
                 <a:ea typeface="Arial Unicode MS"/>
                 <a:cs typeface="Arial Unicode MS"/>
               </a:rPr>
-              <a:t>點很多，是雷達的六十倍，晚上也一點都沒少。可是它給的只是一團一團的點，不知道那是什麼。
+              <a:t>點很多，是雷達的四十倍，晚上也沒有少。可是它給的只是一團一團的點，不知道那是什麼。
 </a:t>
             </a:r>
           </a:p>
@@ -9401,7 +9401,7 @@
                 <a:ea typeface="Arial" pitchFamily="34" charset="-122"/>
                 <a:cs typeface="Arial" pitchFamily="34" charset="-120"/>
               </a:rPr>
-              <a:t>第七週 nuScenes 觀察台（白天場景，雷達點＋物體框＋合起來）</a:t>
+              <a:t>第七週 nuScenes 觀察台（夜間雨後場景，雷達點＋物體框＋合起來）</a:t>
             </a:r>
             <a:endParaRPr lang="en-US" sz="700" dirty="0"/>
           </a:p>
@@ -9815,7 +9815,7 @@
                 <a:ea typeface="Arial" pitchFamily="34" charset="-122"/>
                 <a:cs typeface="Arial" pitchFamily="34" charset="-120"/>
               </a:rPr>
-              <a:t>Nhiệm vụ 1 · 任務一　白天（波士頓）</a:t>
+              <a:t>Nhiệm vụ 1 · 任務一　白天（波士頓斑馬線）</a:t>
             </a:r>
             <a:endParaRPr lang="en-US" sz="1250" dirty="0"/>
           </a:p>
@@ -10143,7 +10143,7 @@
                 <a:ea typeface="Arial" pitchFamily="34" charset="-122"/>
                 <a:cs typeface="Arial" pitchFamily="34" charset="-120"/>
               </a:rPr>
-              <a:t>Câu 2: mở hộp. 4 người đi bộ trong khung, mấy người có điểm radar?</a:t>
+              <a:t>Câu 2: mở hộp. 6 người trên vạch qua đường, mấy người có điểm radar?</a:t>
             </a:r>
             <a:endParaRPr lang="en-US" sz="1250" dirty="0"/>
           </a:p>
@@ -10163,7 +10163,7 @@
                 <a:ea typeface="微軟正黑體" pitchFamily="34" charset="-122"/>
                 <a:cs typeface="微軟正黑體" pitchFamily="34" charset="-120"/>
               </a:rPr>
-              <a:t>第 2 題：打開物體框。畫面裡 4 個行人，有雷達點的有幾個？</a:t>
+              <a:t>第 2 題：打開物體框。斑馬線上 6 個行人，有雷達點的有幾個？</a:t>
             </a:r>
             <a:endParaRPr lang="en-US" sz="1250" dirty="0"/>
           </a:p>
@@ -11355,7 +11355,7 @@
                 <a:ea typeface="Arial" pitchFamily="34" charset="-122"/>
                 <a:cs typeface="Arial" pitchFamily="34" charset="-120"/>
               </a:rPr>
-              <a:t>Câu 6: ban đêm có bao nhiêu điểm lidar? So với 3.013 ban ngày?</a:t>
+              <a:t>Câu 6: ban đêm có bao nhiêu điểm lidar? So với 2.295 ban ngày?</a:t>
             </a:r>
             <a:endParaRPr lang="en-US" sz="1250" dirty="0"/>
           </a:p>
@@ -11375,7 +11375,7 @@
                 <a:ea typeface="微軟正黑體" pitchFamily="34" charset="-122"/>
                 <a:cs typeface="微軟正黑體" pitchFamily="34" charset="-120"/>
               </a:rPr>
-              <a:t>第 6 題：夜間畫面裡的光達點有幾個？和白天的 3,013 個比呢？</a:t>
+              <a:t>第 6 題：夜間畫面裡的光達點有幾個？和白天的 2,295 個比呢？</a:t>
             </a:r>
             <a:endParaRPr lang="en-US" sz="1250" dirty="0"/>
           </a:p>
@@ -15929,7 +15929,7 @@
                 <a:ea typeface="Arial" pitchFamily="34" charset="-122"/>
                 <a:cs typeface="Arial" pitchFamily="34" charset="-120"/>
               </a:rPr>
-              <a:t>Lidar: gấp 60 lần điểm radar, đêm vẫn vậy; nhưng không biết là cái gì.</a:t>
+              <a:t>Lidar: gấp 40 lần điểm radar, đêm không ít đi; nhưng không biết là cái gì.</a:t>
             </a:r>
             <a:endParaRPr lang="en-US" sz="1350" dirty="0"/>
           </a:p>
@@ -15949,7 +15949,7 @@
                 <a:ea typeface="微軟正黑體" pitchFamily="34" charset="-122"/>
                 <a:cs typeface="微軟正黑體" pitchFamily="34" charset="-120"/>
               </a:rPr>
-              <a:t>光達：點是雷達的 60 倍，晚上也一樣；但不知道那是什麼。</a:t>
+              <a:t>光達：點是雷達的 40 倍，晚上也沒少；但不知道那是什麼。</a:t>
             </a:r>
             <a:endParaRPr lang="en-US" sz="1350" dirty="0"/>
           </a:p>

--- a/第七週(10-22)/第七週_第3節_簡報.pptx
+++ b/第七週(10-22)/第七週_第3節_簡報.pptx
@@ -686,11 +686,11 @@
                 <a:spcPts val="0"/>
               </a:spcBef>
               <a:spcAft>
-                <a:spcPts val="183"/>
+                <a:spcPts val="175"/>
               </a:spcAft>
             </a:pPr>
             <a:r>
-              <a:rPr sz="1100" b="1" lang="zh-TW" dirty="0">
+              <a:rPr sz="1050" b="1" lang="zh-TW" dirty="0">
                 <a:solidFill>
                   <a:srgbClr val="000000"/>
                 </a:solidFill>
@@ -701,7 +701,7 @@
               <a:t>這一張的目的：</a:t>
             </a:r>
             <a:r>
-              <a:rPr sz="1100" lang="zh-TW" dirty="0">
+              <a:rPr sz="1050" lang="zh-TW" dirty="0">
                 <a:solidFill>
                   <a:srgbClr val="000000"/>
                 </a:solidFill>
@@ -719,11 +719,11 @@
                 <a:spcPts val="0"/>
               </a:spcBef>
               <a:spcAft>
-                <a:spcPts val="183"/>
+                <a:spcPts val="175"/>
               </a:spcAft>
             </a:pPr>
             <a:r>
-              <a:rPr sz="1100" lang="zh-TW" dirty="0">
+              <a:rPr sz="1050" lang="zh-TW" dirty="0">
                 <a:solidFill>
                   <a:srgbClr val="000000"/>
                 </a:solidFill>
@@ -741,11 +741,11 @@
                 <a:spcPts val="0"/>
               </a:spcBef>
               <a:spcAft>
-                <a:spcPts val="183"/>
+                <a:spcPts val="175"/>
               </a:spcAft>
             </a:pPr>
             <a:r>
-              <a:rPr sz="1100" b="1" lang="zh-TW" dirty="0">
+              <a:rPr sz="1050" b="1" lang="zh-TW" dirty="0">
                 <a:solidFill>
                   <a:srgbClr val="000000"/>
                 </a:solidFill>
@@ -756,7 +756,7 @@
               <a:t>最上面，四個場景鈕</a:t>
             </a:r>
             <a:r>
-              <a:rPr sz="1100" lang="zh-TW" dirty="0">
+              <a:rPr sz="1050" lang="zh-TW" dirty="0">
                 <a:solidFill>
                   <a:srgbClr val="000000"/>
                 </a:solidFill>
@@ -774,11 +774,11 @@
                 <a:spcPts val="0"/>
               </a:spcBef>
               <a:spcAft>
-                <a:spcPts val="183"/>
+                <a:spcPts val="175"/>
               </a:spcAft>
             </a:pPr>
             <a:r>
-              <a:rPr sz="1100" b="1" lang="zh-TW" dirty="0">
+              <a:rPr sz="1050" b="1" lang="zh-TW" dirty="0">
                 <a:solidFill>
                   <a:srgbClr val="000000"/>
                 </a:solidFill>
@@ -789,7 +789,7 @@
               <a:t>左上，四個開關</a:t>
             </a:r>
             <a:r>
-              <a:rPr sz="1100" lang="zh-TW" dirty="0">
+              <a:rPr sz="1050" lang="zh-TW" dirty="0">
                 <a:solidFill>
                   <a:srgbClr val="000000"/>
                 </a:solidFill>
@@ -807,11 +807,11 @@
                 <a:spcPts val="0"/>
               </a:spcBef>
               <a:spcAft>
-                <a:spcPts val="183"/>
+                <a:spcPts val="175"/>
               </a:spcAft>
             </a:pPr>
             <a:r>
-              <a:rPr sz="1100" lang="zh-TW" dirty="0">
+              <a:rPr sz="1050" lang="zh-TW" dirty="0">
                 <a:solidFill>
                   <a:srgbClr val="000000"/>
                 </a:solidFill>
@@ -822,7 +822,7 @@
               <a:t>先講顏色。</a:t>
             </a:r>
             <a:r>
-              <a:rPr sz="1100" b="1" lang="zh-TW" dirty="0">
+              <a:rPr sz="1050" b="1" lang="zh-TW" dirty="0">
                 <a:solidFill>
                   <a:srgbClr val="000000"/>
                 </a:solidFill>
@@ -833,7 +833,7 @@
               <a:t>光達點</a:t>
             </a:r>
             <a:r>
-              <a:rPr sz="1100" lang="zh-TW" dirty="0">
+              <a:rPr sz="1050" lang="zh-TW" dirty="0">
                 <a:solidFill>
                   <a:srgbClr val="000000"/>
                 </a:solidFill>
@@ -844,7 +844,7 @@
               <a:t>是小方點，顏色代表距離，紅色近、藍色遠，跟第一節的圖一樣。</a:t>
             </a:r>
             <a:r>
-              <a:rPr sz="1100" b="1" lang="zh-TW" dirty="0">
+              <a:rPr sz="1050" b="1" lang="zh-TW" dirty="0">
                 <a:solidFill>
                   <a:srgbClr val="000000"/>
                 </a:solidFill>
@@ -855,18 +855,18 @@
               <a:t>雷達點</a:t>
             </a:r>
             <a:r>
-              <a:rPr sz="1100" lang="zh-TW" dirty="0">
-                <a:solidFill>
-                  <a:srgbClr val="000000"/>
-                </a:solidFill>
-                <a:latin typeface="Arial Unicode MS"/>
-                <a:ea typeface="Arial Unicode MS"/>
-                <a:cs typeface="Arial Unicode MS"/>
-              </a:rPr>
-              <a:t>是紅色的圈，實心的表示那個東西在動，空心的表示靜止。</a:t>
-            </a:r>
-            <a:r>
-              <a:rPr sz="1100" b="1" lang="zh-TW" dirty="0">
+              <a:rPr sz="1050" lang="zh-TW" dirty="0">
+                <a:solidFill>
+                  <a:srgbClr val="000000"/>
+                </a:solidFill>
+                <a:latin typeface="Arial Unicode MS"/>
+                <a:ea typeface="Arial Unicode MS"/>
+                <a:cs typeface="Arial Unicode MS"/>
+              </a:rPr>
+              <a:t>是圓圈，顏色也照距離：紅色近、藍色遠；實心的表示那個東西在動，空心的表示靜止。為什麼雷達圈也要照距離上色？因為雷達量不出高度，遠處的點畫到照片上會疊到近處的框裡，看顏色才知道它其實在多遠。</a:t>
+            </a:r>
+            <a:r>
+              <a:rPr sz="1050" b="1" lang="zh-TW" dirty="0">
                 <a:solidFill>
                   <a:srgbClr val="000000"/>
                 </a:solidFill>
@@ -877,7 +877,7 @@
               <a:t>物體框</a:t>
             </a:r>
             <a:r>
-              <a:rPr sz="1100" lang="zh-TW" dirty="0">
+              <a:rPr sz="1050" lang="zh-TW" dirty="0">
                 <a:solidFill>
                   <a:srgbClr val="000000"/>
                 </a:solidFill>
@@ -888,7 +888,7 @@
               <a:t>有兩種顏色：</a:t>
             </a:r>
             <a:r>
-              <a:rPr sz="1100" b="1" lang="zh-TW" dirty="0">
+              <a:rPr sz="1050" b="1" lang="zh-TW" dirty="0">
                 <a:solidFill>
                   <a:srgbClr val="000000"/>
                 </a:solidFill>
@@ -899,7 +899,7 @@
               <a:t>綠框表示框裡至少有一個雷達點，橘框表示一個都沒有。</a:t>
             </a:r>
             <a:r>
-              <a:rPr sz="1100" lang="zh-TW" dirty="0">
+              <a:rPr sz="1050" lang="zh-TW" dirty="0">
                 <a:solidFill>
                   <a:srgbClr val="000000"/>
                 </a:solidFill>
@@ -917,11 +917,11 @@
                 <a:spcPts val="0"/>
               </a:spcBef>
               <a:spcAft>
-                <a:spcPts val="183"/>
+                <a:spcPts val="175"/>
               </a:spcAft>
             </a:pPr>
             <a:r>
-              <a:rPr sz="1100" lang="zh-TW" dirty="0">
+              <a:rPr sz="1050" lang="zh-TW" dirty="0">
                 <a:solidFill>
                   <a:srgbClr val="000000"/>
                 </a:solidFill>
@@ -939,11 +939,11 @@
                 <a:spcPts val="0"/>
               </a:spcBef>
               <a:spcAft>
-                <a:spcPts val="183"/>
+                <a:spcPts val="175"/>
               </a:spcAft>
             </a:pPr>
             <a:r>
-              <a:rPr sz="1100" b="1" lang="zh-TW" dirty="0">
+              <a:rPr sz="1050" b="1" lang="zh-TW" dirty="0">
                 <a:solidFill>
                   <a:srgbClr val="000000"/>
                 </a:solidFill>
@@ -954,7 +954,7 @@
               <a:t>右邊，數一數。</a:t>
             </a:r>
             <a:r>
-              <a:rPr sz="1100" lang="zh-TW" dirty="0">
+              <a:rPr sz="1050" lang="zh-TW" dirty="0">
                 <a:solidFill>
                   <a:srgbClr val="000000"/>
                 </a:solidFill>
@@ -965,7 +965,7 @@
               <a:t>上面三格數字：畫面裡有幾個光達點、幾個雷達點、幾個物體有被雷達抓到。下面的表格，每一列是一個物體，寫它離車子多遠、身上有幾個光達點、幾個雷達點，還有一欄「</a:t>
             </a:r>
             <a:r>
-              <a:rPr sz="1100" b="1" lang="zh-TW" dirty="0">
+              <a:rPr sz="1050" b="1" lang="zh-TW" dirty="0">
                 <a:solidFill>
                   <a:srgbClr val="000000"/>
                 </a:solidFill>
@@ -976,7 +976,7 @@
               <a:t>雷達：多快</a:t>
             </a:r>
             <a:r>
-              <a:rPr sz="1100" lang="zh-TW" dirty="0">
+              <a:rPr sz="1050" lang="zh-TW" dirty="0">
                 <a:solidFill>
                   <a:srgbClr val="000000"/>
                 </a:solidFill>
@@ -994,11 +994,11 @@
                 <a:spcPts val="0"/>
               </a:spcBef>
               <a:spcAft>
-                <a:spcPts val="183"/>
+                <a:spcPts val="175"/>
               </a:spcAft>
             </a:pPr>
             <a:r>
-              <a:rPr sz="1100" b="1" lang="zh-TW" dirty="0">
+              <a:rPr sz="1050" b="1" lang="zh-TW" dirty="0">
                 <a:solidFill>
                   <a:srgbClr val="000000"/>
                 </a:solidFill>
@@ -1009,7 +1009,7 @@
               <a:t>第四個開關「合起來」</a:t>
             </a:r>
             <a:r>
-              <a:rPr sz="1100" lang="zh-TW" dirty="0">
+              <a:rPr sz="1050" lang="zh-TW" dirty="0">
                 <a:solidFill>
                   <a:srgbClr val="000000"/>
                 </a:solidFill>
@@ -1027,11 +1027,11 @@
                 <a:spcPts val="0"/>
               </a:spcBef>
               <a:spcAft>
-                <a:spcPts val="183"/>
+                <a:spcPts val="175"/>
               </a:spcAft>
             </a:pPr>
             <a:r>
-              <a:rPr sz="1100" b="1" lang="zh-TW" dirty="0">
+              <a:rPr sz="1050" b="1" lang="zh-TW" dirty="0">
                 <a:solidFill>
                   <a:srgbClr val="000000"/>
                 </a:solidFill>
@@ -1042,7 +1042,7 @@
               <a:t>這裡最容易搞錯，請看結論條。</a:t>
             </a:r>
             <a:r>
-              <a:rPr sz="1100" lang="zh-TW" dirty="0">
+              <a:rPr sz="1050" lang="zh-TW" dirty="0">
                 <a:solidFill>
                   <a:srgbClr val="000000"/>
                 </a:solidFill>
@@ -1053,7 +1053,7 @@
               <a:t>表格列的是車子周圍五十公尺內</a:t>
             </a:r>
             <a:r>
-              <a:rPr sz="1100" b="1" lang="zh-TW" dirty="0">
+              <a:rPr sz="1050" b="1" lang="zh-TW" dirty="0">
                 <a:solidFill>
                   <a:srgbClr val="000000"/>
                 </a:solidFill>
@@ -1064,7 +1064,7 @@
               <a:t>全部</a:t>
             </a:r>
             <a:r>
-              <a:rPr sz="1100" lang="zh-TW" dirty="0">
+              <a:rPr sz="1050" lang="zh-TW" dirty="0">
                 <a:solidFill>
                   <a:srgbClr val="000000"/>
                 </a:solidFill>
@@ -1075,7 +1075,7 @@
               <a:t>的物體，連車子後面的也列進來。所以題目問「前方相機畫面裡」的時候，</a:t>
             </a:r>
             <a:r>
-              <a:rPr sz="1100" b="1" lang="zh-TW" dirty="0">
+              <a:rPr sz="1050" b="1" lang="zh-TW" dirty="0">
                 <a:solidFill>
                   <a:srgbClr val="000000"/>
                 </a:solidFill>
@@ -1086,7 +1086,7 @@
               <a:t>只數表格最右邊「前方相機畫面」那一欄，有一個黑色圓點 ● 的那幾列</a:t>
             </a:r>
             <a:r>
-              <a:rPr sz="1100" lang="zh-TW" dirty="0">
+              <a:rPr sz="1050" lang="zh-TW" dirty="0">
                 <a:solidFill>
                   <a:srgbClr val="000000"/>
                 </a:solidFill>
@@ -1104,11 +1104,11 @@
                 <a:spcPts val="0"/>
               </a:spcBef>
               <a:spcAft>
-                <a:spcPts val="183"/>
+                <a:spcPts val="175"/>
               </a:spcAft>
             </a:pPr>
             <a:r>
-              <a:rPr sz="1100" lang="zh-TW" dirty="0">
+              <a:rPr sz="1050" lang="zh-TW" dirty="0">
                 <a:solidFill>
                   <a:srgbClr val="000000"/>
                 </a:solidFill>
@@ -1119,7 +1119,7 @@
               <a:t>也提醒一句：這一欄</a:t>
             </a:r>
             <a:r>
-              <a:rPr sz="1100" b="1" lang="zh-TW" dirty="0">
+              <a:rPr sz="1050" b="1" lang="zh-TW" dirty="0">
                 <a:solidFill>
                   <a:srgbClr val="000000"/>
                 </a:solidFill>
@@ -1130,7 +1130,7 @@
               <a:t>不是「相機有沒有認出來」</a:t>
             </a:r>
             <a:r>
-              <a:rPr sz="1100" lang="zh-TW" dirty="0">
+              <a:rPr sz="1050" lang="zh-TW" dirty="0">
                 <a:solidFill>
                   <a:srgbClr val="000000"/>
                 </a:solidFill>
@@ -1148,11 +1148,11 @@
                 <a:spcPts val="0"/>
               </a:spcBef>
               <a:spcAft>
-                <a:spcPts val="183"/>
+                <a:spcPts val="175"/>
               </a:spcAft>
             </a:pPr>
             <a:r>
-              <a:rPr sz="1100" lang="zh-TW" dirty="0">
+              <a:rPr sz="1050" lang="zh-TW" dirty="0">
                 <a:solidFill>
                   <a:srgbClr val="000000"/>
                 </a:solidFill>
@@ -1269,11 +1269,11 @@
                 <a:spcPts val="0"/>
               </a:spcBef>
               <a:spcAft>
-                <a:spcPts val="200"/>
+                <a:spcPts val="183"/>
               </a:spcAft>
             </a:pPr>
             <a:r>
-              <a:rPr sz="1200" b="1" lang="zh-TW" dirty="0">
+              <a:rPr sz="1100" b="1" lang="zh-TW" dirty="0">
                 <a:solidFill>
                   <a:srgbClr val="000000"/>
                 </a:solidFill>
@@ -1284,7 +1284,7 @@
               <a:t>這一張的目的：</a:t>
             </a:r>
             <a:r>
-              <a:rPr sz="1200" lang="zh-TW" dirty="0">
+              <a:rPr sz="1100" lang="zh-TW" dirty="0">
                 <a:solidFill>
                   <a:srgbClr val="000000"/>
                 </a:solidFill>
@@ -1302,11 +1302,11 @@
                 <a:spcPts val="0"/>
               </a:spcBef>
               <a:spcAft>
-                <a:spcPts val="200"/>
+                <a:spcPts val="183"/>
               </a:spcAft>
             </a:pPr>
             <a:r>
-              <a:rPr sz="1200" lang="zh-TW" dirty="0">
+              <a:rPr sz="1100" lang="zh-TW" dirty="0">
                 <a:solidFill>
                   <a:srgbClr val="000000"/>
                 </a:solidFill>
@@ -1317,7 +1317,7 @@
               <a:t>任務一，</a:t>
             </a:r>
             <a:r>
-              <a:rPr sz="1200" b="1" lang="zh-TW" dirty="0">
+              <a:rPr sz="1100" b="1" lang="zh-TW" dirty="0">
                 <a:solidFill>
                   <a:srgbClr val="000000"/>
                 </a:solidFill>
@@ -1328,7 +1328,7 @@
               <a:t>白天，美國波士頓的一個路口</a:t>
             </a:r>
             <a:r>
-              <a:rPr sz="1200" lang="zh-TW" dirty="0">
+              <a:rPr sz="1100" lang="zh-TW" dirty="0">
                 <a:solidFill>
                   <a:srgbClr val="000000"/>
                 </a:solidFill>
@@ -1346,11 +1346,11 @@
                 <a:spcPts val="0"/>
               </a:spcBef>
               <a:spcAft>
-                <a:spcPts val="200"/>
+                <a:spcPts val="183"/>
               </a:spcAft>
             </a:pPr>
             <a:r>
-              <a:rPr sz="1200" lang="zh-TW" dirty="0">
+              <a:rPr sz="1100" lang="zh-TW" dirty="0">
                 <a:solidFill>
                   <a:srgbClr val="000000"/>
                 </a:solidFill>
@@ -1361,7 +1361,7 @@
               <a:t>先只開</a:t>
             </a:r>
             <a:r>
-              <a:rPr sz="1200" b="1" lang="zh-TW" dirty="0">
+              <a:rPr sz="1100" b="1" lang="zh-TW" dirty="0">
                 <a:solidFill>
                   <a:srgbClr val="000000"/>
                 </a:solidFill>
@@ -1372,7 +1372,7 @@
               <a:t>光達點和雷達點</a:t>
             </a:r>
             <a:r>
-              <a:rPr sz="1200" lang="zh-TW" dirty="0">
+              <a:rPr sz="1100" lang="zh-TW" dirty="0">
                 <a:solidFill>
                   <a:srgbClr val="000000"/>
                 </a:solidFill>
@@ -1390,11 +1390,11 @@
                 <a:spcPts val="0"/>
               </a:spcBef>
               <a:spcAft>
-                <a:spcPts val="200"/>
+                <a:spcPts val="183"/>
               </a:spcAft>
             </a:pPr>
             <a:r>
-              <a:rPr sz="1200" lang="zh-TW" dirty="0">
+              <a:rPr sz="1100" lang="zh-TW" dirty="0">
                 <a:solidFill>
                   <a:srgbClr val="000000"/>
                 </a:solidFill>
@@ -1412,11 +1412,11 @@
                 <a:spcPts val="0"/>
               </a:spcBef>
               <a:spcAft>
-                <a:spcPts val="200"/>
+                <a:spcPts val="183"/>
               </a:spcAft>
             </a:pPr>
             <a:r>
-              <a:rPr sz="1200" b="1" lang="zh-TW" dirty="0">
+              <a:rPr sz="1100" b="1" lang="zh-TW" dirty="0">
                 <a:solidFill>
                   <a:srgbClr val="000000"/>
                 </a:solidFill>
@@ -1427,7 +1427,7 @@
               <a:t>第 1 題。</a:t>
             </a:r>
             <a:r>
-              <a:rPr sz="1200" lang="zh-TW" dirty="0">
+              <a:rPr sz="1100" lang="zh-TW" dirty="0">
                 <a:solidFill>
                   <a:srgbClr val="000000"/>
                 </a:solidFill>
@@ -1438,7 +1438,7 @@
               <a:t>光達點兩千兩百九十五個，雷達點五十六個。兩千三除以五十六，大約四十。答案是</a:t>
             </a:r>
             <a:r>
-              <a:rPr sz="1200" b="1" lang="zh-TW" dirty="0">
+              <a:rPr sz="1100" b="1" lang="zh-TW" dirty="0">
                 <a:solidFill>
                   <a:srgbClr val="000000"/>
                 </a:solidFill>
@@ -1449,7 +1449,7 @@
               <a:t>約 40 倍</a:t>
             </a:r>
             <a:r>
-              <a:rPr sz="1200" lang="zh-TW" dirty="0">
+              <a:rPr sz="1100" lang="zh-TW" dirty="0">
                 <a:solidFill>
                   <a:srgbClr val="000000"/>
                 </a:solidFill>
@@ -1467,11 +1467,11 @@
                 <a:spcPts val="0"/>
               </a:spcBef>
               <a:spcAft>
-                <a:spcPts val="200"/>
+                <a:spcPts val="183"/>
               </a:spcAft>
             </a:pPr>
             <a:r>
-              <a:rPr sz="1200" b="1" lang="zh-TW" dirty="0">
+              <a:rPr sz="1100" b="1" lang="zh-TW" dirty="0">
                 <a:solidFill>
                   <a:srgbClr val="000000"/>
                 </a:solidFill>
@@ -1482,7 +1482,7 @@
               <a:t>第 2 題。</a:t>
             </a:r>
             <a:r>
-              <a:rPr sz="1200" lang="zh-TW" dirty="0">
+              <a:rPr sz="1100" lang="zh-TW" dirty="0">
                 <a:solidFill>
                   <a:srgbClr val="000000"/>
                 </a:solidFill>
@@ -1493,7 +1493,7 @@
               <a:t>打開物體框。斑馬線上六個人，框都是</a:t>
             </a:r>
             <a:r>
-              <a:rPr sz="1200" b="1" lang="zh-TW" dirty="0">
+              <a:rPr sz="1100" b="1" lang="zh-TW" dirty="0">
                 <a:solidFill>
                   <a:srgbClr val="000000"/>
                 </a:solidFill>
@@ -1504,7 +1504,7 @@
               <a:t>橘色</a:t>
             </a:r>
             <a:r>
-              <a:rPr sz="1200" lang="zh-TW" dirty="0">
+              <a:rPr sz="1100" lang="zh-TW" dirty="0">
                 <a:solidFill>
                   <a:srgbClr val="000000"/>
                 </a:solidFill>
@@ -1515,7 +1515,7 @@
               <a:t>的。看表格，八到十公尺那六列，雷達點全部是零；光達點每個人都有，少的七個，多的七十一個。答案是 </a:t>
             </a:r>
             <a:r>
-              <a:rPr sz="1200" b="1" lang="zh-TW" dirty="0">
+              <a:rPr sz="1100" b="1" lang="zh-TW" dirty="0">
                 <a:solidFill>
                   <a:srgbClr val="000000"/>
                 </a:solidFill>
@@ -1526,15 +1526,15 @@
               <a:t>0 個</a:t>
             </a:r>
             <a:r>
-              <a:rPr sz="1200" lang="zh-TW" dirty="0">
-                <a:solidFill>
-                  <a:srgbClr val="000000"/>
-                </a:solidFill>
-                <a:latin typeface="Arial Unicode MS"/>
-                <a:ea typeface="Arial Unicode MS"/>
-                <a:cs typeface="Arial Unicode MS"/>
-              </a:rPr>
-              <a:t>。第一節講過原因：人反射弱，橫著走又像靜止的東西。也講過，同一群人前後十五秒，其實大約三成的時候抓得到，這一格剛好全部漏掉。
+              <a:rPr sz="1100" lang="zh-TW" dirty="0">
+                <a:solidFill>
+                  <a:srgbClr val="000000"/>
+                </a:solidFill>
+                <a:latin typeface="Arial Unicode MS"/>
+                <a:ea typeface="Arial Unicode MS"/>
+                <a:cs typeface="Arial Unicode MS"/>
+              </a:rPr>
+              <a:t>。
 </a:t>
             </a:r>
           </a:p>
@@ -1544,52 +1544,41 @@
                 <a:spcPts val="0"/>
               </a:spcBef>
               <a:spcAft>
-                <a:spcPts val="200"/>
+                <a:spcPts val="183"/>
               </a:spcAft>
             </a:pPr>
             <a:r>
-              <a:rPr sz="1200" b="1" lang="zh-TW" dirty="0">
-                <a:solidFill>
-                  <a:srgbClr val="000000"/>
-                </a:solidFill>
-                <a:latin typeface="Arial Unicode MS"/>
-                <a:ea typeface="Arial Unicode MS"/>
-                <a:cs typeface="Arial Unicode MS"/>
-              </a:rPr>
-              <a:t>第 3 題。</a:t>
-            </a:r>
-            <a:r>
-              <a:rPr sz="1200" lang="zh-TW" dirty="0">
-                <a:solidFill>
-                  <a:srgbClr val="000000"/>
-                </a:solidFill>
-                <a:latin typeface="Arial Unicode MS"/>
-                <a:ea typeface="Arial Unicode MS"/>
-                <a:cs typeface="Arial Unicode MS"/>
-              </a:rPr>
-              <a:t>紅圈全部在很低的地方，貼著地平線附近，樓上、樹上、招牌上一個都沒有。答案是：</a:t>
-            </a:r>
-            <a:r>
-              <a:rPr sz="1200" b="1" lang="zh-TW" dirty="0">
-                <a:solidFill>
-                  <a:srgbClr val="000000"/>
-                </a:solidFill>
-                <a:latin typeface="Arial Unicode MS"/>
-                <a:ea typeface="Arial Unicode MS"/>
-                <a:cs typeface="Arial Unicode MS"/>
-              </a:rPr>
-              <a:t>ARS 408 量不出高度，所有的點都放在同一個高度。</a:t>
-            </a:r>
-            <a:r>
-              <a:rPr sz="1200" lang="zh-TW" dirty="0">
-                <a:solidFill>
-                  <a:srgbClr val="000000"/>
-                </a:solidFill>
-                <a:latin typeface="Arial Unicode MS"/>
-                <a:ea typeface="Arial Unicode MS"/>
-                <a:cs typeface="Arial Unicode MS"/>
-              </a:rPr>
-              <a:t>上週規格表上，408 少了「Accuracy elevation angle」那一行；第一節也講過，資料裡每一個雷達點的高度欄都是零。
+              <a:rPr sz="1100" lang="zh-TW" dirty="0">
+                <a:solidFill>
+                  <a:srgbClr val="000000"/>
+                </a:solidFill>
+                <a:latin typeface="Arial Unicode MS"/>
+                <a:ea typeface="Arial Unicode MS"/>
+                <a:cs typeface="Arial Unicode MS"/>
+              </a:rPr>
+              <a:t>有同學會說：照片上框裡明明有雷達圈？請看圓圈的顏色：觀察台的雷達圈也照距離上色，紅色近、藍色遠。框裡那些都是藍、紫色，離車子十八公尺以上，在行人</a:t>
+            </a:r>
+            <a:r>
+              <a:rPr sz="1100" b="1" lang="zh-TW" dirty="0">
+                <a:solidFill>
+                  <a:srgbClr val="000000"/>
+                </a:solidFill>
+                <a:latin typeface="Arial Unicode MS"/>
+                <a:ea typeface="Arial Unicode MS"/>
+                <a:cs typeface="Arial Unicode MS"/>
+              </a:rPr>
+              <a:t>後面</a:t>
+            </a:r>
+            <a:r>
+              <a:rPr sz="1100" lang="zh-TW" dirty="0">
+                <a:solidFill>
+                  <a:srgbClr val="000000"/>
+                </a:solidFill>
+                <a:latin typeface="Arial Unicode MS"/>
+                <a:ea typeface="Arial Unicode MS"/>
+                <a:cs typeface="Arial Unicode MS"/>
+              </a:rPr>
+              <a:t>；雷達量不出高度，畫到照片上，才疊進行人的框裡。第一節講過，所以那時候改用從上往下看。
 </a:t>
             </a:r>
           </a:p>
@@ -1599,19 +1588,19 @@
                 <a:spcPts val="0"/>
               </a:spcBef>
               <a:spcAft>
-                <a:spcPts val="200"/>
+                <a:spcPts val="183"/>
               </a:spcAft>
             </a:pPr>
             <a:r>
-              <a:rPr sz="1200" lang="zh-TW" dirty="0">
-                <a:solidFill>
-                  <a:srgbClr val="000000"/>
-                </a:solidFill>
-                <a:latin typeface="Arial Unicode MS"/>
-                <a:ea typeface="Arial Unicode MS"/>
-                <a:cs typeface="Arial Unicode MS"/>
-              </a:rPr>
-              <a:t>其他三個選項為什麼不對？「只看得到地面」不對，雷達的電波是水平往前打的，點落在遠處的車和路邊的東西上；「只看得到車」也不對，路邊靜止的東西也有點；「照片拍歪」也不對，光達點就有高有低，打得到樓上。
+              <a:rPr sz="1100" lang="zh-TW" dirty="0">
+                <a:solidFill>
+                  <a:srgbClr val="000000"/>
+                </a:solidFill>
+                <a:latin typeface="Arial Unicode MS"/>
+                <a:ea typeface="Arial Unicode MS"/>
+                <a:cs typeface="Arial Unicode MS"/>
+              </a:rPr>
+              <a:t>第一節講過原因：人反射弱，橫著走又像靜止的東西。也講過，同一群人前後十五秒，其實大約三成的時候抓得到，這一格剛好全部漏掉。
 </a:t>
             </a:r>
           </a:p>
@@ -1621,22 +1610,99 @@
                 <a:spcPts val="0"/>
               </a:spcBef>
               <a:spcAft>
-                <a:spcPts val="200"/>
+                <a:spcPts val="183"/>
               </a:spcAft>
             </a:pPr>
             <a:r>
-              <a:rPr sz="1200" lang="zh-TW" dirty="0">
-                <a:solidFill>
-                  <a:srgbClr val="000000"/>
-                </a:solidFill>
-                <a:latin typeface="Arial Unicode MS"/>
-                <a:ea typeface="Arial Unicode MS"/>
-                <a:cs typeface="Arial Unicode MS"/>
-              </a:rPr>
-              <a:t>順便講清楚：紅圈不是排成一條直直的線，近的比較低、遠的貼著地平線，這是透視，就像地上的斑馬線，近的在腳下、遠的在地平線。它們真正的共同點是：</a:t>
-            </a:r>
-            <a:r>
-              <a:rPr sz="1200" b="1" lang="zh-TW" dirty="0">
+              <a:rPr sz="1100" b="1" lang="zh-TW" dirty="0">
+                <a:solidFill>
+                  <a:srgbClr val="000000"/>
+                </a:solidFill>
+                <a:latin typeface="Arial Unicode MS"/>
+                <a:ea typeface="Arial Unicode MS"/>
+                <a:cs typeface="Arial Unicode MS"/>
+              </a:rPr>
+              <a:t>第 3 題。</a:t>
+            </a:r>
+            <a:r>
+              <a:rPr sz="1100" lang="zh-TW" dirty="0">
+                <a:solidFill>
+                  <a:srgbClr val="000000"/>
+                </a:solidFill>
+                <a:latin typeface="Arial Unicode MS"/>
+                <a:ea typeface="Arial Unicode MS"/>
+                <a:cs typeface="Arial Unicode MS"/>
+              </a:rPr>
+              <a:t>雷達圈全部在很低的地方，貼著地平線附近，樓上、樹上、招牌上一個都沒有。答案是：</a:t>
+            </a:r>
+            <a:r>
+              <a:rPr sz="1100" b="1" lang="zh-TW" dirty="0">
+                <a:solidFill>
+                  <a:srgbClr val="000000"/>
+                </a:solidFill>
+                <a:latin typeface="Arial Unicode MS"/>
+                <a:ea typeface="Arial Unicode MS"/>
+                <a:cs typeface="Arial Unicode MS"/>
+              </a:rPr>
+              <a:t>ARS 408 量不出高度，所有的點都放在同一個高度。</a:t>
+            </a:r>
+            <a:r>
+              <a:rPr sz="1100" lang="zh-TW" dirty="0">
+                <a:solidFill>
+                  <a:srgbClr val="000000"/>
+                </a:solidFill>
+                <a:latin typeface="Arial Unicode MS"/>
+                <a:ea typeface="Arial Unicode MS"/>
+                <a:cs typeface="Arial Unicode MS"/>
+              </a:rPr>
+              <a:t>上週規格表上，408 少了「Accuracy elevation angle」那一行；第一節也講過，資料裡每一個雷達點的高度欄都是零。
+</a:t>
+            </a:r>
+          </a:p>
+          <a:p>
+            <a:pPr algn="l">
+              <a:spcBef>
+                <a:spcPts val="0"/>
+              </a:spcBef>
+              <a:spcAft>
+                <a:spcPts val="183"/>
+              </a:spcAft>
+            </a:pPr>
+            <a:r>
+              <a:rPr sz="1100" lang="zh-TW" dirty="0">
+                <a:solidFill>
+                  <a:srgbClr val="000000"/>
+                </a:solidFill>
+                <a:latin typeface="Arial Unicode MS"/>
+                <a:ea typeface="Arial Unicode MS"/>
+                <a:cs typeface="Arial Unicode MS"/>
+              </a:rPr>
+              <a:t>其他三個選項為什麼不對？「只看得到地面」不對，雷達的電波是水平往前打的，點落在遠處的車和路邊的東西上；「只看得到車」也不對，路邊靜止的東西也有點；「照片拍歪」也不對，光達點就有高有低，打得到樓上。
+</a:t>
+            </a:r>
+          </a:p>
+          <a:p>
+            <a:pPr algn="l">
+              <a:spcBef>
+                <a:spcPts val="0"/>
+              </a:spcBef>
+              <a:spcAft>
+                <a:spcPts val="183"/>
+              </a:spcAft>
+            </a:pPr>
+            <a:r>
+              <a:rPr sz="1100" lang="zh-TW" dirty="0">
+                <a:solidFill>
+                  <a:srgbClr val="000000"/>
+                </a:solidFill>
+                <a:latin typeface="Arial Unicode MS"/>
+                <a:ea typeface="Arial Unicode MS"/>
+                <a:cs typeface="Arial Unicode MS"/>
+              </a:rPr>
+              <a:t>順便講清楚：雷達圈不是排成一條直直的線，近的比較低、遠的貼著地平線，這是透視，就像地上的斑馬線，近的在腳下、遠的在地平線。它們真正的共同點是：</a:t>
+            </a:r>
+            <a:r>
+              <a:rPr sz="1100" b="1" lang="zh-TW" dirty="0">
                 <a:solidFill>
                   <a:srgbClr val="000000"/>
                 </a:solidFill>
@@ -2502,7 +2568,7 @@
                 <a:ea typeface="Arial Unicode MS"/>
                 <a:cs typeface="Arial Unicode MS"/>
               </a:rPr>
-              <a:t>打開雷達點和物體框看看：那台黑色轎車的框是綠的，身上有一串紅圈，有幾個是實心的，表示它在動。相機圖下面那行說明，括號裡寫的是 8／59：五十九個雷達點，八個在動。
+              <a:t>打開雷達點和物體框看看：那台黑色轎車的框是綠的，身上有一串雷達圈，有幾個是實心的，表示它在動。相機圖下面那行說明，括號裡寫的是 8／59：五十九個雷達點，八個在動。
 </a:t>
             </a:r>
           </a:p>
@@ -4548,7 +4614,7 @@
                 <a:ea typeface="Arial Unicode MS"/>
                 <a:cs typeface="Arial Unicode MS"/>
               </a:rPr>
-              <a:t>，距離、速度、水平角，所以今天的紅圈全部被放在同一個高度，沒有一個在高處。548 多了第四個數字，</a:t>
+              <a:t>，距離、速度、水平角，所以今天的雷達圈全部被放在同一個高度，沒有一個在高處。548 多了第四個數字，</a:t>
             </a:r>
             <a:r>
               <a:rPr sz="1500" b="1" lang="zh-TW" dirty="0">
@@ -4592,7 +4658,7 @@
                 <a:ea typeface="Arial Unicode MS"/>
                 <a:cs typeface="Arial Unicode MS"/>
               </a:rPr>
-              <a:t>所以如果 nuScenes 今天重錄、換上 548，任務一第 3 題那些全部貼在低處的紅圈，就會散開成有高有低的點。
+              <a:t>所以如果 nuScenes 今天重錄、換上 548，任務一第 3 題那些全部貼在低處的雷達圈，就會散開成有高有低的點。
 </a:t>
             </a:r>
           </a:p>
@@ -4867,7 +4933,7 @@
                 <a:ea typeface="Arial Unicode MS"/>
                 <a:cs typeface="Arial Unicode MS"/>
               </a:rPr>
-              <a:t>量得到速度，實心的紅圈就是它量出來在動的東西；可是量不出高度，所有的點都在同一個高度；而且抓不太到人和機車，停車場八台機車只抓到兩台，斑馬線上六個行人這一格一個都沒抓到。
+              <a:t>量得到速度，實心的雷達圈就是它量出來在動的東西；可是量不出高度，所有的點都在同一個高度；而且抓不太到人和機車，停車場八台機車只抓到兩台，斑馬線上六個行人這一格一個都沒抓到。
 </a:t>
             </a:r>
           </a:p>

--- a/第七週(10-22)/第七週_第3節_簡報.pptx
+++ b/第七週(10-22)/第七週_第3節_簡報.pptx
@@ -686,11 +686,11 @@
                 <a:spcPts val="0"/>
               </a:spcBef>
               <a:spcAft>
-                <a:spcPts val="175"/>
+                <a:spcPts val="158"/>
               </a:spcAft>
             </a:pPr>
             <a:r>
-              <a:rPr sz="1050" b="1" lang="zh-TW" dirty="0">
+              <a:rPr sz="950" b="1" lang="zh-TW" dirty="0">
                 <a:solidFill>
                   <a:srgbClr val="000000"/>
                 </a:solidFill>
@@ -701,15 +701,15 @@
               <a:t>這一張的目的：</a:t>
             </a:r>
             <a:r>
-              <a:rPr sz="1050" lang="zh-TW" dirty="0">
-                <a:solidFill>
-                  <a:srgbClr val="000000"/>
-                </a:solidFill>
-                <a:latin typeface="Arial Unicode MS"/>
-                <a:ea typeface="Arial Unicode MS"/>
-                <a:cs typeface="Arial Unicode MS"/>
-              </a:rPr>
-              <a:t>教大家怎麼用觀察台，尤其是表格最右邊「前方相機畫面」那一欄：只數有 ● 的那幾列。
+              <a:rPr sz="950" lang="zh-TW" dirty="0">
+                <a:solidFill>
+                  <a:srgbClr val="000000"/>
+                </a:solidFill>
+                <a:latin typeface="Arial Unicode MS"/>
+                <a:ea typeface="Arial Unicode MS"/>
+                <a:cs typeface="Arial Unicode MS"/>
+              </a:rPr>
+              <a:t>教大家怎麼用觀察台，尤其是表格上方那兩個鈕：「只看前方相機畫面裡的」和「周圍一圈全部」。
 </a:t>
             </a:r>
           </a:p>
@@ -719,11 +719,11 @@
                 <a:spcPts val="0"/>
               </a:spcBef>
               <a:spcAft>
-                <a:spcPts val="175"/>
+                <a:spcPts val="158"/>
               </a:spcAft>
             </a:pPr>
             <a:r>
-              <a:rPr sz="1050" lang="zh-TW" dirty="0">
+              <a:rPr sz="950" lang="zh-TW" dirty="0">
                 <a:solidFill>
                   <a:srgbClr val="000000"/>
                 </a:solidFill>
@@ -741,11 +741,11 @@
                 <a:spcPts val="0"/>
               </a:spcBef>
               <a:spcAft>
-                <a:spcPts val="175"/>
+                <a:spcPts val="158"/>
               </a:spcAft>
             </a:pPr>
             <a:r>
-              <a:rPr sz="1050" b="1" lang="zh-TW" dirty="0">
+              <a:rPr sz="950" b="1" lang="zh-TW" dirty="0">
                 <a:solidFill>
                   <a:srgbClr val="000000"/>
                 </a:solidFill>
@@ -756,7 +756,7 @@
               <a:t>最上面，四個場景鈕</a:t>
             </a:r>
             <a:r>
-              <a:rPr sz="1050" lang="zh-TW" dirty="0">
+              <a:rPr sz="950" lang="zh-TW" dirty="0">
                 <a:solidFill>
                   <a:srgbClr val="000000"/>
                 </a:solidFill>
@@ -774,11 +774,11 @@
                 <a:spcPts val="0"/>
               </a:spcBef>
               <a:spcAft>
-                <a:spcPts val="175"/>
+                <a:spcPts val="158"/>
               </a:spcAft>
             </a:pPr>
             <a:r>
-              <a:rPr sz="1050" b="1" lang="zh-TW" dirty="0">
+              <a:rPr sz="950" b="1" lang="zh-TW" dirty="0">
                 <a:solidFill>
                   <a:srgbClr val="000000"/>
                 </a:solidFill>
@@ -789,7 +789,7 @@
               <a:t>左上，四個開關</a:t>
             </a:r>
             <a:r>
-              <a:rPr sz="1050" lang="zh-TW" dirty="0">
+              <a:rPr sz="950" lang="zh-TW" dirty="0">
                 <a:solidFill>
                   <a:srgbClr val="000000"/>
                 </a:solidFill>
@@ -807,11 +807,11 @@
                 <a:spcPts val="0"/>
               </a:spcBef>
               <a:spcAft>
-                <a:spcPts val="175"/>
+                <a:spcPts val="158"/>
               </a:spcAft>
             </a:pPr>
             <a:r>
-              <a:rPr sz="1050" lang="zh-TW" dirty="0">
+              <a:rPr sz="950" lang="zh-TW" dirty="0">
                 <a:solidFill>
                   <a:srgbClr val="000000"/>
                 </a:solidFill>
@@ -822,7 +822,7 @@
               <a:t>先講顏色。</a:t>
             </a:r>
             <a:r>
-              <a:rPr sz="1050" b="1" lang="zh-TW" dirty="0">
+              <a:rPr sz="950" b="1" lang="zh-TW" dirty="0">
                 <a:solidFill>
                   <a:srgbClr val="000000"/>
                 </a:solidFill>
@@ -833,7 +833,7 @@
               <a:t>光達點</a:t>
             </a:r>
             <a:r>
-              <a:rPr sz="1050" lang="zh-TW" dirty="0">
+              <a:rPr sz="950" lang="zh-TW" dirty="0">
                 <a:solidFill>
                   <a:srgbClr val="000000"/>
                 </a:solidFill>
@@ -844,7 +844,7 @@
               <a:t>是小方點，顏色代表距離，紅色近、藍色遠，跟第一節的圖一樣。</a:t>
             </a:r>
             <a:r>
-              <a:rPr sz="1050" b="1" lang="zh-TW" dirty="0">
+              <a:rPr sz="950" b="1" lang="zh-TW" dirty="0">
                 <a:solidFill>
                   <a:srgbClr val="000000"/>
                 </a:solidFill>
@@ -855,7 +855,7 @@
               <a:t>雷達點</a:t>
             </a:r>
             <a:r>
-              <a:rPr sz="1050" lang="zh-TW" dirty="0">
+              <a:rPr sz="950" lang="zh-TW" dirty="0">
                 <a:solidFill>
                   <a:srgbClr val="000000"/>
                 </a:solidFill>
@@ -866,7 +866,7 @@
               <a:t>是圓圈，顏色也照距離：紅色近、藍色遠；實心的表示那個東西在動，空心的表示靜止。為什麼雷達圈也要照距離上色？因為雷達量不出高度，遠處的點畫到照片上會疊到近處的框裡，看顏色才知道它其實在多遠。</a:t>
             </a:r>
             <a:r>
-              <a:rPr sz="1050" b="1" lang="zh-TW" dirty="0">
+              <a:rPr sz="950" b="1" lang="zh-TW" dirty="0">
                 <a:solidFill>
                   <a:srgbClr val="000000"/>
                 </a:solidFill>
@@ -877,7 +877,7 @@
               <a:t>物體框</a:t>
             </a:r>
             <a:r>
-              <a:rPr sz="1050" lang="zh-TW" dirty="0">
+              <a:rPr sz="950" lang="zh-TW" dirty="0">
                 <a:solidFill>
                   <a:srgbClr val="000000"/>
                 </a:solidFill>
@@ -888,7 +888,7 @@
               <a:t>有兩種顏色：</a:t>
             </a:r>
             <a:r>
-              <a:rPr sz="1050" b="1" lang="zh-TW" dirty="0">
+              <a:rPr sz="950" b="1" lang="zh-TW" dirty="0">
                 <a:solidFill>
                   <a:srgbClr val="000000"/>
                 </a:solidFill>
@@ -899,7 +899,7 @@
               <a:t>綠框表示框裡至少有一個雷達點，橘框表示一個都沒有。</a:t>
             </a:r>
             <a:r>
-              <a:rPr sz="1050" lang="zh-TW" dirty="0">
+              <a:rPr sz="950" lang="zh-TW" dirty="0">
                 <a:solidFill>
                   <a:srgbClr val="000000"/>
                 </a:solidFill>
@@ -917,11 +917,11 @@
                 <a:spcPts val="0"/>
               </a:spcBef>
               <a:spcAft>
-                <a:spcPts val="175"/>
+                <a:spcPts val="158"/>
               </a:spcAft>
             </a:pPr>
             <a:r>
-              <a:rPr sz="1050" lang="zh-TW" dirty="0">
+              <a:rPr sz="950" lang="zh-TW" dirty="0">
                 <a:solidFill>
                   <a:srgbClr val="000000"/>
                 </a:solidFill>
@@ -939,11 +939,11 @@
                 <a:spcPts val="0"/>
               </a:spcBef>
               <a:spcAft>
-                <a:spcPts val="175"/>
+                <a:spcPts val="158"/>
               </a:spcAft>
             </a:pPr>
             <a:r>
-              <a:rPr sz="1050" b="1" lang="zh-TW" dirty="0">
+              <a:rPr sz="950" b="1" lang="zh-TW" dirty="0">
                 <a:solidFill>
                   <a:srgbClr val="000000"/>
                 </a:solidFill>
@@ -954,7 +954,7 @@
               <a:t>右邊，數一數。</a:t>
             </a:r>
             <a:r>
-              <a:rPr sz="1050" lang="zh-TW" dirty="0">
+              <a:rPr sz="950" lang="zh-TW" dirty="0">
                 <a:solidFill>
                   <a:srgbClr val="000000"/>
                 </a:solidFill>
@@ -965,7 +965,7 @@
               <a:t>上面三格數字：畫面裡有幾個光達點、幾個雷達點、幾個物體有被雷達抓到。下面的表格，每一列是一個物體，寫它離車子多遠、身上有幾個光達點、幾個雷達點，還有一欄「</a:t>
             </a:r>
             <a:r>
-              <a:rPr sz="1050" b="1" lang="zh-TW" dirty="0">
+              <a:rPr sz="950" b="1" lang="zh-TW" dirty="0">
                 <a:solidFill>
                   <a:srgbClr val="000000"/>
                 </a:solidFill>
@@ -976,15 +976,37 @@
               <a:t>雷達：多快</a:t>
             </a:r>
             <a:r>
-              <a:rPr sz="1050" lang="zh-TW" dirty="0">
-                <a:solidFill>
-                  <a:srgbClr val="000000"/>
-                </a:solidFill>
-                <a:latin typeface="Arial Unicode MS"/>
-                <a:ea typeface="Arial Unicode MS"/>
-                <a:cs typeface="Arial Unicode MS"/>
-              </a:rPr>
-              <a:t>」：雷達量到這個東西正在靠近還是遠離、時速多少。沒有雷達點的，這一欄就是一條線。
+              <a:rPr sz="950" lang="zh-TW" dirty="0">
+                <a:solidFill>
+                  <a:srgbClr val="000000"/>
+                </a:solidFill>
+                <a:latin typeface="Arial Unicode MS"/>
+                <a:ea typeface="Arial Unicode MS"/>
+                <a:cs typeface="Arial Unicode MS"/>
+              </a:rPr>
+              <a:t>」：這個東西</a:t>
+            </a:r>
+            <a:r>
+              <a:rPr sz="950" b="1" lang="zh-TW" dirty="0">
+                <a:solidFill>
+                  <a:srgbClr val="000000"/>
+                </a:solidFill>
+                <a:latin typeface="Arial Unicode MS"/>
+                <a:ea typeface="Arial Unicode MS"/>
+                <a:cs typeface="Arial Unicode MS"/>
+              </a:rPr>
+              <a:t>自己</a:t>
+            </a:r>
+            <a:r>
+              <a:rPr sz="950" lang="zh-TW" dirty="0">
+                <a:solidFill>
+                  <a:srgbClr val="000000"/>
+                </a:solidFill>
+                <a:latin typeface="Arial Unicode MS"/>
+                <a:ea typeface="Arial Unicode MS"/>
+                <a:cs typeface="Arial Unicode MS"/>
+              </a:rPr>
+              <a:t>在路上走多快，往我們這邊來寫「靠近」，往遠處去寫「遠離」。第一節講過，雷達會把量到的速度扣掉自己的車速；nuScenes 的資料已經扣好了，所以停著的車寫 ≈0，就算我們的車正在開也一樣。沒有雷達點的，這一欄就是一條線。偶爾會看到「有雷達點、速度卻是一條線」，那是因為那個點被官方的過濾條件拿掉了，只算點數、不畫在圖上。
 </a:t>
             </a:r>
           </a:p>
@@ -994,30 +1016,74 @@
                 <a:spcPts val="0"/>
               </a:spcBef>
               <a:spcAft>
-                <a:spcPts val="175"/>
+                <a:spcPts val="158"/>
               </a:spcAft>
             </a:pPr>
             <a:r>
-              <a:rPr sz="1050" b="1" lang="zh-TW" dirty="0">
-                <a:solidFill>
-                  <a:srgbClr val="000000"/>
-                </a:solidFill>
-                <a:latin typeface="Arial Unicode MS"/>
-                <a:ea typeface="Arial Unicode MS"/>
-                <a:cs typeface="Arial Unicode MS"/>
-              </a:rPr>
-              <a:t>第四個開關「合起來」</a:t>
-            </a:r>
-            <a:r>
-              <a:rPr sz="1050" lang="zh-TW" dirty="0">
-                <a:solidFill>
-                  <a:srgbClr val="000000"/>
-                </a:solidFill>
-                <a:latin typeface="Arial Unicode MS"/>
-                <a:ea typeface="Arial Unicode MS"/>
-                <a:cs typeface="Arial Unicode MS"/>
-              </a:rPr>
-              <a:t>，會在每個框上寫一行字，例如「車・12 m・遠離 18」：「車」是相機認出來的，「12 m」是光達量的，「遠離 18」是雷達量的速度。三種感測器各給一塊，拼成一句話。任務五會用到。
+              <a:rPr sz="950" b="1" lang="zh-TW" dirty="0">
+                <a:solidFill>
+                  <a:srgbClr val="000000"/>
+                </a:solidFill>
+                <a:latin typeface="Arial Unicode MS"/>
+                <a:ea typeface="Arial Unicode MS"/>
+                <a:cs typeface="Arial Unicode MS"/>
+              </a:rPr>
+              <a:t>表格上方有兩個鈕。</a:t>
+            </a:r>
+            <a:r>
+              <a:rPr sz="950" lang="zh-TW" dirty="0">
+                <a:solidFill>
+                  <a:srgbClr val="000000"/>
+                </a:solidFill>
+                <a:latin typeface="Arial Unicode MS"/>
+                <a:ea typeface="Arial Unicode MS"/>
+                <a:cs typeface="Arial Unicode MS"/>
+              </a:rPr>
+              <a:t>預設是「</a:t>
+            </a:r>
+            <a:r>
+              <a:rPr sz="950" b="1" lang="zh-TW" dirty="0">
+                <a:solidFill>
+                  <a:srgbClr val="000000"/>
+                </a:solidFill>
+                <a:latin typeface="Arial Unicode MS"/>
+                <a:ea typeface="Arial Unicode MS"/>
+                <a:cs typeface="Arial Unicode MS"/>
+              </a:rPr>
+              <a:t>只看前方相機畫面裡的</a:t>
+            </a:r>
+            <a:r>
+              <a:rPr sz="950" lang="zh-TW" dirty="0">
+                <a:solidFill>
+                  <a:srgbClr val="000000"/>
+                </a:solidFill>
+                <a:latin typeface="Arial Unicode MS"/>
+                <a:ea typeface="Arial Unicode MS"/>
+                <a:cs typeface="Arial Unicode MS"/>
+              </a:rPr>
+              <a:t>」，表格只列照片裡看得到的物體，今天的作業都問照片裡的東西，用這個就好。另一個是「</a:t>
+            </a:r>
+            <a:r>
+              <a:rPr sz="950" b="1" lang="zh-TW" dirty="0">
+                <a:solidFill>
+                  <a:srgbClr val="000000"/>
+                </a:solidFill>
+                <a:latin typeface="Arial Unicode MS"/>
+                <a:ea typeface="Arial Unicode MS"/>
+                <a:cs typeface="Arial Unicode MS"/>
+              </a:rPr>
+              <a:t>周圍一圈全部</a:t>
+            </a:r>
+            <a:r>
+              <a:rPr sz="950" lang="zh-TW" dirty="0">
+                <a:solidFill>
+                  <a:srgbClr val="000000"/>
+                </a:solidFill>
+                <a:latin typeface="Arial Unicode MS"/>
+                <a:ea typeface="Arial Unicode MS"/>
+                <a:cs typeface="Arial Unicode MS"/>
+              </a:rPr>
+              <a:t>」，會把車子旁邊、後面五十公尺內的物體都列出來，最右邊那一欄寫它在車子的哪一邊。停車場切到全部會有六十幾列，很容易漏看，所以預設不開。
 </a:t>
             </a:r>
           </a:p>
@@ -1027,74 +1093,30 @@
                 <a:spcPts val="0"/>
               </a:spcBef>
               <a:spcAft>
-                <a:spcPts val="175"/>
+                <a:spcPts val="158"/>
               </a:spcAft>
             </a:pPr>
             <a:r>
-              <a:rPr sz="1050" b="1" lang="zh-TW" dirty="0">
-                <a:solidFill>
-                  <a:srgbClr val="000000"/>
-                </a:solidFill>
-                <a:latin typeface="Arial Unicode MS"/>
-                <a:ea typeface="Arial Unicode MS"/>
-                <a:cs typeface="Arial Unicode MS"/>
-              </a:rPr>
-              <a:t>這裡最容易搞錯，請看結論條。</a:t>
-            </a:r>
-            <a:r>
-              <a:rPr sz="1050" lang="zh-TW" dirty="0">
-                <a:solidFill>
-                  <a:srgbClr val="000000"/>
-                </a:solidFill>
-                <a:latin typeface="Arial Unicode MS"/>
-                <a:ea typeface="Arial Unicode MS"/>
-                <a:cs typeface="Arial Unicode MS"/>
-              </a:rPr>
-              <a:t>表格列的是車子周圍五十公尺內</a:t>
-            </a:r>
-            <a:r>
-              <a:rPr sz="1050" b="1" lang="zh-TW" dirty="0">
-                <a:solidFill>
-                  <a:srgbClr val="000000"/>
-                </a:solidFill>
-                <a:latin typeface="Arial Unicode MS"/>
-                <a:ea typeface="Arial Unicode MS"/>
-                <a:cs typeface="Arial Unicode MS"/>
-              </a:rPr>
-              <a:t>全部</a:t>
-            </a:r>
-            <a:r>
-              <a:rPr sz="1050" lang="zh-TW" dirty="0">
-                <a:solidFill>
-                  <a:srgbClr val="000000"/>
-                </a:solidFill>
-                <a:latin typeface="Arial Unicode MS"/>
-                <a:ea typeface="Arial Unicode MS"/>
-                <a:cs typeface="Arial Unicode MS"/>
-              </a:rPr>
-              <a:t>的物體，連車子後面的也列進來。所以題目問「前方相機畫面裡」的時候，</a:t>
-            </a:r>
-            <a:r>
-              <a:rPr sz="1050" b="1" lang="zh-TW" dirty="0">
-                <a:solidFill>
-                  <a:srgbClr val="000000"/>
-                </a:solidFill>
-                <a:latin typeface="Arial Unicode MS"/>
-                <a:ea typeface="Arial Unicode MS"/>
-                <a:cs typeface="Arial Unicode MS"/>
-              </a:rPr>
-              <a:t>只數表格最右邊「前方相機畫面」那一欄，有一個黑色圓點 ● 的那幾列</a:t>
-            </a:r>
-            <a:r>
-              <a:rPr sz="1050" lang="zh-TW" dirty="0">
-                <a:solidFill>
-                  <a:srgbClr val="000000"/>
-                </a:solidFill>
-                <a:latin typeface="Arial Unicode MS"/>
-                <a:ea typeface="Arial Unicode MS"/>
-                <a:cs typeface="Arial Unicode MS"/>
-              </a:rPr>
-              <a:t>；沒有 ● 的，那一欄會寫它在車子的左側、右側還是後方。nuScenes 的車一圈有六台相機，觀察台只放正前方那一台。停車場那個場景，表格裡的車有三十幾台，畫面裡只有四台。
+              <a:rPr sz="950" b="1" lang="zh-TW" dirty="0">
+                <a:solidFill>
+                  <a:srgbClr val="000000"/>
+                </a:solidFill>
+                <a:latin typeface="Arial Unicode MS"/>
+                <a:ea typeface="Arial Unicode MS"/>
+                <a:cs typeface="Arial Unicode MS"/>
+              </a:rPr>
+              <a:t>第四個開關「合起來」</a:t>
+            </a:r>
+            <a:r>
+              <a:rPr sz="950" lang="zh-TW" dirty="0">
+                <a:solidFill>
+                  <a:srgbClr val="000000"/>
+                </a:solidFill>
+                <a:latin typeface="Arial Unicode MS"/>
+                <a:ea typeface="Arial Unicode MS"/>
+                <a:cs typeface="Arial Unicode MS"/>
+              </a:rPr>
+              <a:t>，會在每個框上寫一行字，例如「車・12 m・遠離 18」：「車」是相機認出來的，「12 m」是光達量的，「遠離 18」是雷達量的、那台車自己的速度。三種感測器各給一塊，拼成一句話。任務五會用到。
 </a:t>
             </a:r>
           </a:p>
@@ -1104,41 +1126,74 @@
                 <a:spcPts val="0"/>
               </a:spcBef>
               <a:spcAft>
-                <a:spcPts val="175"/>
+                <a:spcPts val="158"/>
               </a:spcAft>
             </a:pPr>
             <a:r>
-              <a:rPr sz="1050" lang="zh-TW" dirty="0">
-                <a:solidFill>
-                  <a:srgbClr val="000000"/>
-                </a:solidFill>
-                <a:latin typeface="Arial Unicode MS"/>
-                <a:ea typeface="Arial Unicode MS"/>
-                <a:cs typeface="Arial Unicode MS"/>
-              </a:rPr>
-              <a:t>也提醒一句：這一欄</a:t>
-            </a:r>
-            <a:r>
-              <a:rPr sz="1050" b="1" lang="zh-TW" dirty="0">
-                <a:solidFill>
-                  <a:srgbClr val="000000"/>
-                </a:solidFill>
-                <a:latin typeface="Arial Unicode MS"/>
-                <a:ea typeface="Arial Unicode MS"/>
-                <a:cs typeface="Arial Unicode MS"/>
-              </a:rPr>
-              <a:t>不是「相機有沒有認出來」</a:t>
-            </a:r>
-            <a:r>
-              <a:rPr sz="1050" lang="zh-TW" dirty="0">
-                <a:solidFill>
-                  <a:srgbClr val="000000"/>
-                </a:solidFill>
-                <a:latin typeface="Arial Unicode MS"/>
-                <a:ea typeface="Arial Unicode MS"/>
-                <a:cs typeface="Arial Unicode MS"/>
-              </a:rPr>
-              <a:t>。框是人工畫的標註，那個 ● 只表示那個東西在前方相機拍得到的範圍裡。
+              <a:rPr sz="950" b="1" lang="zh-TW" dirty="0">
+                <a:solidFill>
+                  <a:srgbClr val="000000"/>
+                </a:solidFill>
+                <a:latin typeface="Arial Unicode MS"/>
+                <a:ea typeface="Arial Unicode MS"/>
+                <a:cs typeface="Arial Unicode MS"/>
+              </a:rPr>
+              <a:t>這裡最容易搞錯，請看結論條。</a:t>
+            </a:r>
+            <a:r>
+              <a:rPr sz="950" lang="zh-TW" dirty="0">
+                <a:solidFill>
+                  <a:srgbClr val="000000"/>
+                </a:solidFill>
+                <a:latin typeface="Arial Unicode MS"/>
+                <a:ea typeface="Arial Unicode MS"/>
+                <a:cs typeface="Arial Unicode MS"/>
+              </a:rPr>
+              <a:t>表格列的是車子周圍五十公尺內</a:t>
+            </a:r>
+            <a:r>
+              <a:rPr sz="950" b="1" lang="zh-TW" dirty="0">
+                <a:solidFill>
+                  <a:srgbClr val="000000"/>
+                </a:solidFill>
+                <a:latin typeface="Arial Unicode MS"/>
+                <a:ea typeface="Arial Unicode MS"/>
+                <a:cs typeface="Arial Unicode MS"/>
+              </a:rPr>
+              <a:t>全部</a:t>
+            </a:r>
+            <a:r>
+              <a:rPr sz="950" lang="zh-TW" dirty="0">
+                <a:solidFill>
+                  <a:srgbClr val="000000"/>
+                </a:solidFill>
+                <a:latin typeface="Arial Unicode MS"/>
+                <a:ea typeface="Arial Unicode MS"/>
+                <a:cs typeface="Arial Unicode MS"/>
+              </a:rPr>
+              <a:t>的物體，連車子後面的也列進來。所以題目問「前方相機畫面裡」的時候，</a:t>
+            </a:r>
+            <a:r>
+              <a:rPr sz="950" b="1" lang="zh-TW" dirty="0">
+                <a:solidFill>
+                  <a:srgbClr val="000000"/>
+                </a:solidFill>
+                <a:latin typeface="Arial Unicode MS"/>
+                <a:ea typeface="Arial Unicode MS"/>
+                <a:cs typeface="Arial Unicode MS"/>
+              </a:rPr>
+              <a:t>只數表格最右邊「前方相機畫面」那一欄，有一個黑色圓點 ● 的那幾列</a:t>
+            </a:r>
+            <a:r>
+              <a:rPr sz="950" lang="zh-TW" dirty="0">
+                <a:solidFill>
+                  <a:srgbClr val="000000"/>
+                </a:solidFill>
+                <a:latin typeface="Arial Unicode MS"/>
+                <a:ea typeface="Arial Unicode MS"/>
+                <a:cs typeface="Arial Unicode MS"/>
+              </a:rPr>
+              <a:t>；沒有 ● 的，那一欄會寫它在車子的左側、右側還是後方。nuScenes 的車一圈有六台相機，觀察台只放正前方那一台。停車場那個場景，表格裡的車有三十幾台，畫面裡只有四台。
 </a:t>
             </a:r>
           </a:p>
@@ -1148,11 +1203,55 @@
                 <a:spcPts val="0"/>
               </a:spcBef>
               <a:spcAft>
-                <a:spcPts val="175"/>
+                <a:spcPts val="158"/>
               </a:spcAft>
             </a:pPr>
             <a:r>
-              <a:rPr sz="1050" lang="zh-TW" dirty="0">
+              <a:rPr sz="950" lang="zh-TW" dirty="0">
+                <a:solidFill>
+                  <a:srgbClr val="000000"/>
+                </a:solidFill>
+                <a:latin typeface="Arial Unicode MS"/>
+                <a:ea typeface="Arial Unicode MS"/>
+                <a:cs typeface="Arial Unicode MS"/>
+              </a:rPr>
+              <a:t>也提醒一句：這一欄</a:t>
+            </a:r>
+            <a:r>
+              <a:rPr sz="950" b="1" lang="zh-TW" dirty="0">
+                <a:solidFill>
+                  <a:srgbClr val="000000"/>
+                </a:solidFill>
+                <a:latin typeface="Arial Unicode MS"/>
+                <a:ea typeface="Arial Unicode MS"/>
+                <a:cs typeface="Arial Unicode MS"/>
+              </a:rPr>
+              <a:t>不是「相機有沒有認出來」</a:t>
+            </a:r>
+            <a:r>
+              <a:rPr sz="950" lang="zh-TW" dirty="0">
+                <a:solidFill>
+                  <a:srgbClr val="000000"/>
+                </a:solidFill>
+                <a:latin typeface="Arial Unicode MS"/>
+                <a:ea typeface="Arial Unicode MS"/>
+                <a:cs typeface="Arial Unicode MS"/>
+              </a:rPr>
+              <a:t>。框是人工畫的標註，那個 ● 只表示那個東西在前方相機拍得到的範圍裡。
+</a:t>
+            </a:r>
+          </a:p>
+          <a:p>
+            <a:pPr algn="l">
+              <a:spcBef>
+                <a:spcPts val="0"/>
+              </a:spcBef>
+              <a:spcAft>
+                <a:spcPts val="158"/>
+              </a:spcAft>
+            </a:pPr>
+            <a:r>
+              <a:rPr sz="950" lang="zh-TW" dirty="0">
                 <a:solidFill>
                   <a:srgbClr val="000000"/>
                 </a:solidFill>
@@ -1819,11 +1918,11 @@
                 <a:spcPts val="0"/>
               </a:spcBef>
               <a:spcAft>
-                <a:spcPts val="250"/>
+                <a:spcPts val="225"/>
               </a:spcAft>
             </a:pPr>
             <a:r>
-              <a:rPr sz="1500" b="1" lang="zh-TW" dirty="0">
+              <a:rPr sz="1350" b="1" lang="zh-TW" dirty="0">
                 <a:solidFill>
                   <a:srgbClr val="000000"/>
                 </a:solidFill>
@@ -1834,7 +1933,7 @@
               <a:t>這一張的目的：</a:t>
             </a:r>
             <a:r>
-              <a:rPr sz="1500" lang="zh-TW" dirty="0">
+              <a:rPr sz="1350" lang="zh-TW" dirty="0">
                 <a:solidFill>
                   <a:srgbClr val="000000"/>
                 </a:solidFill>
@@ -1852,11 +1951,11 @@
                 <a:spcPts val="0"/>
               </a:spcBef>
               <a:spcAft>
-                <a:spcPts val="250"/>
+                <a:spcPts val="225"/>
               </a:spcAft>
             </a:pPr>
             <a:r>
-              <a:rPr sz="1500" lang="zh-TW" dirty="0">
+              <a:rPr sz="1350" lang="zh-TW" dirty="0">
                 <a:solidFill>
                   <a:srgbClr val="000000"/>
                 </a:solidFill>
@@ -1867,7 +1966,7 @@
               <a:t>任務二，</a:t>
             </a:r>
             <a:r>
-              <a:rPr sz="1500" b="1" lang="zh-TW" dirty="0">
+              <a:rPr sz="1350" b="1" lang="zh-TW" dirty="0">
                 <a:solidFill>
                   <a:srgbClr val="000000"/>
                 </a:solidFill>
@@ -1878,7 +1977,7 @@
               <a:t>新加坡的一個停車場</a:t>
             </a:r>
             <a:r>
-              <a:rPr sz="1500" lang="zh-TW" dirty="0">
+              <a:rPr sz="1350" lang="zh-TW" dirty="0">
                 <a:solidFill>
                   <a:srgbClr val="000000"/>
                 </a:solidFill>
@@ -1896,41 +1995,63 @@
                 <a:spcPts val="0"/>
               </a:spcBef>
               <a:spcAft>
-                <a:spcPts val="250"/>
+                <a:spcPts val="225"/>
               </a:spcAft>
             </a:pPr>
             <a:r>
-              <a:rPr sz="1500" lang="zh-TW" dirty="0">
-                <a:solidFill>
-                  <a:srgbClr val="000000"/>
-                </a:solidFill>
-                <a:latin typeface="Arial Unicode MS"/>
-                <a:ea typeface="Arial Unicode MS"/>
-                <a:cs typeface="Arial Unicode MS"/>
-              </a:rPr>
-              <a:t>先提醒一次：這個場景表格很長，因為停車場裡到處都是車，三十幾台，大部分在車子旁邊和後面。</a:t>
-            </a:r>
-            <a:r>
-              <a:rPr sz="1500" b="1" lang="zh-TW" dirty="0">
-                <a:solidFill>
-                  <a:srgbClr val="000000"/>
-                </a:solidFill>
-                <a:latin typeface="Arial Unicode MS"/>
-                <a:ea typeface="Arial Unicode MS"/>
-                <a:cs typeface="Arial Unicode MS"/>
-              </a:rPr>
-              <a:t>只數表格最右邊「前方相機畫面」那一欄有 ● 的那幾列。</a:t>
-            </a:r>
-            <a:r>
-              <a:rPr sz="1500" lang="zh-TW" dirty="0">
-                <a:solidFill>
-                  <a:srgbClr val="000000"/>
-                </a:solidFill>
-                <a:latin typeface="Arial Unicode MS"/>
-                <a:ea typeface="Arial Unicode MS"/>
-                <a:cs typeface="Arial Unicode MS"/>
-              </a:rPr>
-              <a:t>
+              <a:rPr sz="1350" lang="zh-TW" dirty="0">
+                <a:solidFill>
+                  <a:srgbClr val="000000"/>
+                </a:solidFill>
+                <a:latin typeface="Arial Unicode MS"/>
+                <a:ea typeface="Arial Unicode MS"/>
+                <a:cs typeface="Arial Unicode MS"/>
+              </a:rPr>
+              <a:t>先提醒一次：表格上方的鈕要停在「</a:t>
+            </a:r>
+            <a:r>
+              <a:rPr sz="1350" b="1" lang="zh-TW" dirty="0">
+                <a:solidFill>
+                  <a:srgbClr val="000000"/>
+                </a:solidFill>
+                <a:latin typeface="Arial Unicode MS"/>
+                <a:ea typeface="Arial Unicode MS"/>
+                <a:cs typeface="Arial Unicode MS"/>
+              </a:rPr>
+              <a:t>只看前方相機畫面裡的</a:t>
+            </a:r>
+            <a:r>
+              <a:rPr sz="1350" lang="zh-TW" dirty="0">
+                <a:solidFill>
+                  <a:srgbClr val="000000"/>
+                </a:solidFill>
+                <a:latin typeface="Arial Unicode MS"/>
+                <a:ea typeface="Arial Unicode MS"/>
+                <a:cs typeface="Arial Unicode MS"/>
+              </a:rPr>
+              <a:t>」，這時表格有十七列：行人、機車、汽車混在一起，照距離排。表格框只顯示十一列左右，</a:t>
+            </a:r>
+            <a:r>
+              <a:rPr sz="1350" b="1" lang="zh-TW" dirty="0">
+                <a:solidFill>
+                  <a:srgbClr val="000000"/>
+                </a:solidFill>
+                <a:latin typeface="Arial Unicode MS"/>
+                <a:ea typeface="Arial Unicode MS"/>
+                <a:cs typeface="Arial Unicode MS"/>
+              </a:rPr>
+              <a:t>要往下捲到底</a:t>
+            </a:r>
+            <a:r>
+              <a:rPr sz="1350" lang="zh-TW" dirty="0">
+                <a:solidFill>
+                  <a:srgbClr val="000000"/>
+                </a:solidFill>
+                <a:latin typeface="Arial Unicode MS"/>
+                <a:ea typeface="Arial Unicode MS"/>
+                <a:cs typeface="Arial Unicode MS"/>
+              </a:rPr>
+              <a:t>，不然後面的汽車會漏掉。
 </a:t>
             </a:r>
           </a:p>
@@ -1940,11 +2061,11 @@
                 <a:spcPts val="0"/>
               </a:spcBef>
               <a:spcAft>
-                <a:spcPts val="250"/>
+                <a:spcPts val="225"/>
               </a:spcAft>
             </a:pPr>
             <a:r>
-              <a:rPr sz="1500" lang="zh-TW" dirty="0">
+              <a:rPr sz="1350" lang="zh-TW" dirty="0">
                 <a:solidFill>
                   <a:srgbClr val="000000"/>
                 </a:solidFill>
@@ -1962,11 +2083,11 @@
                 <a:spcPts val="0"/>
               </a:spcBef>
               <a:spcAft>
-                <a:spcPts val="250"/>
+                <a:spcPts val="225"/>
               </a:spcAft>
             </a:pPr>
             <a:r>
-              <a:rPr sz="1500" b="1" lang="zh-TW" dirty="0">
+              <a:rPr sz="1350" b="1" lang="zh-TW" dirty="0">
                 <a:solidFill>
                   <a:srgbClr val="000000"/>
                 </a:solidFill>
@@ -1977,7 +2098,7 @@
               <a:t>第 4 題。</a:t>
             </a:r>
             <a:r>
-              <a:rPr sz="1500" lang="zh-TW" dirty="0">
+              <a:rPr sz="1350" lang="zh-TW" dirty="0">
                 <a:solidFill>
                   <a:srgbClr val="000000"/>
                 </a:solidFill>
@@ -1988,7 +2109,7 @@
               <a:t>畫面裡八台機車，框大多是橘色。看表格，機車那幾列，雷達點不是零的只有兩台：十六點八公尺那台兩個點，二十一點八公尺有一台一個點。答案是 </a:t>
             </a:r>
             <a:r>
-              <a:rPr sz="1500" b="1" lang="zh-TW" dirty="0">
+              <a:rPr sz="1350" b="1" lang="zh-TW" dirty="0">
                 <a:solidFill>
                   <a:srgbClr val="000000"/>
                 </a:solidFill>
@@ -1999,7 +2120,7 @@
               <a:t>2 台</a:t>
             </a:r>
             <a:r>
-              <a:rPr sz="1500" lang="zh-TW" dirty="0">
+              <a:rPr sz="1350" lang="zh-TW" dirty="0">
                 <a:solidFill>
                   <a:srgbClr val="000000"/>
                 </a:solidFill>
@@ -2017,52 +2138,19 @@
                 <a:spcPts val="0"/>
               </a:spcBef>
               <a:spcAft>
-                <a:spcPts val="250"/>
+                <a:spcPts val="225"/>
               </a:spcAft>
             </a:pPr>
             <a:r>
-              <a:rPr sz="1500" b="1" lang="zh-TW" dirty="0">
-                <a:solidFill>
-                  <a:srgbClr val="000000"/>
-                </a:solidFill>
-                <a:latin typeface="Arial Unicode MS"/>
-                <a:ea typeface="Arial Unicode MS"/>
-                <a:cs typeface="Arial Unicode MS"/>
-              </a:rPr>
-              <a:t>第 5 題。</a:t>
-            </a:r>
-            <a:r>
-              <a:rPr sz="1500" lang="zh-TW" dirty="0">
-                <a:solidFill>
-                  <a:srgbClr val="000000"/>
-                </a:solidFill>
-                <a:latin typeface="Arial Unicode MS"/>
-                <a:ea typeface="Arial Unicode MS"/>
-                <a:cs typeface="Arial Unicode MS"/>
-              </a:rPr>
-              <a:t>右邊那幾台汽車，二十七到二十九公尺，四台框都是綠色，每台兩到三個雷達點，只有一台是一個點。答案是 </a:t>
-            </a:r>
-            <a:r>
-              <a:rPr sz="1500" b="1" lang="zh-TW" dirty="0">
-                <a:solidFill>
-                  <a:srgbClr val="000000"/>
-                </a:solidFill>
-                <a:latin typeface="Arial Unicode MS"/>
-                <a:ea typeface="Arial Unicode MS"/>
-                <a:cs typeface="Arial Unicode MS"/>
-              </a:rPr>
-              <a:t>4 台</a:t>
-            </a:r>
-            <a:r>
-              <a:rPr sz="1500" lang="zh-TW" dirty="0">
-                <a:solidFill>
-                  <a:srgbClr val="000000"/>
-                </a:solidFill>
-                <a:latin typeface="Arial Unicode MS"/>
-                <a:ea typeface="Arial Unicode MS"/>
-                <a:cs typeface="Arial Unicode MS"/>
-              </a:rPr>
-              <a:t>。
+              <a:rPr sz="1350" lang="zh-TW" dirty="0">
+                <a:solidFill>
+                  <a:srgbClr val="000000"/>
+                </a:solidFill>
+                <a:latin typeface="Arial Unicode MS"/>
+                <a:ea typeface="Arial Unicode MS"/>
+                <a:cs typeface="Arial Unicode MS"/>
+              </a:rPr>
+              <a:t>有同學可能只看到一台：二十一點八公尺那台的「雷達：多快」是一條線，看起來像沒有。它其實有一個點，只是這個點被官方的過濾條件拿掉了，所以算點數、沒有速度。另一台十六點八公尺的在表格比較上面，要往回捲才看得到。
 </a:t>
             </a:r>
           </a:p>
@@ -2072,41 +2160,52 @@
                 <a:spcPts val="0"/>
               </a:spcBef>
               <a:spcAft>
-                <a:spcPts val="250"/>
+                <a:spcPts val="225"/>
               </a:spcAft>
             </a:pPr>
             <a:r>
-              <a:rPr sz="1500" lang="zh-TW" dirty="0">
-                <a:solidFill>
-                  <a:srgbClr val="000000"/>
-                </a:solidFill>
-                <a:latin typeface="Arial Unicode MS"/>
-                <a:ea typeface="Arial Unicode MS"/>
-                <a:cs typeface="Arial Unicode MS"/>
-              </a:rPr>
-              <a:t>兩題放在一起看：</a:t>
-            </a:r>
-            <a:r>
-              <a:rPr sz="1500" b="1" lang="zh-TW" dirty="0">
-                <a:solidFill>
-                  <a:srgbClr val="000000"/>
-                </a:solidFill>
-                <a:latin typeface="Arial Unicode MS"/>
-                <a:ea typeface="Arial Unicode MS"/>
-                <a:cs typeface="Arial Unicode MS"/>
-              </a:rPr>
-              <a:t>機車比汽車近，雷達反而抓不太到。</a:t>
-            </a:r>
-            <a:r>
-              <a:rPr sz="1500" lang="zh-TW" dirty="0">
-                <a:solidFill>
-                  <a:srgbClr val="000000"/>
-                </a:solidFill>
-                <a:latin typeface="Arial Unicode MS"/>
-                <a:ea typeface="Arial Unicode MS"/>
-                <a:cs typeface="Arial Unicode MS"/>
-              </a:rPr>
-              <a:t>汽車是一大塊金屬，像一面鏡子；機車小，很多部分是塑膠，人坐在上面，電波回來很弱。
+              <a:rPr sz="1350" b="1" lang="zh-TW" dirty="0">
+                <a:solidFill>
+                  <a:srgbClr val="000000"/>
+                </a:solidFill>
+                <a:latin typeface="Arial Unicode MS"/>
+                <a:ea typeface="Arial Unicode MS"/>
+                <a:cs typeface="Arial Unicode MS"/>
+              </a:rPr>
+              <a:t>第 5 題。</a:t>
+            </a:r>
+            <a:r>
+              <a:rPr sz="1350" lang="zh-TW" dirty="0">
+                <a:solidFill>
+                  <a:srgbClr val="000000"/>
+                </a:solidFill>
+                <a:latin typeface="Arial Unicode MS"/>
+                <a:ea typeface="Arial Unicode MS"/>
+                <a:cs typeface="Arial Unicode MS"/>
+              </a:rPr>
+              <a:t>右邊那幾台汽車，二十七到二十九公尺，四台框都是綠色，每台兩到三個雷達點，只有一台是一個點。答案是 </a:t>
+            </a:r>
+            <a:r>
+              <a:rPr sz="1350" b="1" lang="zh-TW" dirty="0">
+                <a:solidFill>
+                  <a:srgbClr val="000000"/>
+                </a:solidFill>
+                <a:latin typeface="Arial Unicode MS"/>
+                <a:ea typeface="Arial Unicode MS"/>
+                <a:cs typeface="Arial Unicode MS"/>
+              </a:rPr>
+              <a:t>4 台</a:t>
+            </a:r>
+            <a:r>
+              <a:rPr sz="1350" lang="zh-TW" dirty="0">
+                <a:solidFill>
+                  <a:srgbClr val="000000"/>
+                </a:solidFill>
+                <a:latin typeface="Arial Unicode MS"/>
+                <a:ea typeface="Arial Unicode MS"/>
+                <a:cs typeface="Arial Unicode MS"/>
+              </a:rPr>
+              <a:t>。
 </a:t>
             </a:r>
           </a:p>
@@ -2116,11 +2215,55 @@
                 <a:spcPts val="0"/>
               </a:spcBef>
               <a:spcAft>
-                <a:spcPts val="250"/>
+                <a:spcPts val="225"/>
               </a:spcAft>
             </a:pPr>
             <a:r>
-              <a:rPr sz="1500" lang="zh-TW" dirty="0">
+              <a:rPr sz="1350" lang="zh-TW" dirty="0">
+                <a:solidFill>
+                  <a:srgbClr val="000000"/>
+                </a:solidFill>
+                <a:latin typeface="Arial Unicode MS"/>
+                <a:ea typeface="Arial Unicode MS"/>
+                <a:cs typeface="Arial Unicode MS"/>
+              </a:rPr>
+              <a:t>兩題放在一起看：</a:t>
+            </a:r>
+            <a:r>
+              <a:rPr sz="1350" b="1" lang="zh-TW" dirty="0">
+                <a:solidFill>
+                  <a:srgbClr val="000000"/>
+                </a:solidFill>
+                <a:latin typeface="Arial Unicode MS"/>
+                <a:ea typeface="Arial Unicode MS"/>
+                <a:cs typeface="Arial Unicode MS"/>
+              </a:rPr>
+              <a:t>機車比汽車近，雷達反而抓不太到。</a:t>
+            </a:r>
+            <a:r>
+              <a:rPr sz="1350" lang="zh-TW" dirty="0">
+                <a:solidFill>
+                  <a:srgbClr val="000000"/>
+                </a:solidFill>
+                <a:latin typeface="Arial Unicode MS"/>
+                <a:ea typeface="Arial Unicode MS"/>
+                <a:cs typeface="Arial Unicode MS"/>
+              </a:rPr>
+              <a:t>汽車是一大塊金屬，像一面鏡子；機車小，很多部分是塑膠，人坐在上面，電波回來很弱。
+</a:t>
+            </a:r>
+          </a:p>
+          <a:p>
+            <a:pPr algn="l">
+              <a:spcBef>
+                <a:spcPts val="0"/>
+              </a:spcBef>
+              <a:spcAft>
+                <a:spcPts val="225"/>
+              </a:spcAft>
+            </a:pPr>
+            <a:r>
+              <a:rPr sz="1350" lang="zh-TW" dirty="0">
                 <a:solidFill>
                   <a:srgbClr val="000000"/>
                 </a:solidFill>
@@ -2491,7 +2634,7 @@
                 <a:ea typeface="Arial Unicode MS"/>
                 <a:cs typeface="Arial Unicode MS"/>
               </a:rPr>
-              <a:t>。天黑了，相機看不清楚，光達的點一個都沒少。
+              <a:t>。天黑了，相機看不清楚，光達的點沒有變少。
 </a:t>
             </a:r>
           </a:p>
@@ -3205,11 +3348,11 @@
                 <a:spcPts val="0"/>
               </a:spcBef>
               <a:spcAft>
-                <a:spcPts val="183"/>
+                <a:spcPts val="167"/>
               </a:spcAft>
             </a:pPr>
             <a:r>
-              <a:rPr sz="1100" b="1" lang="zh-TW" dirty="0">
+              <a:rPr sz="1000" b="1" lang="zh-TW" dirty="0">
                 <a:solidFill>
                   <a:srgbClr val="000000"/>
                 </a:solidFill>
@@ -3220,7 +3363,7 @@
               <a:t>這一張的目的：</a:t>
             </a:r>
             <a:r>
-              <a:rPr sz="1100" lang="zh-TW" dirty="0">
+              <a:rPr sz="1000" lang="zh-TW" dirty="0">
                 <a:solidFill>
                   <a:srgbClr val="000000"/>
                 </a:solidFill>
@@ -3238,11 +3381,11 @@
                 <a:spcPts val="0"/>
               </a:spcBef>
               <a:spcAft>
-                <a:spcPts val="183"/>
+                <a:spcPts val="167"/>
               </a:spcAft>
             </a:pPr>
             <a:r>
-              <a:rPr sz="1100" lang="zh-TW" dirty="0">
+              <a:rPr sz="1000" lang="zh-TW" dirty="0">
                 <a:solidFill>
                   <a:srgbClr val="000000"/>
                 </a:solidFill>
@@ -3253,7 +3396,7 @@
               <a:t>任務五，</a:t>
             </a:r>
             <a:r>
-              <a:rPr sz="1100" b="1" lang="zh-TW" dirty="0">
+              <a:rPr sz="1000" b="1" lang="zh-TW" dirty="0">
                 <a:solidFill>
                   <a:srgbClr val="000000"/>
                 </a:solidFill>
@@ -3264,7 +3407,7 @@
               <a:t>搭檔卡</a:t>
             </a:r>
             <a:r>
-              <a:rPr sz="1100" lang="zh-TW" dirty="0">
+              <a:rPr sz="1000" lang="zh-TW" dirty="0">
                 <a:solidFill>
                   <a:srgbClr val="000000"/>
                 </a:solidFill>
@@ -3282,11 +3425,11 @@
                 <a:spcPts val="0"/>
               </a:spcBef>
               <a:spcAft>
-                <a:spcPts val="183"/>
+                <a:spcPts val="167"/>
               </a:spcAft>
             </a:pPr>
             <a:r>
-              <a:rPr sz="1100" lang="zh-TW" dirty="0">
+              <a:rPr sz="1000" lang="zh-TW" dirty="0">
                 <a:solidFill>
                   <a:srgbClr val="000000"/>
                 </a:solidFill>
@@ -3297,7 +3440,7 @@
               <a:t>先示範一下。場景按「夜間雨後」，打開相機畫面上方那排最右邊、新的開關「</a:t>
             </a:r>
             <a:r>
-              <a:rPr sz="1100" b="1" lang="zh-TW" dirty="0">
+              <a:rPr sz="1000" b="1" lang="zh-TW" dirty="0">
                 <a:solidFill>
                   <a:srgbClr val="000000"/>
                 </a:solidFill>
@@ -3308,15 +3451,15 @@
               <a:t>合起來</a:t>
             </a:r>
             <a:r>
-              <a:rPr sz="1100" lang="zh-TW" dirty="0">
-                <a:solidFill>
-                  <a:srgbClr val="000000"/>
-                </a:solidFill>
-                <a:latin typeface="Arial Unicode MS"/>
-                <a:ea typeface="Arial Unicode MS"/>
-                <a:cs typeface="Arial Unicode MS"/>
-              </a:rPr>
-              <a:t>」。每個框上面會出現一行字，像「車・12 m・遠離 18」。三段分別是：相機認出來的「車」、光達量的「12 公尺」、雷達量的「遠離，時速 18」。右邊表格也多了一欄「雷達：多快」。
+              <a:rPr sz="1000" lang="zh-TW" dirty="0">
+                <a:solidFill>
+                  <a:srgbClr val="000000"/>
+                </a:solidFill>
+                <a:latin typeface="Arial Unicode MS"/>
+                <a:ea typeface="Arial Unicode MS"/>
+                <a:cs typeface="Arial Unicode MS"/>
+              </a:rPr>
+              <a:t>」。每個框上面會出現一行字，像「車・12 m・遠離 18」。三段分別是：相機認出來的「車」、光達量的「12 公尺」、雷達量的「遠離，時速 18」，也就是那台車自己以時速 18 往遠處開。右邊表格也多了一欄「雷達：多快」。
 </a:t>
             </a:r>
           </a:p>
@@ -3326,11 +3469,11 @@
                 <a:spcPts val="0"/>
               </a:spcBef>
               <a:spcAft>
-                <a:spcPts val="183"/>
+                <a:spcPts val="167"/>
               </a:spcAft>
             </a:pPr>
             <a:r>
-              <a:rPr sz="1100" lang="zh-TW" dirty="0">
+              <a:rPr sz="1000" lang="zh-TW" dirty="0">
                 <a:solidFill>
                   <a:srgbClr val="000000"/>
                 </a:solidFill>
@@ -3348,11 +3491,11 @@
                 <a:spcPts val="0"/>
               </a:spcBef>
               <a:spcAft>
-                <a:spcPts val="183"/>
+                <a:spcPts val="167"/>
               </a:spcAft>
             </a:pPr>
             <a:r>
-              <a:rPr sz="1100" b="1" lang="zh-TW" dirty="0">
+              <a:rPr sz="1000" b="1" lang="zh-TW" dirty="0">
                 <a:solidFill>
                   <a:srgbClr val="000000"/>
                 </a:solidFill>
@@ -3363,7 +3506,7 @@
               <a:t>第 10 題。</a:t>
             </a:r>
             <a:r>
-              <a:rPr sz="1100" lang="zh-TW" dirty="0">
+              <a:rPr sz="1000" lang="zh-TW" dirty="0">
                 <a:solidFill>
                   <a:srgbClr val="000000"/>
                 </a:solidFill>
@@ -3374,26 +3517,26 @@
               <a:t>表格 12.0 m 那台車，就是畫面最左邊、只拍到一半的那一台。「雷達：多快」寫「遠離 18」。所以答案是：</a:t>
             </a:r>
             <a:r>
-              <a:rPr sz="1100" b="1" lang="zh-TW" dirty="0">
-                <a:solidFill>
-                  <a:srgbClr val="000000"/>
-                </a:solidFill>
-                <a:latin typeface="Arial Unicode MS"/>
-                <a:ea typeface="Arial Unicode MS"/>
-                <a:cs typeface="Arial Unicode MS"/>
-              </a:rPr>
-              <a:t>一台車，約 12 公尺，正以時速約 18 公里遠離。</a:t>
-            </a:r>
-            <a:r>
-              <a:rPr sz="1100" lang="zh-TW" dirty="0">
-                <a:solidFill>
-                  <a:srgbClr val="000000"/>
-                </a:solidFill>
-                <a:latin typeface="Arial Unicode MS"/>
-                <a:ea typeface="Arial Unicode MS"/>
-                <a:cs typeface="Arial Unicode MS"/>
-              </a:rPr>
-              <a:t>我拿官方標註前後兩格的位置算過，這台車真的是時速 18 左右在離開，雷達量得很準。
+              <a:rPr sz="1000" b="1" lang="zh-TW" dirty="0">
+                <a:solidFill>
+                  <a:srgbClr val="000000"/>
+                </a:solidFill>
+                <a:latin typeface="Arial Unicode MS"/>
+                <a:ea typeface="Arial Unicode MS"/>
+                <a:cs typeface="Arial Unicode MS"/>
+              </a:rPr>
+              <a:t>一台車，約 12 公尺，正以時速約 18 公里往遠處開。</a:t>
+            </a:r>
+            <a:r>
+              <a:rPr sz="1000" lang="zh-TW" dirty="0">
+                <a:solidFill>
+                  <a:srgbClr val="000000"/>
+                </a:solidFill>
+                <a:latin typeface="Arial Unicode MS"/>
+                <a:ea typeface="Arial Unicode MS"/>
+                <a:cs typeface="Arial Unicode MS"/>
+              </a:rPr>
+              <a:t>我拿官方標註前後兩格的位置算過，這台車真的是時速 18 左右在開，雷達量得很準。
 </a:t>
             </a:r>
           </a:p>
@@ -3403,118 +3546,41 @@
                 <a:spcPts val="0"/>
               </a:spcBef>
               <a:spcAft>
-                <a:spcPts val="183"/>
+                <a:spcPts val="167"/>
               </a:spcAft>
             </a:pPr>
             <a:r>
-              <a:rPr sz="1100" b="1" lang="zh-TW" dirty="0">
-                <a:solidFill>
-                  <a:srgbClr val="000000"/>
-                </a:solidFill>
-                <a:latin typeface="Arial Unicode MS"/>
-                <a:ea typeface="Arial Unicode MS"/>
-                <a:cs typeface="Arial Unicode MS"/>
-              </a:rPr>
-              <a:t>第 11 題。</a:t>
-            </a:r>
-            <a:r>
-              <a:rPr sz="1100" lang="zh-TW" dirty="0">
-                <a:solidFill>
-                  <a:srgbClr val="000000"/>
-                </a:solidFill>
-                <a:latin typeface="Arial Unicode MS"/>
-                <a:ea typeface="Arial Unicode MS"/>
-                <a:cs typeface="Arial Unicode MS"/>
-              </a:rPr>
-              <a:t>「一台車」最靠</a:t>
-            </a:r>
-            <a:r>
-              <a:rPr sz="1100" b="1" lang="zh-TW" dirty="0">
-                <a:solidFill>
-                  <a:srgbClr val="000000"/>
-                </a:solidFill>
-                <a:latin typeface="Arial Unicode MS"/>
-                <a:ea typeface="Arial Unicode MS"/>
-                <a:cs typeface="Arial Unicode MS"/>
-              </a:rPr>
-              <a:t>相機</a:t>
-            </a:r>
-            <a:r>
-              <a:rPr sz="1100" lang="zh-TW" dirty="0">
-                <a:solidFill>
-                  <a:srgbClr val="000000"/>
-                </a:solidFill>
-                <a:latin typeface="Arial Unicode MS"/>
-                <a:ea typeface="Arial Unicode MS"/>
-                <a:cs typeface="Arial Unicode MS"/>
-              </a:rPr>
-              <a:t>，只有它認得出那是車；「12 公尺」最靠</a:t>
-            </a:r>
-            <a:r>
-              <a:rPr sz="1100" b="1" lang="zh-TW" dirty="0">
-                <a:solidFill>
-                  <a:srgbClr val="000000"/>
-                </a:solidFill>
-                <a:latin typeface="Arial Unicode MS"/>
-                <a:ea typeface="Arial Unicode MS"/>
-                <a:cs typeface="Arial Unicode MS"/>
-              </a:rPr>
-              <a:t>光達</a:t>
-            </a:r>
-            <a:r>
-              <a:rPr sz="1100" lang="zh-TW" dirty="0">
-                <a:solidFill>
-                  <a:srgbClr val="000000"/>
-                </a:solidFill>
-                <a:latin typeface="Arial Unicode MS"/>
-                <a:ea typeface="Arial Unicode MS"/>
-                <a:cs typeface="Arial Unicode MS"/>
-              </a:rPr>
-              <a:t>，表格的距離是用官方標註的框算的，那個框是照光達的點畫出來的；「時速 18 遠離」最靠</a:t>
-            </a:r>
-            <a:r>
-              <a:rPr sz="1100" b="1" lang="zh-TW" dirty="0">
-                <a:solidFill>
-                  <a:srgbClr val="000000"/>
-                </a:solidFill>
-                <a:latin typeface="Arial Unicode MS"/>
-                <a:ea typeface="Arial Unicode MS"/>
-                <a:cs typeface="Arial Unicode MS"/>
-              </a:rPr>
-              <a:t>雷達</a:t>
-            </a:r>
-            <a:r>
-              <a:rPr sz="1100" lang="zh-TW" dirty="0">
-                <a:solidFill>
-                  <a:srgbClr val="000000"/>
-                </a:solidFill>
-                <a:latin typeface="Arial Unicode MS"/>
-                <a:ea typeface="Arial Unicode MS"/>
-                <a:cs typeface="Arial Unicode MS"/>
-              </a:rPr>
-              <a:t>，它用都卜勒直接量速度。答案是「</a:t>
-            </a:r>
-            <a:r>
-              <a:rPr sz="1100" b="1" lang="zh-TW" dirty="0">
-                <a:solidFill>
-                  <a:srgbClr val="000000"/>
-                </a:solidFill>
-                <a:latin typeface="Arial Unicode MS"/>
-                <a:ea typeface="Arial Unicode MS"/>
-                <a:cs typeface="Arial Unicode MS"/>
-              </a:rPr>
-              <a:t>相機／光達／雷達</a:t>
-            </a:r>
-            <a:r>
-              <a:rPr sz="1100" lang="zh-TW" dirty="0">
-                <a:solidFill>
-                  <a:srgbClr val="000000"/>
-                </a:solidFill>
-                <a:latin typeface="Arial Unicode MS"/>
-                <a:ea typeface="Arial Unicode MS"/>
-                <a:cs typeface="Arial Unicode MS"/>
-              </a:rPr>
-              <a:t>」。
+              <a:rPr sz="1000" lang="zh-TW" dirty="0">
+                <a:solidFill>
+                  <a:srgbClr val="000000"/>
+                </a:solidFill>
+                <a:latin typeface="Arial Unicode MS"/>
+                <a:ea typeface="Arial Unicode MS"/>
+                <a:cs typeface="Arial Unicode MS"/>
+              </a:rPr>
+              <a:t>要提醒一件事：這個 18 是那台車</a:t>
+            </a:r>
+            <a:r>
+              <a:rPr sz="1000" b="1" lang="zh-TW" dirty="0">
+                <a:solidFill>
+                  <a:srgbClr val="000000"/>
+                </a:solidFill>
+                <a:latin typeface="Arial Unicode MS"/>
+                <a:ea typeface="Arial Unicode MS"/>
+                <a:cs typeface="Arial Unicode MS"/>
+              </a:rPr>
+              <a:t>自己</a:t>
+            </a:r>
+            <a:r>
+              <a:rPr sz="1000" lang="zh-TW" dirty="0">
+                <a:solidFill>
+                  <a:srgbClr val="000000"/>
+                </a:solidFill>
+                <a:latin typeface="Arial Unicode MS"/>
+                <a:ea typeface="Arial Unicode MS"/>
+                <a:cs typeface="Arial Unicode MS"/>
+              </a:rPr>
+              <a:t>的速度。我們的車這時候也以時速大約 9 往前開，所以兩台車之間的距離，只以時速 9 公里左右慢慢拉開。雷達原本量到的是兩台車之間的相對速度，扣掉自己的車速，才得到那台車自己的速度，就是第一節講的那個減法。
 </a:t>
             </a:r>
           </a:p>
@@ -3524,88 +3590,110 @@
                 <a:spcPts val="0"/>
               </a:spcBef>
               <a:spcAft>
-                <a:spcPts val="183"/>
+                <a:spcPts val="167"/>
               </a:spcAft>
             </a:pPr>
             <a:r>
-              <a:rPr sz="1100" b="1" lang="zh-TW" dirty="0">
-                <a:solidFill>
-                  <a:srgbClr val="000000"/>
-                </a:solidFill>
-                <a:latin typeface="Arial Unicode MS"/>
-                <a:ea typeface="Arial Unicode MS"/>
-                <a:cs typeface="Arial Unicode MS"/>
-              </a:rPr>
-              <a:t>第 12 題。</a:t>
-            </a:r>
-            <a:r>
-              <a:rPr sz="1100" lang="zh-TW" dirty="0">
-                <a:solidFill>
-                  <a:srgbClr val="000000"/>
-                </a:solidFill>
-                <a:latin typeface="Arial Unicode MS"/>
-                <a:ea typeface="Arial Unicode MS"/>
-                <a:cs typeface="Arial Unicode MS"/>
-              </a:rPr>
-              <a:t>這題最重要。場景換「夜間」，那台黑色轎車，任務三看過，正在開過路口。可是「雷達：多快」寫 </a:t>
-            </a:r>
-            <a:r>
-              <a:rPr sz="1100" b="1" lang="zh-TW" dirty="0">
-                <a:solidFill>
-                  <a:srgbClr val="000000"/>
-                </a:solidFill>
-                <a:latin typeface="Arial Unicode MS"/>
-                <a:ea typeface="Arial Unicode MS"/>
-                <a:cs typeface="Arial Unicode MS"/>
-              </a:rPr>
-              <a:t>≈0</a:t>
-            </a:r>
-            <a:r>
-              <a:rPr sz="1100" lang="zh-TW" dirty="0">
-                <a:solidFill>
-                  <a:srgbClr val="000000"/>
-                </a:solidFill>
-                <a:latin typeface="Arial Unicode MS"/>
-                <a:ea typeface="Arial Unicode MS"/>
-                <a:cs typeface="Arial Unicode MS"/>
-              </a:rPr>
-              <a:t>。雷達壞了嗎？沒有。我用官方標註算過，這台車實際上大約時速二十二，可是它是</a:t>
-            </a:r>
-            <a:r>
-              <a:rPr sz="1100" b="1" lang="zh-TW" dirty="0">
-                <a:solidFill>
-                  <a:srgbClr val="000000"/>
-                </a:solidFill>
-                <a:latin typeface="Arial Unicode MS"/>
-                <a:ea typeface="Arial Unicode MS"/>
-                <a:cs typeface="Arial Unicode MS"/>
-              </a:rPr>
-              <a:t>橫著開</a:t>
-            </a:r>
-            <a:r>
-              <a:rPr sz="1100" lang="zh-TW" dirty="0">
-                <a:solidFill>
-                  <a:srgbClr val="000000"/>
-                </a:solidFill>
-                <a:latin typeface="Arial Unicode MS"/>
-                <a:ea typeface="Arial Unicode MS"/>
-                <a:cs typeface="Arial Unicode MS"/>
-              </a:rPr>
-              <a:t>的，朝我們靠近的那一段速度，只有時速五左右。雷達用都卜勒量速度，只量得到「朝我來、離我去」的那一段。就像站在路邊看一台車從左邊開到右邊，它沒有變近、也沒有變遠。答案是「</a:t>
-            </a:r>
-            <a:r>
-              <a:rPr sz="1100" b="1" lang="zh-TW" dirty="0">
-                <a:solidFill>
-                  <a:srgbClr val="000000"/>
-                </a:solidFill>
-                <a:latin typeface="Arial Unicode MS"/>
-                <a:ea typeface="Arial Unicode MS"/>
-                <a:cs typeface="Arial Unicode MS"/>
-              </a:rPr>
-              <a:t>它是橫著開，雷達只量得到朝自己靠近或遠離的那一段</a:t>
-            </a:r>
-            <a:r>
-              <a:rPr sz="1100" lang="zh-TW" dirty="0">
+              <a:rPr sz="1000" b="1" lang="zh-TW" dirty="0">
+                <a:solidFill>
+                  <a:srgbClr val="000000"/>
+                </a:solidFill>
+                <a:latin typeface="Arial Unicode MS"/>
+                <a:ea typeface="Arial Unicode MS"/>
+                <a:cs typeface="Arial Unicode MS"/>
+              </a:rPr>
+              <a:t>第 11 題。</a:t>
+            </a:r>
+            <a:r>
+              <a:rPr sz="1000" lang="zh-TW" dirty="0">
+                <a:solidFill>
+                  <a:srgbClr val="000000"/>
+                </a:solidFill>
+                <a:latin typeface="Arial Unicode MS"/>
+                <a:ea typeface="Arial Unicode MS"/>
+                <a:cs typeface="Arial Unicode MS"/>
+              </a:rPr>
+              <a:t>「一台車」最靠</a:t>
+            </a:r>
+            <a:r>
+              <a:rPr sz="1000" b="1" lang="zh-TW" dirty="0">
+                <a:solidFill>
+                  <a:srgbClr val="000000"/>
+                </a:solidFill>
+                <a:latin typeface="Arial Unicode MS"/>
+                <a:ea typeface="Arial Unicode MS"/>
+                <a:cs typeface="Arial Unicode MS"/>
+              </a:rPr>
+              <a:t>相機</a:t>
+            </a:r>
+            <a:r>
+              <a:rPr sz="1000" lang="zh-TW" dirty="0">
+                <a:solidFill>
+                  <a:srgbClr val="000000"/>
+                </a:solidFill>
+                <a:latin typeface="Arial Unicode MS"/>
+                <a:ea typeface="Arial Unicode MS"/>
+                <a:cs typeface="Arial Unicode MS"/>
+              </a:rPr>
+              <a:t>，只有它認得出那是車；「12 公尺」最靠</a:t>
+            </a:r>
+            <a:r>
+              <a:rPr sz="1000" b="1" lang="zh-TW" dirty="0">
+                <a:solidFill>
+                  <a:srgbClr val="000000"/>
+                </a:solidFill>
+                <a:latin typeface="Arial Unicode MS"/>
+                <a:ea typeface="Arial Unicode MS"/>
+                <a:cs typeface="Arial Unicode MS"/>
+              </a:rPr>
+              <a:t>光達</a:t>
+            </a:r>
+            <a:r>
+              <a:rPr sz="1000" lang="zh-TW" dirty="0">
+                <a:solidFill>
+                  <a:srgbClr val="000000"/>
+                </a:solidFill>
+                <a:latin typeface="Arial Unicode MS"/>
+                <a:ea typeface="Arial Unicode MS"/>
+                <a:cs typeface="Arial Unicode MS"/>
+              </a:rPr>
+              <a:t>，表格的距離是用官方標註的框算的，那個框是照光達的點畫出來的；「時速 18 往遠處開」最靠</a:t>
+            </a:r>
+            <a:r>
+              <a:rPr sz="1000" b="1" lang="zh-TW" dirty="0">
+                <a:solidFill>
+                  <a:srgbClr val="000000"/>
+                </a:solidFill>
+                <a:latin typeface="Arial Unicode MS"/>
+                <a:ea typeface="Arial Unicode MS"/>
+                <a:cs typeface="Arial Unicode MS"/>
+              </a:rPr>
+              <a:t>雷達</a:t>
+            </a:r>
+            <a:r>
+              <a:rPr sz="1000" lang="zh-TW" dirty="0">
+                <a:solidFill>
+                  <a:srgbClr val="000000"/>
+                </a:solidFill>
+                <a:latin typeface="Arial Unicode MS"/>
+                <a:ea typeface="Arial Unicode MS"/>
+                <a:cs typeface="Arial Unicode MS"/>
+              </a:rPr>
+              <a:t>，它用都卜勒直接量速度。答案是「</a:t>
+            </a:r>
+            <a:r>
+              <a:rPr sz="1000" b="1" lang="zh-TW" dirty="0">
+                <a:solidFill>
+                  <a:srgbClr val="000000"/>
+                </a:solidFill>
+                <a:latin typeface="Arial Unicode MS"/>
+                <a:ea typeface="Arial Unicode MS"/>
+                <a:cs typeface="Arial Unicode MS"/>
+              </a:rPr>
+              <a:t>相機／光達／雷達</a:t>
+            </a:r>
+            <a:r>
+              <a:rPr sz="1000" lang="zh-TW" dirty="0">
                 <a:solidFill>
                   <a:srgbClr val="000000"/>
                 </a:solidFill>
@@ -3623,19 +3711,96 @@
                 <a:spcPts val="0"/>
               </a:spcBef>
               <a:spcAft>
-                <a:spcPts val="183"/>
+                <a:spcPts val="167"/>
               </a:spcAft>
             </a:pPr>
             <a:r>
-              <a:rPr sz="1100" lang="zh-TW" dirty="0">
-                <a:solidFill>
-                  <a:srgbClr val="000000"/>
-                </a:solidFill>
-                <a:latin typeface="Arial Unicode MS"/>
-                <a:ea typeface="Arial Unicode MS"/>
-                <a:cs typeface="Arial Unicode MS"/>
-              </a:rPr>
-              <a:t>所以雷達量的速度，也有盲點。橫著開過去的車，要靠什麼知道它多快？跟下一題一樣。
+              <a:rPr sz="1000" b="1" lang="zh-TW" dirty="0">
+                <a:solidFill>
+                  <a:srgbClr val="000000"/>
+                </a:solidFill>
+                <a:latin typeface="Arial Unicode MS"/>
+                <a:ea typeface="Arial Unicode MS"/>
+                <a:cs typeface="Arial Unicode MS"/>
+              </a:rPr>
+              <a:t>第 12 題。</a:t>
+            </a:r>
+            <a:r>
+              <a:rPr sz="1000" lang="zh-TW" dirty="0">
+                <a:solidFill>
+                  <a:srgbClr val="000000"/>
+                </a:solidFill>
+                <a:latin typeface="Arial Unicode MS"/>
+                <a:ea typeface="Arial Unicode MS"/>
+                <a:cs typeface="Arial Unicode MS"/>
+              </a:rPr>
+              <a:t>這題最重要。場景換「夜間」，那台黑色轎車，任務三看過，正在開過路口。可是「雷達：多快」寫 </a:t>
+            </a:r>
+            <a:r>
+              <a:rPr sz="1000" b="1" lang="zh-TW" dirty="0">
+                <a:solidFill>
+                  <a:srgbClr val="000000"/>
+                </a:solidFill>
+                <a:latin typeface="Arial Unicode MS"/>
+                <a:ea typeface="Arial Unicode MS"/>
+                <a:cs typeface="Arial Unicode MS"/>
+              </a:rPr>
+              <a:t>≈0</a:t>
+            </a:r>
+            <a:r>
+              <a:rPr sz="1000" lang="zh-TW" dirty="0">
+                <a:solidFill>
+                  <a:srgbClr val="000000"/>
+                </a:solidFill>
+                <a:latin typeface="Arial Unicode MS"/>
+                <a:ea typeface="Arial Unicode MS"/>
+                <a:cs typeface="Arial Unicode MS"/>
+              </a:rPr>
+              <a:t>。雷達壞了嗎？沒有。我用官方標註算過，這台車實際上大約時速二十二，可是它是</a:t>
+            </a:r>
+            <a:r>
+              <a:rPr sz="1000" b="1" lang="zh-TW" dirty="0">
+                <a:solidFill>
+                  <a:srgbClr val="000000"/>
+                </a:solidFill>
+                <a:latin typeface="Arial Unicode MS"/>
+                <a:ea typeface="Arial Unicode MS"/>
+                <a:cs typeface="Arial Unicode MS"/>
+              </a:rPr>
+              <a:t>橫著開</a:t>
+            </a:r>
+            <a:r>
+              <a:rPr sz="1000" lang="zh-TW" dirty="0">
+                <a:solidFill>
+                  <a:srgbClr val="000000"/>
+                </a:solidFill>
+                <a:latin typeface="Arial Unicode MS"/>
+                <a:ea typeface="Arial Unicode MS"/>
+                <a:cs typeface="Arial Unicode MS"/>
+              </a:rPr>
+              <a:t>的，朝我們靠近的那一段速度，只有時速五左右。雷達用都卜勒量速度，只量得到「朝我來、離我去」的那一段。就像站在路邊看一台車從左邊開到右邊，它沒有變近、也沒有變遠。答案是「</a:t>
+            </a:r>
+            <a:r>
+              <a:rPr sz="1000" b="1" lang="zh-TW" dirty="0">
+                <a:solidFill>
+                  <a:srgbClr val="000000"/>
+                </a:solidFill>
+                <a:latin typeface="Arial Unicode MS"/>
+                <a:ea typeface="Arial Unicode MS"/>
+                <a:cs typeface="Arial Unicode MS"/>
+              </a:rPr>
+              <a:t>它是橫著開，雷達只量得到朝自己靠近或遠離的那一段</a:t>
+            </a:r>
+            <a:r>
+              <a:rPr sz="1000" lang="zh-TW" dirty="0">
+                <a:solidFill>
+                  <a:srgbClr val="000000"/>
+                </a:solidFill>
+                <a:latin typeface="Arial Unicode MS"/>
+                <a:ea typeface="Arial Unicode MS"/>
+                <a:cs typeface="Arial Unicode MS"/>
+              </a:rPr>
+              <a:t>」。
 </a:t>
             </a:r>
           </a:p>
@@ -3645,52 +3810,19 @@
                 <a:spcPts val="0"/>
               </a:spcBef>
               <a:spcAft>
-                <a:spcPts val="183"/>
+                <a:spcPts val="167"/>
               </a:spcAft>
             </a:pPr>
             <a:r>
-              <a:rPr sz="1100" b="1" lang="zh-TW" dirty="0">
-                <a:solidFill>
-                  <a:srgbClr val="000000"/>
-                </a:solidFill>
-                <a:latin typeface="Arial Unicode MS"/>
-                <a:ea typeface="Arial Unicode MS"/>
-                <a:cs typeface="Arial Unicode MS"/>
-              </a:rPr>
-              <a:t>第 13 題。</a:t>
-            </a:r>
-            <a:r>
-              <a:rPr sz="1100" lang="zh-TW" dirty="0">
-                <a:solidFill>
-                  <a:srgbClr val="000000"/>
-                </a:solidFill>
-                <a:latin typeface="Arial Unicode MS"/>
-                <a:ea typeface="Arial Unicode MS"/>
-                <a:cs typeface="Arial Unicode MS"/>
-              </a:rPr>
-              <a:t>斑馬線上 10.2 m 的行人，雷達一個點都沒有，速度是「—」。這一塊要怎麼補？速度就是「位置變了多少，除以過了多久」。光達每秒轉二十圈，把它連續幾格的位置記下來，一除就知道他走多快。答案是「</a:t>
-            </a:r>
-            <a:r>
-              <a:rPr sz="1100" b="1" lang="zh-TW" dirty="0">
-                <a:solidFill>
-                  <a:srgbClr val="000000"/>
-                </a:solidFill>
-                <a:latin typeface="Arial Unicode MS"/>
-                <a:ea typeface="Arial Unicode MS"/>
-                <a:cs typeface="Arial Unicode MS"/>
-              </a:rPr>
-              <a:t>用光達（或相機）連續幾格的位置變化，算出他走多快</a:t>
-            </a:r>
-            <a:r>
-              <a:rPr sz="1100" lang="zh-TW" dirty="0">
-                <a:solidFill>
-                  <a:srgbClr val="000000"/>
-                </a:solidFill>
-                <a:latin typeface="Arial Unicode MS"/>
-                <a:ea typeface="Arial Unicode MS"/>
-                <a:cs typeface="Arial Unicode MS"/>
-              </a:rPr>
-              <a:t>」。這就是第二節講的追蹤。
+              <a:rPr sz="1000" lang="zh-TW" dirty="0">
+                <a:solidFill>
+                  <a:srgbClr val="000000"/>
+                </a:solidFill>
+                <a:latin typeface="Arial Unicode MS"/>
+                <a:ea typeface="Arial Unicode MS"/>
+                <a:cs typeface="Arial Unicode MS"/>
+              </a:rPr>
+              <a:t>所以雷達量的速度，也有盲點。橫著開過去的車，要靠什麼知道它多快？跟下一題一樣。
 </a:t>
             </a:r>
           </a:p>
@@ -3700,11 +3832,66 @@
                 <a:spcPts val="0"/>
               </a:spcBef>
               <a:spcAft>
-                <a:spcPts val="183"/>
+                <a:spcPts val="167"/>
               </a:spcAft>
             </a:pPr>
             <a:r>
-              <a:rPr sz="1100" lang="zh-TW" dirty="0">
+              <a:rPr sz="1000" b="1" lang="zh-TW" dirty="0">
+                <a:solidFill>
+                  <a:srgbClr val="000000"/>
+                </a:solidFill>
+                <a:latin typeface="Arial Unicode MS"/>
+                <a:ea typeface="Arial Unicode MS"/>
+                <a:cs typeface="Arial Unicode MS"/>
+              </a:rPr>
+              <a:t>第 13 題。</a:t>
+            </a:r>
+            <a:r>
+              <a:rPr sz="1000" lang="zh-TW" dirty="0">
+                <a:solidFill>
+                  <a:srgbClr val="000000"/>
+                </a:solidFill>
+                <a:latin typeface="Arial Unicode MS"/>
+                <a:ea typeface="Arial Unicode MS"/>
+                <a:cs typeface="Arial Unicode MS"/>
+              </a:rPr>
+              <a:t>斑馬線上 10.2 m 的行人，雷達一個點都沒有，速度是「—」。這一塊要怎麼補？速度就是「位置變了多少，除以過了多久」。光達每秒轉二十圈，把它連續幾格的位置記下來，一除就知道他走多快。答案是「</a:t>
+            </a:r>
+            <a:r>
+              <a:rPr sz="1000" b="1" lang="zh-TW" dirty="0">
+                <a:solidFill>
+                  <a:srgbClr val="000000"/>
+                </a:solidFill>
+                <a:latin typeface="Arial Unicode MS"/>
+                <a:ea typeface="Arial Unicode MS"/>
+                <a:cs typeface="Arial Unicode MS"/>
+              </a:rPr>
+              <a:t>用光達（或相機）連續幾格的位置變化，算出他走多快</a:t>
+            </a:r>
+            <a:r>
+              <a:rPr sz="1000" lang="zh-TW" dirty="0">
+                <a:solidFill>
+                  <a:srgbClr val="000000"/>
+                </a:solidFill>
+                <a:latin typeface="Arial Unicode MS"/>
+                <a:ea typeface="Arial Unicode MS"/>
+                <a:cs typeface="Arial Unicode MS"/>
+              </a:rPr>
+              <a:t>」。這就是第二節講的追蹤。
+</a:t>
+            </a:r>
+          </a:p>
+          <a:p>
+            <a:pPr algn="l">
+              <a:spcBef>
+                <a:spcPts val="0"/>
+              </a:spcBef>
+              <a:spcAft>
+                <a:spcPts val="167"/>
+              </a:spcAft>
+            </a:pPr>
+            <a:r>
+              <a:rPr sz="1000" lang="zh-TW" dirty="0">
                 <a:solidFill>
                   <a:srgbClr val="000000"/>
                 </a:solidFill>
@@ -3715,7 +3902,7 @@
               <a:t>四題做完，各位會發現：三種感測器各給一塊，</a:t>
             </a:r>
             <a:r>
-              <a:rPr sz="1100" b="1" lang="zh-TW" dirty="0">
+              <a:rPr sz="1000" b="1" lang="zh-TW" dirty="0">
                 <a:solidFill>
                   <a:srgbClr val="000000"/>
                 </a:solidFill>
@@ -3726,7 +3913,7 @@
               <a:t>少了哪一塊，就要找另一個來補</a:t>
             </a:r>
             <a:r>
-              <a:rPr sz="1100" lang="zh-TW" dirty="0">
+              <a:rPr sz="1000" lang="zh-TW" dirty="0">
                 <a:solidFill>
                   <a:srgbClr val="000000"/>
                 </a:solidFill>
@@ -3843,11 +4030,11 @@
                 <a:spcPts val="0"/>
               </a:spcBef>
               <a:spcAft>
-                <a:spcPts val="192"/>
+                <a:spcPts val="175"/>
               </a:spcAft>
             </a:pPr>
             <a:r>
-              <a:rPr sz="1150" b="1" lang="zh-TW" dirty="0">
+              <a:rPr sz="1050" b="1" lang="zh-TW" dirty="0">
                 <a:solidFill>
                   <a:srgbClr val="000000"/>
                 </a:solidFill>
@@ -3858,7 +4045,7 @@
               <a:t>這一張的目的：</a:t>
             </a:r>
             <a:r>
-              <a:rPr sz="1150" lang="zh-TW" dirty="0">
+              <a:rPr sz="1050" lang="zh-TW" dirty="0">
                 <a:solidFill>
                   <a:srgbClr val="000000"/>
                 </a:solidFill>
@@ -3876,11 +4063,11 @@
                 <a:spcPts val="0"/>
               </a:spcBef>
               <a:spcAft>
-                <a:spcPts val="192"/>
+                <a:spcPts val="175"/>
               </a:spcAft>
             </a:pPr>
             <a:r>
-              <a:rPr sz="1150" lang="zh-TW" dirty="0">
+              <a:rPr sz="1050" lang="zh-TW" dirty="0">
                 <a:solidFill>
                   <a:srgbClr val="000000"/>
                 </a:solidFill>
@@ -3891,7 +4078,7 @@
               <a:t>任務六。第三週第一節有一張表：</a:t>
             </a:r>
             <a:r>
-              <a:rPr sz="1150" b="1" lang="zh-TW" dirty="0">
+              <a:rPr sz="1050" b="1" lang="zh-TW" dirty="0">
                 <a:solidFill>
                   <a:srgbClr val="000000"/>
                 </a:solidFill>
@@ -3902,7 +4089,7 @@
               <a:t>每一種感測器的弱點，由哪一種來補。</a:t>
             </a:r>
             <a:r>
-              <a:rPr sz="1150" lang="zh-TW" dirty="0">
+              <a:rPr sz="1050" lang="zh-TW" dirty="0">
                 <a:solidFill>
                   <a:srgbClr val="000000"/>
                 </a:solidFill>
@@ -3920,11 +4107,11 @@
                 <a:spcPts val="0"/>
               </a:spcBef>
               <a:spcAft>
-                <a:spcPts val="192"/>
+                <a:spcPts val="175"/>
               </a:spcAft>
             </a:pPr>
             <a:r>
-              <a:rPr sz="1150" lang="zh-TW" dirty="0">
+              <a:rPr sz="1050" lang="zh-TW" dirty="0">
                 <a:solidFill>
                   <a:srgbClr val="000000"/>
                 </a:solidFill>
@@ -3942,11 +4129,11 @@
                 <a:spcPts val="0"/>
               </a:spcBef>
               <a:spcAft>
-                <a:spcPts val="192"/>
+                <a:spcPts val="175"/>
               </a:spcAft>
             </a:pPr>
             <a:r>
-              <a:rPr sz="1150" lang="zh-TW" dirty="0">
+              <a:rPr sz="1050" lang="zh-TW" dirty="0">
                 <a:solidFill>
                   <a:srgbClr val="000000"/>
                 </a:solidFill>
@@ -3964,11 +4151,11 @@
                 <a:spcPts val="0"/>
               </a:spcBef>
               <a:spcAft>
-                <a:spcPts val="192"/>
+                <a:spcPts val="175"/>
               </a:spcAft>
             </a:pPr>
             <a:r>
-              <a:rPr sz="1150" b="1" lang="zh-TW" dirty="0">
+              <a:rPr sz="1050" b="1" lang="zh-TW" dirty="0">
                 <a:solidFill>
                   <a:srgbClr val="000000"/>
                 </a:solidFill>
@@ -3979,7 +4166,7 @@
               <a:t>第一列，不知道那是什麼。</a:t>
             </a:r>
             <a:r>
-              <a:rPr sz="1150" lang="zh-TW" dirty="0">
+              <a:rPr sz="1050" lang="zh-TW" dirty="0">
                 <a:solidFill>
                   <a:srgbClr val="000000"/>
                 </a:solidFill>
@@ -3990,7 +4177,7 @@
               <a:t>光達、雷達只知道有一團東西，認得出是人還是垃圾桶的，是</a:t>
             </a:r>
             <a:r>
-              <a:rPr sz="1150" b="1" lang="zh-TW" dirty="0">
+              <a:rPr sz="1050" b="1" lang="zh-TW" dirty="0">
                 <a:solidFill>
                   <a:srgbClr val="000000"/>
                 </a:solidFill>
@@ -4001,7 +4188,7 @@
               <a:t>相機</a:t>
             </a:r>
             <a:r>
-              <a:rPr sz="1150" lang="zh-TW" dirty="0">
+              <a:rPr sz="1050" lang="zh-TW" dirty="0">
                 <a:solidFill>
                   <a:srgbClr val="000000"/>
                 </a:solidFill>
@@ -4019,11 +4206,11 @@
                 <a:spcPts val="0"/>
               </a:spcBef>
               <a:spcAft>
-                <a:spcPts val="192"/>
+                <a:spcPts val="175"/>
               </a:spcAft>
             </a:pPr>
             <a:r>
-              <a:rPr sz="1150" b="1" lang="zh-TW" dirty="0">
+              <a:rPr sz="1050" b="1" lang="zh-TW" dirty="0">
                 <a:solidFill>
                   <a:srgbClr val="000000"/>
                 </a:solidFill>
@@ -4034,7 +4221,7 @@
               <a:t>第二列，讀不出紅綠燈的顏色。</a:t>
             </a:r>
             <a:r>
-              <a:rPr sz="1150" lang="zh-TW" dirty="0">
+              <a:rPr sz="1050" lang="zh-TW" dirty="0">
                 <a:solidFill>
                   <a:srgbClr val="000000"/>
                 </a:solidFill>
@@ -4045,7 +4232,7 @@
               <a:t>只有</a:t>
             </a:r>
             <a:r>
-              <a:rPr sz="1150" b="1" lang="zh-TW" dirty="0">
+              <a:rPr sz="1050" b="1" lang="zh-TW" dirty="0">
                 <a:solidFill>
                   <a:srgbClr val="000000"/>
                 </a:solidFill>
@@ -4056,7 +4243,7 @@
               <a:t>相機</a:t>
             </a:r>
             <a:r>
-              <a:rPr sz="1150" lang="zh-TW" dirty="0">
+              <a:rPr sz="1050" lang="zh-TW" dirty="0">
                 <a:solidFill>
                   <a:srgbClr val="000000"/>
                 </a:solidFill>
@@ -4074,11 +4261,11 @@
                 <a:spcPts val="0"/>
               </a:spcBef>
               <a:spcAft>
-                <a:spcPts val="192"/>
+                <a:spcPts val="175"/>
               </a:spcAft>
             </a:pPr>
             <a:r>
-              <a:rPr sz="1150" b="1" lang="zh-TW" dirty="0">
+              <a:rPr sz="1050" b="1" lang="zh-TW" dirty="0">
                 <a:solidFill>
                   <a:srgbClr val="000000"/>
                 </a:solidFill>
@@ -4089,7 +4276,7 @@
               <a:t>第三列，不知道接近得多快。</a:t>
             </a:r>
             <a:r>
-              <a:rPr sz="1150" b="1" lang="zh-TW" dirty="0">
+              <a:rPr sz="1050" b="1" lang="zh-TW" dirty="0">
                 <a:solidFill>
                   <a:srgbClr val="000000"/>
                 </a:solidFill>
@@ -4100,7 +4287,7 @@
               <a:t>雷達</a:t>
             </a:r>
             <a:r>
-              <a:rPr sz="1150" lang="zh-TW" dirty="0">
+              <a:rPr sz="1050" lang="zh-TW" dirty="0">
                 <a:solidFill>
                   <a:srgbClr val="000000"/>
                 </a:solidFill>
@@ -4118,11 +4305,11 @@
                 <a:spcPts val="0"/>
               </a:spcBef>
               <a:spcAft>
-                <a:spcPts val="192"/>
+                <a:spcPts val="175"/>
               </a:spcAft>
             </a:pPr>
             <a:r>
-              <a:rPr sz="1150" b="1" lang="zh-TW" dirty="0">
+              <a:rPr sz="1050" b="1" lang="zh-TW" dirty="0">
                 <a:solidFill>
                   <a:srgbClr val="000000"/>
                 </a:solidFill>
@@ -4133,7 +4320,7 @@
               <a:t>第四列，保險桿前面的近距離盲區。</a:t>
             </a:r>
             <a:r>
-              <a:rPr sz="1150" b="1" lang="zh-TW" dirty="0">
+              <a:rPr sz="1050" b="1" lang="zh-TW" dirty="0">
                 <a:solidFill>
                   <a:srgbClr val="000000"/>
                 </a:solidFill>
@@ -4144,7 +4331,7 @@
               <a:t>超音波</a:t>
             </a:r>
             <a:r>
-              <a:rPr sz="1150" lang="zh-TW" dirty="0">
+              <a:rPr sz="1050" lang="zh-TW" dirty="0">
                 <a:solidFill>
                   <a:srgbClr val="000000"/>
                 </a:solidFill>
@@ -4162,11 +4349,11 @@
                 <a:spcPts val="0"/>
               </a:spcBef>
               <a:spcAft>
-                <a:spcPts val="192"/>
+                <a:spcPts val="175"/>
               </a:spcAft>
             </a:pPr>
             <a:r>
-              <a:rPr sz="1150" b="1" lang="zh-TW" dirty="0">
+              <a:rPr sz="1050" b="1" lang="zh-TW" dirty="0">
                 <a:solidFill>
                   <a:srgbClr val="000000"/>
                 </a:solidFill>
@@ -4177,7 +4364,7 @@
               <a:t>第五列，天黑，相機看不清楚。</a:t>
             </a:r>
             <a:r>
-              <a:rPr sz="1150" b="1" lang="zh-TW" dirty="0">
+              <a:rPr sz="1050" b="1" lang="zh-TW" dirty="0">
                 <a:solidFill>
                   <a:srgbClr val="000000"/>
                 </a:solidFill>
@@ -4188,15 +4375,15 @@
               <a:t>光達或雷達</a:t>
             </a:r>
             <a:r>
-              <a:rPr sz="1150" lang="zh-TW" dirty="0">
-                <a:solidFill>
-                  <a:srgbClr val="000000"/>
-                </a:solidFill>
-                <a:latin typeface="Arial Unicode MS"/>
-                <a:ea typeface="Arial Unicode MS"/>
-                <a:cs typeface="Arial Unicode MS"/>
-              </a:rPr>
-              <a:t>。任務三剛剛看到：晚上光達的點一個都沒少，那台黑色轎車雷達也抓到了。
+              <a:rPr sz="1050" lang="zh-TW" dirty="0">
+                <a:solidFill>
+                  <a:srgbClr val="000000"/>
+                </a:solidFill>
+                <a:latin typeface="Arial Unicode MS"/>
+                <a:ea typeface="Arial Unicode MS"/>
+                <a:cs typeface="Arial Unicode MS"/>
+              </a:rPr>
+              <a:t>。任務三剛剛看到：晚上光達的點沒有變少，那台黑色轎車雷達也抓到了。
 </a:t>
             </a:r>
           </a:p>
@@ -4206,11 +4393,11 @@
                 <a:spcPts val="0"/>
               </a:spcBef>
               <a:spcAft>
-                <a:spcPts val="192"/>
+                <a:spcPts val="175"/>
               </a:spcAft>
             </a:pPr>
             <a:r>
-              <a:rPr sz="1150" b="1" lang="zh-TW" dirty="0">
+              <a:rPr sz="1050" b="1" lang="zh-TW" dirty="0">
                 <a:solidFill>
                   <a:srgbClr val="000000"/>
                 </a:solidFill>
@@ -4221,7 +4408,7 @@
               <a:t>第六列，不知道自己在哪裡。</a:t>
             </a:r>
             <a:r>
-              <a:rPr sz="1150" b="1" lang="zh-TW" dirty="0">
+              <a:rPr sz="1050" b="1" lang="zh-TW" dirty="0">
                 <a:solidFill>
                   <a:srgbClr val="000000"/>
                 </a:solidFill>
@@ -4232,7 +4419,7 @@
               <a:t>衛星定位加 IMU 加地圖</a:t>
             </a:r>
             <a:r>
-              <a:rPr sz="1150" lang="zh-TW" dirty="0">
+              <a:rPr sz="1050" lang="zh-TW" dirty="0">
                 <a:solidFill>
                   <a:srgbClr val="000000"/>
                 </a:solidFill>
@@ -4250,11 +4437,11 @@
                 <a:spcPts val="0"/>
               </a:spcBef>
               <a:spcAft>
-                <a:spcPts val="192"/>
+                <a:spcPts val="175"/>
               </a:spcAft>
             </a:pPr>
             <a:r>
-              <a:rPr sz="1150" b="1" lang="zh-TW" dirty="0">
+              <a:rPr sz="1050" b="1" lang="zh-TW" dirty="0">
                 <a:solidFill>
                   <a:srgbClr val="000000"/>
                 </a:solidFill>
@@ -4265,7 +4452,7 @@
               <a:t>第七列，今天新加的：雷達量不出高度。</a:t>
             </a:r>
             <a:r>
-              <a:rPr sz="1150" b="1" lang="zh-TW" dirty="0">
+              <a:rPr sz="1050" b="1" lang="zh-TW" dirty="0">
                 <a:solidFill>
                   <a:srgbClr val="000000"/>
                 </a:solidFill>
@@ -4276,15 +4463,15 @@
               <a:t>光達</a:t>
             </a:r>
             <a:r>
-              <a:rPr sz="1150" lang="zh-TW" dirty="0">
-                <a:solidFill>
-                  <a:srgbClr val="000000"/>
-                </a:solidFill>
-                <a:latin typeface="Arial Unicode MS"/>
-                <a:ea typeface="Arial Unicode MS"/>
-                <a:cs typeface="Arial Unicode MS"/>
-              </a:rPr>
-              <a:t>。任務一看到，雷達點全部被放在同一個高度，沒有一個在高處；光達的點一層一層的，有高有低，三十二條雷射線，每一條都有自己往上或往下的角度。
+              <a:rPr sz="1050" lang="zh-TW" dirty="0">
+                <a:solidFill>
+                  <a:srgbClr val="000000"/>
+                </a:solidFill>
+                <a:latin typeface="Arial Unicode MS"/>
+                <a:ea typeface="Arial Unicode MS"/>
+                <a:cs typeface="Arial Unicode MS"/>
+              </a:rPr>
+              <a:t>。任務一看到，雷達點全部被放在同一個高度，沒有一個在高處；光達的點一層一層的，有高有低，三十二條雷射線，每一條都有自己往上或往下的角度。有同學會選「相機和光達」：相機看得出東西在畫面的上面還是下面，可是量不出它離地幾公尺，所以最直接的答案是光達。
 </a:t>
             </a:r>
           </a:p>
@@ -4294,11 +4481,11 @@
                 <a:spcPts val="0"/>
               </a:spcBef>
               <a:spcAft>
-                <a:spcPts val="192"/>
+                <a:spcPts val="175"/>
               </a:spcAft>
             </a:pPr>
             <a:r>
-              <a:rPr sz="1150" b="1" lang="zh-TW" dirty="0">
+              <a:rPr sz="1050" b="1" lang="zh-TW" dirty="0">
                 <a:solidFill>
                   <a:srgbClr val="000000"/>
                 </a:solidFill>
@@ -4309,7 +4496,7 @@
               <a:t>第八列，今天新加的：雷達很少抓到行人和機車。</a:t>
             </a:r>
             <a:r>
-              <a:rPr sz="1150" b="1" lang="zh-TW" dirty="0">
+              <a:rPr sz="1050" b="1" lang="zh-TW" dirty="0">
                 <a:solidFill>
                   <a:srgbClr val="000000"/>
                 </a:solidFill>
@@ -4320,7 +4507,7 @@
               <a:t>相機和光達</a:t>
             </a:r>
             <a:r>
-              <a:rPr sz="1150" lang="zh-TW" dirty="0">
+              <a:rPr sz="1050" lang="zh-TW" dirty="0">
                 <a:solidFill>
                   <a:srgbClr val="000000"/>
                 </a:solidFill>
@@ -4338,11 +4525,11 @@
                 <a:spcPts val="0"/>
               </a:spcBef>
               <a:spcAft>
-                <a:spcPts val="192"/>
+                <a:spcPts val="175"/>
               </a:spcAft>
             </a:pPr>
             <a:r>
-              <a:rPr sz="1150" lang="zh-TW" dirty="0">
+              <a:rPr sz="1050" lang="zh-TW" dirty="0">
                 <a:solidFill>
                   <a:srgbClr val="000000"/>
                 </a:solidFill>
@@ -9392,7 +9579,7 @@
         <p:spPr>
           <a:xfrm>
             <a:off x="502920" y="1101852"/>
-            <a:ext cx="4206240" cy="2514600"/>
+            <a:ext cx="4006735" cy="2514600"/>
           </a:xfrm>
           <a:prstGeom prst="roundRect">
             <a:avLst>
@@ -9426,8 +9613,8 @@
         </p:blipFill>
         <p:spPr>
           <a:xfrm>
-            <a:off x="576072" y="1252728"/>
-            <a:ext cx="4059936" cy="2029968"/>
+            <a:off x="576072" y="1206094"/>
+            <a:ext cx="3860431" cy="2123237"/>
           </a:xfrm>
           <a:prstGeom prst="rect">
             <a:avLst/>
@@ -9443,7 +9630,7 @@
         <p:spPr>
           <a:xfrm>
             <a:off x="576072" y="3396996"/>
-            <a:ext cx="4059936" cy="182880"/>
+            <a:ext cx="3860431" cy="182880"/>
           </a:xfrm>
           <a:prstGeom prst="rect">
             <a:avLst/>
@@ -9481,8 +9668,8 @@
         </p:nvSpPr>
         <p:spPr>
           <a:xfrm>
-            <a:off x="5020056" y="914400"/>
-            <a:ext cx="3621024" cy="2889504"/>
+            <a:off x="4820551" y="914400"/>
+            <a:ext cx="3820529" cy="2889504"/>
           </a:xfrm>
           <a:prstGeom prst="rect">
             <a:avLst/>
@@ -9641,7 +9828,7 @@
                 <a:ea typeface="Arial" pitchFamily="34" charset="-122"/>
                 <a:cs typeface="Arial" pitchFamily="34" charset="-120"/>
               </a:rPr>
-              <a:t>Bảng có mọi vật trong 50 m, kể cả phía sau. Hỏi «trong camera trước» thì chỉ đếm dòng có ●.</a:t>
+              <a:t>Bảng mặc định chỉ có vật trong camera trước; nút «Tất cả quanh xe» mở cả vật phía sau, bên hông.</a:t>
             </a:r>
             <a:endParaRPr lang="en-US" sz="1250" dirty="0"/>
           </a:p>
@@ -9661,7 +9848,7 @@
                 <a:ea typeface="微軟正黑體" pitchFamily="34" charset="-122"/>
                 <a:cs typeface="微軟正黑體" pitchFamily="34" charset="-120"/>
               </a:rPr>
-              <a:t>表格列出周圍 50 公尺內全部物體，連後面的也算。問「前方相機畫面裡」，只數有 ● 的。</a:t>
+              <a:t>表格預設只列前方相機畫面裡的；按「周圍一圈全部」，連旁邊、後面的也列出來。</a:t>
             </a:r>
             <a:endParaRPr lang="en-US" sz="1250" dirty="0"/>
           </a:p>
@@ -11020,7 +11207,7 @@
                 <a:ea typeface="Arial" pitchFamily="34" charset="-122"/>
                 <a:cs typeface="Arial" pitchFamily="34" charset="-120"/>
               </a:rPr>
-              <a:t>Chọn «Bãi đỗ xe», mở hộp. Bãi đỗ có rất nhiều xe: chỉ đếm dòng có dấu ●.</a:t>
+              <a:t>Chọn «Bãi đỗ xe», mở hộp. Bảng có 17 dòng: nhớ cuộn xuống hết.</a:t>
             </a:r>
             <a:endParaRPr lang="en-US" sz="1250" dirty="0"/>
           </a:p>
@@ -11040,7 +11227,7 @@
                 <a:ea typeface="微軟正黑體" pitchFamily="34" charset="-122"/>
                 <a:cs typeface="微軟正黑體" pitchFamily="34" charset="-120"/>
               </a:rPr>
-              <a:t>場景選「停車場」，打開物體框。停車場的車很多：只數有 ● 的那幾列。</a:t>
+              <a:t>場景選「停車場」，打開物體框。表格有 17 列，記得往下捲到底。</a:t>
             </a:r>
             <a:endParaRPr lang="en-US" sz="1250" dirty="0"/>
           </a:p>
@@ -12776,7 +12963,7 @@
                 <a:ea typeface="Arial" pitchFamily="34" charset="-122"/>
                 <a:cs typeface="Arial" pitchFamily="34" charset="-120"/>
               </a:rPr>
-              <a:t>Câu 11: «một ô tô», «12 m», «18 km/h ra xa» — mỗi phần dựa vào ai?</a:t>
+              <a:t>Câu 11: «một ô tô», «12 m», «chạy ra xa 18 km/h» — mỗi phần dựa vào ai?</a:t>
             </a:r>
             <a:endParaRPr lang="en-US" sz="1250" dirty="0"/>
           </a:p>
@@ -12796,7 +12983,7 @@
                 <a:ea typeface="微軟正黑體" pitchFamily="34" charset="-122"/>
                 <a:cs typeface="微軟正黑體" pitchFamily="34" charset="-120"/>
               </a:rPr>
-              <a:t>第 11 題：「一台車」「12 公尺」「時速 18 遠離」，分別最靠誰？</a:t>
+              <a:t>第 11 題：「一台車」「12 公尺」「時速 18 往遠處開」，分別最靠誰？</a:t>
             </a:r>
             <a:endParaRPr lang="en-US" sz="1250" dirty="0"/>
           </a:p>
